--- a/output/Bonus_Plan_SIMPLE.pptx
+++ b/output/Bonus_Plan_SIMPLE.pptx
@@ -18,6 +18,7 @@
     <p:sldId id="266" r:id="rId17"/>
     <p:sldId id="267" r:id="rId18"/>
     <p:sldId id="268" r:id="rId19"/>
+    <p:sldId id="269" r:id="rId20"/>
   </p:sldIdLst>
   <p:sldSz cx="12188952" cy="6858000" type="screen4x3"/>
   <p:notesSz cx="6858000" cy="9144000"/>
@@ -3631,7 +3632,7 @@
                 </a:solidFill>
                 <a:latin typeface="Calibri"/>
               </a:rPr>
-              <a:t>10 / 13</a:t>
+              <a:t>10 / 14</a:t>
             </a:r>
           </a:p>
         </p:txBody>
@@ -8190,6 +8191,3978 @@
 </file>
 
 <file path=ppt/slides/slide11.xml><?xml version="1.0" encoding="utf-8"?>
+<p:sld xmlns:a="http://schemas.openxmlformats.org/drawingml/2006/main" xmlns:p="http://schemas.openxmlformats.org/presentationml/2006/main" xmlns:r="http://schemas.openxmlformats.org/officeDocument/2006/relationships">
+  <p:cSld>
+    <p:spTree>
+      <p:nvGrpSpPr>
+        <p:cNvPr id="1" name=""/>
+        <p:cNvGrpSpPr/>
+        <p:nvPr/>
+      </p:nvGrpSpPr>
+      <p:grpSpPr/>
+      <p:sp>
+        <p:nvSpPr>
+          <p:cNvPr id="2" name="Rectangle 1"/>
+          <p:cNvSpPr/>
+          <p:nvPr/>
+        </p:nvSpPr>
+        <p:spPr>
+          <a:xfrm>
+            <a:off x="0" y="0"/>
+            <a:ext cx="12188952" cy="868680"/>
+          </a:xfrm>
+          <a:prstGeom prst="rect">
+            <a:avLst/>
+          </a:prstGeom>
+          <a:solidFill>
+            <a:srgbClr val="1F4E78"/>
+          </a:solidFill>
+          <a:ln>
+            <a:noFill/>
+          </a:ln>
+          <a:effectLst/>
+        </p:spPr>
+        <p:style>
+          <a:lnRef idx="1">
+            <a:schemeClr val="accent1"/>
+          </a:lnRef>
+          <a:fillRef idx="3">
+            <a:schemeClr val="accent1"/>
+          </a:fillRef>
+          <a:effectRef idx="2">
+            <a:schemeClr val="accent1"/>
+          </a:effectRef>
+          <a:fontRef idx="minor">
+            <a:schemeClr val="lt1"/>
+          </a:fontRef>
+        </p:style>
+        <p:txBody>
+          <a:bodyPr rtlCol="0" anchor="ctr"/>
+          <a:lstStyle/>
+          <a:p>
+            <a:pPr algn="ctr"/>
+          </a:p>
+        </p:txBody>
+      </p:sp>
+      <p:sp>
+        <p:nvSpPr>
+          <p:cNvPr id="3" name="TextBox 2"/>
+          <p:cNvSpPr txBox="1"/>
+          <p:nvPr/>
+        </p:nvSpPr>
+        <p:spPr>
+          <a:xfrm>
+            <a:off x="365760" y="109728"/>
+            <a:ext cx="11430000" cy="457200"/>
+          </a:xfrm>
+          <a:prstGeom prst="rect">
+            <a:avLst/>
+          </a:prstGeom>
+          <a:noFill/>
+          <a:ln>
+            <a:noFill/>
+          </a:ln>
+        </p:spPr>
+        <p:txBody>
+          <a:bodyPr wrap="square" lIns="73152" rIns="73152" tIns="36576" bIns="36576" anchor="ctr">
+            <a:spAutoFit/>
+          </a:bodyPr>
+          <a:lstStyle/>
+          <a:p>
+            <a:pPr algn="l"/>
+            <a:r>
+              <a:rPr sz="2400" b="1" i="0">
+                <a:solidFill>
+                  <a:srgbClr val="FFFFFF"/>
+                </a:solidFill>
+                <a:latin typeface="Calibri"/>
+              </a:rPr>
+              <a:t>Current vs New Plan - Per Agent-Month Comparison</a:t>
+            </a:r>
+          </a:p>
+        </p:txBody>
+      </p:sp>
+      <p:sp>
+        <p:nvSpPr>
+          <p:cNvPr id="4" name="TextBox 3"/>
+          <p:cNvSpPr txBox="1"/>
+          <p:nvPr/>
+        </p:nvSpPr>
+        <p:spPr>
+          <a:xfrm>
+            <a:off x="365760" y="530352"/>
+            <a:ext cx="11430000" cy="320040"/>
+          </a:xfrm>
+          <a:prstGeom prst="rect">
+            <a:avLst/>
+          </a:prstGeom>
+          <a:noFill/>
+          <a:ln>
+            <a:noFill/>
+          </a:ln>
+        </p:spPr>
+        <p:txBody>
+          <a:bodyPr wrap="square" lIns="73152" rIns="73152" tIns="36576" bIns="36576" anchor="ctr">
+            <a:spAutoFit/>
+          </a:bodyPr>
+          <a:lstStyle/>
+          <a:p>
+            <a:pPr algn="l"/>
+            <a:r>
+              <a:rPr sz="1200" b="0" i="1">
+                <a:solidFill>
+                  <a:srgbClr val="BDD7EE"/>
+                </a:solidFill>
+                <a:latin typeface="Calibri"/>
+              </a:rPr>
+              <a:t>CURRENT = today's count-tier on NB+RWR. NEW = tier-bonus (NB + RWR + REN). Sorted by delta. Top 10 per scenario.</a:t>
+            </a:r>
+          </a:p>
+        </p:txBody>
+      </p:sp>
+      <p:sp>
+        <p:nvSpPr>
+          <p:cNvPr id="5" name="Rectangle 4"/>
+          <p:cNvSpPr/>
+          <p:nvPr/>
+        </p:nvSpPr>
+        <p:spPr>
+          <a:xfrm>
+            <a:off x="0" y="6647688"/>
+            <a:ext cx="12188952" cy="210312"/>
+          </a:xfrm>
+          <a:prstGeom prst="rect">
+            <a:avLst/>
+          </a:prstGeom>
+          <a:solidFill>
+            <a:srgbClr val="F2F2F2"/>
+          </a:solidFill>
+          <a:ln>
+            <a:noFill/>
+          </a:ln>
+          <a:effectLst/>
+        </p:spPr>
+        <p:style>
+          <a:lnRef idx="1">
+            <a:schemeClr val="accent1"/>
+          </a:lnRef>
+          <a:fillRef idx="3">
+            <a:schemeClr val="accent1"/>
+          </a:fillRef>
+          <a:effectRef idx="2">
+            <a:schemeClr val="accent1"/>
+          </a:effectRef>
+          <a:fontRef idx="minor">
+            <a:schemeClr val="lt1"/>
+          </a:fontRef>
+        </p:style>
+        <p:txBody>
+          <a:bodyPr rtlCol="0" anchor="ctr"/>
+          <a:lstStyle/>
+          <a:p>
+            <a:pPr algn="ctr"/>
+          </a:p>
+        </p:txBody>
+      </p:sp>
+      <p:sp>
+        <p:nvSpPr>
+          <p:cNvPr id="6" name="TextBox 5"/>
+          <p:cNvSpPr txBox="1"/>
+          <p:nvPr/>
+        </p:nvSpPr>
+        <p:spPr>
+          <a:xfrm>
+            <a:off x="365760" y="6647688"/>
+            <a:ext cx="7315200" cy="210312"/>
+          </a:xfrm>
+          <a:prstGeom prst="rect">
+            <a:avLst/>
+          </a:prstGeom>
+          <a:noFill/>
+          <a:ln>
+            <a:noFill/>
+          </a:ln>
+        </p:spPr>
+        <p:txBody>
+          <a:bodyPr wrap="square" lIns="73152" rIns="73152" tIns="36576" bIns="36576" anchor="ctr">
+            <a:spAutoFit/>
+          </a:bodyPr>
+          <a:lstStyle/>
+          <a:p>
+            <a:pPr algn="l"/>
+            <a:r>
+              <a:rPr sz="1000" b="0" i="0">
+                <a:solidFill>
+                  <a:srgbClr val="404040"/>
+                </a:solidFill>
+                <a:latin typeface="Calibri"/>
+              </a:rPr>
+              <a:t>Fiesta Bonus Plan - Ownership Decision Deck</a:t>
+            </a:r>
+          </a:p>
+        </p:txBody>
+      </p:sp>
+      <p:sp>
+        <p:nvSpPr>
+          <p:cNvPr id="7" name="TextBox 6"/>
+          <p:cNvSpPr txBox="1"/>
+          <p:nvPr/>
+        </p:nvSpPr>
+        <p:spPr>
+          <a:xfrm>
+            <a:off x="11338560" y="6647688"/>
+            <a:ext cx="731520" cy="210312"/>
+          </a:xfrm>
+          <a:prstGeom prst="rect">
+            <a:avLst/>
+          </a:prstGeom>
+          <a:noFill/>
+          <a:ln>
+            <a:noFill/>
+          </a:ln>
+        </p:spPr>
+        <p:txBody>
+          <a:bodyPr wrap="square" lIns="73152" rIns="73152" tIns="36576" bIns="36576" anchor="ctr">
+            <a:spAutoFit/>
+          </a:bodyPr>
+          <a:lstStyle/>
+          <a:p>
+            <a:pPr algn="r"/>
+            <a:r>
+              <a:rPr sz="1000" b="0" i="0">
+                <a:solidFill>
+                  <a:srgbClr val="404040"/>
+                </a:solidFill>
+                <a:latin typeface="Calibri"/>
+              </a:rPr>
+              <a:t>11 / 14</a:t>
+            </a:r>
+          </a:p>
+        </p:txBody>
+      </p:sp>
+      <p:sp>
+        <p:nvSpPr>
+          <p:cNvPr id="8" name="Rectangle 7"/>
+          <p:cNvSpPr/>
+          <p:nvPr/>
+        </p:nvSpPr>
+        <p:spPr>
+          <a:xfrm>
+            <a:off x="274320" y="1005840"/>
+            <a:ext cx="3703320" cy="365760"/>
+          </a:xfrm>
+          <a:prstGeom prst="rect">
+            <a:avLst/>
+          </a:prstGeom>
+          <a:solidFill>
+            <a:srgbClr val="1F4E78"/>
+          </a:solidFill>
+          <a:ln>
+            <a:noFill/>
+          </a:ln>
+          <a:effectLst/>
+        </p:spPr>
+        <p:style>
+          <a:lnRef idx="1">
+            <a:schemeClr val="accent1"/>
+          </a:lnRef>
+          <a:fillRef idx="3">
+            <a:schemeClr val="accent1"/>
+          </a:fillRef>
+          <a:effectRef idx="2">
+            <a:schemeClr val="accent1"/>
+          </a:effectRef>
+          <a:fontRef idx="minor">
+            <a:schemeClr val="lt1"/>
+          </a:fontRef>
+        </p:style>
+        <p:txBody>
+          <a:bodyPr rtlCol="0" anchor="ctr"/>
+          <a:lstStyle/>
+          <a:p>
+            <a:pPr algn="ctr"/>
+          </a:p>
+        </p:txBody>
+      </p:sp>
+      <p:sp>
+        <p:nvSpPr>
+          <p:cNvPr id="9" name="TextBox 8"/>
+          <p:cNvSpPr txBox="1"/>
+          <p:nvPr/>
+        </p:nvSpPr>
+        <p:spPr>
+          <a:xfrm>
+            <a:off x="274320" y="1005840"/>
+            <a:ext cx="3703320" cy="365760"/>
+          </a:xfrm>
+          <a:prstGeom prst="rect">
+            <a:avLst/>
+          </a:prstGeom>
+          <a:noFill/>
+          <a:ln>
+            <a:noFill/>
+          </a:ln>
+        </p:spPr>
+        <p:txBody>
+          <a:bodyPr wrap="square" lIns="73152" rIns="73152" tIns="36576" bIns="36576" anchor="ctr">
+            <a:spAutoFit/>
+          </a:bodyPr>
+          <a:lstStyle/>
+          <a:p>
+            <a:pPr algn="ctr"/>
+            <a:r>
+              <a:rPr sz="1400" b="1" i="0">
+                <a:solidFill>
+                  <a:srgbClr val="FFFFFF"/>
+                </a:solidFill>
+                <a:latin typeface="Calibri"/>
+              </a:rPr>
+              <a:t>REAL (today)</a:t>
+            </a:r>
+          </a:p>
+        </p:txBody>
+      </p:sp>
+      <p:graphicFrame>
+        <p:nvGraphicFramePr>
+          <p:cNvPr id="10" name="Table 9"/>
+          <p:cNvGraphicFramePr>
+            <a:graphicFrameLocks noGrp="1"/>
+          </p:cNvGraphicFramePr>
+          <p:nvPr/>
+        </p:nvGraphicFramePr>
+        <p:xfrm>
+          <a:off x="274320" y="1417320"/>
+          <a:ext cx="3703320" cy="3072384"/>
+        </p:xfrm>
+        <a:graphic>
+          <a:graphicData uri="http://schemas.openxmlformats.org/drawingml/2006/table">
+            <a:tbl>
+              <a:tblPr firstRow="1" bandRow="1">
+                <a:tableStyleId>{5C22544A-7EE6-4342-B048-85BDC9FD1C3A}</a:tableStyleId>
+              </a:tblPr>
+              <a:tblGrid>
+                <a:gridCol w="1280160"/>
+                <a:gridCol w="777240"/>
+                <a:gridCol w="777240"/>
+                <a:gridCol w="868680"/>
+              </a:tblGrid>
+              <a:tr h="256032">
+                <a:tc>
+                  <a:txBody>
+                    <a:bodyPr lIns="45720" rIns="45720" tIns="18288" bIns="18288" wrap="square" anchor="ctr"/>
+                    <a:lstStyle/>
+                    <a:p>
+                      <a:pPr algn="ctr"/>
+                      <a:r>
+                        <a:rPr sz="900" b="1">
+                          <a:solidFill>
+                            <a:srgbClr val="FFFFFF"/>
+                          </a:solidFill>
+                          <a:latin typeface="Calibri"/>
+                        </a:rPr>
+                        <a:t>Agent / Mo</a:t>
+                      </a:r>
+                    </a:p>
+                  </a:txBody>
+                  <a:tcPr>
+                    <a:solidFill>
+                      <a:srgbClr val="1F4E78"/>
+                    </a:solidFill>
+                  </a:tcPr>
+                </a:tc>
+                <a:tc>
+                  <a:txBody>
+                    <a:bodyPr lIns="45720" rIns="45720" tIns="18288" bIns="18288" wrap="square" anchor="ctr"/>
+                    <a:lstStyle/>
+                    <a:p>
+                      <a:pPr algn="ctr"/>
+                      <a:r>
+                        <a:rPr sz="900" b="1">
+                          <a:solidFill>
+                            <a:srgbClr val="FFFFFF"/>
+                          </a:solidFill>
+                          <a:latin typeface="Calibri"/>
+                        </a:rPr>
+                        <a:t>Current</a:t>
+                      </a:r>
+                    </a:p>
+                  </a:txBody>
+                  <a:tcPr>
+                    <a:solidFill>
+                      <a:srgbClr val="1F4E78"/>
+                    </a:solidFill>
+                  </a:tcPr>
+                </a:tc>
+                <a:tc>
+                  <a:txBody>
+                    <a:bodyPr lIns="45720" rIns="45720" tIns="18288" bIns="18288" wrap="square" anchor="ctr"/>
+                    <a:lstStyle/>
+                    <a:p>
+                      <a:pPr algn="ctr"/>
+                      <a:r>
+                        <a:rPr sz="900" b="1">
+                          <a:solidFill>
+                            <a:srgbClr val="FFFFFF"/>
+                          </a:solidFill>
+                          <a:latin typeface="Calibri"/>
+                        </a:rPr>
+                        <a:t>New</a:t>
+                      </a:r>
+                    </a:p>
+                  </a:txBody>
+                  <a:tcPr>
+                    <a:solidFill>
+                      <a:srgbClr val="1F4E78"/>
+                    </a:solidFill>
+                  </a:tcPr>
+                </a:tc>
+                <a:tc>
+                  <a:txBody>
+                    <a:bodyPr lIns="45720" rIns="45720" tIns="18288" bIns="18288" wrap="square" anchor="ctr"/>
+                    <a:lstStyle/>
+                    <a:p>
+                      <a:pPr algn="ctr"/>
+                      <a:r>
+                        <a:rPr sz="900" b="1">
+                          <a:solidFill>
+                            <a:srgbClr val="FFFFFF"/>
+                          </a:solidFill>
+                          <a:latin typeface="Calibri"/>
+                        </a:rPr>
+                        <a:t>Delta</a:t>
+                      </a:r>
+                    </a:p>
+                  </a:txBody>
+                  <a:tcPr>
+                    <a:solidFill>
+                      <a:srgbClr val="1F4E78"/>
+                    </a:solidFill>
+                  </a:tcPr>
+                </a:tc>
+              </a:tr>
+              <a:tr h="256032">
+                <a:tc>
+                  <a:txBody>
+                    <a:bodyPr lIns="45720" rIns="45720" tIns="18288" bIns="18288" wrap="square" anchor="ctr"/>
+                    <a:lstStyle/>
+                    <a:p>
+                      <a:pPr algn="ctr"/>
+                      <a:r>
+                        <a:rPr sz="900" b="1">
+                          <a:solidFill>
+                            <a:srgbClr val="101010"/>
+                          </a:solidFill>
+                          <a:latin typeface="Calibri"/>
+                        </a:rPr>
+                        <a:t>Abel Mar</a:t>
+                      </a:r>
+                    </a:p>
+                  </a:txBody>
+                  <a:tcPr>
+                    <a:solidFill>
+                      <a:srgbClr val="FFFFFF"/>
+                    </a:solidFill>
+                  </a:tcPr>
+                </a:tc>
+                <a:tc>
+                  <a:txBody>
+                    <a:bodyPr lIns="45720" rIns="45720" tIns="18288" bIns="18288" wrap="square" anchor="ctr"/>
+                    <a:lstStyle/>
+                    <a:p>
+                      <a:pPr algn="ctr"/>
+                      <a:r>
+                        <a:rPr sz="900">
+                          <a:solidFill>
+                            <a:srgbClr val="101010"/>
+                          </a:solidFill>
+                          <a:latin typeface="Calibri"/>
+                        </a:rPr>
+                        <a:t>$350</a:t>
+                      </a:r>
+                    </a:p>
+                  </a:txBody>
+                  <a:tcPr>
+                    <a:solidFill>
+                      <a:srgbClr val="FFFFFF"/>
+                    </a:solidFill>
+                  </a:tcPr>
+                </a:tc>
+                <a:tc>
+                  <a:txBody>
+                    <a:bodyPr lIns="45720" rIns="45720" tIns="18288" bIns="18288" wrap="square" anchor="ctr"/>
+                    <a:lstStyle/>
+                    <a:p>
+                      <a:pPr algn="ctr"/>
+                      <a:r>
+                        <a:rPr sz="900">
+                          <a:solidFill>
+                            <a:srgbClr val="101010"/>
+                          </a:solidFill>
+                          <a:latin typeface="Calibri"/>
+                        </a:rPr>
+                        <a:t>$250</a:t>
+                      </a:r>
+                    </a:p>
+                  </a:txBody>
+                  <a:tcPr>
+                    <a:solidFill>
+                      <a:srgbClr val="FFFFFF"/>
+                    </a:solidFill>
+                  </a:tcPr>
+                </a:tc>
+                <a:tc>
+                  <a:txBody>
+                    <a:bodyPr lIns="45720" rIns="45720" tIns="18288" bIns="18288" wrap="square" anchor="ctr"/>
+                    <a:lstStyle/>
+                    <a:p>
+                      <a:pPr algn="ctr"/>
+                      <a:r>
+                        <a:rPr sz="900">
+                          <a:solidFill>
+                            <a:srgbClr val="101010"/>
+                          </a:solidFill>
+                          <a:latin typeface="Calibri"/>
+                        </a:rPr>
+                        <a:t>$-100</a:t>
+                      </a:r>
+                    </a:p>
+                  </a:txBody>
+                  <a:tcPr>
+                    <a:solidFill>
+                      <a:srgbClr val="FFFFFF"/>
+                    </a:solidFill>
+                  </a:tcPr>
+                </a:tc>
+              </a:tr>
+              <a:tr h="256032">
+                <a:tc>
+                  <a:txBody>
+                    <a:bodyPr lIns="45720" rIns="45720" tIns="18288" bIns="18288" wrap="square" anchor="ctr"/>
+                    <a:lstStyle/>
+                    <a:p>
+                      <a:pPr algn="ctr"/>
+                      <a:r>
+                        <a:rPr sz="900" b="1">
+                          <a:solidFill>
+                            <a:srgbClr val="101010"/>
+                          </a:solidFill>
+                          <a:latin typeface="Calibri"/>
+                        </a:rPr>
+                        <a:t>Monica Mar</a:t>
+                      </a:r>
+                    </a:p>
+                  </a:txBody>
+                  <a:tcPr>
+                    <a:solidFill>
+                      <a:srgbClr val="F2F2F2"/>
+                    </a:solidFill>
+                  </a:tcPr>
+                </a:tc>
+                <a:tc>
+                  <a:txBody>
+                    <a:bodyPr lIns="45720" rIns="45720" tIns="18288" bIns="18288" wrap="square" anchor="ctr"/>
+                    <a:lstStyle/>
+                    <a:p>
+                      <a:pPr algn="ctr"/>
+                      <a:r>
+                        <a:rPr sz="900">
+                          <a:solidFill>
+                            <a:srgbClr val="101010"/>
+                          </a:solidFill>
+                          <a:latin typeface="Calibri"/>
+                        </a:rPr>
+                        <a:t>$590</a:t>
+                      </a:r>
+                    </a:p>
+                  </a:txBody>
+                  <a:tcPr>
+                    <a:solidFill>
+                      <a:srgbClr val="F2F2F2"/>
+                    </a:solidFill>
+                  </a:tcPr>
+                </a:tc>
+                <a:tc>
+                  <a:txBody>
+                    <a:bodyPr lIns="45720" rIns="45720" tIns="18288" bIns="18288" wrap="square" anchor="ctr"/>
+                    <a:lstStyle/>
+                    <a:p>
+                      <a:pPr algn="ctr"/>
+                      <a:r>
+                        <a:rPr sz="900">
+                          <a:solidFill>
+                            <a:srgbClr val="101010"/>
+                          </a:solidFill>
+                          <a:latin typeface="Calibri"/>
+                        </a:rPr>
+                        <a:t>$375</a:t>
+                      </a:r>
+                    </a:p>
+                  </a:txBody>
+                  <a:tcPr>
+                    <a:solidFill>
+                      <a:srgbClr val="F2F2F2"/>
+                    </a:solidFill>
+                  </a:tcPr>
+                </a:tc>
+                <a:tc>
+                  <a:txBody>
+                    <a:bodyPr lIns="45720" rIns="45720" tIns="18288" bIns="18288" wrap="square" anchor="ctr"/>
+                    <a:lstStyle/>
+                    <a:p>
+                      <a:pPr algn="ctr"/>
+                      <a:r>
+                        <a:rPr sz="900">
+                          <a:solidFill>
+                            <a:srgbClr val="101010"/>
+                          </a:solidFill>
+                          <a:latin typeface="Calibri"/>
+                        </a:rPr>
+                        <a:t>$-215</a:t>
+                      </a:r>
+                    </a:p>
+                  </a:txBody>
+                  <a:tcPr>
+                    <a:solidFill>
+                      <a:srgbClr val="F2F2F2"/>
+                    </a:solidFill>
+                  </a:tcPr>
+                </a:tc>
+              </a:tr>
+              <a:tr h="256032">
+                <a:tc>
+                  <a:txBody>
+                    <a:bodyPr lIns="45720" rIns="45720" tIns="18288" bIns="18288" wrap="square" anchor="ctr"/>
+                    <a:lstStyle/>
+                    <a:p>
+                      <a:pPr algn="ctr"/>
+                      <a:r>
+                        <a:rPr sz="900" b="1">
+                          <a:solidFill>
+                            <a:srgbClr val="101010"/>
+                          </a:solidFill>
+                          <a:latin typeface="Calibri"/>
+                        </a:rPr>
+                        <a:t>Abel Feb</a:t>
+                      </a:r>
+                    </a:p>
+                  </a:txBody>
+                  <a:tcPr>
+                    <a:solidFill>
+                      <a:srgbClr val="FFFFFF"/>
+                    </a:solidFill>
+                  </a:tcPr>
+                </a:tc>
+                <a:tc>
+                  <a:txBody>
+                    <a:bodyPr lIns="45720" rIns="45720" tIns="18288" bIns="18288" wrap="square" anchor="ctr"/>
+                    <a:lstStyle/>
+                    <a:p>
+                      <a:pPr algn="ctr"/>
+                      <a:r>
+                        <a:rPr sz="900">
+                          <a:solidFill>
+                            <a:srgbClr val="101010"/>
+                          </a:solidFill>
+                          <a:latin typeface="Calibri"/>
+                        </a:rPr>
+                        <a:t>$250</a:t>
+                      </a:r>
+                    </a:p>
+                  </a:txBody>
+                  <a:tcPr>
+                    <a:solidFill>
+                      <a:srgbClr val="FFFFFF"/>
+                    </a:solidFill>
+                  </a:tcPr>
+                </a:tc>
+                <a:tc>
+                  <a:txBody>
+                    <a:bodyPr lIns="45720" rIns="45720" tIns="18288" bIns="18288" wrap="square" anchor="ctr"/>
+                    <a:lstStyle/>
+                    <a:p>
+                      <a:pPr algn="ctr"/>
+                      <a:r>
+                        <a:rPr sz="900">
+                          <a:solidFill>
+                            <a:srgbClr val="101010"/>
+                          </a:solidFill>
+                          <a:latin typeface="Calibri"/>
+                        </a:rPr>
+                        <a:t>$0</a:t>
+                      </a:r>
+                    </a:p>
+                  </a:txBody>
+                  <a:tcPr>
+                    <a:solidFill>
+                      <a:srgbClr val="FFFFFF"/>
+                    </a:solidFill>
+                  </a:tcPr>
+                </a:tc>
+                <a:tc>
+                  <a:txBody>
+                    <a:bodyPr lIns="45720" rIns="45720" tIns="18288" bIns="18288" wrap="square" anchor="ctr"/>
+                    <a:lstStyle/>
+                    <a:p>
+                      <a:pPr algn="ctr"/>
+                      <a:r>
+                        <a:rPr sz="900">
+                          <a:solidFill>
+                            <a:srgbClr val="101010"/>
+                          </a:solidFill>
+                          <a:latin typeface="Calibri"/>
+                        </a:rPr>
+                        <a:t>$-250</a:t>
+                      </a:r>
+                    </a:p>
+                  </a:txBody>
+                  <a:tcPr>
+                    <a:solidFill>
+                      <a:srgbClr val="FFFFFF"/>
+                    </a:solidFill>
+                  </a:tcPr>
+                </a:tc>
+              </a:tr>
+              <a:tr h="256032">
+                <a:tc>
+                  <a:txBody>
+                    <a:bodyPr lIns="45720" rIns="45720" tIns="18288" bIns="18288" wrap="square" anchor="ctr"/>
+                    <a:lstStyle/>
+                    <a:p>
+                      <a:pPr algn="ctr"/>
+                      <a:r>
+                        <a:rPr sz="900" b="1">
+                          <a:solidFill>
+                            <a:srgbClr val="101010"/>
+                          </a:solidFill>
+                          <a:latin typeface="Calibri"/>
+                        </a:rPr>
+                        <a:t>Dialinerys Apr</a:t>
+                      </a:r>
+                    </a:p>
+                  </a:txBody>
+                  <a:tcPr>
+                    <a:solidFill>
+                      <a:srgbClr val="F2F2F2"/>
+                    </a:solidFill>
+                  </a:tcPr>
+                </a:tc>
+                <a:tc>
+                  <a:txBody>
+                    <a:bodyPr lIns="45720" rIns="45720" tIns="18288" bIns="18288" wrap="square" anchor="ctr"/>
+                    <a:lstStyle/>
+                    <a:p>
+                      <a:pPr algn="ctr"/>
+                      <a:r>
+                        <a:rPr sz="900">
+                          <a:solidFill>
+                            <a:srgbClr val="101010"/>
+                          </a:solidFill>
+                          <a:latin typeface="Calibri"/>
+                        </a:rPr>
+                        <a:t>$720</a:t>
+                      </a:r>
+                    </a:p>
+                  </a:txBody>
+                  <a:tcPr>
+                    <a:solidFill>
+                      <a:srgbClr val="F2F2F2"/>
+                    </a:solidFill>
+                  </a:tcPr>
+                </a:tc>
+                <a:tc>
+                  <a:txBody>
+                    <a:bodyPr lIns="45720" rIns="45720" tIns="18288" bIns="18288" wrap="square" anchor="ctr"/>
+                    <a:lstStyle/>
+                    <a:p>
+                      <a:pPr algn="ctr"/>
+                      <a:r>
+                        <a:rPr sz="900">
+                          <a:solidFill>
+                            <a:srgbClr val="101010"/>
+                          </a:solidFill>
+                          <a:latin typeface="Calibri"/>
+                        </a:rPr>
+                        <a:t>$450</a:t>
+                      </a:r>
+                    </a:p>
+                  </a:txBody>
+                  <a:tcPr>
+                    <a:solidFill>
+                      <a:srgbClr val="F2F2F2"/>
+                    </a:solidFill>
+                  </a:tcPr>
+                </a:tc>
+                <a:tc>
+                  <a:txBody>
+                    <a:bodyPr lIns="45720" rIns="45720" tIns="18288" bIns="18288" wrap="square" anchor="ctr"/>
+                    <a:lstStyle/>
+                    <a:p>
+                      <a:pPr algn="ctr"/>
+                      <a:r>
+                        <a:rPr sz="900">
+                          <a:solidFill>
+                            <a:srgbClr val="101010"/>
+                          </a:solidFill>
+                          <a:latin typeface="Calibri"/>
+                        </a:rPr>
+                        <a:t>$-270</a:t>
+                      </a:r>
+                    </a:p>
+                  </a:txBody>
+                  <a:tcPr>
+                    <a:solidFill>
+                      <a:srgbClr val="F2F2F2"/>
+                    </a:solidFill>
+                  </a:tcPr>
+                </a:tc>
+              </a:tr>
+              <a:tr h="256032">
+                <a:tc>
+                  <a:txBody>
+                    <a:bodyPr lIns="45720" rIns="45720" tIns="18288" bIns="18288" wrap="square" anchor="ctr"/>
+                    <a:lstStyle/>
+                    <a:p>
+                      <a:pPr algn="ctr"/>
+                      <a:r>
+                        <a:rPr sz="900" b="1">
+                          <a:solidFill>
+                            <a:srgbClr val="101010"/>
+                          </a:solidFill>
+                          <a:latin typeface="Calibri"/>
+                        </a:rPr>
+                        <a:t>Abel Jan</a:t>
+                      </a:r>
+                    </a:p>
+                  </a:txBody>
+                  <a:tcPr>
+                    <a:solidFill>
+                      <a:srgbClr val="FFFFFF"/>
+                    </a:solidFill>
+                  </a:tcPr>
+                </a:tc>
+                <a:tc>
+                  <a:txBody>
+                    <a:bodyPr lIns="45720" rIns="45720" tIns="18288" bIns="18288" wrap="square" anchor="ctr"/>
+                    <a:lstStyle/>
+                    <a:p>
+                      <a:pPr algn="ctr"/>
+                      <a:r>
+                        <a:rPr sz="900">
+                          <a:solidFill>
+                            <a:srgbClr val="101010"/>
+                          </a:solidFill>
+                          <a:latin typeface="Calibri"/>
+                        </a:rPr>
+                        <a:t>$350</a:t>
+                      </a:r>
+                    </a:p>
+                  </a:txBody>
+                  <a:tcPr>
+                    <a:solidFill>
+                      <a:srgbClr val="FFFFFF"/>
+                    </a:solidFill>
+                  </a:tcPr>
+                </a:tc>
+                <a:tc>
+                  <a:txBody>
+                    <a:bodyPr lIns="45720" rIns="45720" tIns="18288" bIns="18288" wrap="square" anchor="ctr"/>
+                    <a:lstStyle/>
+                    <a:p>
+                      <a:pPr algn="ctr"/>
+                      <a:r>
+                        <a:rPr sz="900">
+                          <a:solidFill>
+                            <a:srgbClr val="101010"/>
+                          </a:solidFill>
+                          <a:latin typeface="Calibri"/>
+                        </a:rPr>
+                        <a:t>$0</a:t>
+                      </a:r>
+                    </a:p>
+                  </a:txBody>
+                  <a:tcPr>
+                    <a:solidFill>
+                      <a:srgbClr val="FFFFFF"/>
+                    </a:solidFill>
+                  </a:tcPr>
+                </a:tc>
+                <a:tc>
+                  <a:txBody>
+                    <a:bodyPr lIns="45720" rIns="45720" tIns="18288" bIns="18288" wrap="square" anchor="ctr"/>
+                    <a:lstStyle/>
+                    <a:p>
+                      <a:pPr algn="ctr"/>
+                      <a:r>
+                        <a:rPr sz="900">
+                          <a:solidFill>
+                            <a:srgbClr val="101010"/>
+                          </a:solidFill>
+                          <a:latin typeface="Calibri"/>
+                        </a:rPr>
+                        <a:t>$-350</a:t>
+                      </a:r>
+                    </a:p>
+                  </a:txBody>
+                  <a:tcPr>
+                    <a:solidFill>
+                      <a:srgbClr val="FFFFFF"/>
+                    </a:solidFill>
+                  </a:tcPr>
+                </a:tc>
+              </a:tr>
+              <a:tr h="256032">
+                <a:tc>
+                  <a:txBody>
+                    <a:bodyPr lIns="45720" rIns="45720" tIns="18288" bIns="18288" wrap="square" anchor="ctr"/>
+                    <a:lstStyle/>
+                    <a:p>
+                      <a:pPr algn="ctr"/>
+                      <a:r>
+                        <a:rPr sz="900" b="1">
+                          <a:solidFill>
+                            <a:srgbClr val="101010"/>
+                          </a:solidFill>
+                          <a:latin typeface="Calibri"/>
+                        </a:rPr>
+                        <a:t>Abel Apr</a:t>
+                      </a:r>
+                    </a:p>
+                  </a:txBody>
+                  <a:tcPr>
+                    <a:solidFill>
+                      <a:srgbClr val="F2F2F2"/>
+                    </a:solidFill>
+                  </a:tcPr>
+                </a:tc>
+                <a:tc>
+                  <a:txBody>
+                    <a:bodyPr lIns="45720" rIns="45720" tIns="18288" bIns="18288" wrap="square" anchor="ctr"/>
+                    <a:lstStyle/>
+                    <a:p>
+                      <a:pPr algn="ctr"/>
+                      <a:r>
+                        <a:rPr sz="900">
+                          <a:solidFill>
+                            <a:srgbClr val="101010"/>
+                          </a:solidFill>
+                          <a:latin typeface="Calibri"/>
+                        </a:rPr>
+                        <a:t>$350</a:t>
+                      </a:r>
+                    </a:p>
+                  </a:txBody>
+                  <a:tcPr>
+                    <a:solidFill>
+                      <a:srgbClr val="F2F2F2"/>
+                    </a:solidFill>
+                  </a:tcPr>
+                </a:tc>
+                <a:tc>
+                  <a:txBody>
+                    <a:bodyPr lIns="45720" rIns="45720" tIns="18288" bIns="18288" wrap="square" anchor="ctr"/>
+                    <a:lstStyle/>
+                    <a:p>
+                      <a:pPr algn="ctr"/>
+                      <a:r>
+                        <a:rPr sz="900">
+                          <a:solidFill>
+                            <a:srgbClr val="101010"/>
+                          </a:solidFill>
+                          <a:latin typeface="Calibri"/>
+                        </a:rPr>
+                        <a:t>$0</a:t>
+                      </a:r>
+                    </a:p>
+                  </a:txBody>
+                  <a:tcPr>
+                    <a:solidFill>
+                      <a:srgbClr val="F2F2F2"/>
+                    </a:solidFill>
+                  </a:tcPr>
+                </a:tc>
+                <a:tc>
+                  <a:txBody>
+                    <a:bodyPr lIns="45720" rIns="45720" tIns="18288" bIns="18288" wrap="square" anchor="ctr"/>
+                    <a:lstStyle/>
+                    <a:p>
+                      <a:pPr algn="ctr"/>
+                      <a:r>
+                        <a:rPr sz="900">
+                          <a:solidFill>
+                            <a:srgbClr val="101010"/>
+                          </a:solidFill>
+                          <a:latin typeface="Calibri"/>
+                        </a:rPr>
+                        <a:t>$-350</a:t>
+                      </a:r>
+                    </a:p>
+                  </a:txBody>
+                  <a:tcPr>
+                    <a:solidFill>
+                      <a:srgbClr val="F2F2F2"/>
+                    </a:solidFill>
+                  </a:tcPr>
+                </a:tc>
+              </a:tr>
+              <a:tr h="256032">
+                <a:tc>
+                  <a:txBody>
+                    <a:bodyPr lIns="45720" rIns="45720" tIns="18288" bIns="18288" wrap="square" anchor="ctr"/>
+                    <a:lstStyle/>
+                    <a:p>
+                      <a:pPr algn="ctr"/>
+                      <a:r>
+                        <a:rPr sz="900" b="1">
+                          <a:solidFill>
+                            <a:srgbClr val="101010"/>
+                          </a:solidFill>
+                          <a:latin typeface="Calibri"/>
+                        </a:rPr>
+                        <a:t>Thalia Jan</a:t>
+                      </a:r>
+                    </a:p>
+                  </a:txBody>
+                  <a:tcPr>
+                    <a:solidFill>
+                      <a:srgbClr val="FFFFFF"/>
+                    </a:solidFill>
+                  </a:tcPr>
+                </a:tc>
+                <a:tc>
+                  <a:txBody>
+                    <a:bodyPr lIns="45720" rIns="45720" tIns="18288" bIns="18288" wrap="square" anchor="ctr"/>
+                    <a:lstStyle/>
+                    <a:p>
+                      <a:pPr algn="ctr"/>
+                      <a:r>
+                        <a:rPr sz="900">
+                          <a:solidFill>
+                            <a:srgbClr val="101010"/>
+                          </a:solidFill>
+                          <a:latin typeface="Calibri"/>
+                        </a:rPr>
+                        <a:t>$350</a:t>
+                      </a:r>
+                    </a:p>
+                  </a:txBody>
+                  <a:tcPr>
+                    <a:solidFill>
+                      <a:srgbClr val="FFFFFF"/>
+                    </a:solidFill>
+                  </a:tcPr>
+                </a:tc>
+                <a:tc>
+                  <a:txBody>
+                    <a:bodyPr lIns="45720" rIns="45720" tIns="18288" bIns="18288" wrap="square" anchor="ctr"/>
+                    <a:lstStyle/>
+                    <a:p>
+                      <a:pPr algn="ctr"/>
+                      <a:r>
+                        <a:rPr sz="900">
+                          <a:solidFill>
+                            <a:srgbClr val="101010"/>
+                          </a:solidFill>
+                          <a:latin typeface="Calibri"/>
+                        </a:rPr>
+                        <a:t>$0</a:t>
+                      </a:r>
+                    </a:p>
+                  </a:txBody>
+                  <a:tcPr>
+                    <a:solidFill>
+                      <a:srgbClr val="FFFFFF"/>
+                    </a:solidFill>
+                  </a:tcPr>
+                </a:tc>
+                <a:tc>
+                  <a:txBody>
+                    <a:bodyPr lIns="45720" rIns="45720" tIns="18288" bIns="18288" wrap="square" anchor="ctr"/>
+                    <a:lstStyle/>
+                    <a:p>
+                      <a:pPr algn="ctr"/>
+                      <a:r>
+                        <a:rPr sz="900">
+                          <a:solidFill>
+                            <a:srgbClr val="101010"/>
+                          </a:solidFill>
+                          <a:latin typeface="Calibri"/>
+                        </a:rPr>
+                        <a:t>$-350</a:t>
+                      </a:r>
+                    </a:p>
+                  </a:txBody>
+                  <a:tcPr>
+                    <a:solidFill>
+                      <a:srgbClr val="FFFFFF"/>
+                    </a:solidFill>
+                  </a:tcPr>
+                </a:tc>
+              </a:tr>
+              <a:tr h="256032">
+                <a:tc>
+                  <a:txBody>
+                    <a:bodyPr lIns="45720" rIns="45720" tIns="18288" bIns="18288" wrap="square" anchor="ctr"/>
+                    <a:lstStyle/>
+                    <a:p>
+                      <a:pPr algn="ctr"/>
+                      <a:r>
+                        <a:rPr sz="900" b="1">
+                          <a:solidFill>
+                            <a:srgbClr val="101010"/>
+                          </a:solidFill>
+                          <a:latin typeface="Calibri"/>
+                        </a:rPr>
+                        <a:t>Thalia Feb</a:t>
+                      </a:r>
+                    </a:p>
+                  </a:txBody>
+                  <a:tcPr>
+                    <a:solidFill>
+                      <a:srgbClr val="F2F2F2"/>
+                    </a:solidFill>
+                  </a:tcPr>
+                </a:tc>
+                <a:tc>
+                  <a:txBody>
+                    <a:bodyPr lIns="45720" rIns="45720" tIns="18288" bIns="18288" wrap="square" anchor="ctr"/>
+                    <a:lstStyle/>
+                    <a:p>
+                      <a:pPr algn="ctr"/>
+                      <a:r>
+                        <a:rPr sz="900">
+                          <a:solidFill>
+                            <a:srgbClr val="101010"/>
+                          </a:solidFill>
+                          <a:latin typeface="Calibri"/>
+                        </a:rPr>
+                        <a:t>$350</a:t>
+                      </a:r>
+                    </a:p>
+                  </a:txBody>
+                  <a:tcPr>
+                    <a:solidFill>
+                      <a:srgbClr val="F2F2F2"/>
+                    </a:solidFill>
+                  </a:tcPr>
+                </a:tc>
+                <a:tc>
+                  <a:txBody>
+                    <a:bodyPr lIns="45720" rIns="45720" tIns="18288" bIns="18288" wrap="square" anchor="ctr"/>
+                    <a:lstStyle/>
+                    <a:p>
+                      <a:pPr algn="ctr"/>
+                      <a:r>
+                        <a:rPr sz="900">
+                          <a:solidFill>
+                            <a:srgbClr val="101010"/>
+                          </a:solidFill>
+                          <a:latin typeface="Calibri"/>
+                        </a:rPr>
+                        <a:t>$0</a:t>
+                      </a:r>
+                    </a:p>
+                  </a:txBody>
+                  <a:tcPr>
+                    <a:solidFill>
+                      <a:srgbClr val="F2F2F2"/>
+                    </a:solidFill>
+                  </a:tcPr>
+                </a:tc>
+                <a:tc>
+                  <a:txBody>
+                    <a:bodyPr lIns="45720" rIns="45720" tIns="18288" bIns="18288" wrap="square" anchor="ctr"/>
+                    <a:lstStyle/>
+                    <a:p>
+                      <a:pPr algn="ctr"/>
+                      <a:r>
+                        <a:rPr sz="900">
+                          <a:solidFill>
+                            <a:srgbClr val="101010"/>
+                          </a:solidFill>
+                          <a:latin typeface="Calibri"/>
+                        </a:rPr>
+                        <a:t>$-350</a:t>
+                      </a:r>
+                    </a:p>
+                  </a:txBody>
+                  <a:tcPr>
+                    <a:solidFill>
+                      <a:srgbClr val="F2F2F2"/>
+                    </a:solidFill>
+                  </a:tcPr>
+                </a:tc>
+              </a:tr>
+              <a:tr h="256032">
+                <a:tc>
+                  <a:txBody>
+                    <a:bodyPr lIns="45720" rIns="45720" tIns="18288" bIns="18288" wrap="square" anchor="ctr"/>
+                    <a:lstStyle/>
+                    <a:p>
+                      <a:pPr algn="ctr"/>
+                      <a:r>
+                        <a:rPr sz="900" b="1">
+                          <a:solidFill>
+                            <a:srgbClr val="101010"/>
+                          </a:solidFill>
+                          <a:latin typeface="Calibri"/>
+                        </a:rPr>
+                        <a:t>Thalia Mar</a:t>
+                      </a:r>
+                    </a:p>
+                  </a:txBody>
+                  <a:tcPr>
+                    <a:solidFill>
+                      <a:srgbClr val="FFFFFF"/>
+                    </a:solidFill>
+                  </a:tcPr>
+                </a:tc>
+                <a:tc>
+                  <a:txBody>
+                    <a:bodyPr lIns="45720" rIns="45720" tIns="18288" bIns="18288" wrap="square" anchor="ctr"/>
+                    <a:lstStyle/>
+                    <a:p>
+                      <a:pPr algn="ctr"/>
+                      <a:r>
+                        <a:rPr sz="900">
+                          <a:solidFill>
+                            <a:srgbClr val="101010"/>
+                          </a:solidFill>
+                          <a:latin typeface="Calibri"/>
+                        </a:rPr>
+                        <a:t>$350</a:t>
+                      </a:r>
+                    </a:p>
+                  </a:txBody>
+                  <a:tcPr>
+                    <a:solidFill>
+                      <a:srgbClr val="FFFFFF"/>
+                    </a:solidFill>
+                  </a:tcPr>
+                </a:tc>
+                <a:tc>
+                  <a:txBody>
+                    <a:bodyPr lIns="45720" rIns="45720" tIns="18288" bIns="18288" wrap="square" anchor="ctr"/>
+                    <a:lstStyle/>
+                    <a:p>
+                      <a:pPr algn="ctr"/>
+                      <a:r>
+                        <a:rPr sz="900">
+                          <a:solidFill>
+                            <a:srgbClr val="101010"/>
+                          </a:solidFill>
+                          <a:latin typeface="Calibri"/>
+                        </a:rPr>
+                        <a:t>$0</a:t>
+                      </a:r>
+                    </a:p>
+                  </a:txBody>
+                  <a:tcPr>
+                    <a:solidFill>
+                      <a:srgbClr val="FFFFFF"/>
+                    </a:solidFill>
+                  </a:tcPr>
+                </a:tc>
+                <a:tc>
+                  <a:txBody>
+                    <a:bodyPr lIns="45720" rIns="45720" tIns="18288" bIns="18288" wrap="square" anchor="ctr"/>
+                    <a:lstStyle/>
+                    <a:p>
+                      <a:pPr algn="ctr"/>
+                      <a:r>
+                        <a:rPr sz="900">
+                          <a:solidFill>
+                            <a:srgbClr val="101010"/>
+                          </a:solidFill>
+                          <a:latin typeface="Calibri"/>
+                        </a:rPr>
+                        <a:t>$-350</a:t>
+                      </a:r>
+                    </a:p>
+                  </a:txBody>
+                  <a:tcPr>
+                    <a:solidFill>
+                      <a:srgbClr val="FFFFFF"/>
+                    </a:solidFill>
+                  </a:tcPr>
+                </a:tc>
+              </a:tr>
+              <a:tr h="256032">
+                <a:tc>
+                  <a:txBody>
+                    <a:bodyPr lIns="45720" rIns="45720" tIns="18288" bIns="18288" wrap="square" anchor="ctr"/>
+                    <a:lstStyle/>
+                    <a:p>
+                      <a:pPr algn="ctr"/>
+                      <a:r>
+                        <a:rPr sz="900" b="1">
+                          <a:solidFill>
+                            <a:srgbClr val="101010"/>
+                          </a:solidFill>
+                          <a:latin typeface="Calibri"/>
+                        </a:rPr>
+                        <a:t>Thalia Apr</a:t>
+                      </a:r>
+                    </a:p>
+                  </a:txBody>
+                  <a:tcPr>
+                    <a:solidFill>
+                      <a:srgbClr val="F2F2F2"/>
+                    </a:solidFill>
+                  </a:tcPr>
+                </a:tc>
+                <a:tc>
+                  <a:txBody>
+                    <a:bodyPr lIns="45720" rIns="45720" tIns="18288" bIns="18288" wrap="square" anchor="ctr"/>
+                    <a:lstStyle/>
+                    <a:p>
+                      <a:pPr algn="ctr"/>
+                      <a:r>
+                        <a:rPr sz="900">
+                          <a:solidFill>
+                            <a:srgbClr val="101010"/>
+                          </a:solidFill>
+                          <a:latin typeface="Calibri"/>
+                        </a:rPr>
+                        <a:t>$350</a:t>
+                      </a:r>
+                    </a:p>
+                  </a:txBody>
+                  <a:tcPr>
+                    <a:solidFill>
+                      <a:srgbClr val="F2F2F2"/>
+                    </a:solidFill>
+                  </a:tcPr>
+                </a:tc>
+                <a:tc>
+                  <a:txBody>
+                    <a:bodyPr lIns="45720" rIns="45720" tIns="18288" bIns="18288" wrap="square" anchor="ctr"/>
+                    <a:lstStyle/>
+                    <a:p>
+                      <a:pPr algn="ctr"/>
+                      <a:r>
+                        <a:rPr sz="900">
+                          <a:solidFill>
+                            <a:srgbClr val="101010"/>
+                          </a:solidFill>
+                          <a:latin typeface="Calibri"/>
+                        </a:rPr>
+                        <a:t>$0</a:t>
+                      </a:r>
+                    </a:p>
+                  </a:txBody>
+                  <a:tcPr>
+                    <a:solidFill>
+                      <a:srgbClr val="F2F2F2"/>
+                    </a:solidFill>
+                  </a:tcPr>
+                </a:tc>
+                <a:tc>
+                  <a:txBody>
+                    <a:bodyPr lIns="45720" rIns="45720" tIns="18288" bIns="18288" wrap="square" anchor="ctr"/>
+                    <a:lstStyle/>
+                    <a:p>
+                      <a:pPr algn="ctr"/>
+                      <a:r>
+                        <a:rPr sz="900">
+                          <a:solidFill>
+                            <a:srgbClr val="101010"/>
+                          </a:solidFill>
+                          <a:latin typeface="Calibri"/>
+                        </a:rPr>
+                        <a:t>$-350</a:t>
+                      </a:r>
+                    </a:p>
+                  </a:txBody>
+                  <a:tcPr>
+                    <a:solidFill>
+                      <a:srgbClr val="F2F2F2"/>
+                    </a:solidFill>
+                  </a:tcPr>
+                </a:tc>
+              </a:tr>
+              <a:tr h="256032">
+                <a:tc>
+                  <a:txBody>
+                    <a:bodyPr lIns="45720" rIns="45720" tIns="18288" bIns="18288" wrap="square" anchor="ctr"/>
+                    <a:lstStyle/>
+                    <a:p>
+                      <a:pPr algn="ctr"/>
+                      <a:r>
+                        <a:rPr sz="900" b="1">
+                          <a:solidFill>
+                            <a:srgbClr val="101010"/>
+                          </a:solidFill>
+                          <a:latin typeface="Calibri"/>
+                        </a:rPr>
+                        <a:t>4-mo total (all agents)</a:t>
+                      </a:r>
+                    </a:p>
+                  </a:txBody>
+                  <a:tcPr>
+                    <a:solidFill>
+                      <a:srgbClr val="FFFFFF"/>
+                    </a:solidFill>
+                  </a:tcPr>
+                </a:tc>
+                <a:tc>
+                  <a:txBody>
+                    <a:bodyPr lIns="45720" rIns="45720" tIns="18288" bIns="18288" wrap="square" anchor="ctr"/>
+                    <a:lstStyle/>
+                    <a:p>
+                      <a:pPr algn="ctr"/>
+                      <a:r>
+                        <a:rPr sz="900">
+                          <a:solidFill>
+                            <a:srgbClr val="101010"/>
+                          </a:solidFill>
+                          <a:latin typeface="Calibri"/>
+                        </a:rPr>
+                        <a:t>$12,220</a:t>
+                      </a:r>
+                    </a:p>
+                  </a:txBody>
+                  <a:tcPr>
+                    <a:solidFill>
+                      <a:srgbClr val="FFFFFF"/>
+                    </a:solidFill>
+                  </a:tcPr>
+                </a:tc>
+                <a:tc>
+                  <a:txBody>
+                    <a:bodyPr lIns="45720" rIns="45720" tIns="18288" bIns="18288" wrap="square" anchor="ctr"/>
+                    <a:lstStyle/>
+                    <a:p>
+                      <a:pPr algn="ctr"/>
+                      <a:r>
+                        <a:rPr sz="900">
+                          <a:solidFill>
+                            <a:srgbClr val="101010"/>
+                          </a:solidFill>
+                          <a:latin typeface="Calibri"/>
+                        </a:rPr>
+                        <a:t>$1,675</a:t>
+                      </a:r>
+                    </a:p>
+                  </a:txBody>
+                  <a:tcPr>
+                    <a:solidFill>
+                      <a:srgbClr val="FFFFFF"/>
+                    </a:solidFill>
+                  </a:tcPr>
+                </a:tc>
+                <a:tc>
+                  <a:txBody>
+                    <a:bodyPr lIns="45720" rIns="45720" tIns="18288" bIns="18288" wrap="square" anchor="ctr"/>
+                    <a:lstStyle/>
+                    <a:p>
+                      <a:pPr algn="ctr"/>
+                      <a:r>
+                        <a:rPr sz="900">
+                          <a:solidFill>
+                            <a:srgbClr val="101010"/>
+                          </a:solidFill>
+                          <a:latin typeface="Calibri"/>
+                        </a:rPr>
+                        <a:t>$-10,545</a:t>
+                      </a:r>
+                    </a:p>
+                  </a:txBody>
+                  <a:tcPr>
+                    <a:solidFill>
+                      <a:srgbClr val="FFFFFF"/>
+                    </a:solidFill>
+                  </a:tcPr>
+                </a:tc>
+              </a:tr>
+            </a:tbl>
+          </a:graphicData>
+        </a:graphic>
+      </p:graphicFrame>
+      <p:sp>
+        <p:nvSpPr>
+          <p:cNvPr id="11" name="Rectangle 10"/>
+          <p:cNvSpPr/>
+          <p:nvPr/>
+        </p:nvSpPr>
+        <p:spPr>
+          <a:xfrm>
+            <a:off x="4224528" y="1005840"/>
+            <a:ext cx="3703320" cy="365760"/>
+          </a:xfrm>
+          <a:prstGeom prst="rect">
+            <a:avLst/>
+          </a:prstGeom>
+          <a:solidFill>
+            <a:srgbClr val="2E75B6"/>
+          </a:solidFill>
+          <a:ln>
+            <a:noFill/>
+          </a:ln>
+          <a:effectLst/>
+        </p:spPr>
+        <p:style>
+          <a:lnRef idx="1">
+            <a:schemeClr val="accent1"/>
+          </a:lnRef>
+          <a:fillRef idx="3">
+            <a:schemeClr val="accent1"/>
+          </a:fillRef>
+          <a:effectRef idx="2">
+            <a:schemeClr val="accent1"/>
+          </a:effectRef>
+          <a:fontRef idx="minor">
+            <a:schemeClr val="lt1"/>
+          </a:fontRef>
+        </p:style>
+        <p:txBody>
+          <a:bodyPr rtlCol="0" anchor="ctr"/>
+          <a:lstStyle/>
+          <a:p>
+            <a:pPr algn="ctr"/>
+          </a:p>
+        </p:txBody>
+      </p:sp>
+      <p:sp>
+        <p:nvSpPr>
+          <p:cNvPr id="12" name="TextBox 11"/>
+          <p:cNvSpPr txBox="1"/>
+          <p:nvPr/>
+        </p:nvSpPr>
+        <p:spPr>
+          <a:xfrm>
+            <a:off x="4224528" y="1005840"/>
+            <a:ext cx="3703320" cy="365760"/>
+          </a:xfrm>
+          <a:prstGeom prst="rect">
+            <a:avLst/>
+          </a:prstGeom>
+          <a:noFill/>
+          <a:ln>
+            <a:noFill/>
+          </a:ln>
+        </p:spPr>
+        <p:txBody>
+          <a:bodyPr wrap="square" lIns="73152" rIns="73152" tIns="36576" bIns="36576" anchor="ctr">
+            <a:spAutoFit/>
+          </a:bodyPr>
+          <a:lstStyle/>
+          <a:p>
+            <a:pPr algn="ctr"/>
+            <a:r>
+              <a:rPr sz="1400" b="1" i="0">
+                <a:solidFill>
+                  <a:srgbClr val="FFFFFF"/>
+                </a:solidFill>
+                <a:latin typeface="Calibri"/>
+              </a:rPr>
+              <a:t>50% SWAP</a:t>
+            </a:r>
+          </a:p>
+        </p:txBody>
+      </p:sp>
+      <p:graphicFrame>
+        <p:nvGraphicFramePr>
+          <p:cNvPr id="13" name="Table 12"/>
+          <p:cNvGraphicFramePr>
+            <a:graphicFrameLocks noGrp="1"/>
+          </p:cNvGraphicFramePr>
+          <p:nvPr/>
+        </p:nvGraphicFramePr>
+        <p:xfrm>
+          <a:off x="4224528" y="1417320"/>
+          <a:ext cx="3703320" cy="3072384"/>
+        </p:xfrm>
+        <a:graphic>
+          <a:graphicData uri="http://schemas.openxmlformats.org/drawingml/2006/table">
+            <a:tbl>
+              <a:tblPr firstRow="1" bandRow="1">
+                <a:tableStyleId>{5C22544A-7EE6-4342-B048-85BDC9FD1C3A}</a:tableStyleId>
+              </a:tblPr>
+              <a:tblGrid>
+                <a:gridCol w="1280160"/>
+                <a:gridCol w="777240"/>
+                <a:gridCol w="777240"/>
+                <a:gridCol w="868680"/>
+              </a:tblGrid>
+              <a:tr h="256032">
+                <a:tc>
+                  <a:txBody>
+                    <a:bodyPr lIns="45720" rIns="45720" tIns="18288" bIns="18288" wrap="square" anchor="ctr"/>
+                    <a:lstStyle/>
+                    <a:p>
+                      <a:pPr algn="ctr"/>
+                      <a:r>
+                        <a:rPr sz="900" b="1">
+                          <a:solidFill>
+                            <a:srgbClr val="FFFFFF"/>
+                          </a:solidFill>
+                          <a:latin typeface="Calibri"/>
+                        </a:rPr>
+                        <a:t>Agent / Mo</a:t>
+                      </a:r>
+                    </a:p>
+                  </a:txBody>
+                  <a:tcPr>
+                    <a:solidFill>
+                      <a:srgbClr val="2E75B6"/>
+                    </a:solidFill>
+                  </a:tcPr>
+                </a:tc>
+                <a:tc>
+                  <a:txBody>
+                    <a:bodyPr lIns="45720" rIns="45720" tIns="18288" bIns="18288" wrap="square" anchor="ctr"/>
+                    <a:lstStyle/>
+                    <a:p>
+                      <a:pPr algn="ctr"/>
+                      <a:r>
+                        <a:rPr sz="900" b="1">
+                          <a:solidFill>
+                            <a:srgbClr val="FFFFFF"/>
+                          </a:solidFill>
+                          <a:latin typeface="Calibri"/>
+                        </a:rPr>
+                        <a:t>Current</a:t>
+                      </a:r>
+                    </a:p>
+                  </a:txBody>
+                  <a:tcPr>
+                    <a:solidFill>
+                      <a:srgbClr val="2E75B6"/>
+                    </a:solidFill>
+                  </a:tcPr>
+                </a:tc>
+                <a:tc>
+                  <a:txBody>
+                    <a:bodyPr lIns="45720" rIns="45720" tIns="18288" bIns="18288" wrap="square" anchor="ctr"/>
+                    <a:lstStyle/>
+                    <a:p>
+                      <a:pPr algn="ctr"/>
+                      <a:r>
+                        <a:rPr sz="900" b="1">
+                          <a:solidFill>
+                            <a:srgbClr val="FFFFFF"/>
+                          </a:solidFill>
+                          <a:latin typeface="Calibri"/>
+                        </a:rPr>
+                        <a:t>New</a:t>
+                      </a:r>
+                    </a:p>
+                  </a:txBody>
+                  <a:tcPr>
+                    <a:solidFill>
+                      <a:srgbClr val="2E75B6"/>
+                    </a:solidFill>
+                  </a:tcPr>
+                </a:tc>
+                <a:tc>
+                  <a:txBody>
+                    <a:bodyPr lIns="45720" rIns="45720" tIns="18288" bIns="18288" wrap="square" anchor="ctr"/>
+                    <a:lstStyle/>
+                    <a:p>
+                      <a:pPr algn="ctr"/>
+                      <a:r>
+                        <a:rPr sz="900" b="1">
+                          <a:solidFill>
+                            <a:srgbClr val="FFFFFF"/>
+                          </a:solidFill>
+                          <a:latin typeface="Calibri"/>
+                        </a:rPr>
+                        <a:t>Delta</a:t>
+                      </a:r>
+                    </a:p>
+                  </a:txBody>
+                  <a:tcPr>
+                    <a:solidFill>
+                      <a:srgbClr val="2E75B6"/>
+                    </a:solidFill>
+                  </a:tcPr>
+                </a:tc>
+              </a:tr>
+              <a:tr h="256032">
+                <a:tc>
+                  <a:txBody>
+                    <a:bodyPr lIns="45720" rIns="45720" tIns="18288" bIns="18288" wrap="square" anchor="ctr"/>
+                    <a:lstStyle/>
+                    <a:p>
+                      <a:pPr algn="ctr"/>
+                      <a:r>
+                        <a:rPr sz="900" b="1">
+                          <a:solidFill>
+                            <a:srgbClr val="101010"/>
+                          </a:solidFill>
+                          <a:latin typeface="Calibri"/>
+                        </a:rPr>
+                        <a:t>Dialinerys Apr</a:t>
+                      </a:r>
+                    </a:p>
+                  </a:txBody>
+                  <a:tcPr>
+                    <a:solidFill>
+                      <a:srgbClr val="FFFFFF"/>
+                    </a:solidFill>
+                  </a:tcPr>
+                </a:tc>
+                <a:tc>
+                  <a:txBody>
+                    <a:bodyPr lIns="45720" rIns="45720" tIns="18288" bIns="18288" wrap="square" anchor="ctr"/>
+                    <a:lstStyle/>
+                    <a:p>
+                      <a:pPr algn="ctr"/>
+                      <a:r>
+                        <a:rPr sz="900">
+                          <a:solidFill>
+                            <a:srgbClr val="101010"/>
+                          </a:solidFill>
+                          <a:latin typeface="Calibri"/>
+                        </a:rPr>
+                        <a:t>$500</a:t>
+                      </a:r>
+                    </a:p>
+                  </a:txBody>
+                  <a:tcPr>
+                    <a:solidFill>
+                      <a:srgbClr val="FFFFFF"/>
+                    </a:solidFill>
+                  </a:tcPr>
+                </a:tc>
+                <a:tc>
+                  <a:txBody>
+                    <a:bodyPr lIns="45720" rIns="45720" tIns="18288" bIns="18288" wrap="square" anchor="ctr"/>
+                    <a:lstStyle/>
+                    <a:p>
+                      <a:pPr algn="ctr"/>
+                      <a:r>
+                        <a:rPr sz="900">
+                          <a:solidFill>
+                            <a:srgbClr val="101010"/>
+                          </a:solidFill>
+                          <a:latin typeface="Calibri"/>
+                        </a:rPr>
+                        <a:t>$600</a:t>
+                      </a:r>
+                    </a:p>
+                  </a:txBody>
+                  <a:tcPr>
+                    <a:solidFill>
+                      <a:srgbClr val="FFFFFF"/>
+                    </a:solidFill>
+                  </a:tcPr>
+                </a:tc>
+                <a:tc>
+                  <a:txBody>
+                    <a:bodyPr lIns="45720" rIns="45720" tIns="18288" bIns="18288" wrap="square" anchor="ctr"/>
+                    <a:lstStyle/>
+                    <a:p>
+                      <a:pPr algn="ctr"/>
+                      <a:r>
+                        <a:rPr sz="900">
+                          <a:solidFill>
+                            <a:srgbClr val="101010"/>
+                          </a:solidFill>
+                          <a:latin typeface="Calibri"/>
+                        </a:rPr>
+                        <a:t>+$100</a:t>
+                      </a:r>
+                    </a:p>
+                  </a:txBody>
+                  <a:tcPr>
+                    <a:solidFill>
+                      <a:srgbClr val="FFFFFF"/>
+                    </a:solidFill>
+                  </a:tcPr>
+                </a:tc>
+              </a:tr>
+              <a:tr h="256032">
+                <a:tc>
+                  <a:txBody>
+                    <a:bodyPr lIns="45720" rIns="45720" tIns="18288" bIns="18288" wrap="square" anchor="ctr"/>
+                    <a:lstStyle/>
+                    <a:p>
+                      <a:pPr algn="ctr"/>
+                      <a:r>
+                        <a:rPr sz="900" b="1">
+                          <a:solidFill>
+                            <a:srgbClr val="101010"/>
+                          </a:solidFill>
+                          <a:latin typeface="Calibri"/>
+                        </a:rPr>
+                        <a:t>Dialinerys Mar</a:t>
+                      </a:r>
+                    </a:p>
+                  </a:txBody>
+                  <a:tcPr>
+                    <a:solidFill>
+                      <a:srgbClr val="F2F2F2"/>
+                    </a:solidFill>
+                  </a:tcPr>
+                </a:tc>
+                <a:tc>
+                  <a:txBody>
+                    <a:bodyPr lIns="45720" rIns="45720" tIns="18288" bIns="18288" wrap="square" anchor="ctr"/>
+                    <a:lstStyle/>
+                    <a:p>
+                      <a:pPr algn="ctr"/>
+                      <a:r>
+                        <a:rPr sz="900">
+                          <a:solidFill>
+                            <a:srgbClr val="101010"/>
+                          </a:solidFill>
+                          <a:latin typeface="Calibri"/>
+                        </a:rPr>
+                        <a:t>$680</a:t>
+                      </a:r>
+                    </a:p>
+                  </a:txBody>
+                  <a:tcPr>
+                    <a:solidFill>
+                      <a:srgbClr val="F2F2F2"/>
+                    </a:solidFill>
+                  </a:tcPr>
+                </a:tc>
+                <a:tc>
+                  <a:txBody>
+                    <a:bodyPr lIns="45720" rIns="45720" tIns="18288" bIns="18288" wrap="square" anchor="ctr"/>
+                    <a:lstStyle/>
+                    <a:p>
+                      <a:pPr algn="ctr"/>
+                      <a:r>
+                        <a:rPr sz="900">
+                          <a:solidFill>
+                            <a:srgbClr val="101010"/>
+                          </a:solidFill>
+                          <a:latin typeface="Calibri"/>
+                        </a:rPr>
+                        <a:t>$700</a:t>
+                      </a:r>
+                    </a:p>
+                  </a:txBody>
+                  <a:tcPr>
+                    <a:solidFill>
+                      <a:srgbClr val="F2F2F2"/>
+                    </a:solidFill>
+                  </a:tcPr>
+                </a:tc>
+                <a:tc>
+                  <a:txBody>
+                    <a:bodyPr lIns="45720" rIns="45720" tIns="18288" bIns="18288" wrap="square" anchor="ctr"/>
+                    <a:lstStyle/>
+                    <a:p>
+                      <a:pPr algn="ctr"/>
+                      <a:r>
+                        <a:rPr sz="900">
+                          <a:solidFill>
+                            <a:srgbClr val="101010"/>
+                          </a:solidFill>
+                          <a:latin typeface="Calibri"/>
+                        </a:rPr>
+                        <a:t>+$20</a:t>
+                      </a:r>
+                    </a:p>
+                  </a:txBody>
+                  <a:tcPr>
+                    <a:solidFill>
+                      <a:srgbClr val="F2F2F2"/>
+                    </a:solidFill>
+                  </a:tcPr>
+                </a:tc>
+              </a:tr>
+              <a:tr h="256032">
+                <a:tc>
+                  <a:txBody>
+                    <a:bodyPr lIns="45720" rIns="45720" tIns="18288" bIns="18288" wrap="square" anchor="ctr"/>
+                    <a:lstStyle/>
+                    <a:p>
+                      <a:pPr algn="ctr"/>
+                      <a:r>
+                        <a:rPr sz="900" b="1">
+                          <a:solidFill>
+                            <a:srgbClr val="101010"/>
+                          </a:solidFill>
+                          <a:latin typeface="Calibri"/>
+                        </a:rPr>
+                        <a:t>Abel Feb</a:t>
+                      </a:r>
+                    </a:p>
+                  </a:txBody>
+                  <a:tcPr>
+                    <a:solidFill>
+                      <a:srgbClr val="FFFFFF"/>
+                    </a:solidFill>
+                  </a:tcPr>
+                </a:tc>
+                <a:tc>
+                  <a:txBody>
+                    <a:bodyPr lIns="45720" rIns="45720" tIns="18288" bIns="18288" wrap="square" anchor="ctr"/>
+                    <a:lstStyle/>
+                    <a:p>
+                      <a:pPr algn="ctr"/>
+                      <a:r>
+                        <a:rPr sz="900">
+                          <a:solidFill>
+                            <a:srgbClr val="101010"/>
+                          </a:solidFill>
+                          <a:latin typeface="Calibri"/>
+                        </a:rPr>
+                        <a:t>$0</a:t>
+                      </a:r>
+                    </a:p>
+                  </a:txBody>
+                  <a:tcPr>
+                    <a:solidFill>
+                      <a:srgbClr val="FFFFFF"/>
+                    </a:solidFill>
+                  </a:tcPr>
+                </a:tc>
+                <a:tc>
+                  <a:txBody>
+                    <a:bodyPr lIns="45720" rIns="45720" tIns="18288" bIns="18288" wrap="square" anchor="ctr"/>
+                    <a:lstStyle/>
+                    <a:p>
+                      <a:pPr algn="ctr"/>
+                      <a:r>
+                        <a:rPr sz="900">
+                          <a:solidFill>
+                            <a:srgbClr val="101010"/>
+                          </a:solidFill>
+                          <a:latin typeface="Calibri"/>
+                        </a:rPr>
+                        <a:t>$0</a:t>
+                      </a:r>
+                    </a:p>
+                  </a:txBody>
+                  <a:tcPr>
+                    <a:solidFill>
+                      <a:srgbClr val="FFFFFF"/>
+                    </a:solidFill>
+                  </a:tcPr>
+                </a:tc>
+                <a:tc>
+                  <a:txBody>
+                    <a:bodyPr lIns="45720" rIns="45720" tIns="18288" bIns="18288" wrap="square" anchor="ctr"/>
+                    <a:lstStyle/>
+                    <a:p>
+                      <a:pPr algn="ctr"/>
+                      <a:r>
+                        <a:rPr sz="900">
+                          <a:solidFill>
+                            <a:srgbClr val="101010"/>
+                          </a:solidFill>
+                          <a:latin typeface="Calibri"/>
+                        </a:rPr>
+                        <a:t>$0</a:t>
+                      </a:r>
+                    </a:p>
+                  </a:txBody>
+                  <a:tcPr>
+                    <a:solidFill>
+                      <a:srgbClr val="FFFFFF"/>
+                    </a:solidFill>
+                  </a:tcPr>
+                </a:tc>
+              </a:tr>
+              <a:tr h="256032">
+                <a:tc>
+                  <a:txBody>
+                    <a:bodyPr lIns="45720" rIns="45720" tIns="18288" bIns="18288" wrap="square" anchor="ctr"/>
+                    <a:lstStyle/>
+                    <a:p>
+                      <a:pPr algn="ctr"/>
+                      <a:r>
+                        <a:rPr sz="900" b="1">
+                          <a:solidFill>
+                            <a:srgbClr val="101010"/>
+                          </a:solidFill>
+                          <a:latin typeface="Calibri"/>
+                        </a:rPr>
+                        <a:t>Dialinerys Jan</a:t>
+                      </a:r>
+                    </a:p>
+                  </a:txBody>
+                  <a:tcPr>
+                    <a:solidFill>
+                      <a:srgbClr val="F2F2F2"/>
+                    </a:solidFill>
+                  </a:tcPr>
+                </a:tc>
+                <a:tc>
+                  <a:txBody>
+                    <a:bodyPr lIns="45720" rIns="45720" tIns="18288" bIns="18288" wrap="square" anchor="ctr"/>
+                    <a:lstStyle/>
+                    <a:p>
+                      <a:pPr algn="ctr"/>
+                      <a:r>
+                        <a:rPr sz="900">
+                          <a:solidFill>
+                            <a:srgbClr val="101010"/>
+                          </a:solidFill>
+                          <a:latin typeface="Calibri"/>
+                        </a:rPr>
+                        <a:t>$350</a:t>
+                      </a:r>
+                    </a:p>
+                  </a:txBody>
+                  <a:tcPr>
+                    <a:solidFill>
+                      <a:srgbClr val="F2F2F2"/>
+                    </a:solidFill>
+                  </a:tcPr>
+                </a:tc>
+                <a:tc>
+                  <a:txBody>
+                    <a:bodyPr lIns="45720" rIns="45720" tIns="18288" bIns="18288" wrap="square" anchor="ctr"/>
+                    <a:lstStyle/>
+                    <a:p>
+                      <a:pPr algn="ctr"/>
+                      <a:r>
+                        <a:rPr sz="900">
+                          <a:solidFill>
+                            <a:srgbClr val="101010"/>
+                          </a:solidFill>
+                          <a:latin typeface="Calibri"/>
+                        </a:rPr>
+                        <a:t>$350</a:t>
+                      </a:r>
+                    </a:p>
+                  </a:txBody>
+                  <a:tcPr>
+                    <a:solidFill>
+                      <a:srgbClr val="F2F2F2"/>
+                    </a:solidFill>
+                  </a:tcPr>
+                </a:tc>
+                <a:tc>
+                  <a:txBody>
+                    <a:bodyPr lIns="45720" rIns="45720" tIns="18288" bIns="18288" wrap="square" anchor="ctr"/>
+                    <a:lstStyle/>
+                    <a:p>
+                      <a:pPr algn="ctr"/>
+                      <a:r>
+                        <a:rPr sz="900">
+                          <a:solidFill>
+                            <a:srgbClr val="101010"/>
+                          </a:solidFill>
+                          <a:latin typeface="Calibri"/>
+                        </a:rPr>
+                        <a:t>$0</a:t>
+                      </a:r>
+                    </a:p>
+                  </a:txBody>
+                  <a:tcPr>
+                    <a:solidFill>
+                      <a:srgbClr val="F2F2F2"/>
+                    </a:solidFill>
+                  </a:tcPr>
+                </a:tc>
+              </a:tr>
+              <a:tr h="256032">
+                <a:tc>
+                  <a:txBody>
+                    <a:bodyPr lIns="45720" rIns="45720" tIns="18288" bIns="18288" wrap="square" anchor="ctr"/>
+                    <a:lstStyle/>
+                    <a:p>
+                      <a:pPr algn="ctr"/>
+                      <a:r>
+                        <a:rPr sz="900" b="1">
+                          <a:solidFill>
+                            <a:srgbClr val="101010"/>
+                          </a:solidFill>
+                          <a:latin typeface="Calibri"/>
+                        </a:rPr>
+                        <a:t>Melissa Feb</a:t>
+                      </a:r>
+                    </a:p>
+                  </a:txBody>
+                  <a:tcPr>
+                    <a:solidFill>
+                      <a:srgbClr val="FFFFFF"/>
+                    </a:solidFill>
+                  </a:tcPr>
+                </a:tc>
+                <a:tc>
+                  <a:txBody>
+                    <a:bodyPr lIns="45720" rIns="45720" tIns="18288" bIns="18288" wrap="square" anchor="ctr"/>
+                    <a:lstStyle/>
+                    <a:p>
+                      <a:pPr algn="ctr"/>
+                      <a:r>
+                        <a:rPr sz="900">
+                          <a:solidFill>
+                            <a:srgbClr val="101010"/>
+                          </a:solidFill>
+                          <a:latin typeface="Calibri"/>
+                        </a:rPr>
+                        <a:t>$250</a:t>
+                      </a:r>
+                    </a:p>
+                  </a:txBody>
+                  <a:tcPr>
+                    <a:solidFill>
+                      <a:srgbClr val="FFFFFF"/>
+                    </a:solidFill>
+                  </a:tcPr>
+                </a:tc>
+                <a:tc>
+                  <a:txBody>
+                    <a:bodyPr lIns="45720" rIns="45720" tIns="18288" bIns="18288" wrap="square" anchor="ctr"/>
+                    <a:lstStyle/>
+                    <a:p>
+                      <a:pPr algn="ctr"/>
+                      <a:r>
+                        <a:rPr sz="900">
+                          <a:solidFill>
+                            <a:srgbClr val="101010"/>
+                          </a:solidFill>
+                          <a:latin typeface="Calibri"/>
+                        </a:rPr>
+                        <a:t>$250</a:t>
+                      </a:r>
+                    </a:p>
+                  </a:txBody>
+                  <a:tcPr>
+                    <a:solidFill>
+                      <a:srgbClr val="FFFFFF"/>
+                    </a:solidFill>
+                  </a:tcPr>
+                </a:tc>
+                <a:tc>
+                  <a:txBody>
+                    <a:bodyPr lIns="45720" rIns="45720" tIns="18288" bIns="18288" wrap="square" anchor="ctr"/>
+                    <a:lstStyle/>
+                    <a:p>
+                      <a:pPr algn="ctr"/>
+                      <a:r>
+                        <a:rPr sz="900">
+                          <a:solidFill>
+                            <a:srgbClr val="101010"/>
+                          </a:solidFill>
+                          <a:latin typeface="Calibri"/>
+                        </a:rPr>
+                        <a:t>$0</a:t>
+                      </a:r>
+                    </a:p>
+                  </a:txBody>
+                  <a:tcPr>
+                    <a:solidFill>
+                      <a:srgbClr val="FFFFFF"/>
+                    </a:solidFill>
+                  </a:tcPr>
+                </a:tc>
+              </a:tr>
+              <a:tr h="256032">
+                <a:tc>
+                  <a:txBody>
+                    <a:bodyPr lIns="45720" rIns="45720" tIns="18288" bIns="18288" wrap="square" anchor="ctr"/>
+                    <a:lstStyle/>
+                    <a:p>
+                      <a:pPr algn="ctr"/>
+                      <a:r>
+                        <a:rPr sz="900" b="1">
+                          <a:solidFill>
+                            <a:srgbClr val="101010"/>
+                          </a:solidFill>
+                          <a:latin typeface="Calibri"/>
+                        </a:rPr>
+                        <a:t>Thalia Jan</a:t>
+                      </a:r>
+                    </a:p>
+                  </a:txBody>
+                  <a:tcPr>
+                    <a:solidFill>
+                      <a:srgbClr val="F2F2F2"/>
+                    </a:solidFill>
+                  </a:tcPr>
+                </a:tc>
+                <a:tc>
+                  <a:txBody>
+                    <a:bodyPr lIns="45720" rIns="45720" tIns="18288" bIns="18288" wrap="square" anchor="ctr"/>
+                    <a:lstStyle/>
+                    <a:p>
+                      <a:pPr algn="ctr"/>
+                      <a:r>
+                        <a:rPr sz="900">
+                          <a:solidFill>
+                            <a:srgbClr val="101010"/>
+                          </a:solidFill>
+                          <a:latin typeface="Calibri"/>
+                        </a:rPr>
+                        <a:t>$0</a:t>
+                      </a:r>
+                    </a:p>
+                  </a:txBody>
+                  <a:tcPr>
+                    <a:solidFill>
+                      <a:srgbClr val="F2F2F2"/>
+                    </a:solidFill>
+                  </a:tcPr>
+                </a:tc>
+                <a:tc>
+                  <a:txBody>
+                    <a:bodyPr lIns="45720" rIns="45720" tIns="18288" bIns="18288" wrap="square" anchor="ctr"/>
+                    <a:lstStyle/>
+                    <a:p>
+                      <a:pPr algn="ctr"/>
+                      <a:r>
+                        <a:rPr sz="900">
+                          <a:solidFill>
+                            <a:srgbClr val="101010"/>
+                          </a:solidFill>
+                          <a:latin typeface="Calibri"/>
+                        </a:rPr>
+                        <a:t>$0</a:t>
+                      </a:r>
+                    </a:p>
+                  </a:txBody>
+                  <a:tcPr>
+                    <a:solidFill>
+                      <a:srgbClr val="F2F2F2"/>
+                    </a:solidFill>
+                  </a:tcPr>
+                </a:tc>
+                <a:tc>
+                  <a:txBody>
+                    <a:bodyPr lIns="45720" rIns="45720" tIns="18288" bIns="18288" wrap="square" anchor="ctr"/>
+                    <a:lstStyle/>
+                    <a:p>
+                      <a:pPr algn="ctr"/>
+                      <a:r>
+                        <a:rPr sz="900">
+                          <a:solidFill>
+                            <a:srgbClr val="101010"/>
+                          </a:solidFill>
+                          <a:latin typeface="Calibri"/>
+                        </a:rPr>
+                        <a:t>$0</a:t>
+                      </a:r>
+                    </a:p>
+                  </a:txBody>
+                  <a:tcPr>
+                    <a:solidFill>
+                      <a:srgbClr val="F2F2F2"/>
+                    </a:solidFill>
+                  </a:tcPr>
+                </a:tc>
+              </a:tr>
+              <a:tr h="256032">
+                <a:tc>
+                  <a:txBody>
+                    <a:bodyPr lIns="45720" rIns="45720" tIns="18288" bIns="18288" wrap="square" anchor="ctr"/>
+                    <a:lstStyle/>
+                    <a:p>
+                      <a:pPr algn="ctr"/>
+                      <a:r>
+                        <a:rPr sz="900" b="1">
+                          <a:solidFill>
+                            <a:srgbClr val="101010"/>
+                          </a:solidFill>
+                          <a:latin typeface="Calibri"/>
+                        </a:rPr>
+                        <a:t>Thalia Feb</a:t>
+                      </a:r>
+                    </a:p>
+                  </a:txBody>
+                  <a:tcPr>
+                    <a:solidFill>
+                      <a:srgbClr val="FFFFFF"/>
+                    </a:solidFill>
+                  </a:tcPr>
+                </a:tc>
+                <a:tc>
+                  <a:txBody>
+                    <a:bodyPr lIns="45720" rIns="45720" tIns="18288" bIns="18288" wrap="square" anchor="ctr"/>
+                    <a:lstStyle/>
+                    <a:p>
+                      <a:pPr algn="ctr"/>
+                      <a:r>
+                        <a:rPr sz="900">
+                          <a:solidFill>
+                            <a:srgbClr val="101010"/>
+                          </a:solidFill>
+                          <a:latin typeface="Calibri"/>
+                        </a:rPr>
+                        <a:t>$0</a:t>
+                      </a:r>
+                    </a:p>
+                  </a:txBody>
+                  <a:tcPr>
+                    <a:solidFill>
+                      <a:srgbClr val="FFFFFF"/>
+                    </a:solidFill>
+                  </a:tcPr>
+                </a:tc>
+                <a:tc>
+                  <a:txBody>
+                    <a:bodyPr lIns="45720" rIns="45720" tIns="18288" bIns="18288" wrap="square" anchor="ctr"/>
+                    <a:lstStyle/>
+                    <a:p>
+                      <a:pPr algn="ctr"/>
+                      <a:r>
+                        <a:rPr sz="900">
+                          <a:solidFill>
+                            <a:srgbClr val="101010"/>
+                          </a:solidFill>
+                          <a:latin typeface="Calibri"/>
+                        </a:rPr>
+                        <a:t>$0</a:t>
+                      </a:r>
+                    </a:p>
+                  </a:txBody>
+                  <a:tcPr>
+                    <a:solidFill>
+                      <a:srgbClr val="FFFFFF"/>
+                    </a:solidFill>
+                  </a:tcPr>
+                </a:tc>
+                <a:tc>
+                  <a:txBody>
+                    <a:bodyPr lIns="45720" rIns="45720" tIns="18288" bIns="18288" wrap="square" anchor="ctr"/>
+                    <a:lstStyle/>
+                    <a:p>
+                      <a:pPr algn="ctr"/>
+                      <a:r>
+                        <a:rPr sz="900">
+                          <a:solidFill>
+                            <a:srgbClr val="101010"/>
+                          </a:solidFill>
+                          <a:latin typeface="Calibri"/>
+                        </a:rPr>
+                        <a:t>$0</a:t>
+                      </a:r>
+                    </a:p>
+                  </a:txBody>
+                  <a:tcPr>
+                    <a:solidFill>
+                      <a:srgbClr val="FFFFFF"/>
+                    </a:solidFill>
+                  </a:tcPr>
+                </a:tc>
+              </a:tr>
+              <a:tr h="256032">
+                <a:tc>
+                  <a:txBody>
+                    <a:bodyPr lIns="45720" rIns="45720" tIns="18288" bIns="18288" wrap="square" anchor="ctr"/>
+                    <a:lstStyle/>
+                    <a:p>
+                      <a:pPr algn="ctr"/>
+                      <a:r>
+                        <a:rPr sz="900" b="1">
+                          <a:solidFill>
+                            <a:srgbClr val="101010"/>
+                          </a:solidFill>
+                          <a:latin typeface="Calibri"/>
+                        </a:rPr>
+                        <a:t>Thalia Mar</a:t>
+                      </a:r>
+                    </a:p>
+                  </a:txBody>
+                  <a:tcPr>
+                    <a:solidFill>
+                      <a:srgbClr val="F2F2F2"/>
+                    </a:solidFill>
+                  </a:tcPr>
+                </a:tc>
+                <a:tc>
+                  <a:txBody>
+                    <a:bodyPr lIns="45720" rIns="45720" tIns="18288" bIns="18288" wrap="square" anchor="ctr"/>
+                    <a:lstStyle/>
+                    <a:p>
+                      <a:pPr algn="ctr"/>
+                      <a:r>
+                        <a:rPr sz="900">
+                          <a:solidFill>
+                            <a:srgbClr val="101010"/>
+                          </a:solidFill>
+                          <a:latin typeface="Calibri"/>
+                        </a:rPr>
+                        <a:t>$0</a:t>
+                      </a:r>
+                    </a:p>
+                  </a:txBody>
+                  <a:tcPr>
+                    <a:solidFill>
+                      <a:srgbClr val="F2F2F2"/>
+                    </a:solidFill>
+                  </a:tcPr>
+                </a:tc>
+                <a:tc>
+                  <a:txBody>
+                    <a:bodyPr lIns="45720" rIns="45720" tIns="18288" bIns="18288" wrap="square" anchor="ctr"/>
+                    <a:lstStyle/>
+                    <a:p>
+                      <a:pPr algn="ctr"/>
+                      <a:r>
+                        <a:rPr sz="900">
+                          <a:solidFill>
+                            <a:srgbClr val="101010"/>
+                          </a:solidFill>
+                          <a:latin typeface="Calibri"/>
+                        </a:rPr>
+                        <a:t>$0</a:t>
+                      </a:r>
+                    </a:p>
+                  </a:txBody>
+                  <a:tcPr>
+                    <a:solidFill>
+                      <a:srgbClr val="F2F2F2"/>
+                    </a:solidFill>
+                  </a:tcPr>
+                </a:tc>
+                <a:tc>
+                  <a:txBody>
+                    <a:bodyPr lIns="45720" rIns="45720" tIns="18288" bIns="18288" wrap="square" anchor="ctr"/>
+                    <a:lstStyle/>
+                    <a:p>
+                      <a:pPr algn="ctr"/>
+                      <a:r>
+                        <a:rPr sz="900">
+                          <a:solidFill>
+                            <a:srgbClr val="101010"/>
+                          </a:solidFill>
+                          <a:latin typeface="Calibri"/>
+                        </a:rPr>
+                        <a:t>$0</a:t>
+                      </a:r>
+                    </a:p>
+                  </a:txBody>
+                  <a:tcPr>
+                    <a:solidFill>
+                      <a:srgbClr val="F2F2F2"/>
+                    </a:solidFill>
+                  </a:tcPr>
+                </a:tc>
+              </a:tr>
+              <a:tr h="256032">
+                <a:tc>
+                  <a:txBody>
+                    <a:bodyPr lIns="45720" rIns="45720" tIns="18288" bIns="18288" wrap="square" anchor="ctr"/>
+                    <a:lstStyle/>
+                    <a:p>
+                      <a:pPr algn="ctr"/>
+                      <a:r>
+                        <a:rPr sz="900" b="1">
+                          <a:solidFill>
+                            <a:srgbClr val="101010"/>
+                          </a:solidFill>
+                          <a:latin typeface="Calibri"/>
+                        </a:rPr>
+                        <a:t>Thalia Apr</a:t>
+                      </a:r>
+                    </a:p>
+                  </a:txBody>
+                  <a:tcPr>
+                    <a:solidFill>
+                      <a:srgbClr val="FFFFFF"/>
+                    </a:solidFill>
+                  </a:tcPr>
+                </a:tc>
+                <a:tc>
+                  <a:txBody>
+                    <a:bodyPr lIns="45720" rIns="45720" tIns="18288" bIns="18288" wrap="square" anchor="ctr"/>
+                    <a:lstStyle/>
+                    <a:p>
+                      <a:pPr algn="ctr"/>
+                      <a:r>
+                        <a:rPr sz="900">
+                          <a:solidFill>
+                            <a:srgbClr val="101010"/>
+                          </a:solidFill>
+                          <a:latin typeface="Calibri"/>
+                        </a:rPr>
+                        <a:t>$0</a:t>
+                      </a:r>
+                    </a:p>
+                  </a:txBody>
+                  <a:tcPr>
+                    <a:solidFill>
+                      <a:srgbClr val="FFFFFF"/>
+                    </a:solidFill>
+                  </a:tcPr>
+                </a:tc>
+                <a:tc>
+                  <a:txBody>
+                    <a:bodyPr lIns="45720" rIns="45720" tIns="18288" bIns="18288" wrap="square" anchor="ctr"/>
+                    <a:lstStyle/>
+                    <a:p>
+                      <a:pPr algn="ctr"/>
+                      <a:r>
+                        <a:rPr sz="900">
+                          <a:solidFill>
+                            <a:srgbClr val="101010"/>
+                          </a:solidFill>
+                          <a:latin typeface="Calibri"/>
+                        </a:rPr>
+                        <a:t>$0</a:t>
+                      </a:r>
+                    </a:p>
+                  </a:txBody>
+                  <a:tcPr>
+                    <a:solidFill>
+                      <a:srgbClr val="FFFFFF"/>
+                    </a:solidFill>
+                  </a:tcPr>
+                </a:tc>
+                <a:tc>
+                  <a:txBody>
+                    <a:bodyPr lIns="45720" rIns="45720" tIns="18288" bIns="18288" wrap="square" anchor="ctr"/>
+                    <a:lstStyle/>
+                    <a:p>
+                      <a:pPr algn="ctr"/>
+                      <a:r>
+                        <a:rPr sz="900">
+                          <a:solidFill>
+                            <a:srgbClr val="101010"/>
+                          </a:solidFill>
+                          <a:latin typeface="Calibri"/>
+                        </a:rPr>
+                        <a:t>$0</a:t>
+                      </a:r>
+                    </a:p>
+                  </a:txBody>
+                  <a:tcPr>
+                    <a:solidFill>
+                      <a:srgbClr val="FFFFFF"/>
+                    </a:solidFill>
+                  </a:tcPr>
+                </a:tc>
+              </a:tr>
+              <a:tr h="256032">
+                <a:tc>
+                  <a:txBody>
+                    <a:bodyPr lIns="45720" rIns="45720" tIns="18288" bIns="18288" wrap="square" anchor="ctr"/>
+                    <a:lstStyle/>
+                    <a:p>
+                      <a:pPr algn="ctr"/>
+                      <a:r>
+                        <a:rPr sz="900" b="1">
+                          <a:solidFill>
+                            <a:srgbClr val="101010"/>
+                          </a:solidFill>
+                          <a:latin typeface="Calibri"/>
+                        </a:rPr>
+                        <a:t>Monica Mar</a:t>
+                      </a:r>
+                    </a:p>
+                  </a:txBody>
+                  <a:tcPr>
+                    <a:solidFill>
+                      <a:srgbClr val="F2F2F2"/>
+                    </a:solidFill>
+                  </a:tcPr>
+                </a:tc>
+                <a:tc>
+                  <a:txBody>
+                    <a:bodyPr lIns="45720" rIns="45720" tIns="18288" bIns="18288" wrap="square" anchor="ctr"/>
+                    <a:lstStyle/>
+                    <a:p>
+                      <a:pPr algn="ctr"/>
+                      <a:r>
+                        <a:rPr sz="900">
+                          <a:solidFill>
+                            <a:srgbClr val="101010"/>
+                          </a:solidFill>
+                          <a:latin typeface="Calibri"/>
+                        </a:rPr>
+                        <a:t>$450</a:t>
+                      </a:r>
+                    </a:p>
+                  </a:txBody>
+                  <a:tcPr>
+                    <a:solidFill>
+                      <a:srgbClr val="F2F2F2"/>
+                    </a:solidFill>
+                  </a:tcPr>
+                </a:tc>
+                <a:tc>
+                  <a:txBody>
+                    <a:bodyPr lIns="45720" rIns="45720" tIns="18288" bIns="18288" wrap="square" anchor="ctr"/>
+                    <a:lstStyle/>
+                    <a:p>
+                      <a:pPr algn="ctr"/>
+                      <a:r>
+                        <a:rPr sz="900">
+                          <a:solidFill>
+                            <a:srgbClr val="101010"/>
+                          </a:solidFill>
+                          <a:latin typeface="Calibri"/>
+                        </a:rPr>
+                        <a:t>$375</a:t>
+                      </a:r>
+                    </a:p>
+                  </a:txBody>
+                  <a:tcPr>
+                    <a:solidFill>
+                      <a:srgbClr val="F2F2F2"/>
+                    </a:solidFill>
+                  </a:tcPr>
+                </a:tc>
+                <a:tc>
+                  <a:txBody>
+                    <a:bodyPr lIns="45720" rIns="45720" tIns="18288" bIns="18288" wrap="square" anchor="ctr"/>
+                    <a:lstStyle/>
+                    <a:p>
+                      <a:pPr algn="ctr"/>
+                      <a:r>
+                        <a:rPr sz="900">
+                          <a:solidFill>
+                            <a:srgbClr val="101010"/>
+                          </a:solidFill>
+                          <a:latin typeface="Calibri"/>
+                        </a:rPr>
+                        <a:t>$-75</a:t>
+                      </a:r>
+                    </a:p>
+                  </a:txBody>
+                  <a:tcPr>
+                    <a:solidFill>
+                      <a:srgbClr val="F2F2F2"/>
+                    </a:solidFill>
+                  </a:tcPr>
+                </a:tc>
+              </a:tr>
+              <a:tr h="256032">
+                <a:tc>
+                  <a:txBody>
+                    <a:bodyPr lIns="45720" rIns="45720" tIns="18288" bIns="18288" wrap="square" anchor="ctr"/>
+                    <a:lstStyle/>
+                    <a:p>
+                      <a:pPr algn="ctr"/>
+                      <a:r>
+                        <a:rPr sz="900" b="1">
+                          <a:solidFill>
+                            <a:srgbClr val="101010"/>
+                          </a:solidFill>
+                          <a:latin typeface="Calibri"/>
+                        </a:rPr>
+                        <a:t>4-mo total (all agents)</a:t>
+                      </a:r>
+                    </a:p>
+                  </a:txBody>
+                  <a:tcPr>
+                    <a:solidFill>
+                      <a:srgbClr val="FFFFFF"/>
+                    </a:solidFill>
+                  </a:tcPr>
+                </a:tc>
+                <a:tc>
+                  <a:txBody>
+                    <a:bodyPr lIns="45720" rIns="45720" tIns="18288" bIns="18288" wrap="square" anchor="ctr"/>
+                    <a:lstStyle/>
+                    <a:p>
+                      <a:pPr algn="ctr"/>
+                      <a:r>
+                        <a:rPr sz="900">
+                          <a:solidFill>
+                            <a:srgbClr val="101010"/>
+                          </a:solidFill>
+                          <a:latin typeface="Calibri"/>
+                        </a:rPr>
+                        <a:t>$7,110</a:t>
+                      </a:r>
+                    </a:p>
+                  </a:txBody>
+                  <a:tcPr>
+                    <a:solidFill>
+                      <a:srgbClr val="FFFFFF"/>
+                    </a:solidFill>
+                  </a:tcPr>
+                </a:tc>
+                <a:tc>
+                  <a:txBody>
+                    <a:bodyPr lIns="45720" rIns="45720" tIns="18288" bIns="18288" wrap="square" anchor="ctr"/>
+                    <a:lstStyle/>
+                    <a:p>
+                      <a:pPr algn="ctr"/>
+                      <a:r>
+                        <a:rPr sz="900">
+                          <a:solidFill>
+                            <a:srgbClr val="101010"/>
+                          </a:solidFill>
+                          <a:latin typeface="Calibri"/>
+                        </a:rPr>
+                        <a:t>$3,875</a:t>
+                      </a:r>
+                    </a:p>
+                  </a:txBody>
+                  <a:tcPr>
+                    <a:solidFill>
+                      <a:srgbClr val="FFFFFF"/>
+                    </a:solidFill>
+                  </a:tcPr>
+                </a:tc>
+                <a:tc>
+                  <a:txBody>
+                    <a:bodyPr lIns="45720" rIns="45720" tIns="18288" bIns="18288" wrap="square" anchor="ctr"/>
+                    <a:lstStyle/>
+                    <a:p>
+                      <a:pPr algn="ctr"/>
+                      <a:r>
+                        <a:rPr sz="900">
+                          <a:solidFill>
+                            <a:srgbClr val="101010"/>
+                          </a:solidFill>
+                          <a:latin typeface="Calibri"/>
+                        </a:rPr>
+                        <a:t>$-3,235</a:t>
+                      </a:r>
+                    </a:p>
+                  </a:txBody>
+                  <a:tcPr>
+                    <a:solidFill>
+                      <a:srgbClr val="FFFFFF"/>
+                    </a:solidFill>
+                  </a:tcPr>
+                </a:tc>
+              </a:tr>
+            </a:tbl>
+          </a:graphicData>
+        </a:graphic>
+      </p:graphicFrame>
+      <p:sp>
+        <p:nvSpPr>
+          <p:cNvPr id="14" name="Rectangle 13"/>
+          <p:cNvSpPr/>
+          <p:nvPr/>
+        </p:nvSpPr>
+        <p:spPr>
+          <a:xfrm>
+            <a:off x="8174736" y="1005840"/>
+            <a:ext cx="3703320" cy="365760"/>
+          </a:xfrm>
+          <a:prstGeom prst="rect">
+            <a:avLst/>
+          </a:prstGeom>
+          <a:solidFill>
+            <a:srgbClr val="BF9000"/>
+          </a:solidFill>
+          <a:ln>
+            <a:noFill/>
+          </a:ln>
+          <a:effectLst/>
+        </p:spPr>
+        <p:style>
+          <a:lnRef idx="1">
+            <a:schemeClr val="accent1"/>
+          </a:lnRef>
+          <a:fillRef idx="3">
+            <a:schemeClr val="accent1"/>
+          </a:fillRef>
+          <a:effectRef idx="2">
+            <a:schemeClr val="accent1"/>
+          </a:effectRef>
+          <a:fontRef idx="minor">
+            <a:schemeClr val="lt1"/>
+          </a:fontRef>
+        </p:style>
+        <p:txBody>
+          <a:bodyPr rtlCol="0" anchor="ctr"/>
+          <a:lstStyle/>
+          <a:p>
+            <a:pPr algn="ctr"/>
+          </a:p>
+        </p:txBody>
+      </p:sp>
+      <p:sp>
+        <p:nvSpPr>
+          <p:cNvPr id="15" name="TextBox 14"/>
+          <p:cNvSpPr txBox="1"/>
+          <p:nvPr/>
+        </p:nvSpPr>
+        <p:spPr>
+          <a:xfrm>
+            <a:off x="8174736" y="1005840"/>
+            <a:ext cx="3703320" cy="365760"/>
+          </a:xfrm>
+          <a:prstGeom prst="rect">
+            <a:avLst/>
+          </a:prstGeom>
+          <a:noFill/>
+          <a:ln>
+            <a:noFill/>
+          </a:ln>
+        </p:spPr>
+        <p:txBody>
+          <a:bodyPr wrap="square" lIns="73152" rIns="73152" tIns="36576" bIns="36576" anchor="ctr">
+            <a:spAutoFit/>
+          </a:bodyPr>
+          <a:lstStyle/>
+          <a:p>
+            <a:pPr algn="ctr"/>
+            <a:r>
+              <a:rPr sz="1400" b="1" i="0">
+                <a:solidFill>
+                  <a:srgbClr val="FFFFFF"/>
+                </a:solidFill>
+                <a:latin typeface="Calibri"/>
+              </a:rPr>
+              <a:t>100% FLIP</a:t>
+            </a:r>
+          </a:p>
+        </p:txBody>
+      </p:sp>
+      <p:graphicFrame>
+        <p:nvGraphicFramePr>
+          <p:cNvPr id="16" name="Table 15"/>
+          <p:cNvGraphicFramePr>
+            <a:graphicFrameLocks noGrp="1"/>
+          </p:cNvGraphicFramePr>
+          <p:nvPr/>
+        </p:nvGraphicFramePr>
+        <p:xfrm>
+          <a:off x="8174736" y="1417320"/>
+          <a:ext cx="3703320" cy="3072384"/>
+        </p:xfrm>
+        <a:graphic>
+          <a:graphicData uri="http://schemas.openxmlformats.org/drawingml/2006/table">
+            <a:tbl>
+              <a:tblPr firstRow="1" bandRow="1">
+                <a:tableStyleId>{5C22544A-7EE6-4342-B048-85BDC9FD1C3A}</a:tableStyleId>
+              </a:tblPr>
+              <a:tblGrid>
+                <a:gridCol w="1280160"/>
+                <a:gridCol w="777240"/>
+                <a:gridCol w="777240"/>
+                <a:gridCol w="868680"/>
+              </a:tblGrid>
+              <a:tr h="256032">
+                <a:tc>
+                  <a:txBody>
+                    <a:bodyPr lIns="45720" rIns="45720" tIns="18288" bIns="18288" wrap="square" anchor="ctr"/>
+                    <a:lstStyle/>
+                    <a:p>
+                      <a:pPr algn="ctr"/>
+                      <a:r>
+                        <a:rPr sz="900" b="1">
+                          <a:solidFill>
+                            <a:srgbClr val="FFFFFF"/>
+                          </a:solidFill>
+                          <a:latin typeface="Calibri"/>
+                        </a:rPr>
+                        <a:t>Agent / Mo</a:t>
+                      </a:r>
+                    </a:p>
+                  </a:txBody>
+                  <a:tcPr>
+                    <a:solidFill>
+                      <a:srgbClr val="BF9000"/>
+                    </a:solidFill>
+                  </a:tcPr>
+                </a:tc>
+                <a:tc>
+                  <a:txBody>
+                    <a:bodyPr lIns="45720" rIns="45720" tIns="18288" bIns="18288" wrap="square" anchor="ctr"/>
+                    <a:lstStyle/>
+                    <a:p>
+                      <a:pPr algn="ctr"/>
+                      <a:r>
+                        <a:rPr sz="900" b="1">
+                          <a:solidFill>
+                            <a:srgbClr val="FFFFFF"/>
+                          </a:solidFill>
+                          <a:latin typeface="Calibri"/>
+                        </a:rPr>
+                        <a:t>Current</a:t>
+                      </a:r>
+                    </a:p>
+                  </a:txBody>
+                  <a:tcPr>
+                    <a:solidFill>
+                      <a:srgbClr val="BF9000"/>
+                    </a:solidFill>
+                  </a:tcPr>
+                </a:tc>
+                <a:tc>
+                  <a:txBody>
+                    <a:bodyPr lIns="45720" rIns="45720" tIns="18288" bIns="18288" wrap="square" anchor="ctr"/>
+                    <a:lstStyle/>
+                    <a:p>
+                      <a:pPr algn="ctr"/>
+                      <a:r>
+                        <a:rPr sz="900" b="1">
+                          <a:solidFill>
+                            <a:srgbClr val="FFFFFF"/>
+                          </a:solidFill>
+                          <a:latin typeface="Calibri"/>
+                        </a:rPr>
+                        <a:t>New</a:t>
+                      </a:r>
+                    </a:p>
+                  </a:txBody>
+                  <a:tcPr>
+                    <a:solidFill>
+                      <a:srgbClr val="BF9000"/>
+                    </a:solidFill>
+                  </a:tcPr>
+                </a:tc>
+                <a:tc>
+                  <a:txBody>
+                    <a:bodyPr lIns="45720" rIns="45720" tIns="18288" bIns="18288" wrap="square" anchor="ctr"/>
+                    <a:lstStyle/>
+                    <a:p>
+                      <a:pPr algn="ctr"/>
+                      <a:r>
+                        <a:rPr sz="900" b="1">
+                          <a:solidFill>
+                            <a:srgbClr val="FFFFFF"/>
+                          </a:solidFill>
+                          <a:latin typeface="Calibri"/>
+                        </a:rPr>
+                        <a:t>Delta</a:t>
+                      </a:r>
+                    </a:p>
+                  </a:txBody>
+                  <a:tcPr>
+                    <a:solidFill>
+                      <a:srgbClr val="BF9000"/>
+                    </a:solidFill>
+                  </a:tcPr>
+                </a:tc>
+              </a:tr>
+              <a:tr h="256032">
+                <a:tc>
+                  <a:txBody>
+                    <a:bodyPr lIns="45720" rIns="45720" tIns="18288" bIns="18288" wrap="square" anchor="ctr"/>
+                    <a:lstStyle/>
+                    <a:p>
+                      <a:pPr algn="ctr"/>
+                      <a:r>
+                        <a:rPr sz="900" b="1">
+                          <a:solidFill>
+                            <a:srgbClr val="101010"/>
+                          </a:solidFill>
+                          <a:latin typeface="Calibri"/>
+                        </a:rPr>
+                        <a:t>Dialinerys Mar</a:t>
+                      </a:r>
+                    </a:p>
+                  </a:txBody>
+                  <a:tcPr>
+                    <a:solidFill>
+                      <a:srgbClr val="FFFFFF"/>
+                    </a:solidFill>
+                  </a:tcPr>
+                </a:tc>
+                <a:tc>
+                  <a:txBody>
+                    <a:bodyPr lIns="45720" rIns="45720" tIns="18288" bIns="18288" wrap="square" anchor="ctr"/>
+                    <a:lstStyle/>
+                    <a:p>
+                      <a:pPr algn="ctr"/>
+                      <a:r>
+                        <a:rPr sz="900">
+                          <a:solidFill>
+                            <a:srgbClr val="101010"/>
+                          </a:solidFill>
+                          <a:latin typeface="Calibri"/>
+                        </a:rPr>
+                        <a:t>$350</a:t>
+                      </a:r>
+                    </a:p>
+                  </a:txBody>
+                  <a:tcPr>
+                    <a:solidFill>
+                      <a:srgbClr val="FFFFFF"/>
+                    </a:solidFill>
+                  </a:tcPr>
+                </a:tc>
+                <a:tc>
+                  <a:txBody>
+                    <a:bodyPr lIns="45720" rIns="45720" tIns="18288" bIns="18288" wrap="square" anchor="ctr"/>
+                    <a:lstStyle/>
+                    <a:p>
+                      <a:pPr algn="ctr"/>
+                      <a:r>
+                        <a:rPr sz="900">
+                          <a:solidFill>
+                            <a:srgbClr val="101010"/>
+                          </a:solidFill>
+                          <a:latin typeface="Calibri"/>
+                        </a:rPr>
+                        <a:t>$800</a:t>
+                      </a:r>
+                    </a:p>
+                  </a:txBody>
+                  <a:tcPr>
+                    <a:solidFill>
+                      <a:srgbClr val="FFFFFF"/>
+                    </a:solidFill>
+                  </a:tcPr>
+                </a:tc>
+                <a:tc>
+                  <a:txBody>
+                    <a:bodyPr lIns="45720" rIns="45720" tIns="18288" bIns="18288" wrap="square" anchor="ctr"/>
+                    <a:lstStyle/>
+                    <a:p>
+                      <a:pPr algn="ctr"/>
+                      <a:r>
+                        <a:rPr sz="900">
+                          <a:solidFill>
+                            <a:srgbClr val="101010"/>
+                          </a:solidFill>
+                          <a:latin typeface="Calibri"/>
+                        </a:rPr>
+                        <a:t>+$450</a:t>
+                      </a:r>
+                    </a:p>
+                  </a:txBody>
+                  <a:tcPr>
+                    <a:solidFill>
+                      <a:srgbClr val="FFFFFF"/>
+                    </a:solidFill>
+                  </a:tcPr>
+                </a:tc>
+              </a:tr>
+              <a:tr h="256032">
+                <a:tc>
+                  <a:txBody>
+                    <a:bodyPr lIns="45720" rIns="45720" tIns="18288" bIns="18288" wrap="square" anchor="ctr"/>
+                    <a:lstStyle/>
+                    <a:p>
+                      <a:pPr algn="ctr"/>
+                      <a:r>
+                        <a:rPr sz="900" b="1">
+                          <a:solidFill>
+                            <a:srgbClr val="101010"/>
+                          </a:solidFill>
+                          <a:latin typeface="Calibri"/>
+                        </a:rPr>
+                        <a:t>Melissa Feb</a:t>
+                      </a:r>
+                    </a:p>
+                  </a:txBody>
+                  <a:tcPr>
+                    <a:solidFill>
+                      <a:srgbClr val="F2F2F2"/>
+                    </a:solidFill>
+                  </a:tcPr>
+                </a:tc>
+                <a:tc>
+                  <a:txBody>
+                    <a:bodyPr lIns="45720" rIns="45720" tIns="18288" bIns="18288" wrap="square" anchor="ctr"/>
+                    <a:lstStyle/>
+                    <a:p>
+                      <a:pPr algn="ctr"/>
+                      <a:r>
+                        <a:rPr sz="900">
+                          <a:solidFill>
+                            <a:srgbClr val="101010"/>
+                          </a:solidFill>
+                          <a:latin typeface="Calibri"/>
+                        </a:rPr>
+                        <a:t>$0</a:t>
+                      </a:r>
+                    </a:p>
+                  </a:txBody>
+                  <a:tcPr>
+                    <a:solidFill>
+                      <a:srgbClr val="F2F2F2"/>
+                    </a:solidFill>
+                  </a:tcPr>
+                </a:tc>
+                <a:tc>
+                  <a:txBody>
+                    <a:bodyPr lIns="45720" rIns="45720" tIns="18288" bIns="18288" wrap="square" anchor="ctr"/>
+                    <a:lstStyle/>
+                    <a:p>
+                      <a:pPr algn="ctr"/>
+                      <a:r>
+                        <a:rPr sz="900">
+                          <a:solidFill>
+                            <a:srgbClr val="101010"/>
+                          </a:solidFill>
+                          <a:latin typeface="Calibri"/>
+                        </a:rPr>
+                        <a:t>$350</a:t>
+                      </a:r>
+                    </a:p>
+                  </a:txBody>
+                  <a:tcPr>
+                    <a:solidFill>
+                      <a:srgbClr val="F2F2F2"/>
+                    </a:solidFill>
+                  </a:tcPr>
+                </a:tc>
+                <a:tc>
+                  <a:txBody>
+                    <a:bodyPr lIns="45720" rIns="45720" tIns="18288" bIns="18288" wrap="square" anchor="ctr"/>
+                    <a:lstStyle/>
+                    <a:p>
+                      <a:pPr algn="ctr"/>
+                      <a:r>
+                        <a:rPr sz="900">
+                          <a:solidFill>
+                            <a:srgbClr val="101010"/>
+                          </a:solidFill>
+                          <a:latin typeface="Calibri"/>
+                        </a:rPr>
+                        <a:t>+$350</a:t>
+                      </a:r>
+                    </a:p>
+                  </a:txBody>
+                  <a:tcPr>
+                    <a:solidFill>
+                      <a:srgbClr val="F2F2F2"/>
+                    </a:solidFill>
+                  </a:tcPr>
+                </a:tc>
+              </a:tr>
+              <a:tr h="256032">
+                <a:tc>
+                  <a:txBody>
+                    <a:bodyPr lIns="45720" rIns="45720" tIns="18288" bIns="18288" wrap="square" anchor="ctr"/>
+                    <a:lstStyle/>
+                    <a:p>
+                      <a:pPr algn="ctr"/>
+                      <a:r>
+                        <a:rPr sz="900" b="1">
+                          <a:solidFill>
+                            <a:srgbClr val="101010"/>
+                          </a:solidFill>
+                          <a:latin typeface="Calibri"/>
+                        </a:rPr>
+                        <a:t>Melissa Mar</a:t>
+                      </a:r>
+                    </a:p>
+                  </a:txBody>
+                  <a:tcPr>
+                    <a:solidFill>
+                      <a:srgbClr val="FFFFFF"/>
+                    </a:solidFill>
+                  </a:tcPr>
+                </a:tc>
+                <a:tc>
+                  <a:txBody>
+                    <a:bodyPr lIns="45720" rIns="45720" tIns="18288" bIns="18288" wrap="square" anchor="ctr"/>
+                    <a:lstStyle/>
+                    <a:p>
+                      <a:pPr algn="ctr"/>
+                      <a:r>
+                        <a:rPr sz="900">
+                          <a:solidFill>
+                            <a:srgbClr val="101010"/>
+                          </a:solidFill>
+                          <a:latin typeface="Calibri"/>
+                        </a:rPr>
+                        <a:t>$0</a:t>
+                      </a:r>
+                    </a:p>
+                  </a:txBody>
+                  <a:tcPr>
+                    <a:solidFill>
+                      <a:srgbClr val="FFFFFF"/>
+                    </a:solidFill>
+                  </a:tcPr>
+                </a:tc>
+                <a:tc>
+                  <a:txBody>
+                    <a:bodyPr lIns="45720" rIns="45720" tIns="18288" bIns="18288" wrap="square" anchor="ctr"/>
+                    <a:lstStyle/>
+                    <a:p>
+                      <a:pPr algn="ctr"/>
+                      <a:r>
+                        <a:rPr sz="900">
+                          <a:solidFill>
+                            <a:srgbClr val="101010"/>
+                          </a:solidFill>
+                          <a:latin typeface="Calibri"/>
+                        </a:rPr>
+                        <a:t>$350</a:t>
+                      </a:r>
+                    </a:p>
+                  </a:txBody>
+                  <a:tcPr>
+                    <a:solidFill>
+                      <a:srgbClr val="FFFFFF"/>
+                    </a:solidFill>
+                  </a:tcPr>
+                </a:tc>
+                <a:tc>
+                  <a:txBody>
+                    <a:bodyPr lIns="45720" rIns="45720" tIns="18288" bIns="18288" wrap="square" anchor="ctr"/>
+                    <a:lstStyle/>
+                    <a:p>
+                      <a:pPr algn="ctr"/>
+                      <a:r>
+                        <a:rPr sz="900">
+                          <a:solidFill>
+                            <a:srgbClr val="101010"/>
+                          </a:solidFill>
+                          <a:latin typeface="Calibri"/>
+                        </a:rPr>
+                        <a:t>+$350</a:t>
+                      </a:r>
+                    </a:p>
+                  </a:txBody>
+                  <a:tcPr>
+                    <a:solidFill>
+                      <a:srgbClr val="FFFFFF"/>
+                    </a:solidFill>
+                  </a:tcPr>
+                </a:tc>
+              </a:tr>
+              <a:tr h="256032">
+                <a:tc>
+                  <a:txBody>
+                    <a:bodyPr lIns="45720" rIns="45720" tIns="18288" bIns="18288" wrap="square" anchor="ctr"/>
+                    <a:lstStyle/>
+                    <a:p>
+                      <a:pPr algn="ctr"/>
+                      <a:r>
+                        <a:rPr sz="900" b="1">
+                          <a:solidFill>
+                            <a:srgbClr val="101010"/>
+                          </a:solidFill>
+                          <a:latin typeface="Calibri"/>
+                        </a:rPr>
+                        <a:t>Melissa Apr</a:t>
+                      </a:r>
+                    </a:p>
+                  </a:txBody>
+                  <a:tcPr>
+                    <a:solidFill>
+                      <a:srgbClr val="F2F2F2"/>
+                    </a:solidFill>
+                  </a:tcPr>
+                </a:tc>
+                <a:tc>
+                  <a:txBody>
+                    <a:bodyPr lIns="45720" rIns="45720" tIns="18288" bIns="18288" wrap="square" anchor="ctr"/>
+                    <a:lstStyle/>
+                    <a:p>
+                      <a:pPr algn="ctr"/>
+                      <a:r>
+                        <a:rPr sz="900">
+                          <a:solidFill>
+                            <a:srgbClr val="101010"/>
+                          </a:solidFill>
+                          <a:latin typeface="Calibri"/>
+                        </a:rPr>
+                        <a:t>$0</a:t>
+                      </a:r>
+                    </a:p>
+                  </a:txBody>
+                  <a:tcPr>
+                    <a:solidFill>
+                      <a:srgbClr val="F2F2F2"/>
+                    </a:solidFill>
+                  </a:tcPr>
+                </a:tc>
+                <a:tc>
+                  <a:txBody>
+                    <a:bodyPr lIns="45720" rIns="45720" tIns="18288" bIns="18288" wrap="square" anchor="ctr"/>
+                    <a:lstStyle/>
+                    <a:p>
+                      <a:pPr algn="ctr"/>
+                      <a:r>
+                        <a:rPr sz="900">
+                          <a:solidFill>
+                            <a:srgbClr val="101010"/>
+                          </a:solidFill>
+                          <a:latin typeface="Calibri"/>
+                        </a:rPr>
+                        <a:t>$350</a:t>
+                      </a:r>
+                    </a:p>
+                  </a:txBody>
+                  <a:tcPr>
+                    <a:solidFill>
+                      <a:srgbClr val="F2F2F2"/>
+                    </a:solidFill>
+                  </a:tcPr>
+                </a:tc>
+                <a:tc>
+                  <a:txBody>
+                    <a:bodyPr lIns="45720" rIns="45720" tIns="18288" bIns="18288" wrap="square" anchor="ctr"/>
+                    <a:lstStyle/>
+                    <a:p>
+                      <a:pPr algn="ctr"/>
+                      <a:r>
+                        <a:rPr sz="900">
+                          <a:solidFill>
+                            <a:srgbClr val="101010"/>
+                          </a:solidFill>
+                          <a:latin typeface="Calibri"/>
+                        </a:rPr>
+                        <a:t>+$350</a:t>
+                      </a:r>
+                    </a:p>
+                  </a:txBody>
+                  <a:tcPr>
+                    <a:solidFill>
+                      <a:srgbClr val="F2F2F2"/>
+                    </a:solidFill>
+                  </a:tcPr>
+                </a:tc>
+              </a:tr>
+              <a:tr h="256032">
+                <a:tc>
+                  <a:txBody>
+                    <a:bodyPr lIns="45720" rIns="45720" tIns="18288" bIns="18288" wrap="square" anchor="ctr"/>
+                    <a:lstStyle/>
+                    <a:p>
+                      <a:pPr algn="ctr"/>
+                      <a:r>
+                        <a:rPr sz="900" b="1">
+                          <a:solidFill>
+                            <a:srgbClr val="101010"/>
+                          </a:solidFill>
+                          <a:latin typeface="Calibri"/>
+                        </a:rPr>
+                        <a:t>Flavia Feb</a:t>
+                      </a:r>
+                    </a:p>
+                  </a:txBody>
+                  <a:tcPr>
+                    <a:solidFill>
+                      <a:srgbClr val="FFFFFF"/>
+                    </a:solidFill>
+                  </a:tcPr>
+                </a:tc>
+                <a:tc>
+                  <a:txBody>
+                    <a:bodyPr lIns="45720" rIns="45720" tIns="18288" bIns="18288" wrap="square" anchor="ctr"/>
+                    <a:lstStyle/>
+                    <a:p>
+                      <a:pPr algn="ctr"/>
+                      <a:r>
+                        <a:rPr sz="900">
+                          <a:solidFill>
+                            <a:srgbClr val="101010"/>
+                          </a:solidFill>
+                          <a:latin typeface="Calibri"/>
+                        </a:rPr>
+                        <a:t>$0</a:t>
+                      </a:r>
+                    </a:p>
+                  </a:txBody>
+                  <a:tcPr>
+                    <a:solidFill>
+                      <a:srgbClr val="FFFFFF"/>
+                    </a:solidFill>
+                  </a:tcPr>
+                </a:tc>
+                <a:tc>
+                  <a:txBody>
+                    <a:bodyPr lIns="45720" rIns="45720" tIns="18288" bIns="18288" wrap="square" anchor="ctr"/>
+                    <a:lstStyle/>
+                    <a:p>
+                      <a:pPr algn="ctr"/>
+                      <a:r>
+                        <a:rPr sz="900">
+                          <a:solidFill>
+                            <a:srgbClr val="101010"/>
+                          </a:solidFill>
+                          <a:latin typeface="Calibri"/>
+                        </a:rPr>
+                        <a:t>$350</a:t>
+                      </a:r>
+                    </a:p>
+                  </a:txBody>
+                  <a:tcPr>
+                    <a:solidFill>
+                      <a:srgbClr val="FFFFFF"/>
+                    </a:solidFill>
+                  </a:tcPr>
+                </a:tc>
+                <a:tc>
+                  <a:txBody>
+                    <a:bodyPr lIns="45720" rIns="45720" tIns="18288" bIns="18288" wrap="square" anchor="ctr"/>
+                    <a:lstStyle/>
+                    <a:p>
+                      <a:pPr algn="ctr"/>
+                      <a:r>
+                        <a:rPr sz="900">
+                          <a:solidFill>
+                            <a:srgbClr val="101010"/>
+                          </a:solidFill>
+                          <a:latin typeface="Calibri"/>
+                        </a:rPr>
+                        <a:t>+$350</a:t>
+                      </a:r>
+                    </a:p>
+                  </a:txBody>
+                  <a:tcPr>
+                    <a:solidFill>
+                      <a:srgbClr val="FFFFFF"/>
+                    </a:solidFill>
+                  </a:tcPr>
+                </a:tc>
+              </a:tr>
+              <a:tr h="256032">
+                <a:tc>
+                  <a:txBody>
+                    <a:bodyPr lIns="45720" rIns="45720" tIns="18288" bIns="18288" wrap="square" anchor="ctr"/>
+                    <a:lstStyle/>
+                    <a:p>
+                      <a:pPr algn="ctr"/>
+                      <a:r>
+                        <a:rPr sz="900" b="1">
+                          <a:solidFill>
+                            <a:srgbClr val="101010"/>
+                          </a:solidFill>
+                          <a:latin typeface="Calibri"/>
+                        </a:rPr>
+                        <a:t>Monica Jan</a:t>
+                      </a:r>
+                    </a:p>
+                  </a:txBody>
+                  <a:tcPr>
+                    <a:solidFill>
+                      <a:srgbClr val="F2F2F2"/>
+                    </a:solidFill>
+                  </a:tcPr>
+                </a:tc>
+                <a:tc>
+                  <a:txBody>
+                    <a:bodyPr lIns="45720" rIns="45720" tIns="18288" bIns="18288" wrap="square" anchor="ctr"/>
+                    <a:lstStyle/>
+                    <a:p>
+                      <a:pPr algn="ctr"/>
+                      <a:r>
+                        <a:rPr sz="900">
+                          <a:solidFill>
+                            <a:srgbClr val="101010"/>
+                          </a:solidFill>
+                          <a:latin typeface="Calibri"/>
+                        </a:rPr>
+                        <a:t>$0</a:t>
+                      </a:r>
+                    </a:p>
+                  </a:txBody>
+                  <a:tcPr>
+                    <a:solidFill>
+                      <a:srgbClr val="F2F2F2"/>
+                    </a:solidFill>
+                  </a:tcPr>
+                </a:tc>
+                <a:tc>
+                  <a:txBody>
+                    <a:bodyPr lIns="45720" rIns="45720" tIns="18288" bIns="18288" wrap="square" anchor="ctr"/>
+                    <a:lstStyle/>
+                    <a:p>
+                      <a:pPr algn="ctr"/>
+                      <a:r>
+                        <a:rPr sz="900">
+                          <a:solidFill>
+                            <a:srgbClr val="101010"/>
+                          </a:solidFill>
+                          <a:latin typeface="Calibri"/>
+                        </a:rPr>
+                        <a:t>$350</a:t>
+                      </a:r>
+                    </a:p>
+                  </a:txBody>
+                  <a:tcPr>
+                    <a:solidFill>
+                      <a:srgbClr val="F2F2F2"/>
+                    </a:solidFill>
+                  </a:tcPr>
+                </a:tc>
+                <a:tc>
+                  <a:txBody>
+                    <a:bodyPr lIns="45720" rIns="45720" tIns="18288" bIns="18288" wrap="square" anchor="ctr"/>
+                    <a:lstStyle/>
+                    <a:p>
+                      <a:pPr algn="ctr"/>
+                      <a:r>
+                        <a:rPr sz="900">
+                          <a:solidFill>
+                            <a:srgbClr val="101010"/>
+                          </a:solidFill>
+                          <a:latin typeface="Calibri"/>
+                        </a:rPr>
+                        <a:t>+$350</a:t>
+                      </a:r>
+                    </a:p>
+                  </a:txBody>
+                  <a:tcPr>
+                    <a:solidFill>
+                      <a:srgbClr val="F2F2F2"/>
+                    </a:solidFill>
+                  </a:tcPr>
+                </a:tc>
+              </a:tr>
+              <a:tr h="256032">
+                <a:tc>
+                  <a:txBody>
+                    <a:bodyPr lIns="45720" rIns="45720" tIns="18288" bIns="18288" wrap="square" anchor="ctr"/>
+                    <a:lstStyle/>
+                    <a:p>
+                      <a:pPr algn="ctr"/>
+                      <a:r>
+                        <a:rPr sz="900" b="1">
+                          <a:solidFill>
+                            <a:srgbClr val="101010"/>
+                          </a:solidFill>
+                          <a:latin typeface="Calibri"/>
+                        </a:rPr>
+                        <a:t>Monica Feb</a:t>
+                      </a:r>
+                    </a:p>
+                  </a:txBody>
+                  <a:tcPr>
+                    <a:solidFill>
+                      <a:srgbClr val="FFFFFF"/>
+                    </a:solidFill>
+                  </a:tcPr>
+                </a:tc>
+                <a:tc>
+                  <a:txBody>
+                    <a:bodyPr lIns="45720" rIns="45720" tIns="18288" bIns="18288" wrap="square" anchor="ctr"/>
+                    <a:lstStyle/>
+                    <a:p>
+                      <a:pPr algn="ctr"/>
+                      <a:r>
+                        <a:rPr sz="900">
+                          <a:solidFill>
+                            <a:srgbClr val="101010"/>
+                          </a:solidFill>
+                          <a:latin typeface="Calibri"/>
+                        </a:rPr>
+                        <a:t>$0</a:t>
+                      </a:r>
+                    </a:p>
+                  </a:txBody>
+                  <a:tcPr>
+                    <a:solidFill>
+                      <a:srgbClr val="FFFFFF"/>
+                    </a:solidFill>
+                  </a:tcPr>
+                </a:tc>
+                <a:tc>
+                  <a:txBody>
+                    <a:bodyPr lIns="45720" rIns="45720" tIns="18288" bIns="18288" wrap="square" anchor="ctr"/>
+                    <a:lstStyle/>
+                    <a:p>
+                      <a:pPr algn="ctr"/>
+                      <a:r>
+                        <a:rPr sz="900">
+                          <a:solidFill>
+                            <a:srgbClr val="101010"/>
+                          </a:solidFill>
+                          <a:latin typeface="Calibri"/>
+                        </a:rPr>
+                        <a:t>$350</a:t>
+                      </a:r>
+                    </a:p>
+                  </a:txBody>
+                  <a:tcPr>
+                    <a:solidFill>
+                      <a:srgbClr val="FFFFFF"/>
+                    </a:solidFill>
+                  </a:tcPr>
+                </a:tc>
+                <a:tc>
+                  <a:txBody>
+                    <a:bodyPr lIns="45720" rIns="45720" tIns="18288" bIns="18288" wrap="square" anchor="ctr"/>
+                    <a:lstStyle/>
+                    <a:p>
+                      <a:pPr algn="ctr"/>
+                      <a:r>
+                        <a:rPr sz="900">
+                          <a:solidFill>
+                            <a:srgbClr val="101010"/>
+                          </a:solidFill>
+                          <a:latin typeface="Calibri"/>
+                        </a:rPr>
+                        <a:t>+$350</a:t>
+                      </a:r>
+                    </a:p>
+                  </a:txBody>
+                  <a:tcPr>
+                    <a:solidFill>
+                      <a:srgbClr val="FFFFFF"/>
+                    </a:solidFill>
+                  </a:tcPr>
+                </a:tc>
+              </a:tr>
+              <a:tr h="256032">
+                <a:tc>
+                  <a:txBody>
+                    <a:bodyPr lIns="45720" rIns="45720" tIns="18288" bIns="18288" wrap="square" anchor="ctr"/>
+                    <a:lstStyle/>
+                    <a:p>
+                      <a:pPr algn="ctr"/>
+                      <a:r>
+                        <a:rPr sz="900" b="1">
+                          <a:solidFill>
+                            <a:srgbClr val="101010"/>
+                          </a:solidFill>
+                          <a:latin typeface="Calibri"/>
+                        </a:rPr>
+                        <a:t>Dialinerys Feb</a:t>
+                      </a:r>
+                    </a:p>
+                  </a:txBody>
+                  <a:tcPr>
+                    <a:solidFill>
+                      <a:srgbClr val="F2F2F2"/>
+                    </a:solidFill>
+                  </a:tcPr>
+                </a:tc>
+                <a:tc>
+                  <a:txBody>
+                    <a:bodyPr lIns="45720" rIns="45720" tIns="18288" bIns="18288" wrap="square" anchor="ctr"/>
+                    <a:lstStyle/>
+                    <a:p>
+                      <a:pPr algn="ctr"/>
+                      <a:r>
+                        <a:rPr sz="900">
+                          <a:solidFill>
+                            <a:srgbClr val="101010"/>
+                          </a:solidFill>
+                          <a:latin typeface="Calibri"/>
+                        </a:rPr>
+                        <a:t>$250</a:t>
+                      </a:r>
+                    </a:p>
+                  </a:txBody>
+                  <a:tcPr>
+                    <a:solidFill>
+                      <a:srgbClr val="F2F2F2"/>
+                    </a:solidFill>
+                  </a:tcPr>
+                </a:tc>
+                <a:tc>
+                  <a:txBody>
+                    <a:bodyPr lIns="45720" rIns="45720" tIns="18288" bIns="18288" wrap="square" anchor="ctr"/>
+                    <a:lstStyle/>
+                    <a:p>
+                      <a:pPr algn="ctr"/>
+                      <a:r>
+                        <a:rPr sz="900">
+                          <a:solidFill>
+                            <a:srgbClr val="101010"/>
+                          </a:solidFill>
+                          <a:latin typeface="Calibri"/>
+                        </a:rPr>
+                        <a:t>$550</a:t>
+                      </a:r>
+                    </a:p>
+                  </a:txBody>
+                  <a:tcPr>
+                    <a:solidFill>
+                      <a:srgbClr val="F2F2F2"/>
+                    </a:solidFill>
+                  </a:tcPr>
+                </a:tc>
+                <a:tc>
+                  <a:txBody>
+                    <a:bodyPr lIns="45720" rIns="45720" tIns="18288" bIns="18288" wrap="square" anchor="ctr"/>
+                    <a:lstStyle/>
+                    <a:p>
+                      <a:pPr algn="ctr"/>
+                      <a:r>
+                        <a:rPr sz="900">
+                          <a:solidFill>
+                            <a:srgbClr val="101010"/>
+                          </a:solidFill>
+                          <a:latin typeface="Calibri"/>
+                        </a:rPr>
+                        <a:t>+$300</a:t>
+                      </a:r>
+                    </a:p>
+                  </a:txBody>
+                  <a:tcPr>
+                    <a:solidFill>
+                      <a:srgbClr val="F2F2F2"/>
+                    </a:solidFill>
+                  </a:tcPr>
+                </a:tc>
+              </a:tr>
+              <a:tr h="256032">
+                <a:tc>
+                  <a:txBody>
+                    <a:bodyPr lIns="45720" rIns="45720" tIns="18288" bIns="18288" wrap="square" anchor="ctr"/>
+                    <a:lstStyle/>
+                    <a:p>
+                      <a:pPr algn="ctr"/>
+                      <a:r>
+                        <a:rPr sz="900" b="1">
+                          <a:solidFill>
+                            <a:srgbClr val="101010"/>
+                          </a:solidFill>
+                          <a:latin typeface="Calibri"/>
+                        </a:rPr>
+                        <a:t>Monica Mar</a:t>
+                      </a:r>
+                    </a:p>
+                  </a:txBody>
+                  <a:tcPr>
+                    <a:solidFill>
+                      <a:srgbClr val="FFFFFF"/>
+                    </a:solidFill>
+                  </a:tcPr>
+                </a:tc>
+                <a:tc>
+                  <a:txBody>
+                    <a:bodyPr lIns="45720" rIns="45720" tIns="18288" bIns="18288" wrap="square" anchor="ctr"/>
+                    <a:lstStyle/>
+                    <a:p>
+                      <a:pPr algn="ctr"/>
+                      <a:r>
+                        <a:rPr sz="900">
+                          <a:solidFill>
+                            <a:srgbClr val="101010"/>
+                          </a:solidFill>
+                          <a:latin typeface="Calibri"/>
+                        </a:rPr>
+                        <a:t>$350</a:t>
+                      </a:r>
+                    </a:p>
+                  </a:txBody>
+                  <a:tcPr>
+                    <a:solidFill>
+                      <a:srgbClr val="FFFFFF"/>
+                    </a:solidFill>
+                  </a:tcPr>
+                </a:tc>
+                <a:tc>
+                  <a:txBody>
+                    <a:bodyPr lIns="45720" rIns="45720" tIns="18288" bIns="18288" wrap="square" anchor="ctr"/>
+                    <a:lstStyle/>
+                    <a:p>
+                      <a:pPr algn="ctr"/>
+                      <a:r>
+                        <a:rPr sz="900">
+                          <a:solidFill>
+                            <a:srgbClr val="101010"/>
+                          </a:solidFill>
+                          <a:latin typeface="Calibri"/>
+                        </a:rPr>
+                        <a:t>$625</a:t>
+                      </a:r>
+                    </a:p>
+                  </a:txBody>
+                  <a:tcPr>
+                    <a:solidFill>
+                      <a:srgbClr val="FFFFFF"/>
+                    </a:solidFill>
+                  </a:tcPr>
+                </a:tc>
+                <a:tc>
+                  <a:txBody>
+                    <a:bodyPr lIns="45720" rIns="45720" tIns="18288" bIns="18288" wrap="square" anchor="ctr"/>
+                    <a:lstStyle/>
+                    <a:p>
+                      <a:pPr algn="ctr"/>
+                      <a:r>
+                        <a:rPr sz="900">
+                          <a:solidFill>
+                            <a:srgbClr val="101010"/>
+                          </a:solidFill>
+                          <a:latin typeface="Calibri"/>
+                        </a:rPr>
+                        <a:t>+$275</a:t>
+                      </a:r>
+                    </a:p>
+                  </a:txBody>
+                  <a:tcPr>
+                    <a:solidFill>
+                      <a:srgbClr val="FFFFFF"/>
+                    </a:solidFill>
+                  </a:tcPr>
+                </a:tc>
+              </a:tr>
+              <a:tr h="256032">
+                <a:tc>
+                  <a:txBody>
+                    <a:bodyPr lIns="45720" rIns="45720" tIns="18288" bIns="18288" wrap="square" anchor="ctr"/>
+                    <a:lstStyle/>
+                    <a:p>
+                      <a:pPr algn="ctr"/>
+                      <a:r>
+                        <a:rPr sz="900" b="1">
+                          <a:solidFill>
+                            <a:srgbClr val="101010"/>
+                          </a:solidFill>
+                          <a:latin typeface="Calibri"/>
+                        </a:rPr>
+                        <a:t>Abel Feb</a:t>
+                      </a:r>
+                    </a:p>
+                  </a:txBody>
+                  <a:tcPr>
+                    <a:solidFill>
+                      <a:srgbClr val="F2F2F2"/>
+                    </a:solidFill>
+                  </a:tcPr>
+                </a:tc>
+                <a:tc>
+                  <a:txBody>
+                    <a:bodyPr lIns="45720" rIns="45720" tIns="18288" bIns="18288" wrap="square" anchor="ctr"/>
+                    <a:lstStyle/>
+                    <a:p>
+                      <a:pPr algn="ctr"/>
+                      <a:r>
+                        <a:rPr sz="900">
+                          <a:solidFill>
+                            <a:srgbClr val="101010"/>
+                          </a:solidFill>
+                          <a:latin typeface="Calibri"/>
+                        </a:rPr>
+                        <a:t>$0</a:t>
+                      </a:r>
+                    </a:p>
+                  </a:txBody>
+                  <a:tcPr>
+                    <a:solidFill>
+                      <a:srgbClr val="F2F2F2"/>
+                    </a:solidFill>
+                  </a:tcPr>
+                </a:tc>
+                <a:tc>
+                  <a:txBody>
+                    <a:bodyPr lIns="45720" rIns="45720" tIns="18288" bIns="18288" wrap="square" anchor="ctr"/>
+                    <a:lstStyle/>
+                    <a:p>
+                      <a:pPr algn="ctr"/>
+                      <a:r>
+                        <a:rPr sz="900">
+                          <a:solidFill>
+                            <a:srgbClr val="101010"/>
+                          </a:solidFill>
+                          <a:latin typeface="Calibri"/>
+                        </a:rPr>
+                        <a:t>$250</a:t>
+                      </a:r>
+                    </a:p>
+                  </a:txBody>
+                  <a:tcPr>
+                    <a:solidFill>
+                      <a:srgbClr val="F2F2F2"/>
+                    </a:solidFill>
+                  </a:tcPr>
+                </a:tc>
+                <a:tc>
+                  <a:txBody>
+                    <a:bodyPr lIns="45720" rIns="45720" tIns="18288" bIns="18288" wrap="square" anchor="ctr"/>
+                    <a:lstStyle/>
+                    <a:p>
+                      <a:pPr algn="ctr"/>
+                      <a:r>
+                        <a:rPr sz="900">
+                          <a:solidFill>
+                            <a:srgbClr val="101010"/>
+                          </a:solidFill>
+                          <a:latin typeface="Calibri"/>
+                        </a:rPr>
+                        <a:t>+$250</a:t>
+                      </a:r>
+                    </a:p>
+                  </a:txBody>
+                  <a:tcPr>
+                    <a:solidFill>
+                      <a:srgbClr val="F2F2F2"/>
+                    </a:solidFill>
+                  </a:tcPr>
+                </a:tc>
+              </a:tr>
+              <a:tr h="256032">
+                <a:tc>
+                  <a:txBody>
+                    <a:bodyPr lIns="45720" rIns="45720" tIns="18288" bIns="18288" wrap="square" anchor="ctr"/>
+                    <a:lstStyle/>
+                    <a:p>
+                      <a:pPr algn="ctr"/>
+                      <a:r>
+                        <a:rPr sz="900" b="1">
+                          <a:solidFill>
+                            <a:srgbClr val="101010"/>
+                          </a:solidFill>
+                          <a:latin typeface="Calibri"/>
+                        </a:rPr>
+                        <a:t>4-mo total (all agents)</a:t>
+                      </a:r>
+                    </a:p>
+                  </a:txBody>
+                  <a:tcPr>
+                    <a:solidFill>
+                      <a:srgbClr val="FFFFFF"/>
+                    </a:solidFill>
+                  </a:tcPr>
+                </a:tc>
+                <a:tc>
+                  <a:txBody>
+                    <a:bodyPr lIns="45720" rIns="45720" tIns="18288" bIns="18288" wrap="square" anchor="ctr"/>
+                    <a:lstStyle/>
+                    <a:p>
+                      <a:pPr algn="ctr"/>
+                      <a:r>
+                        <a:rPr sz="900">
+                          <a:solidFill>
+                            <a:srgbClr val="101010"/>
+                          </a:solidFill>
+                          <a:latin typeface="Calibri"/>
+                        </a:rPr>
+                        <a:t>$2,750</a:t>
+                      </a:r>
+                    </a:p>
+                  </a:txBody>
+                  <a:tcPr>
+                    <a:solidFill>
+                      <a:srgbClr val="FFFFFF"/>
+                    </a:solidFill>
+                  </a:tcPr>
+                </a:tc>
+                <a:tc>
+                  <a:txBody>
+                    <a:bodyPr lIns="45720" rIns="45720" tIns="18288" bIns="18288" wrap="square" anchor="ctr"/>
+                    <a:lstStyle/>
+                    <a:p>
+                      <a:pPr algn="ctr"/>
+                      <a:r>
+                        <a:rPr sz="900">
+                          <a:solidFill>
+                            <a:srgbClr val="101010"/>
+                          </a:solidFill>
+                          <a:latin typeface="Calibri"/>
+                        </a:rPr>
+                        <a:t>$7,975</a:t>
+                      </a:r>
+                    </a:p>
+                  </a:txBody>
+                  <a:tcPr>
+                    <a:solidFill>
+                      <a:srgbClr val="FFFFFF"/>
+                    </a:solidFill>
+                  </a:tcPr>
+                </a:tc>
+                <a:tc>
+                  <a:txBody>
+                    <a:bodyPr lIns="45720" rIns="45720" tIns="18288" bIns="18288" wrap="square" anchor="ctr"/>
+                    <a:lstStyle/>
+                    <a:p>
+                      <a:pPr algn="ctr"/>
+                      <a:r>
+                        <a:rPr sz="900">
+                          <a:solidFill>
+                            <a:srgbClr val="101010"/>
+                          </a:solidFill>
+                          <a:latin typeface="Calibri"/>
+                        </a:rPr>
+                        <a:t>+$5,225</a:t>
+                      </a:r>
+                    </a:p>
+                  </a:txBody>
+                  <a:tcPr>
+                    <a:solidFill>
+                      <a:srgbClr val="FFFFFF"/>
+                    </a:solidFill>
+                  </a:tcPr>
+                </a:tc>
+              </a:tr>
+            </a:tbl>
+          </a:graphicData>
+        </a:graphic>
+      </p:graphicFrame>
+    </p:spTree>
+  </p:cSld>
+  <p:clrMapOvr>
+    <a:masterClrMapping/>
+  </p:clrMapOvr>
+</p:sld>
+</file>
+
+<file path=ppt/slides/slide12.xml><?xml version="1.0" encoding="utf-8"?>
 <p:sld xmlns:a="http://schemas.openxmlformats.org/drawingml/2006/main" xmlns:p="http://schemas.openxmlformats.org/presentationml/2006/main" xmlns:r="http://schemas.openxmlformats.org/officeDocument/2006/relationships">
   <p:cSld>
     <p:spTree>
@@ -8434,7 +12407,7 @@
                 </a:solidFill>
                 <a:latin typeface="Calibri"/>
               </a:rPr>
-              <a:t>11 / 13</a:t>
+              <a:t>12 / 14</a:t>
             </a:r>
           </a:p>
         </p:txBody>
@@ -9072,7 +13045,7 @@
 </p:sld>
 </file>
 
-<file path=ppt/slides/slide12.xml><?xml version="1.0" encoding="utf-8"?>
+<file path=ppt/slides/slide13.xml><?xml version="1.0" encoding="utf-8"?>
 <p:sld xmlns:a="http://schemas.openxmlformats.org/drawingml/2006/main" xmlns:p="http://schemas.openxmlformats.org/presentationml/2006/main" xmlns:r="http://schemas.openxmlformats.org/officeDocument/2006/relationships">
   <p:cSld>
     <p:spTree>
@@ -9317,7 +13290,7 @@
                 </a:solidFill>
                 <a:latin typeface="Calibri"/>
               </a:rPr>
-              <a:t>12 / 13</a:t>
+              <a:t>13 / 14</a:t>
             </a:r>
           </a:p>
         </p:txBody>
@@ -9698,7 +13671,7 @@
 </p:sld>
 </file>
 
-<file path=ppt/slides/slide13.xml><?xml version="1.0" encoding="utf-8"?>
+<file path=ppt/slides/slide14.xml><?xml version="1.0" encoding="utf-8"?>
 <p:sld xmlns:a="http://schemas.openxmlformats.org/drawingml/2006/main" xmlns:p="http://schemas.openxmlformats.org/presentationml/2006/main" xmlns:r="http://schemas.openxmlformats.org/officeDocument/2006/relationships">
   <p:cSld>
     <p:spTree>
@@ -10239,7 +14212,7 @@
                 </a:solidFill>
                 <a:latin typeface="Calibri"/>
               </a:rPr>
-              <a:t>2 / 13</a:t>
+              <a:t>2 / 14</a:t>
             </a:r>
           </a:p>
         </p:txBody>
@@ -10785,7 +14758,7 @@
                 </a:solidFill>
                 <a:latin typeface="Calibri"/>
               </a:rPr>
-              <a:t>3 / 13</a:t>
+              <a:t>3 / 14</a:t>
             </a:r>
           </a:p>
         </p:txBody>
@@ -13074,7 +17047,7 @@
                 </a:solidFill>
                 <a:latin typeface="Calibri"/>
               </a:rPr>
-              <a:t>4 / 13</a:t>
+              <a:t>4 / 14</a:t>
             </a:r>
           </a:p>
         </p:txBody>
@@ -14000,7 +17973,7 @@
                 </a:solidFill>
                 <a:latin typeface="Calibri"/>
               </a:rPr>
-              <a:t>5 / 13</a:t>
+              <a:t>5 / 14</a:t>
             </a:r>
           </a:p>
         </p:txBody>
@@ -15074,7 +19047,7 @@
                 </a:solidFill>
                 <a:latin typeface="Calibri"/>
               </a:rPr>
-              <a:t>6 / 13</a:t>
+              <a:t>6 / 14</a:t>
             </a:r>
           </a:p>
         </p:txBody>
@@ -17306,7 +21279,7 @@
                 </a:solidFill>
                 <a:latin typeface="Calibri"/>
               </a:rPr>
-              <a:t>7 / 13</a:t>
+              <a:t>7 / 14</a:t>
             </a:r>
           </a:p>
         </p:txBody>
@@ -20660,7 +24633,7 @@
                 </a:solidFill>
                 <a:latin typeface="Calibri"/>
               </a:rPr>
-              <a:t>8 / 13</a:t>
+              <a:t>8 / 14</a:t>
             </a:r>
           </a:p>
         </p:txBody>
@@ -24014,7 +27987,7 @@
                 </a:solidFill>
                 <a:latin typeface="Calibri"/>
               </a:rPr>
-              <a:t>9 / 13</a:t>
+              <a:t>9 / 14</a:t>
             </a:r>
           </a:p>
         </p:txBody>

--- a/output/Bonus_Plan_SIMPLE.pptx
+++ b/output/Bonus_Plan_SIMPLE.pptx
@@ -8315,7 +8315,7 @@
                 </a:solidFill>
                 <a:latin typeface="Calibri"/>
               </a:rPr>
-              <a:t>CURRENT = today's count-tier on NB+RWR. NEW = tier-bonus (NB + RWR + REN). Sorted by delta. Top 10 per scenario.</a:t>
+              <a:t>CURRENT = count-tier on NB+RWR. NEW = NB tier + RWR tier + REN tier + retention kicker. Sorted by delta. # = policy count, $ = written premium.</a:t>
             </a:r>
           </a:p>
         </p:txBody>
@@ -8532,7 +8532,7 @@
         </p:nvGraphicFramePr>
         <p:xfrm>
           <a:off x="274320" y="1417320"/>
-          <a:ext cx="3703320" cy="3072384"/>
+          <a:ext cx="4389120" cy="3017520"/>
         </p:xfrm>
         <a:graphic>
           <a:graphicData uri="http://schemas.openxmlformats.org/drawingml/2006/table">
@@ -8541,20 +8541,23 @@
                 <a:tableStyleId>{5C22544A-7EE6-4342-B048-85BDC9FD1C3A}</a:tableStyleId>
               </a:tblPr>
               <a:tblGrid>
-                <a:gridCol w="1280160"/>
-                <a:gridCol w="777240"/>
-                <a:gridCol w="777240"/>
                 <a:gridCol w="868680"/>
+                <a:gridCol w="640080"/>
+                <a:gridCol w="640080"/>
+                <a:gridCol w="640080"/>
+                <a:gridCol w="502920"/>
+                <a:gridCol w="502920"/>
+                <a:gridCol w="594360"/>
               </a:tblGrid>
-              <a:tr h="256032">
-                <a:tc>
-                  <a:txBody>
-                    <a:bodyPr lIns="45720" rIns="45720" tIns="18288" bIns="18288" wrap="square" anchor="ctr"/>
-                    <a:lstStyle/>
-                    <a:p>
-                      <a:pPr algn="ctr"/>
-                      <a:r>
-                        <a:rPr sz="900" b="1">
+              <a:tr h="274320">
+                <a:tc>
+                  <a:txBody>
+                    <a:bodyPr lIns="45720" rIns="45720" tIns="18288" bIns="18288" wrap="square" anchor="ctr"/>
+                    <a:lstStyle/>
+                    <a:p>
+                      <a:pPr algn="ctr"/>
+                      <a:r>
+                        <a:rPr sz="800" b="1">
                           <a:solidFill>
                             <a:srgbClr val="FFFFFF"/>
                           </a:solidFill>
@@ -8577,12 +8580,81 @@
                     <a:p>
                       <a:pPr algn="ctr"/>
                       <a:r>
-                        <a:rPr sz="900" b="1">
+                        <a:rPr sz="800" b="1">
                           <a:solidFill>
                             <a:srgbClr val="FFFFFF"/>
                           </a:solidFill>
                           <a:latin typeface="Calibri"/>
                         </a:rPr>
+                        <a:t>NB # / $</a:t>
+                      </a:r>
+                    </a:p>
+                  </a:txBody>
+                  <a:tcPr>
+                    <a:solidFill>
+                      <a:srgbClr val="1F4E78"/>
+                    </a:solidFill>
+                  </a:tcPr>
+                </a:tc>
+                <a:tc>
+                  <a:txBody>
+                    <a:bodyPr lIns="45720" rIns="45720" tIns="18288" bIns="18288" wrap="square" anchor="ctr"/>
+                    <a:lstStyle/>
+                    <a:p>
+                      <a:pPr algn="ctr"/>
+                      <a:r>
+                        <a:rPr sz="800" b="1">
+                          <a:solidFill>
+                            <a:srgbClr val="FFFFFF"/>
+                          </a:solidFill>
+                          <a:latin typeface="Calibri"/>
+                        </a:rPr>
+                        <a:t>RWR # / $</a:t>
+                      </a:r>
+                    </a:p>
+                  </a:txBody>
+                  <a:tcPr>
+                    <a:solidFill>
+                      <a:srgbClr val="1F4E78"/>
+                    </a:solidFill>
+                  </a:tcPr>
+                </a:tc>
+                <a:tc>
+                  <a:txBody>
+                    <a:bodyPr lIns="45720" rIns="45720" tIns="18288" bIns="18288" wrap="square" anchor="ctr"/>
+                    <a:lstStyle/>
+                    <a:p>
+                      <a:pPr algn="ctr"/>
+                      <a:r>
+                        <a:rPr sz="800" b="1">
+                          <a:solidFill>
+                            <a:srgbClr val="FFFFFF"/>
+                          </a:solidFill>
+                          <a:latin typeface="Calibri"/>
+                        </a:rPr>
+                        <a:t>REN # / $</a:t>
+                      </a:r>
+                    </a:p>
+                  </a:txBody>
+                  <a:tcPr>
+                    <a:solidFill>
+                      <a:srgbClr val="1F4E78"/>
+                    </a:solidFill>
+                  </a:tcPr>
+                </a:tc>
+                <a:tc>
+                  <a:txBody>
+                    <a:bodyPr lIns="45720" rIns="45720" tIns="18288" bIns="18288" wrap="square" anchor="ctr"/>
+                    <a:lstStyle/>
+                    <a:p>
+                      <a:pPr algn="ctr"/>
+                      <a:r>
+                        <a:rPr sz="800" b="1">
+                          <a:solidFill>
+                            <a:srgbClr val="FFFFFF"/>
+                          </a:solidFill>
+                          <a:latin typeface="Calibri"/>
+                        </a:rPr>
                         <a:t>Current</a:t>
                       </a:r>
                     </a:p>
@@ -8600,7 +8672,7 @@
                     <a:p>
                       <a:pPr algn="ctr"/>
                       <a:r>
-                        <a:rPr sz="900" b="1">
+                        <a:rPr sz="800" b="1">
                           <a:solidFill>
                             <a:srgbClr val="FFFFFF"/>
                           </a:solidFill>
@@ -8623,7 +8695,7 @@
                     <a:p>
                       <a:pPr algn="ctr"/>
                       <a:r>
-                        <a:rPr sz="900" b="1">
+                        <a:rPr sz="800" b="1">
                           <a:solidFill>
                             <a:srgbClr val="FFFFFF"/>
                           </a:solidFill>
@@ -8640,15 +8712,15 @@
                   </a:tcPr>
                 </a:tc>
               </a:tr>
-              <a:tr h="256032">
-                <a:tc>
-                  <a:txBody>
-                    <a:bodyPr lIns="45720" rIns="45720" tIns="18288" bIns="18288" wrap="square" anchor="ctr"/>
-                    <a:lstStyle/>
-                    <a:p>
-                      <a:pPr algn="ctr"/>
-                      <a:r>
-                        <a:rPr sz="900" b="1">
+              <a:tr h="274320">
+                <a:tc>
+                  <a:txBody>
+                    <a:bodyPr lIns="45720" rIns="45720" tIns="18288" bIns="18288" wrap="square" anchor="ctr"/>
+                    <a:lstStyle/>
+                    <a:p>
+                      <a:pPr algn="ctr"/>
+                      <a:r>
+                        <a:rPr sz="800" b="1">
                           <a:solidFill>
                             <a:srgbClr val="101010"/>
                           </a:solidFill>
@@ -8671,7 +8743,76 @@
                     <a:p>
                       <a:pPr algn="ctr"/>
                       <a:r>
-                        <a:rPr sz="900">
+                        <a:rPr sz="800">
+                          <a:solidFill>
+                            <a:srgbClr val="101010"/>
+                          </a:solidFill>
+                          <a:latin typeface="Calibri"/>
+                        </a:rPr>
+                        <a:t>30 / $47k</a:t>
+                      </a:r>
+                    </a:p>
+                  </a:txBody>
+                  <a:tcPr>
+                    <a:solidFill>
+                      <a:srgbClr val="FFFFFF"/>
+                    </a:solidFill>
+                  </a:tcPr>
+                </a:tc>
+                <a:tc>
+                  <a:txBody>
+                    <a:bodyPr lIns="45720" rIns="45720" tIns="18288" bIns="18288" wrap="square" anchor="ctr"/>
+                    <a:lstStyle/>
+                    <a:p>
+                      <a:pPr algn="ctr"/>
+                      <a:r>
+                        <a:rPr sz="800">
+                          <a:solidFill>
+                            <a:srgbClr val="101010"/>
+                          </a:solidFill>
+                          <a:latin typeface="Calibri"/>
+                        </a:rPr>
+                        <a:t>17 / $25k</a:t>
+                      </a:r>
+                    </a:p>
+                  </a:txBody>
+                  <a:tcPr>
+                    <a:solidFill>
+                      <a:srgbClr val="FFFFFF"/>
+                    </a:solidFill>
+                  </a:tcPr>
+                </a:tc>
+                <a:tc>
+                  <a:txBody>
+                    <a:bodyPr lIns="45720" rIns="45720" tIns="18288" bIns="18288" wrap="square" anchor="ctr"/>
+                    <a:lstStyle/>
+                    <a:p>
+                      <a:pPr algn="ctr"/>
+                      <a:r>
+                        <a:rPr sz="800">
+                          <a:solidFill>
+                            <a:srgbClr val="101010"/>
+                          </a:solidFill>
+                          <a:latin typeface="Calibri"/>
+                        </a:rPr>
+                        <a:t>5 / $4k</a:t>
+                      </a:r>
+                    </a:p>
+                  </a:txBody>
+                  <a:tcPr>
+                    <a:solidFill>
+                      <a:srgbClr val="FFFFFF"/>
+                    </a:solidFill>
+                  </a:tcPr>
+                </a:tc>
+                <a:tc>
+                  <a:txBody>
+                    <a:bodyPr lIns="45720" rIns="45720" tIns="18288" bIns="18288" wrap="square" anchor="ctr"/>
+                    <a:lstStyle/>
+                    <a:p>
+                      <a:pPr algn="ctr"/>
+                      <a:r>
+                        <a:rPr sz="800">
                           <a:solidFill>
                             <a:srgbClr val="101010"/>
                           </a:solidFill>
@@ -8694,7 +8835,7 @@
                     <a:p>
                       <a:pPr algn="ctr"/>
                       <a:r>
-                        <a:rPr sz="900">
+                        <a:rPr sz="800">
                           <a:solidFill>
                             <a:srgbClr val="101010"/>
                           </a:solidFill>
@@ -8717,7 +8858,7 @@
                     <a:p>
                       <a:pPr algn="ctr"/>
                       <a:r>
-                        <a:rPr sz="900">
+                        <a:rPr sz="800">
                           <a:solidFill>
                             <a:srgbClr val="101010"/>
                           </a:solidFill>
@@ -8734,15 +8875,15 @@
                   </a:tcPr>
                 </a:tc>
               </a:tr>
-              <a:tr h="256032">
-                <a:tc>
-                  <a:txBody>
-                    <a:bodyPr lIns="45720" rIns="45720" tIns="18288" bIns="18288" wrap="square" anchor="ctr"/>
-                    <a:lstStyle/>
-                    <a:p>
-                      <a:pPr algn="ctr"/>
-                      <a:r>
-                        <a:rPr sz="900" b="1">
+              <a:tr h="274320">
+                <a:tc>
+                  <a:txBody>
+                    <a:bodyPr lIns="45720" rIns="45720" tIns="18288" bIns="18288" wrap="square" anchor="ctr"/>
+                    <a:lstStyle/>
+                    <a:p>
+                      <a:pPr algn="ctr"/>
+                      <a:r>
+                        <a:rPr sz="800" b="1">
                           <a:solidFill>
                             <a:srgbClr val="101010"/>
                           </a:solidFill>
@@ -8765,7 +8906,76 @@
                     <a:p>
                       <a:pPr algn="ctr"/>
                       <a:r>
-                        <a:rPr sz="900">
+                        <a:rPr sz="800">
+                          <a:solidFill>
+                            <a:srgbClr val="101010"/>
+                          </a:solidFill>
+                          <a:latin typeface="Calibri"/>
+                        </a:rPr>
+                        <a:t>36 / $69k</a:t>
+                      </a:r>
+                    </a:p>
+                  </a:txBody>
+                  <a:tcPr>
+                    <a:solidFill>
+                      <a:srgbClr val="F2F2F2"/>
+                    </a:solidFill>
+                  </a:tcPr>
+                </a:tc>
+                <a:tc>
+                  <a:txBody>
+                    <a:bodyPr lIns="45720" rIns="45720" tIns="18288" bIns="18288" wrap="square" anchor="ctr"/>
+                    <a:lstStyle/>
+                    <a:p>
+                      <a:pPr algn="ctr"/>
+                      <a:r>
+                        <a:rPr sz="800">
+                          <a:solidFill>
+                            <a:srgbClr val="101010"/>
+                          </a:solidFill>
+                          <a:latin typeface="Calibri"/>
+                        </a:rPr>
+                        <a:t>28 / $39k</a:t>
+                      </a:r>
+                    </a:p>
+                  </a:txBody>
+                  <a:tcPr>
+                    <a:solidFill>
+                      <a:srgbClr val="F2F2F2"/>
+                    </a:solidFill>
+                  </a:tcPr>
+                </a:tc>
+                <a:tc>
+                  <a:txBody>
+                    <a:bodyPr lIns="45720" rIns="45720" tIns="18288" bIns="18288" wrap="square" anchor="ctr"/>
+                    <a:lstStyle/>
+                    <a:p>
+                      <a:pPr algn="ctr"/>
+                      <a:r>
+                        <a:rPr sz="800">
+                          <a:solidFill>
+                            <a:srgbClr val="101010"/>
+                          </a:solidFill>
+                          <a:latin typeface="Calibri"/>
+                        </a:rPr>
+                        <a:t>0 / $0k</a:t>
+                      </a:r>
+                    </a:p>
+                  </a:txBody>
+                  <a:tcPr>
+                    <a:solidFill>
+                      <a:srgbClr val="F2F2F2"/>
+                    </a:solidFill>
+                  </a:tcPr>
+                </a:tc>
+                <a:tc>
+                  <a:txBody>
+                    <a:bodyPr lIns="45720" rIns="45720" tIns="18288" bIns="18288" wrap="square" anchor="ctr"/>
+                    <a:lstStyle/>
+                    <a:p>
+                      <a:pPr algn="ctr"/>
+                      <a:r>
+                        <a:rPr sz="800">
                           <a:solidFill>
                             <a:srgbClr val="101010"/>
                           </a:solidFill>
@@ -8788,7 +8998,7 @@
                     <a:p>
                       <a:pPr algn="ctr"/>
                       <a:r>
-                        <a:rPr sz="900">
+                        <a:rPr sz="800">
                           <a:solidFill>
                             <a:srgbClr val="101010"/>
                           </a:solidFill>
@@ -8811,7 +9021,7 @@
                     <a:p>
                       <a:pPr algn="ctr"/>
                       <a:r>
-                        <a:rPr sz="900">
+                        <a:rPr sz="800">
                           <a:solidFill>
                             <a:srgbClr val="101010"/>
                           </a:solidFill>
@@ -8828,15 +9038,15 @@
                   </a:tcPr>
                 </a:tc>
               </a:tr>
-              <a:tr h="256032">
-                <a:tc>
-                  <a:txBody>
-                    <a:bodyPr lIns="45720" rIns="45720" tIns="18288" bIns="18288" wrap="square" anchor="ctr"/>
-                    <a:lstStyle/>
-                    <a:p>
-                      <a:pPr algn="ctr"/>
-                      <a:r>
-                        <a:rPr sz="900" b="1">
+              <a:tr h="274320">
+                <a:tc>
+                  <a:txBody>
+                    <a:bodyPr lIns="45720" rIns="45720" tIns="18288" bIns="18288" wrap="square" anchor="ctr"/>
+                    <a:lstStyle/>
+                    <a:p>
+                      <a:pPr algn="ctr"/>
+                      <a:r>
+                        <a:rPr sz="800" b="1">
                           <a:solidFill>
                             <a:srgbClr val="101010"/>
                           </a:solidFill>
@@ -8859,7 +9069,76 @@
                     <a:p>
                       <a:pPr algn="ctr"/>
                       <a:r>
-                        <a:rPr sz="900">
+                        <a:rPr sz="800">
+                          <a:solidFill>
+                            <a:srgbClr val="101010"/>
+                          </a:solidFill>
+                          <a:latin typeface="Calibri"/>
+                        </a:rPr>
+                        <a:t>13 / $25k</a:t>
+                      </a:r>
+                    </a:p>
+                  </a:txBody>
+                  <a:tcPr>
+                    <a:solidFill>
+                      <a:srgbClr val="FFFFFF"/>
+                    </a:solidFill>
+                  </a:tcPr>
+                </a:tc>
+                <a:tc>
+                  <a:txBody>
+                    <a:bodyPr lIns="45720" rIns="45720" tIns="18288" bIns="18288" wrap="square" anchor="ctr"/>
+                    <a:lstStyle/>
+                    <a:p>
+                      <a:pPr algn="ctr"/>
+                      <a:r>
+                        <a:rPr sz="800">
+                          <a:solidFill>
+                            <a:srgbClr val="101010"/>
+                          </a:solidFill>
+                          <a:latin typeface="Calibri"/>
+                        </a:rPr>
+                        <a:t>19 / $31k</a:t>
+                      </a:r>
+                    </a:p>
+                  </a:txBody>
+                  <a:tcPr>
+                    <a:solidFill>
+                      <a:srgbClr val="FFFFFF"/>
+                    </a:solidFill>
+                  </a:tcPr>
+                </a:tc>
+                <a:tc>
+                  <a:txBody>
+                    <a:bodyPr lIns="45720" rIns="45720" tIns="18288" bIns="18288" wrap="square" anchor="ctr"/>
+                    <a:lstStyle/>
+                    <a:p>
+                      <a:pPr algn="ctr"/>
+                      <a:r>
+                        <a:rPr sz="800">
+                          <a:solidFill>
+                            <a:srgbClr val="101010"/>
+                          </a:solidFill>
+                          <a:latin typeface="Calibri"/>
+                        </a:rPr>
+                        <a:t>7 / $8k</a:t>
+                      </a:r>
+                    </a:p>
+                  </a:txBody>
+                  <a:tcPr>
+                    <a:solidFill>
+                      <a:srgbClr val="FFFFFF"/>
+                    </a:solidFill>
+                  </a:tcPr>
+                </a:tc>
+                <a:tc>
+                  <a:txBody>
+                    <a:bodyPr lIns="45720" rIns="45720" tIns="18288" bIns="18288" wrap="square" anchor="ctr"/>
+                    <a:lstStyle/>
+                    <a:p>
+                      <a:pPr algn="ctr"/>
+                      <a:r>
+                        <a:rPr sz="800">
                           <a:solidFill>
                             <a:srgbClr val="101010"/>
                           </a:solidFill>
@@ -8882,7 +9161,7 @@
                     <a:p>
                       <a:pPr algn="ctr"/>
                       <a:r>
-                        <a:rPr sz="900">
+                        <a:rPr sz="800">
                           <a:solidFill>
                             <a:srgbClr val="101010"/>
                           </a:solidFill>
@@ -8905,7 +9184,7 @@
                     <a:p>
                       <a:pPr algn="ctr"/>
                       <a:r>
-                        <a:rPr sz="900">
+                        <a:rPr sz="800">
                           <a:solidFill>
                             <a:srgbClr val="101010"/>
                           </a:solidFill>
@@ -8922,38 +9201,107 @@
                   </a:tcPr>
                 </a:tc>
               </a:tr>
-              <a:tr h="256032">
-                <a:tc>
-                  <a:txBody>
-                    <a:bodyPr lIns="45720" rIns="45720" tIns="18288" bIns="18288" wrap="square" anchor="ctr"/>
-                    <a:lstStyle/>
-                    <a:p>
-                      <a:pPr algn="ctr"/>
-                      <a:r>
-                        <a:rPr sz="900" b="1">
-                          <a:solidFill>
-                            <a:srgbClr val="101010"/>
-                          </a:solidFill>
-                          <a:latin typeface="Calibri"/>
-                        </a:rPr>
-                        <a:t>Dialinerys Apr</a:t>
-                      </a:r>
-                    </a:p>
-                  </a:txBody>
-                  <a:tcPr>
-                    <a:solidFill>
-                      <a:srgbClr val="F2F2F2"/>
-                    </a:solidFill>
-                  </a:tcPr>
-                </a:tc>
-                <a:tc>
-                  <a:txBody>
-                    <a:bodyPr lIns="45720" rIns="45720" tIns="18288" bIns="18288" wrap="square" anchor="ctr"/>
-                    <a:lstStyle/>
-                    <a:p>
-                      <a:pPr algn="ctr"/>
-                      <a:r>
-                        <a:rPr sz="900">
+              <a:tr h="274320">
+                <a:tc>
+                  <a:txBody>
+                    <a:bodyPr lIns="45720" rIns="45720" tIns="18288" bIns="18288" wrap="square" anchor="ctr"/>
+                    <a:lstStyle/>
+                    <a:p>
+                      <a:pPr algn="ctr"/>
+                      <a:r>
+                        <a:rPr sz="800" b="1">
+                          <a:solidFill>
+                            <a:srgbClr val="101010"/>
+                          </a:solidFill>
+                          <a:latin typeface="Calibri"/>
+                        </a:rPr>
+                        <a:t>Dialiner Apr</a:t>
+                      </a:r>
+                    </a:p>
+                  </a:txBody>
+                  <a:tcPr>
+                    <a:solidFill>
+                      <a:srgbClr val="F2F2F2"/>
+                    </a:solidFill>
+                  </a:tcPr>
+                </a:tc>
+                <a:tc>
+                  <a:txBody>
+                    <a:bodyPr lIns="45720" rIns="45720" tIns="18288" bIns="18288" wrap="square" anchor="ctr"/>
+                    <a:lstStyle/>
+                    <a:p>
+                      <a:pPr algn="ctr"/>
+                      <a:r>
+                        <a:rPr sz="800">
+                          <a:solidFill>
+                            <a:srgbClr val="101010"/>
+                          </a:solidFill>
+                          <a:latin typeface="Calibri"/>
+                        </a:rPr>
+                        <a:t>33 / $50k</a:t>
+                      </a:r>
+                    </a:p>
+                  </a:txBody>
+                  <a:tcPr>
+                    <a:solidFill>
+                      <a:srgbClr val="F2F2F2"/>
+                    </a:solidFill>
+                  </a:tcPr>
+                </a:tc>
+                <a:tc>
+                  <a:txBody>
+                    <a:bodyPr lIns="45720" rIns="45720" tIns="18288" bIns="18288" wrap="square" anchor="ctr"/>
+                    <a:lstStyle/>
+                    <a:p>
+                      <a:pPr algn="ctr"/>
+                      <a:r>
+                        <a:rPr sz="800">
+                          <a:solidFill>
+                            <a:srgbClr val="101010"/>
+                          </a:solidFill>
+                          <a:latin typeface="Calibri"/>
+                        </a:rPr>
+                        <a:t>44 / $64k</a:t>
+                      </a:r>
+                    </a:p>
+                  </a:txBody>
+                  <a:tcPr>
+                    <a:solidFill>
+                      <a:srgbClr val="F2F2F2"/>
+                    </a:solidFill>
+                  </a:tcPr>
+                </a:tc>
+                <a:tc>
+                  <a:txBody>
+                    <a:bodyPr lIns="45720" rIns="45720" tIns="18288" bIns="18288" wrap="square" anchor="ctr"/>
+                    <a:lstStyle/>
+                    <a:p>
+                      <a:pPr algn="ctr"/>
+                      <a:r>
+                        <a:rPr sz="800">
+                          <a:solidFill>
+                            <a:srgbClr val="101010"/>
+                          </a:solidFill>
+                          <a:latin typeface="Calibri"/>
+                        </a:rPr>
+                        <a:t>2 / $20k</a:t>
+                      </a:r>
+                    </a:p>
+                  </a:txBody>
+                  <a:tcPr>
+                    <a:solidFill>
+                      <a:srgbClr val="F2F2F2"/>
+                    </a:solidFill>
+                  </a:tcPr>
+                </a:tc>
+                <a:tc>
+                  <a:txBody>
+                    <a:bodyPr lIns="45720" rIns="45720" tIns="18288" bIns="18288" wrap="square" anchor="ctr"/>
+                    <a:lstStyle/>
+                    <a:p>
+                      <a:pPr algn="ctr"/>
+                      <a:r>
+                        <a:rPr sz="800">
                           <a:solidFill>
                             <a:srgbClr val="101010"/>
                           </a:solidFill>
@@ -8976,7 +9324,7 @@
                     <a:p>
                       <a:pPr algn="ctr"/>
                       <a:r>
-                        <a:rPr sz="900">
+                        <a:rPr sz="800">
                           <a:solidFill>
                             <a:srgbClr val="101010"/>
                           </a:solidFill>
@@ -8999,7 +9347,7 @@
                     <a:p>
                       <a:pPr algn="ctr"/>
                       <a:r>
-                        <a:rPr sz="900">
+                        <a:rPr sz="800">
                           <a:solidFill>
                             <a:srgbClr val="101010"/>
                           </a:solidFill>
@@ -9016,15 +9364,15 @@
                   </a:tcPr>
                 </a:tc>
               </a:tr>
-              <a:tr h="256032">
-                <a:tc>
-                  <a:txBody>
-                    <a:bodyPr lIns="45720" rIns="45720" tIns="18288" bIns="18288" wrap="square" anchor="ctr"/>
-                    <a:lstStyle/>
-                    <a:p>
-                      <a:pPr algn="ctr"/>
-                      <a:r>
-                        <a:rPr sz="900" b="1">
+              <a:tr h="274320">
+                <a:tc>
+                  <a:txBody>
+                    <a:bodyPr lIns="45720" rIns="45720" tIns="18288" bIns="18288" wrap="square" anchor="ctr"/>
+                    <a:lstStyle/>
+                    <a:p>
+                      <a:pPr algn="ctr"/>
+                      <a:r>
+                        <a:rPr sz="800" b="1">
                           <a:solidFill>
                             <a:srgbClr val="101010"/>
                           </a:solidFill>
@@ -9047,7 +9395,76 @@
                     <a:p>
                       <a:pPr algn="ctr"/>
                       <a:r>
-                        <a:rPr sz="900">
+                        <a:rPr sz="800">
+                          <a:solidFill>
+                            <a:srgbClr val="101010"/>
+                          </a:solidFill>
+                          <a:latin typeface="Calibri"/>
+                        </a:rPr>
+                        <a:t>25 / $39k</a:t>
+                      </a:r>
+                    </a:p>
+                  </a:txBody>
+                  <a:tcPr>
+                    <a:solidFill>
+                      <a:srgbClr val="FFFFFF"/>
+                    </a:solidFill>
+                  </a:tcPr>
+                </a:tc>
+                <a:tc>
+                  <a:txBody>
+                    <a:bodyPr lIns="45720" rIns="45720" tIns="18288" bIns="18288" wrap="square" anchor="ctr"/>
+                    <a:lstStyle/>
+                    <a:p>
+                      <a:pPr algn="ctr"/>
+                      <a:r>
+                        <a:rPr sz="800">
+                          <a:solidFill>
+                            <a:srgbClr val="101010"/>
+                          </a:solidFill>
+                          <a:latin typeface="Calibri"/>
+                        </a:rPr>
+                        <a:t>17 / $28k</a:t>
+                      </a:r>
+                    </a:p>
+                  </a:txBody>
+                  <a:tcPr>
+                    <a:solidFill>
+                      <a:srgbClr val="FFFFFF"/>
+                    </a:solidFill>
+                  </a:tcPr>
+                </a:tc>
+                <a:tc>
+                  <a:txBody>
+                    <a:bodyPr lIns="45720" rIns="45720" tIns="18288" bIns="18288" wrap="square" anchor="ctr"/>
+                    <a:lstStyle/>
+                    <a:p>
+                      <a:pPr algn="ctr"/>
+                      <a:r>
+                        <a:rPr sz="800">
+                          <a:solidFill>
+                            <a:srgbClr val="101010"/>
+                          </a:solidFill>
+                          <a:latin typeface="Calibri"/>
+                        </a:rPr>
+                        <a:t>9 / $8k</a:t>
+                      </a:r>
+                    </a:p>
+                  </a:txBody>
+                  <a:tcPr>
+                    <a:solidFill>
+                      <a:srgbClr val="FFFFFF"/>
+                    </a:solidFill>
+                  </a:tcPr>
+                </a:tc>
+                <a:tc>
+                  <a:txBody>
+                    <a:bodyPr lIns="45720" rIns="45720" tIns="18288" bIns="18288" wrap="square" anchor="ctr"/>
+                    <a:lstStyle/>
+                    <a:p>
+                      <a:pPr algn="ctr"/>
+                      <a:r>
+                        <a:rPr sz="800">
                           <a:solidFill>
                             <a:srgbClr val="101010"/>
                           </a:solidFill>
@@ -9070,7 +9487,7 @@
                     <a:p>
                       <a:pPr algn="ctr"/>
                       <a:r>
-                        <a:rPr sz="900">
+                        <a:rPr sz="800">
                           <a:solidFill>
                             <a:srgbClr val="101010"/>
                           </a:solidFill>
@@ -9093,7 +9510,7 @@
                     <a:p>
                       <a:pPr algn="ctr"/>
                       <a:r>
-                        <a:rPr sz="900">
+                        <a:rPr sz="800">
                           <a:solidFill>
                             <a:srgbClr val="101010"/>
                           </a:solidFill>
@@ -9110,15 +9527,15 @@
                   </a:tcPr>
                 </a:tc>
               </a:tr>
-              <a:tr h="256032">
-                <a:tc>
-                  <a:txBody>
-                    <a:bodyPr lIns="45720" rIns="45720" tIns="18288" bIns="18288" wrap="square" anchor="ctr"/>
-                    <a:lstStyle/>
-                    <a:p>
-                      <a:pPr algn="ctr"/>
-                      <a:r>
-                        <a:rPr sz="900" b="1">
+              <a:tr h="274320">
+                <a:tc>
+                  <a:txBody>
+                    <a:bodyPr lIns="45720" rIns="45720" tIns="18288" bIns="18288" wrap="square" anchor="ctr"/>
+                    <a:lstStyle/>
+                    <a:p>
+                      <a:pPr algn="ctr"/>
+                      <a:r>
+                        <a:rPr sz="800" b="1">
                           <a:solidFill>
                             <a:srgbClr val="101010"/>
                           </a:solidFill>
@@ -9141,7 +9558,76 @@
                     <a:p>
                       <a:pPr algn="ctr"/>
                       <a:r>
-                        <a:rPr sz="900">
+                        <a:rPr sz="800">
+                          <a:solidFill>
+                            <a:srgbClr val="101010"/>
+                          </a:solidFill>
+                          <a:latin typeface="Calibri"/>
+                        </a:rPr>
+                        <a:t>27 / $38k</a:t>
+                      </a:r>
+                    </a:p>
+                  </a:txBody>
+                  <a:tcPr>
+                    <a:solidFill>
+                      <a:srgbClr val="F2F2F2"/>
+                    </a:solidFill>
+                  </a:tcPr>
+                </a:tc>
+                <a:tc>
+                  <a:txBody>
+                    <a:bodyPr lIns="45720" rIns="45720" tIns="18288" bIns="18288" wrap="square" anchor="ctr"/>
+                    <a:lstStyle/>
+                    <a:p>
+                      <a:pPr algn="ctr"/>
+                      <a:r>
+                        <a:rPr sz="800">
+                          <a:solidFill>
+                            <a:srgbClr val="101010"/>
+                          </a:solidFill>
+                          <a:latin typeface="Calibri"/>
+                        </a:rPr>
+                        <a:t>15 / $15k</a:t>
+                      </a:r>
+                    </a:p>
+                  </a:txBody>
+                  <a:tcPr>
+                    <a:solidFill>
+                      <a:srgbClr val="F2F2F2"/>
+                    </a:solidFill>
+                  </a:tcPr>
+                </a:tc>
+                <a:tc>
+                  <a:txBody>
+                    <a:bodyPr lIns="45720" rIns="45720" tIns="18288" bIns="18288" wrap="square" anchor="ctr"/>
+                    <a:lstStyle/>
+                    <a:p>
+                      <a:pPr algn="ctr"/>
+                      <a:r>
+                        <a:rPr sz="800">
+                          <a:solidFill>
+                            <a:srgbClr val="101010"/>
+                          </a:solidFill>
+                          <a:latin typeface="Calibri"/>
+                        </a:rPr>
+                        <a:t>13 / $11k</a:t>
+                      </a:r>
+                    </a:p>
+                  </a:txBody>
+                  <a:tcPr>
+                    <a:solidFill>
+                      <a:srgbClr val="F2F2F2"/>
+                    </a:solidFill>
+                  </a:tcPr>
+                </a:tc>
+                <a:tc>
+                  <a:txBody>
+                    <a:bodyPr lIns="45720" rIns="45720" tIns="18288" bIns="18288" wrap="square" anchor="ctr"/>
+                    <a:lstStyle/>
+                    <a:p>
+                      <a:pPr algn="ctr"/>
+                      <a:r>
+                        <a:rPr sz="800">
                           <a:solidFill>
                             <a:srgbClr val="101010"/>
                           </a:solidFill>
@@ -9164,7 +9650,7 @@
                     <a:p>
                       <a:pPr algn="ctr"/>
                       <a:r>
-                        <a:rPr sz="900">
+                        <a:rPr sz="800">
                           <a:solidFill>
                             <a:srgbClr val="101010"/>
                           </a:solidFill>
@@ -9187,7 +9673,7 @@
                     <a:p>
                       <a:pPr algn="ctr"/>
                       <a:r>
-                        <a:rPr sz="900">
+                        <a:rPr sz="800">
                           <a:solidFill>
                             <a:srgbClr val="101010"/>
                           </a:solidFill>
@@ -9204,15 +9690,15 @@
                   </a:tcPr>
                 </a:tc>
               </a:tr>
-              <a:tr h="256032">
-                <a:tc>
-                  <a:txBody>
-                    <a:bodyPr lIns="45720" rIns="45720" tIns="18288" bIns="18288" wrap="square" anchor="ctr"/>
-                    <a:lstStyle/>
-                    <a:p>
-                      <a:pPr algn="ctr"/>
-                      <a:r>
-                        <a:rPr sz="900" b="1">
+              <a:tr h="274320">
+                <a:tc>
+                  <a:txBody>
+                    <a:bodyPr lIns="45720" rIns="45720" tIns="18288" bIns="18288" wrap="square" anchor="ctr"/>
+                    <a:lstStyle/>
+                    <a:p>
+                      <a:pPr algn="ctr"/>
+                      <a:r>
+                        <a:rPr sz="800" b="1">
                           <a:solidFill>
                             <a:srgbClr val="101010"/>
                           </a:solidFill>
@@ -9235,7 +9721,76 @@
                     <a:p>
                       <a:pPr algn="ctr"/>
                       <a:r>
-                        <a:rPr sz="900">
+                        <a:rPr sz="800">
+                          <a:solidFill>
+                            <a:srgbClr val="101010"/>
+                          </a:solidFill>
+                          <a:latin typeface="Calibri"/>
+                        </a:rPr>
+                        <a:t>10 / $16k</a:t>
+                      </a:r>
+                    </a:p>
+                  </a:txBody>
+                  <a:tcPr>
+                    <a:solidFill>
+                      <a:srgbClr val="FFFFFF"/>
+                    </a:solidFill>
+                  </a:tcPr>
+                </a:tc>
+                <a:tc>
+                  <a:txBody>
+                    <a:bodyPr lIns="45720" rIns="45720" tIns="18288" bIns="18288" wrap="square" anchor="ctr"/>
+                    <a:lstStyle/>
+                    <a:p>
+                      <a:pPr algn="ctr"/>
+                      <a:r>
+                        <a:rPr sz="800">
+                          <a:solidFill>
+                            <a:srgbClr val="101010"/>
+                          </a:solidFill>
+                          <a:latin typeface="Calibri"/>
+                        </a:rPr>
+                        <a:t>28 / $33k</a:t>
+                      </a:r>
+                    </a:p>
+                  </a:txBody>
+                  <a:tcPr>
+                    <a:solidFill>
+                      <a:srgbClr val="FFFFFF"/>
+                    </a:solidFill>
+                  </a:tcPr>
+                </a:tc>
+                <a:tc>
+                  <a:txBody>
+                    <a:bodyPr lIns="45720" rIns="45720" tIns="18288" bIns="18288" wrap="square" anchor="ctr"/>
+                    <a:lstStyle/>
+                    <a:p>
+                      <a:pPr algn="ctr"/>
+                      <a:r>
+                        <a:rPr sz="800">
+                          <a:solidFill>
+                            <a:srgbClr val="101010"/>
+                          </a:solidFill>
+                          <a:latin typeface="Calibri"/>
+                        </a:rPr>
+                        <a:t>4 / $4k</a:t>
+                      </a:r>
+                    </a:p>
+                  </a:txBody>
+                  <a:tcPr>
+                    <a:solidFill>
+                      <a:srgbClr val="FFFFFF"/>
+                    </a:solidFill>
+                  </a:tcPr>
+                </a:tc>
+                <a:tc>
+                  <a:txBody>
+                    <a:bodyPr lIns="45720" rIns="45720" tIns="18288" bIns="18288" wrap="square" anchor="ctr"/>
+                    <a:lstStyle/>
+                    <a:p>
+                      <a:pPr algn="ctr"/>
+                      <a:r>
+                        <a:rPr sz="800">
                           <a:solidFill>
                             <a:srgbClr val="101010"/>
                           </a:solidFill>
@@ -9258,7 +9813,7 @@
                     <a:p>
                       <a:pPr algn="ctr"/>
                       <a:r>
-                        <a:rPr sz="900">
+                        <a:rPr sz="800">
                           <a:solidFill>
                             <a:srgbClr val="101010"/>
                           </a:solidFill>
@@ -9281,7 +9836,7 @@
                     <a:p>
                       <a:pPr algn="ctr"/>
                       <a:r>
-                        <a:rPr sz="900">
+                        <a:rPr sz="800">
                           <a:solidFill>
                             <a:srgbClr val="101010"/>
                           </a:solidFill>
@@ -9298,15 +9853,15 @@
                   </a:tcPr>
                 </a:tc>
               </a:tr>
-              <a:tr h="256032">
-                <a:tc>
-                  <a:txBody>
-                    <a:bodyPr lIns="45720" rIns="45720" tIns="18288" bIns="18288" wrap="square" anchor="ctr"/>
-                    <a:lstStyle/>
-                    <a:p>
-                      <a:pPr algn="ctr"/>
-                      <a:r>
-                        <a:rPr sz="900" b="1">
+              <a:tr h="274320">
+                <a:tc>
+                  <a:txBody>
+                    <a:bodyPr lIns="45720" rIns="45720" tIns="18288" bIns="18288" wrap="square" anchor="ctr"/>
+                    <a:lstStyle/>
+                    <a:p>
+                      <a:pPr algn="ctr"/>
+                      <a:r>
+                        <a:rPr sz="800" b="1">
                           <a:solidFill>
                             <a:srgbClr val="101010"/>
                           </a:solidFill>
@@ -9329,7 +9884,76 @@
                     <a:p>
                       <a:pPr algn="ctr"/>
                       <a:r>
-                        <a:rPr sz="900">
+                        <a:rPr sz="800">
+                          <a:solidFill>
+                            <a:srgbClr val="101010"/>
+                          </a:solidFill>
+                          <a:latin typeface="Calibri"/>
+                        </a:rPr>
+                        <a:t>14 / $19k</a:t>
+                      </a:r>
+                    </a:p>
+                  </a:txBody>
+                  <a:tcPr>
+                    <a:solidFill>
+                      <a:srgbClr val="F2F2F2"/>
+                    </a:solidFill>
+                  </a:tcPr>
+                </a:tc>
+                <a:tc>
+                  <a:txBody>
+                    <a:bodyPr lIns="45720" rIns="45720" tIns="18288" bIns="18288" wrap="square" anchor="ctr"/>
+                    <a:lstStyle/>
+                    <a:p>
+                      <a:pPr algn="ctr"/>
+                      <a:r>
+                        <a:rPr sz="800">
+                          <a:solidFill>
+                            <a:srgbClr val="101010"/>
+                          </a:solidFill>
+                          <a:latin typeface="Calibri"/>
+                        </a:rPr>
+                        <a:t>24 / $28k</a:t>
+                      </a:r>
+                    </a:p>
+                  </a:txBody>
+                  <a:tcPr>
+                    <a:solidFill>
+                      <a:srgbClr val="F2F2F2"/>
+                    </a:solidFill>
+                  </a:tcPr>
+                </a:tc>
+                <a:tc>
+                  <a:txBody>
+                    <a:bodyPr lIns="45720" rIns="45720" tIns="18288" bIns="18288" wrap="square" anchor="ctr"/>
+                    <a:lstStyle/>
+                    <a:p>
+                      <a:pPr algn="ctr"/>
+                      <a:r>
+                        <a:rPr sz="800">
+                          <a:solidFill>
+                            <a:srgbClr val="101010"/>
+                          </a:solidFill>
+                          <a:latin typeface="Calibri"/>
+                        </a:rPr>
+                        <a:t>5 / $7k</a:t>
+                      </a:r>
+                    </a:p>
+                  </a:txBody>
+                  <a:tcPr>
+                    <a:solidFill>
+                      <a:srgbClr val="F2F2F2"/>
+                    </a:solidFill>
+                  </a:tcPr>
+                </a:tc>
+                <a:tc>
+                  <a:txBody>
+                    <a:bodyPr lIns="45720" rIns="45720" tIns="18288" bIns="18288" wrap="square" anchor="ctr"/>
+                    <a:lstStyle/>
+                    <a:p>
+                      <a:pPr algn="ctr"/>
+                      <a:r>
+                        <a:rPr sz="800">
                           <a:solidFill>
                             <a:srgbClr val="101010"/>
                           </a:solidFill>
@@ -9352,7 +9976,7 @@
                     <a:p>
                       <a:pPr algn="ctr"/>
                       <a:r>
-                        <a:rPr sz="900">
+                        <a:rPr sz="800">
                           <a:solidFill>
                             <a:srgbClr val="101010"/>
                           </a:solidFill>
@@ -9375,7 +9999,7 @@
                     <a:p>
                       <a:pPr algn="ctr"/>
                       <a:r>
-                        <a:rPr sz="900">
+                        <a:rPr sz="800">
                           <a:solidFill>
                             <a:srgbClr val="101010"/>
                           </a:solidFill>
@@ -9392,15 +10016,15 @@
                   </a:tcPr>
                 </a:tc>
               </a:tr>
-              <a:tr h="256032">
-                <a:tc>
-                  <a:txBody>
-                    <a:bodyPr lIns="45720" rIns="45720" tIns="18288" bIns="18288" wrap="square" anchor="ctr"/>
-                    <a:lstStyle/>
-                    <a:p>
-                      <a:pPr algn="ctr"/>
-                      <a:r>
-                        <a:rPr sz="900" b="1">
+              <a:tr h="274320">
+                <a:tc>
+                  <a:txBody>
+                    <a:bodyPr lIns="45720" rIns="45720" tIns="18288" bIns="18288" wrap="square" anchor="ctr"/>
+                    <a:lstStyle/>
+                    <a:p>
+                      <a:pPr algn="ctr"/>
+                      <a:r>
+                        <a:rPr sz="800" b="1">
                           <a:solidFill>
                             <a:srgbClr val="101010"/>
                           </a:solidFill>
@@ -9423,7 +10047,76 @@
                     <a:p>
                       <a:pPr algn="ctr"/>
                       <a:r>
-                        <a:rPr sz="900">
+                        <a:rPr sz="800">
+                          <a:solidFill>
+                            <a:srgbClr val="101010"/>
+                          </a:solidFill>
+                          <a:latin typeface="Calibri"/>
+                        </a:rPr>
+                        <a:t>19 / $18k</a:t>
+                      </a:r>
+                    </a:p>
+                  </a:txBody>
+                  <a:tcPr>
+                    <a:solidFill>
+                      <a:srgbClr val="FFFFFF"/>
+                    </a:solidFill>
+                  </a:tcPr>
+                </a:tc>
+                <a:tc>
+                  <a:txBody>
+                    <a:bodyPr lIns="45720" rIns="45720" tIns="18288" bIns="18288" wrap="square" anchor="ctr"/>
+                    <a:lstStyle/>
+                    <a:p>
+                      <a:pPr algn="ctr"/>
+                      <a:r>
+                        <a:rPr sz="800">
+                          <a:solidFill>
+                            <a:srgbClr val="101010"/>
+                          </a:solidFill>
+                          <a:latin typeface="Calibri"/>
+                        </a:rPr>
+                        <a:t>19 / $20k</a:t>
+                      </a:r>
+                    </a:p>
+                  </a:txBody>
+                  <a:tcPr>
+                    <a:solidFill>
+                      <a:srgbClr val="FFFFFF"/>
+                    </a:solidFill>
+                  </a:tcPr>
+                </a:tc>
+                <a:tc>
+                  <a:txBody>
+                    <a:bodyPr lIns="45720" rIns="45720" tIns="18288" bIns="18288" wrap="square" anchor="ctr"/>
+                    <a:lstStyle/>
+                    <a:p>
+                      <a:pPr algn="ctr"/>
+                      <a:r>
+                        <a:rPr sz="800">
+                          <a:solidFill>
+                            <a:srgbClr val="101010"/>
+                          </a:solidFill>
+                          <a:latin typeface="Calibri"/>
+                        </a:rPr>
+                        <a:t>6 / $6k</a:t>
+                      </a:r>
+                    </a:p>
+                  </a:txBody>
+                  <a:tcPr>
+                    <a:solidFill>
+                      <a:srgbClr val="FFFFFF"/>
+                    </a:solidFill>
+                  </a:tcPr>
+                </a:tc>
+                <a:tc>
+                  <a:txBody>
+                    <a:bodyPr lIns="45720" rIns="45720" tIns="18288" bIns="18288" wrap="square" anchor="ctr"/>
+                    <a:lstStyle/>
+                    <a:p>
+                      <a:pPr algn="ctr"/>
+                      <a:r>
+                        <a:rPr sz="800">
                           <a:solidFill>
                             <a:srgbClr val="101010"/>
                           </a:solidFill>
@@ -9446,7 +10139,7 @@
                     <a:p>
                       <a:pPr algn="ctr"/>
                       <a:r>
-                        <a:rPr sz="900">
+                        <a:rPr sz="800">
                           <a:solidFill>
                             <a:srgbClr val="101010"/>
                           </a:solidFill>
@@ -9469,7 +10162,7 @@
                     <a:p>
                       <a:pPr algn="ctr"/>
                       <a:r>
-                        <a:rPr sz="900">
+                        <a:rPr sz="800">
                           <a:solidFill>
                             <a:srgbClr val="101010"/>
                           </a:solidFill>
@@ -9486,109 +10179,15 @@
                   </a:tcPr>
                 </a:tc>
               </a:tr>
-              <a:tr h="256032">
-                <a:tc>
-                  <a:txBody>
-                    <a:bodyPr lIns="45720" rIns="45720" tIns="18288" bIns="18288" wrap="square" anchor="ctr"/>
-                    <a:lstStyle/>
-                    <a:p>
-                      <a:pPr algn="ctr"/>
-                      <a:r>
-                        <a:rPr sz="900" b="1">
-                          <a:solidFill>
-                            <a:srgbClr val="101010"/>
-                          </a:solidFill>
-                          <a:latin typeface="Calibri"/>
-                        </a:rPr>
-                        <a:t>Thalia Apr</a:t>
-                      </a:r>
-                    </a:p>
-                  </a:txBody>
-                  <a:tcPr>
-                    <a:solidFill>
-                      <a:srgbClr val="F2F2F2"/>
-                    </a:solidFill>
-                  </a:tcPr>
-                </a:tc>
-                <a:tc>
-                  <a:txBody>
-                    <a:bodyPr lIns="45720" rIns="45720" tIns="18288" bIns="18288" wrap="square" anchor="ctr"/>
-                    <a:lstStyle/>
-                    <a:p>
-                      <a:pPr algn="ctr"/>
-                      <a:r>
-                        <a:rPr sz="900">
-                          <a:solidFill>
-                            <a:srgbClr val="101010"/>
-                          </a:solidFill>
-                          <a:latin typeface="Calibri"/>
-                        </a:rPr>
-                        <a:t>$350</a:t>
-                      </a:r>
-                    </a:p>
-                  </a:txBody>
-                  <a:tcPr>
-                    <a:solidFill>
-                      <a:srgbClr val="F2F2F2"/>
-                    </a:solidFill>
-                  </a:tcPr>
-                </a:tc>
-                <a:tc>
-                  <a:txBody>
-                    <a:bodyPr lIns="45720" rIns="45720" tIns="18288" bIns="18288" wrap="square" anchor="ctr"/>
-                    <a:lstStyle/>
-                    <a:p>
-                      <a:pPr algn="ctr"/>
-                      <a:r>
-                        <a:rPr sz="900">
-                          <a:solidFill>
-                            <a:srgbClr val="101010"/>
-                          </a:solidFill>
-                          <a:latin typeface="Calibri"/>
-                        </a:rPr>
-                        <a:t>$0</a:t>
-                      </a:r>
-                    </a:p>
-                  </a:txBody>
-                  <a:tcPr>
-                    <a:solidFill>
-                      <a:srgbClr val="F2F2F2"/>
-                    </a:solidFill>
-                  </a:tcPr>
-                </a:tc>
-                <a:tc>
-                  <a:txBody>
-                    <a:bodyPr lIns="45720" rIns="45720" tIns="18288" bIns="18288" wrap="square" anchor="ctr"/>
-                    <a:lstStyle/>
-                    <a:p>
-                      <a:pPr algn="ctr"/>
-                      <a:r>
-                        <a:rPr sz="900">
-                          <a:solidFill>
-                            <a:srgbClr val="101010"/>
-                          </a:solidFill>
-                          <a:latin typeface="Calibri"/>
-                        </a:rPr>
-                        <a:t>$-350</a:t>
-                      </a:r>
-                    </a:p>
-                  </a:txBody>
-                  <a:tcPr>
-                    <a:solidFill>
-                      <a:srgbClr val="F2F2F2"/>
-                    </a:solidFill>
-                  </a:tcPr>
-                </a:tc>
-              </a:tr>
-              <a:tr h="256032">
-                <a:tc>
-                  <a:txBody>
-                    <a:bodyPr lIns="45720" rIns="45720" tIns="18288" bIns="18288" wrap="square" anchor="ctr"/>
-                    <a:lstStyle/>
-                    <a:p>
-                      <a:pPr algn="ctr"/>
-                      <a:r>
-                        <a:rPr sz="900" b="1">
+              <a:tr h="274320">
+                <a:tc>
+                  <a:txBody>
+                    <a:bodyPr lIns="45720" rIns="45720" tIns="18288" bIns="18288" wrap="square" anchor="ctr"/>
+                    <a:lstStyle/>
+                    <a:p>
+                      <a:pPr algn="ctr"/>
+                      <a:r>
+                        <a:rPr sz="800" b="1">
                           <a:solidFill>
                             <a:srgbClr val="101010"/>
                           </a:solidFill>
@@ -9600,18 +10199,87 @@
                   </a:txBody>
                   <a:tcPr>
                     <a:solidFill>
-                      <a:srgbClr val="FFFFFF"/>
-                    </a:solidFill>
-                  </a:tcPr>
-                </a:tc>
-                <a:tc>
-                  <a:txBody>
-                    <a:bodyPr lIns="45720" rIns="45720" tIns="18288" bIns="18288" wrap="square" anchor="ctr"/>
-                    <a:lstStyle/>
-                    <a:p>
-                      <a:pPr algn="ctr"/>
-                      <a:r>
-                        <a:rPr sz="900">
+                      <a:srgbClr val="F2F2F2"/>
+                    </a:solidFill>
+                  </a:tcPr>
+                </a:tc>
+                <a:tc>
+                  <a:txBody>
+                    <a:bodyPr lIns="45720" rIns="45720" tIns="18288" bIns="18288" wrap="square" anchor="ctr"/>
+                    <a:lstStyle/>
+                    <a:p>
+                      <a:pPr algn="ctr"/>
+                      <a:r>
+                        <a:rPr sz="800">
+                          <a:solidFill>
+                            <a:srgbClr val="101010"/>
+                          </a:solidFill>
+                          <a:latin typeface="Calibri"/>
+                        </a:rPr>
+                        <a:t/>
+                      </a:r>
+                    </a:p>
+                  </a:txBody>
+                  <a:tcPr>
+                    <a:solidFill>
+                      <a:srgbClr val="F2F2F2"/>
+                    </a:solidFill>
+                  </a:tcPr>
+                </a:tc>
+                <a:tc>
+                  <a:txBody>
+                    <a:bodyPr lIns="45720" rIns="45720" tIns="18288" bIns="18288" wrap="square" anchor="ctr"/>
+                    <a:lstStyle/>
+                    <a:p>
+                      <a:pPr algn="ctr"/>
+                      <a:r>
+                        <a:rPr sz="800">
+                          <a:solidFill>
+                            <a:srgbClr val="101010"/>
+                          </a:solidFill>
+                          <a:latin typeface="Calibri"/>
+                        </a:rPr>
+                        <a:t/>
+                      </a:r>
+                    </a:p>
+                  </a:txBody>
+                  <a:tcPr>
+                    <a:solidFill>
+                      <a:srgbClr val="F2F2F2"/>
+                    </a:solidFill>
+                  </a:tcPr>
+                </a:tc>
+                <a:tc>
+                  <a:txBody>
+                    <a:bodyPr lIns="45720" rIns="45720" tIns="18288" bIns="18288" wrap="square" anchor="ctr"/>
+                    <a:lstStyle/>
+                    <a:p>
+                      <a:pPr algn="ctr"/>
+                      <a:r>
+                        <a:rPr sz="800">
+                          <a:solidFill>
+                            <a:srgbClr val="101010"/>
+                          </a:solidFill>
+                          <a:latin typeface="Calibri"/>
+                        </a:rPr>
+                        <a:t/>
+                      </a:r>
+                    </a:p>
+                  </a:txBody>
+                  <a:tcPr>
+                    <a:solidFill>
+                      <a:srgbClr val="F2F2F2"/>
+                    </a:solidFill>
+                  </a:tcPr>
+                </a:tc>
+                <a:tc>
+                  <a:txBody>
+                    <a:bodyPr lIns="45720" rIns="45720" tIns="18288" bIns="18288" wrap="square" anchor="ctr"/>
+                    <a:lstStyle/>
+                    <a:p>
+                      <a:pPr algn="ctr"/>
+                      <a:r>
+                        <a:rPr sz="800">
                           <a:solidFill>
                             <a:srgbClr val="101010"/>
                           </a:solidFill>
@@ -9623,18 +10291,18 @@
                   </a:txBody>
                   <a:tcPr>
                     <a:solidFill>
-                      <a:srgbClr val="FFFFFF"/>
-                    </a:solidFill>
-                  </a:tcPr>
-                </a:tc>
-                <a:tc>
-                  <a:txBody>
-                    <a:bodyPr lIns="45720" rIns="45720" tIns="18288" bIns="18288" wrap="square" anchor="ctr"/>
-                    <a:lstStyle/>
-                    <a:p>
-                      <a:pPr algn="ctr"/>
-                      <a:r>
-                        <a:rPr sz="900">
+                      <a:srgbClr val="F2F2F2"/>
+                    </a:solidFill>
+                  </a:tcPr>
+                </a:tc>
+                <a:tc>
+                  <a:txBody>
+                    <a:bodyPr lIns="45720" rIns="45720" tIns="18288" bIns="18288" wrap="square" anchor="ctr"/>
+                    <a:lstStyle/>
+                    <a:p>
+                      <a:pPr algn="ctr"/>
+                      <a:r>
+                        <a:rPr sz="800">
                           <a:solidFill>
                             <a:srgbClr val="101010"/>
                           </a:solidFill>
@@ -9646,18 +10314,18 @@
                   </a:txBody>
                   <a:tcPr>
                     <a:solidFill>
-                      <a:srgbClr val="FFFFFF"/>
-                    </a:solidFill>
-                  </a:tcPr>
-                </a:tc>
-                <a:tc>
-                  <a:txBody>
-                    <a:bodyPr lIns="45720" rIns="45720" tIns="18288" bIns="18288" wrap="square" anchor="ctr"/>
-                    <a:lstStyle/>
-                    <a:p>
-                      <a:pPr algn="ctr"/>
-                      <a:r>
-                        <a:rPr sz="900">
+                      <a:srgbClr val="F2F2F2"/>
+                    </a:solidFill>
+                  </a:tcPr>
+                </a:tc>
+                <a:tc>
+                  <a:txBody>
+                    <a:bodyPr lIns="45720" rIns="45720" tIns="18288" bIns="18288" wrap="square" anchor="ctr"/>
+                    <a:lstStyle/>
+                    <a:p>
+                      <a:pPr algn="ctr"/>
+                      <a:r>
+                        <a:rPr sz="800">
                           <a:solidFill>
                             <a:srgbClr val="101010"/>
                           </a:solidFill>
@@ -9669,7 +10337,7 @@
                   </a:txBody>
                   <a:tcPr>
                     <a:solidFill>
-                      <a:srgbClr val="FFFFFF"/>
+                      <a:srgbClr val="F2F2F2"/>
                     </a:solidFill>
                   </a:tcPr>
                 </a:tc>
@@ -9770,7 +10438,7 @@
         </p:nvGraphicFramePr>
         <p:xfrm>
           <a:off x="4224528" y="1417320"/>
-          <a:ext cx="3703320" cy="3072384"/>
+          <a:ext cx="4389120" cy="3017520"/>
         </p:xfrm>
         <a:graphic>
           <a:graphicData uri="http://schemas.openxmlformats.org/drawingml/2006/table">
@@ -9779,20 +10447,23 @@
                 <a:tableStyleId>{5C22544A-7EE6-4342-B048-85BDC9FD1C3A}</a:tableStyleId>
               </a:tblPr>
               <a:tblGrid>
-                <a:gridCol w="1280160"/>
-                <a:gridCol w="777240"/>
-                <a:gridCol w="777240"/>
                 <a:gridCol w="868680"/>
+                <a:gridCol w="640080"/>
+                <a:gridCol w="640080"/>
+                <a:gridCol w="640080"/>
+                <a:gridCol w="502920"/>
+                <a:gridCol w="502920"/>
+                <a:gridCol w="594360"/>
               </a:tblGrid>
-              <a:tr h="256032">
-                <a:tc>
-                  <a:txBody>
-                    <a:bodyPr lIns="45720" rIns="45720" tIns="18288" bIns="18288" wrap="square" anchor="ctr"/>
-                    <a:lstStyle/>
-                    <a:p>
-                      <a:pPr algn="ctr"/>
-                      <a:r>
-                        <a:rPr sz="900" b="1">
+              <a:tr h="274320">
+                <a:tc>
+                  <a:txBody>
+                    <a:bodyPr lIns="45720" rIns="45720" tIns="18288" bIns="18288" wrap="square" anchor="ctr"/>
+                    <a:lstStyle/>
+                    <a:p>
+                      <a:pPr algn="ctr"/>
+                      <a:r>
+                        <a:rPr sz="800" b="1">
                           <a:solidFill>
                             <a:srgbClr val="FFFFFF"/>
                           </a:solidFill>
@@ -9815,12 +10486,81 @@
                     <a:p>
                       <a:pPr algn="ctr"/>
                       <a:r>
-                        <a:rPr sz="900" b="1">
+                        <a:rPr sz="800" b="1">
                           <a:solidFill>
                             <a:srgbClr val="FFFFFF"/>
                           </a:solidFill>
                           <a:latin typeface="Calibri"/>
                         </a:rPr>
+                        <a:t>NB # / $</a:t>
+                      </a:r>
+                    </a:p>
+                  </a:txBody>
+                  <a:tcPr>
+                    <a:solidFill>
+                      <a:srgbClr val="2E75B6"/>
+                    </a:solidFill>
+                  </a:tcPr>
+                </a:tc>
+                <a:tc>
+                  <a:txBody>
+                    <a:bodyPr lIns="45720" rIns="45720" tIns="18288" bIns="18288" wrap="square" anchor="ctr"/>
+                    <a:lstStyle/>
+                    <a:p>
+                      <a:pPr algn="ctr"/>
+                      <a:r>
+                        <a:rPr sz="800" b="1">
+                          <a:solidFill>
+                            <a:srgbClr val="FFFFFF"/>
+                          </a:solidFill>
+                          <a:latin typeface="Calibri"/>
+                        </a:rPr>
+                        <a:t>RWR # / $</a:t>
+                      </a:r>
+                    </a:p>
+                  </a:txBody>
+                  <a:tcPr>
+                    <a:solidFill>
+                      <a:srgbClr val="2E75B6"/>
+                    </a:solidFill>
+                  </a:tcPr>
+                </a:tc>
+                <a:tc>
+                  <a:txBody>
+                    <a:bodyPr lIns="45720" rIns="45720" tIns="18288" bIns="18288" wrap="square" anchor="ctr"/>
+                    <a:lstStyle/>
+                    <a:p>
+                      <a:pPr algn="ctr"/>
+                      <a:r>
+                        <a:rPr sz="800" b="1">
+                          <a:solidFill>
+                            <a:srgbClr val="FFFFFF"/>
+                          </a:solidFill>
+                          <a:latin typeface="Calibri"/>
+                        </a:rPr>
+                        <a:t>REN # / $</a:t>
+                      </a:r>
+                    </a:p>
+                  </a:txBody>
+                  <a:tcPr>
+                    <a:solidFill>
+                      <a:srgbClr val="2E75B6"/>
+                    </a:solidFill>
+                  </a:tcPr>
+                </a:tc>
+                <a:tc>
+                  <a:txBody>
+                    <a:bodyPr lIns="45720" rIns="45720" tIns="18288" bIns="18288" wrap="square" anchor="ctr"/>
+                    <a:lstStyle/>
+                    <a:p>
+                      <a:pPr algn="ctr"/>
+                      <a:r>
+                        <a:rPr sz="800" b="1">
+                          <a:solidFill>
+                            <a:srgbClr val="FFFFFF"/>
+                          </a:solidFill>
+                          <a:latin typeface="Calibri"/>
+                        </a:rPr>
                         <a:t>Current</a:t>
                       </a:r>
                     </a:p>
@@ -9838,7 +10578,7 @@
                     <a:p>
                       <a:pPr algn="ctr"/>
                       <a:r>
-                        <a:rPr sz="900" b="1">
+                        <a:rPr sz="800" b="1">
                           <a:solidFill>
                             <a:srgbClr val="FFFFFF"/>
                           </a:solidFill>
@@ -9861,7 +10601,7 @@
                     <a:p>
                       <a:pPr algn="ctr"/>
                       <a:r>
-                        <a:rPr sz="900" b="1">
+                        <a:rPr sz="800" b="1">
                           <a:solidFill>
                             <a:srgbClr val="FFFFFF"/>
                           </a:solidFill>
@@ -9878,38 +10618,107 @@
                   </a:tcPr>
                 </a:tc>
               </a:tr>
-              <a:tr h="256032">
-                <a:tc>
-                  <a:txBody>
-                    <a:bodyPr lIns="45720" rIns="45720" tIns="18288" bIns="18288" wrap="square" anchor="ctr"/>
-                    <a:lstStyle/>
-                    <a:p>
-                      <a:pPr algn="ctr"/>
-                      <a:r>
-                        <a:rPr sz="900" b="1">
-                          <a:solidFill>
-                            <a:srgbClr val="101010"/>
-                          </a:solidFill>
-                          <a:latin typeface="Calibri"/>
-                        </a:rPr>
-                        <a:t>Dialinerys Apr</a:t>
-                      </a:r>
-                    </a:p>
-                  </a:txBody>
-                  <a:tcPr>
-                    <a:solidFill>
-                      <a:srgbClr val="FFFFFF"/>
-                    </a:solidFill>
-                  </a:tcPr>
-                </a:tc>
-                <a:tc>
-                  <a:txBody>
-                    <a:bodyPr lIns="45720" rIns="45720" tIns="18288" bIns="18288" wrap="square" anchor="ctr"/>
-                    <a:lstStyle/>
-                    <a:p>
-                      <a:pPr algn="ctr"/>
-                      <a:r>
-                        <a:rPr sz="900">
+              <a:tr h="274320">
+                <a:tc>
+                  <a:txBody>
+                    <a:bodyPr lIns="45720" rIns="45720" tIns="18288" bIns="18288" wrap="square" anchor="ctr"/>
+                    <a:lstStyle/>
+                    <a:p>
+                      <a:pPr algn="ctr"/>
+                      <a:r>
+                        <a:rPr sz="800" b="1">
+                          <a:solidFill>
+                            <a:srgbClr val="101010"/>
+                          </a:solidFill>
+                          <a:latin typeface="Calibri"/>
+                        </a:rPr>
+                        <a:t>Dialiner Apr</a:t>
+                      </a:r>
+                    </a:p>
+                  </a:txBody>
+                  <a:tcPr>
+                    <a:solidFill>
+                      <a:srgbClr val="FFFFFF"/>
+                    </a:solidFill>
+                  </a:tcPr>
+                </a:tc>
+                <a:tc>
+                  <a:txBody>
+                    <a:bodyPr lIns="45720" rIns="45720" tIns="18288" bIns="18288" wrap="square" anchor="ctr"/>
+                    <a:lstStyle/>
+                    <a:p>
+                      <a:pPr algn="ctr"/>
+                      <a:r>
+                        <a:rPr sz="800">
+                          <a:solidFill>
+                            <a:srgbClr val="101010"/>
+                          </a:solidFill>
+                          <a:latin typeface="Calibri"/>
+                        </a:rPr>
+                        <a:t>33 / $50k</a:t>
+                      </a:r>
+                    </a:p>
+                  </a:txBody>
+                  <a:tcPr>
+                    <a:solidFill>
+                      <a:srgbClr val="FFFFFF"/>
+                    </a:solidFill>
+                  </a:tcPr>
+                </a:tc>
+                <a:tc>
+                  <a:txBody>
+                    <a:bodyPr lIns="45720" rIns="45720" tIns="18288" bIns="18288" wrap="square" anchor="ctr"/>
+                    <a:lstStyle/>
+                    <a:p>
+                      <a:pPr algn="ctr"/>
+                      <a:r>
+                        <a:rPr sz="800">
+                          <a:solidFill>
+                            <a:srgbClr val="101010"/>
+                          </a:solidFill>
+                          <a:latin typeface="Calibri"/>
+                        </a:rPr>
+                        <a:t>22 / $32k</a:t>
+                      </a:r>
+                    </a:p>
+                  </a:txBody>
+                  <a:tcPr>
+                    <a:solidFill>
+                      <a:srgbClr val="FFFFFF"/>
+                    </a:solidFill>
+                  </a:tcPr>
+                </a:tc>
+                <a:tc>
+                  <a:txBody>
+                    <a:bodyPr lIns="45720" rIns="45720" tIns="18288" bIns="18288" wrap="square" anchor="ctr"/>
+                    <a:lstStyle/>
+                    <a:p>
+                      <a:pPr algn="ctr"/>
+                      <a:r>
+                        <a:rPr sz="800">
+                          <a:solidFill>
+                            <a:srgbClr val="101010"/>
+                          </a:solidFill>
+                          <a:latin typeface="Calibri"/>
+                        </a:rPr>
+                        <a:t>24 / $52k</a:t>
+                      </a:r>
+                    </a:p>
+                  </a:txBody>
+                  <a:tcPr>
+                    <a:solidFill>
+                      <a:srgbClr val="FFFFFF"/>
+                    </a:solidFill>
+                  </a:tcPr>
+                </a:tc>
+                <a:tc>
+                  <a:txBody>
+                    <a:bodyPr lIns="45720" rIns="45720" tIns="18288" bIns="18288" wrap="square" anchor="ctr"/>
+                    <a:lstStyle/>
+                    <a:p>
+                      <a:pPr algn="ctr"/>
+                      <a:r>
+                        <a:rPr sz="800">
                           <a:solidFill>
                             <a:srgbClr val="101010"/>
                           </a:solidFill>
@@ -9932,36 +10741,36 @@
                     <a:p>
                       <a:pPr algn="ctr"/>
                       <a:r>
-                        <a:rPr sz="900">
-                          <a:solidFill>
-                            <a:srgbClr val="101010"/>
-                          </a:solidFill>
-                          <a:latin typeface="Calibri"/>
-                        </a:rPr>
-                        <a:t>$600</a:t>
-                      </a:r>
-                    </a:p>
-                  </a:txBody>
-                  <a:tcPr>
-                    <a:solidFill>
-                      <a:srgbClr val="FFFFFF"/>
-                    </a:solidFill>
-                  </a:tcPr>
-                </a:tc>
-                <a:tc>
-                  <a:txBody>
-                    <a:bodyPr lIns="45720" rIns="45720" tIns="18288" bIns="18288" wrap="square" anchor="ctr"/>
-                    <a:lstStyle/>
-                    <a:p>
-                      <a:pPr algn="ctr"/>
-                      <a:r>
-                        <a:rPr sz="900">
-                          <a:solidFill>
-                            <a:srgbClr val="101010"/>
-                          </a:solidFill>
-                          <a:latin typeface="Calibri"/>
-                        </a:rPr>
-                        <a:t>+$100</a:t>
+                        <a:rPr sz="800">
+                          <a:solidFill>
+                            <a:srgbClr val="101010"/>
+                          </a:solidFill>
+                          <a:latin typeface="Calibri"/>
+                        </a:rPr>
+                        <a:t>$1,100</a:t>
+                      </a:r>
+                    </a:p>
+                  </a:txBody>
+                  <a:tcPr>
+                    <a:solidFill>
+                      <a:srgbClr val="FFFFFF"/>
+                    </a:solidFill>
+                  </a:tcPr>
+                </a:tc>
+                <a:tc>
+                  <a:txBody>
+                    <a:bodyPr lIns="45720" rIns="45720" tIns="18288" bIns="18288" wrap="square" anchor="ctr"/>
+                    <a:lstStyle/>
+                    <a:p>
+                      <a:pPr algn="ctr"/>
+                      <a:r>
+                        <a:rPr sz="800">
+                          <a:solidFill>
+                            <a:srgbClr val="101010"/>
+                          </a:solidFill>
+                          <a:latin typeface="Calibri"/>
+                        </a:rPr>
+                        <a:t>+$600</a:t>
                       </a:r>
                     </a:p>
                   </a:txBody>
@@ -9972,38 +10781,107 @@
                   </a:tcPr>
                 </a:tc>
               </a:tr>
-              <a:tr h="256032">
-                <a:tc>
-                  <a:txBody>
-                    <a:bodyPr lIns="45720" rIns="45720" tIns="18288" bIns="18288" wrap="square" anchor="ctr"/>
-                    <a:lstStyle/>
-                    <a:p>
-                      <a:pPr algn="ctr"/>
-                      <a:r>
-                        <a:rPr sz="900" b="1">
-                          <a:solidFill>
-                            <a:srgbClr val="101010"/>
-                          </a:solidFill>
-                          <a:latin typeface="Calibri"/>
-                        </a:rPr>
-                        <a:t>Dialinerys Mar</a:t>
-                      </a:r>
-                    </a:p>
-                  </a:txBody>
-                  <a:tcPr>
-                    <a:solidFill>
-                      <a:srgbClr val="F2F2F2"/>
-                    </a:solidFill>
-                  </a:tcPr>
-                </a:tc>
-                <a:tc>
-                  <a:txBody>
-                    <a:bodyPr lIns="45720" rIns="45720" tIns="18288" bIns="18288" wrap="square" anchor="ctr"/>
-                    <a:lstStyle/>
-                    <a:p>
-                      <a:pPr algn="ctr"/>
-                      <a:r>
-                        <a:rPr sz="900">
+              <a:tr h="274320">
+                <a:tc>
+                  <a:txBody>
+                    <a:bodyPr lIns="45720" rIns="45720" tIns="18288" bIns="18288" wrap="square" anchor="ctr"/>
+                    <a:lstStyle/>
+                    <a:p>
+                      <a:pPr algn="ctr"/>
+                      <a:r>
+                        <a:rPr sz="800" b="1">
+                          <a:solidFill>
+                            <a:srgbClr val="101010"/>
+                          </a:solidFill>
+                          <a:latin typeface="Calibri"/>
+                        </a:rPr>
+                        <a:t>Dialiner Mar</a:t>
+                      </a:r>
+                    </a:p>
+                  </a:txBody>
+                  <a:tcPr>
+                    <a:solidFill>
+                      <a:srgbClr val="F2F2F2"/>
+                    </a:solidFill>
+                  </a:tcPr>
+                </a:tc>
+                <a:tc>
+                  <a:txBody>
+                    <a:bodyPr lIns="45720" rIns="45720" tIns="18288" bIns="18288" wrap="square" anchor="ctr"/>
+                    <a:lstStyle/>
+                    <a:p>
+                      <a:pPr algn="ctr"/>
+                      <a:r>
+                        <a:rPr sz="800">
+                          <a:solidFill>
+                            <a:srgbClr val="101010"/>
+                          </a:solidFill>
+                          <a:latin typeface="Calibri"/>
+                        </a:rPr>
+                        <a:t>38 / $52k</a:t>
+                      </a:r>
+                    </a:p>
+                  </a:txBody>
+                  <a:tcPr>
+                    <a:solidFill>
+                      <a:srgbClr val="F2F2F2"/>
+                    </a:solidFill>
+                  </a:tcPr>
+                </a:tc>
+                <a:tc>
+                  <a:txBody>
+                    <a:bodyPr lIns="45720" rIns="45720" tIns="18288" bIns="18288" wrap="square" anchor="ctr"/>
+                    <a:lstStyle/>
+                    <a:p>
+                      <a:pPr algn="ctr"/>
+                      <a:r>
+                        <a:rPr sz="800">
+                          <a:solidFill>
+                            <a:srgbClr val="101010"/>
+                          </a:solidFill>
+                          <a:latin typeface="Calibri"/>
+                        </a:rPr>
+                        <a:t>35 / $48k</a:t>
+                      </a:r>
+                    </a:p>
+                  </a:txBody>
+                  <a:tcPr>
+                    <a:solidFill>
+                      <a:srgbClr val="F2F2F2"/>
+                    </a:solidFill>
+                  </a:tcPr>
+                </a:tc>
+                <a:tc>
+                  <a:txBody>
+                    <a:bodyPr lIns="45720" rIns="45720" tIns="18288" bIns="18288" wrap="square" anchor="ctr"/>
+                    <a:lstStyle/>
+                    <a:p>
+                      <a:pPr algn="ctr"/>
+                      <a:r>
+                        <a:rPr sz="800">
+                          <a:solidFill>
+                            <a:srgbClr val="101010"/>
+                          </a:solidFill>
+                          <a:latin typeface="Calibri"/>
+                        </a:rPr>
+                        <a:t>41 / $54k</a:t>
+                      </a:r>
+                    </a:p>
+                  </a:txBody>
+                  <a:tcPr>
+                    <a:solidFill>
+                      <a:srgbClr val="F2F2F2"/>
+                    </a:solidFill>
+                  </a:tcPr>
+                </a:tc>
+                <a:tc>
+                  <a:txBody>
+                    <a:bodyPr lIns="45720" rIns="45720" tIns="18288" bIns="18288" wrap="square" anchor="ctr"/>
+                    <a:lstStyle/>
+                    <a:p>
+                      <a:pPr algn="ctr"/>
+                      <a:r>
+                        <a:rPr sz="800">
                           <a:solidFill>
                             <a:srgbClr val="101010"/>
                           </a:solidFill>
@@ -10026,36 +10904,36 @@
                     <a:p>
                       <a:pPr algn="ctr"/>
                       <a:r>
-                        <a:rPr sz="900">
-                          <a:solidFill>
-                            <a:srgbClr val="101010"/>
-                          </a:solidFill>
-                          <a:latin typeface="Calibri"/>
-                        </a:rPr>
-                        <a:t>$700</a:t>
-                      </a:r>
-                    </a:p>
-                  </a:txBody>
-                  <a:tcPr>
-                    <a:solidFill>
-                      <a:srgbClr val="F2F2F2"/>
-                    </a:solidFill>
-                  </a:tcPr>
-                </a:tc>
-                <a:tc>
-                  <a:txBody>
-                    <a:bodyPr lIns="45720" rIns="45720" tIns="18288" bIns="18288" wrap="square" anchor="ctr"/>
-                    <a:lstStyle/>
-                    <a:p>
-                      <a:pPr algn="ctr"/>
-                      <a:r>
-                        <a:rPr sz="900">
-                          <a:solidFill>
-                            <a:srgbClr val="101010"/>
-                          </a:solidFill>
-                          <a:latin typeface="Calibri"/>
-                        </a:rPr>
-                        <a:t>+$20</a:t>
+                        <a:rPr sz="800">
+                          <a:solidFill>
+                            <a:srgbClr val="101010"/>
+                          </a:solidFill>
+                          <a:latin typeface="Calibri"/>
+                        </a:rPr>
+                        <a:t>$1,200</a:t>
+                      </a:r>
+                    </a:p>
+                  </a:txBody>
+                  <a:tcPr>
+                    <a:solidFill>
+                      <a:srgbClr val="F2F2F2"/>
+                    </a:solidFill>
+                  </a:tcPr>
+                </a:tc>
+                <a:tc>
+                  <a:txBody>
+                    <a:bodyPr lIns="45720" rIns="45720" tIns="18288" bIns="18288" wrap="square" anchor="ctr"/>
+                    <a:lstStyle/>
+                    <a:p>
+                      <a:pPr algn="ctr"/>
+                      <a:r>
+                        <a:rPr sz="800">
+                          <a:solidFill>
+                            <a:srgbClr val="101010"/>
+                          </a:solidFill>
+                          <a:latin typeface="Calibri"/>
+                        </a:rPr>
+                        <a:t>+$520</a:t>
                       </a:r>
                     </a:p>
                   </a:txBody>
@@ -10066,90 +10944,159 @@
                   </a:tcPr>
                 </a:tc>
               </a:tr>
-              <a:tr h="256032">
-                <a:tc>
-                  <a:txBody>
-                    <a:bodyPr lIns="45720" rIns="45720" tIns="18288" bIns="18288" wrap="square" anchor="ctr"/>
-                    <a:lstStyle/>
-                    <a:p>
-                      <a:pPr algn="ctr"/>
-                      <a:r>
-                        <a:rPr sz="900" b="1">
-                          <a:solidFill>
-                            <a:srgbClr val="101010"/>
-                          </a:solidFill>
-                          <a:latin typeface="Calibri"/>
-                        </a:rPr>
-                        <a:t>Abel Feb</a:t>
-                      </a:r>
-                    </a:p>
-                  </a:txBody>
-                  <a:tcPr>
-                    <a:solidFill>
-                      <a:srgbClr val="FFFFFF"/>
-                    </a:solidFill>
-                  </a:tcPr>
-                </a:tc>
-                <a:tc>
-                  <a:txBody>
-                    <a:bodyPr lIns="45720" rIns="45720" tIns="18288" bIns="18288" wrap="square" anchor="ctr"/>
-                    <a:lstStyle/>
-                    <a:p>
-                      <a:pPr algn="ctr"/>
-                      <a:r>
-                        <a:rPr sz="900">
-                          <a:solidFill>
-                            <a:srgbClr val="101010"/>
-                          </a:solidFill>
-                          <a:latin typeface="Calibri"/>
-                        </a:rPr>
-                        <a:t>$0</a:t>
-                      </a:r>
-                    </a:p>
-                  </a:txBody>
-                  <a:tcPr>
-                    <a:solidFill>
-                      <a:srgbClr val="FFFFFF"/>
-                    </a:solidFill>
-                  </a:tcPr>
-                </a:tc>
-                <a:tc>
-                  <a:txBody>
-                    <a:bodyPr lIns="45720" rIns="45720" tIns="18288" bIns="18288" wrap="square" anchor="ctr"/>
-                    <a:lstStyle/>
-                    <a:p>
-                      <a:pPr algn="ctr"/>
-                      <a:r>
-                        <a:rPr sz="900">
-                          <a:solidFill>
-                            <a:srgbClr val="101010"/>
-                          </a:solidFill>
-                          <a:latin typeface="Calibri"/>
-                        </a:rPr>
-                        <a:t>$0</a:t>
-                      </a:r>
-                    </a:p>
-                  </a:txBody>
-                  <a:tcPr>
-                    <a:solidFill>
-                      <a:srgbClr val="FFFFFF"/>
-                    </a:solidFill>
-                  </a:tcPr>
-                </a:tc>
-                <a:tc>
-                  <a:txBody>
-                    <a:bodyPr lIns="45720" rIns="45720" tIns="18288" bIns="18288" wrap="square" anchor="ctr"/>
-                    <a:lstStyle/>
-                    <a:p>
-                      <a:pPr algn="ctr"/>
-                      <a:r>
-                        <a:rPr sz="900">
-                          <a:solidFill>
-                            <a:srgbClr val="101010"/>
-                          </a:solidFill>
-                          <a:latin typeface="Calibri"/>
-                        </a:rPr>
-                        <a:t>$0</a:t>
+              <a:tr h="274320">
+                <a:tc>
+                  <a:txBody>
+                    <a:bodyPr lIns="45720" rIns="45720" tIns="18288" bIns="18288" wrap="square" anchor="ctr"/>
+                    <a:lstStyle/>
+                    <a:p>
+                      <a:pPr algn="ctr"/>
+                      <a:r>
+                        <a:rPr sz="800" b="1">
+                          <a:solidFill>
+                            <a:srgbClr val="101010"/>
+                          </a:solidFill>
+                          <a:latin typeface="Calibri"/>
+                        </a:rPr>
+                        <a:t>Dialiner Jan</a:t>
+                      </a:r>
+                    </a:p>
+                  </a:txBody>
+                  <a:tcPr>
+                    <a:solidFill>
+                      <a:srgbClr val="FFFFFF"/>
+                    </a:solidFill>
+                  </a:tcPr>
+                </a:tc>
+                <a:tc>
+                  <a:txBody>
+                    <a:bodyPr lIns="45720" rIns="45720" tIns="18288" bIns="18288" wrap="square" anchor="ctr"/>
+                    <a:lstStyle/>
+                    <a:p>
+                      <a:pPr algn="ctr"/>
+                      <a:r>
+                        <a:rPr sz="800">
+                          <a:solidFill>
+                            <a:srgbClr val="101010"/>
+                          </a:solidFill>
+                          <a:latin typeface="Calibri"/>
+                        </a:rPr>
+                        <a:t>23 / $40k</a:t>
+                      </a:r>
+                    </a:p>
+                  </a:txBody>
+                  <a:tcPr>
+                    <a:solidFill>
+                      <a:srgbClr val="FFFFFF"/>
+                    </a:solidFill>
+                  </a:tcPr>
+                </a:tc>
+                <a:tc>
+                  <a:txBody>
+                    <a:bodyPr lIns="45720" rIns="45720" tIns="18288" bIns="18288" wrap="square" anchor="ctr"/>
+                    <a:lstStyle/>
+                    <a:p>
+                      <a:pPr algn="ctr"/>
+                      <a:r>
+                        <a:rPr sz="800">
+                          <a:solidFill>
+                            <a:srgbClr val="101010"/>
+                          </a:solidFill>
+                          <a:latin typeface="Calibri"/>
+                        </a:rPr>
+                        <a:t>24 / $33k</a:t>
+                      </a:r>
+                    </a:p>
+                  </a:txBody>
+                  <a:tcPr>
+                    <a:solidFill>
+                      <a:srgbClr val="FFFFFF"/>
+                    </a:solidFill>
+                  </a:tcPr>
+                </a:tc>
+                <a:tc>
+                  <a:txBody>
+                    <a:bodyPr lIns="45720" rIns="45720" tIns="18288" bIns="18288" wrap="square" anchor="ctr"/>
+                    <a:lstStyle/>
+                    <a:p>
+                      <a:pPr algn="ctr"/>
+                      <a:r>
+                        <a:rPr sz="800">
+                          <a:solidFill>
+                            <a:srgbClr val="101010"/>
+                          </a:solidFill>
+                          <a:latin typeface="Calibri"/>
+                        </a:rPr>
+                        <a:t>35 / $45k</a:t>
+                      </a:r>
+                    </a:p>
+                  </a:txBody>
+                  <a:tcPr>
+                    <a:solidFill>
+                      <a:srgbClr val="FFFFFF"/>
+                    </a:solidFill>
+                  </a:tcPr>
+                </a:tc>
+                <a:tc>
+                  <a:txBody>
+                    <a:bodyPr lIns="45720" rIns="45720" tIns="18288" bIns="18288" wrap="square" anchor="ctr"/>
+                    <a:lstStyle/>
+                    <a:p>
+                      <a:pPr algn="ctr"/>
+                      <a:r>
+                        <a:rPr sz="800">
+                          <a:solidFill>
+                            <a:srgbClr val="101010"/>
+                          </a:solidFill>
+                          <a:latin typeface="Calibri"/>
+                        </a:rPr>
+                        <a:t>$350</a:t>
+                      </a:r>
+                    </a:p>
+                  </a:txBody>
+                  <a:tcPr>
+                    <a:solidFill>
+                      <a:srgbClr val="FFFFFF"/>
+                    </a:solidFill>
+                  </a:tcPr>
+                </a:tc>
+                <a:tc>
+                  <a:txBody>
+                    <a:bodyPr lIns="45720" rIns="45720" tIns="18288" bIns="18288" wrap="square" anchor="ctr"/>
+                    <a:lstStyle/>
+                    <a:p>
+                      <a:pPr algn="ctr"/>
+                      <a:r>
+                        <a:rPr sz="800">
+                          <a:solidFill>
+                            <a:srgbClr val="101010"/>
+                          </a:solidFill>
+                          <a:latin typeface="Calibri"/>
+                        </a:rPr>
+                        <a:t>$850</a:t>
+                      </a:r>
+                    </a:p>
+                  </a:txBody>
+                  <a:tcPr>
+                    <a:solidFill>
+                      <a:srgbClr val="FFFFFF"/>
+                    </a:solidFill>
+                  </a:tcPr>
+                </a:tc>
+                <a:tc>
+                  <a:txBody>
+                    <a:bodyPr lIns="45720" rIns="45720" tIns="18288" bIns="18288" wrap="square" anchor="ctr"/>
+                    <a:lstStyle/>
+                    <a:p>
+                      <a:pPr algn="ctr"/>
+                      <a:r>
+                        <a:rPr sz="800">
+                          <a:solidFill>
+                            <a:srgbClr val="101010"/>
+                          </a:solidFill>
+                          <a:latin typeface="Calibri"/>
+                        </a:rPr>
+                        <a:t>+$500</a:t>
                       </a:r>
                     </a:p>
                   </a:txBody>
@@ -10160,38 +11107,270 @@
                   </a:tcPr>
                 </a:tc>
               </a:tr>
-              <a:tr h="256032">
-                <a:tc>
-                  <a:txBody>
-                    <a:bodyPr lIns="45720" rIns="45720" tIns="18288" bIns="18288" wrap="square" anchor="ctr"/>
-                    <a:lstStyle/>
-                    <a:p>
-                      <a:pPr algn="ctr"/>
-                      <a:r>
-                        <a:rPr sz="900" b="1">
-                          <a:solidFill>
-                            <a:srgbClr val="101010"/>
-                          </a:solidFill>
-                          <a:latin typeface="Calibri"/>
-                        </a:rPr>
-                        <a:t>Dialinerys Jan</a:t>
-                      </a:r>
-                    </a:p>
-                  </a:txBody>
-                  <a:tcPr>
-                    <a:solidFill>
-                      <a:srgbClr val="F2F2F2"/>
-                    </a:solidFill>
-                  </a:tcPr>
-                </a:tc>
-                <a:tc>
-                  <a:txBody>
-                    <a:bodyPr lIns="45720" rIns="45720" tIns="18288" bIns="18288" wrap="square" anchor="ctr"/>
-                    <a:lstStyle/>
-                    <a:p>
-                      <a:pPr algn="ctr"/>
-                      <a:r>
-                        <a:rPr sz="900">
+              <a:tr h="274320">
+                <a:tc>
+                  <a:txBody>
+                    <a:bodyPr lIns="45720" rIns="45720" tIns="18288" bIns="18288" wrap="square" anchor="ctr"/>
+                    <a:lstStyle/>
+                    <a:p>
+                      <a:pPr algn="ctr"/>
+                      <a:r>
+                        <a:rPr sz="800" b="1">
+                          <a:solidFill>
+                            <a:srgbClr val="101010"/>
+                          </a:solidFill>
+                          <a:latin typeface="Calibri"/>
+                        </a:rPr>
+                        <a:t>Melissa Feb</a:t>
+                      </a:r>
+                    </a:p>
+                  </a:txBody>
+                  <a:tcPr>
+                    <a:solidFill>
+                      <a:srgbClr val="F2F2F2"/>
+                    </a:solidFill>
+                  </a:tcPr>
+                </a:tc>
+                <a:tc>
+                  <a:txBody>
+                    <a:bodyPr lIns="45720" rIns="45720" tIns="18288" bIns="18288" wrap="square" anchor="ctr"/>
+                    <a:lstStyle/>
+                    <a:p>
+                      <a:pPr algn="ctr"/>
+                      <a:r>
+                        <a:rPr sz="800">
+                          <a:solidFill>
+                            <a:srgbClr val="101010"/>
+                          </a:solidFill>
+                          <a:latin typeface="Calibri"/>
+                        </a:rPr>
+                        <a:t>13 / $8k</a:t>
+                      </a:r>
+                    </a:p>
+                  </a:txBody>
+                  <a:tcPr>
+                    <a:solidFill>
+                      <a:srgbClr val="F2F2F2"/>
+                    </a:solidFill>
+                  </a:tcPr>
+                </a:tc>
+                <a:tc>
+                  <a:txBody>
+                    <a:bodyPr lIns="45720" rIns="45720" tIns="18288" bIns="18288" wrap="square" anchor="ctr"/>
+                    <a:lstStyle/>
+                    <a:p>
+                      <a:pPr algn="ctr"/>
+                      <a:r>
+                        <a:rPr sz="800">
+                          <a:solidFill>
+                            <a:srgbClr val="101010"/>
+                          </a:solidFill>
+                          <a:latin typeface="Calibri"/>
+                        </a:rPr>
+                        <a:t>19 / $25k</a:t>
+                      </a:r>
+                    </a:p>
+                  </a:txBody>
+                  <a:tcPr>
+                    <a:solidFill>
+                      <a:srgbClr val="F2F2F2"/>
+                    </a:solidFill>
+                  </a:tcPr>
+                </a:tc>
+                <a:tc>
+                  <a:txBody>
+                    <a:bodyPr lIns="45720" rIns="45720" tIns="18288" bIns="18288" wrap="square" anchor="ctr"/>
+                    <a:lstStyle/>
+                    <a:p>
+                      <a:pPr algn="ctr"/>
+                      <a:r>
+                        <a:rPr sz="800">
+                          <a:solidFill>
+                            <a:srgbClr val="101010"/>
+                          </a:solidFill>
+                          <a:latin typeface="Calibri"/>
+                        </a:rPr>
+                        <a:t>19 / $26k</a:t>
+                      </a:r>
+                    </a:p>
+                  </a:txBody>
+                  <a:tcPr>
+                    <a:solidFill>
+                      <a:srgbClr val="F2F2F2"/>
+                    </a:solidFill>
+                  </a:tcPr>
+                </a:tc>
+                <a:tc>
+                  <a:txBody>
+                    <a:bodyPr lIns="45720" rIns="45720" tIns="18288" bIns="18288" wrap="square" anchor="ctr"/>
+                    <a:lstStyle/>
+                    <a:p>
+                      <a:pPr algn="ctr"/>
+                      <a:r>
+                        <a:rPr sz="800">
+                          <a:solidFill>
+                            <a:srgbClr val="101010"/>
+                          </a:solidFill>
+                          <a:latin typeface="Calibri"/>
+                        </a:rPr>
+                        <a:t>$250</a:t>
+                      </a:r>
+                    </a:p>
+                  </a:txBody>
+                  <a:tcPr>
+                    <a:solidFill>
+                      <a:srgbClr val="F2F2F2"/>
+                    </a:solidFill>
+                  </a:tcPr>
+                </a:tc>
+                <a:tc>
+                  <a:txBody>
+                    <a:bodyPr lIns="45720" rIns="45720" tIns="18288" bIns="18288" wrap="square" anchor="ctr"/>
+                    <a:lstStyle/>
+                    <a:p>
+                      <a:pPr algn="ctr"/>
+                      <a:r>
+                        <a:rPr sz="800">
+                          <a:solidFill>
+                            <a:srgbClr val="101010"/>
+                          </a:solidFill>
+                          <a:latin typeface="Calibri"/>
+                        </a:rPr>
+                        <a:t>$750</a:t>
+                      </a:r>
+                    </a:p>
+                  </a:txBody>
+                  <a:tcPr>
+                    <a:solidFill>
+                      <a:srgbClr val="F2F2F2"/>
+                    </a:solidFill>
+                  </a:tcPr>
+                </a:tc>
+                <a:tc>
+                  <a:txBody>
+                    <a:bodyPr lIns="45720" rIns="45720" tIns="18288" bIns="18288" wrap="square" anchor="ctr"/>
+                    <a:lstStyle/>
+                    <a:p>
+                      <a:pPr algn="ctr"/>
+                      <a:r>
+                        <a:rPr sz="800">
+                          <a:solidFill>
+                            <a:srgbClr val="101010"/>
+                          </a:solidFill>
+                          <a:latin typeface="Calibri"/>
+                        </a:rPr>
+                        <a:t>+$500</a:t>
+                      </a:r>
+                    </a:p>
+                  </a:txBody>
+                  <a:tcPr>
+                    <a:solidFill>
+                      <a:srgbClr val="F2F2F2"/>
+                    </a:solidFill>
+                  </a:tcPr>
+                </a:tc>
+              </a:tr>
+              <a:tr h="274320">
+                <a:tc>
+                  <a:txBody>
+                    <a:bodyPr lIns="45720" rIns="45720" tIns="18288" bIns="18288" wrap="square" anchor="ctr"/>
+                    <a:lstStyle/>
+                    <a:p>
+                      <a:pPr algn="ctr"/>
+                      <a:r>
+                        <a:rPr sz="800" b="1">
+                          <a:solidFill>
+                            <a:srgbClr val="101010"/>
+                          </a:solidFill>
+                          <a:latin typeface="Calibri"/>
+                        </a:rPr>
+                        <a:t>Monica Jan</a:t>
+                      </a:r>
+                    </a:p>
+                  </a:txBody>
+                  <a:tcPr>
+                    <a:solidFill>
+                      <a:srgbClr val="FFFFFF"/>
+                    </a:solidFill>
+                  </a:tcPr>
+                </a:tc>
+                <a:tc>
+                  <a:txBody>
+                    <a:bodyPr lIns="45720" rIns="45720" tIns="18288" bIns="18288" wrap="square" anchor="ctr"/>
+                    <a:lstStyle/>
+                    <a:p>
+                      <a:pPr algn="ctr"/>
+                      <a:r>
+                        <a:rPr sz="800">
+                          <a:solidFill>
+                            <a:srgbClr val="101010"/>
+                          </a:solidFill>
+                          <a:latin typeface="Calibri"/>
+                        </a:rPr>
+                        <a:t>23 / $29k</a:t>
+                      </a:r>
+                    </a:p>
+                  </a:txBody>
+                  <a:tcPr>
+                    <a:solidFill>
+                      <a:srgbClr val="FFFFFF"/>
+                    </a:solidFill>
+                  </a:tcPr>
+                </a:tc>
+                <a:tc>
+                  <a:txBody>
+                    <a:bodyPr lIns="45720" rIns="45720" tIns="18288" bIns="18288" wrap="square" anchor="ctr"/>
+                    <a:lstStyle/>
+                    <a:p>
+                      <a:pPr algn="ctr"/>
+                      <a:r>
+                        <a:rPr sz="800">
+                          <a:solidFill>
+                            <a:srgbClr val="101010"/>
+                          </a:solidFill>
+                          <a:latin typeface="Calibri"/>
+                        </a:rPr>
+                        <a:t>19 / $24k</a:t>
+                      </a:r>
+                    </a:p>
+                  </a:txBody>
+                  <a:tcPr>
+                    <a:solidFill>
+                      <a:srgbClr val="FFFFFF"/>
+                    </a:solidFill>
+                  </a:tcPr>
+                </a:tc>
+                <a:tc>
+                  <a:txBody>
+                    <a:bodyPr lIns="45720" rIns="45720" tIns="18288" bIns="18288" wrap="square" anchor="ctr"/>
+                    <a:lstStyle/>
+                    <a:p>
+                      <a:pPr algn="ctr"/>
+                      <a:r>
+                        <a:rPr sz="800">
+                          <a:solidFill>
+                            <a:srgbClr val="101010"/>
+                          </a:solidFill>
+                          <a:latin typeface="Calibri"/>
+                        </a:rPr>
+                        <a:t>24 / $31k</a:t>
+                      </a:r>
+                    </a:p>
+                  </a:txBody>
+                  <a:tcPr>
+                    <a:solidFill>
+                      <a:srgbClr val="FFFFFF"/>
+                    </a:solidFill>
+                  </a:tcPr>
+                </a:tc>
+                <a:tc>
+                  <a:txBody>
+                    <a:bodyPr lIns="45720" rIns="45720" tIns="18288" bIns="18288" wrap="square" anchor="ctr"/>
+                    <a:lstStyle/>
+                    <a:p>
+                      <a:pPr algn="ctr"/>
+                      <a:r>
+                        <a:rPr sz="800">
                           <a:solidFill>
                             <a:srgbClr val="101010"/>
                           </a:solidFill>
@@ -10203,18 +11382,158 @@
                   </a:txBody>
                   <a:tcPr>
                     <a:solidFill>
-                      <a:srgbClr val="F2F2F2"/>
-                    </a:solidFill>
-                  </a:tcPr>
-                </a:tc>
-                <a:tc>
-                  <a:txBody>
-                    <a:bodyPr lIns="45720" rIns="45720" tIns="18288" bIns="18288" wrap="square" anchor="ctr"/>
-                    <a:lstStyle/>
-                    <a:p>
-                      <a:pPr algn="ctr"/>
-                      <a:r>
-                        <a:rPr sz="900">
+                      <a:srgbClr val="FFFFFF"/>
+                    </a:solidFill>
+                  </a:tcPr>
+                </a:tc>
+                <a:tc>
+                  <a:txBody>
+                    <a:bodyPr lIns="45720" rIns="45720" tIns="18288" bIns="18288" wrap="square" anchor="ctr"/>
+                    <a:lstStyle/>
+                    <a:p>
+                      <a:pPr algn="ctr"/>
+                      <a:r>
+                        <a:rPr sz="800">
+                          <a:solidFill>
+                            <a:srgbClr val="101010"/>
+                          </a:solidFill>
+                          <a:latin typeface="Calibri"/>
+                        </a:rPr>
+                        <a:t>$750</a:t>
+                      </a:r>
+                    </a:p>
+                  </a:txBody>
+                  <a:tcPr>
+                    <a:solidFill>
+                      <a:srgbClr val="FFFFFF"/>
+                    </a:solidFill>
+                  </a:tcPr>
+                </a:tc>
+                <a:tc>
+                  <a:txBody>
+                    <a:bodyPr lIns="45720" rIns="45720" tIns="18288" bIns="18288" wrap="square" anchor="ctr"/>
+                    <a:lstStyle/>
+                    <a:p>
+                      <a:pPr algn="ctr"/>
+                      <a:r>
+                        <a:rPr sz="800">
+                          <a:solidFill>
+                            <a:srgbClr val="101010"/>
+                          </a:solidFill>
+                          <a:latin typeface="Calibri"/>
+                        </a:rPr>
+                        <a:t>+$400</a:t>
+                      </a:r>
+                    </a:p>
+                  </a:txBody>
+                  <a:tcPr>
+                    <a:solidFill>
+                      <a:srgbClr val="FFFFFF"/>
+                    </a:solidFill>
+                  </a:tcPr>
+                </a:tc>
+              </a:tr>
+              <a:tr h="274320">
+                <a:tc>
+                  <a:txBody>
+                    <a:bodyPr lIns="45720" rIns="45720" tIns="18288" bIns="18288" wrap="square" anchor="ctr"/>
+                    <a:lstStyle/>
+                    <a:p>
+                      <a:pPr algn="ctr"/>
+                      <a:r>
+                        <a:rPr sz="800" b="1">
+                          <a:solidFill>
+                            <a:srgbClr val="101010"/>
+                          </a:solidFill>
+                          <a:latin typeface="Calibri"/>
+                        </a:rPr>
+                        <a:t>Monica Feb</a:t>
+                      </a:r>
+                    </a:p>
+                  </a:txBody>
+                  <a:tcPr>
+                    <a:solidFill>
+                      <a:srgbClr val="F2F2F2"/>
+                    </a:solidFill>
+                  </a:tcPr>
+                </a:tc>
+                <a:tc>
+                  <a:txBody>
+                    <a:bodyPr lIns="45720" rIns="45720" tIns="18288" bIns="18288" wrap="square" anchor="ctr"/>
+                    <a:lstStyle/>
+                    <a:p>
+                      <a:pPr algn="ctr"/>
+                      <a:r>
+                        <a:rPr sz="800">
+                          <a:solidFill>
+                            <a:srgbClr val="101010"/>
+                          </a:solidFill>
+                          <a:latin typeface="Calibri"/>
+                        </a:rPr>
+                        <a:t>21 / $32k</a:t>
+                      </a:r>
+                    </a:p>
+                  </a:txBody>
+                  <a:tcPr>
+                    <a:solidFill>
+                      <a:srgbClr val="F2F2F2"/>
+                    </a:solidFill>
+                  </a:tcPr>
+                </a:tc>
+                <a:tc>
+                  <a:txBody>
+                    <a:bodyPr lIns="45720" rIns="45720" tIns="18288" bIns="18288" wrap="square" anchor="ctr"/>
+                    <a:lstStyle/>
+                    <a:p>
+                      <a:pPr algn="ctr"/>
+                      <a:r>
+                        <a:rPr sz="800">
+                          <a:solidFill>
+                            <a:srgbClr val="101010"/>
+                          </a:solidFill>
+                          <a:latin typeface="Calibri"/>
+                        </a:rPr>
+                        <a:t>15 / $24k</a:t>
+                      </a:r>
+                    </a:p>
+                  </a:txBody>
+                  <a:tcPr>
+                    <a:solidFill>
+                      <a:srgbClr val="F2F2F2"/>
+                    </a:solidFill>
+                  </a:tcPr>
+                </a:tc>
+                <a:tc>
+                  <a:txBody>
+                    <a:bodyPr lIns="45720" rIns="45720" tIns="18288" bIns="18288" wrap="square" anchor="ctr"/>
+                    <a:lstStyle/>
+                    <a:p>
+                      <a:pPr algn="ctr"/>
+                      <a:r>
+                        <a:rPr sz="800">
+                          <a:solidFill>
+                            <a:srgbClr val="101010"/>
+                          </a:solidFill>
+                          <a:latin typeface="Calibri"/>
+                        </a:rPr>
+                        <a:t>16 / $27k</a:t>
+                      </a:r>
+                    </a:p>
+                  </a:txBody>
+                  <a:tcPr>
+                    <a:solidFill>
+                      <a:srgbClr val="F2F2F2"/>
+                    </a:solidFill>
+                  </a:tcPr>
+                </a:tc>
+                <a:tc>
+                  <a:txBody>
+                    <a:bodyPr lIns="45720" rIns="45720" tIns="18288" bIns="18288" wrap="square" anchor="ctr"/>
+                    <a:lstStyle/>
+                    <a:p>
+                      <a:pPr algn="ctr"/>
+                      <a:r>
+                        <a:rPr sz="800">
                           <a:solidFill>
                             <a:srgbClr val="101010"/>
                           </a:solidFill>
@@ -10237,13 +11556,36 @@
                     <a:p>
                       <a:pPr algn="ctr"/>
                       <a:r>
-                        <a:rPr sz="900">
-                          <a:solidFill>
-                            <a:srgbClr val="101010"/>
-                          </a:solidFill>
-                          <a:latin typeface="Calibri"/>
-                        </a:rPr>
-                        <a:t>$0</a:t>
+                        <a:rPr sz="800">
+                          <a:solidFill>
+                            <a:srgbClr val="101010"/>
+                          </a:solidFill>
+                          <a:latin typeface="Calibri"/>
+                        </a:rPr>
+                        <a:t>$750</a:t>
+                      </a:r>
+                    </a:p>
+                  </a:txBody>
+                  <a:tcPr>
+                    <a:solidFill>
+                      <a:srgbClr val="F2F2F2"/>
+                    </a:solidFill>
+                  </a:tcPr>
+                </a:tc>
+                <a:tc>
+                  <a:txBody>
+                    <a:bodyPr lIns="45720" rIns="45720" tIns="18288" bIns="18288" wrap="square" anchor="ctr"/>
+                    <a:lstStyle/>
+                    <a:p>
+                      <a:pPr algn="ctr"/>
+                      <a:r>
+                        <a:rPr sz="800">
+                          <a:solidFill>
+                            <a:srgbClr val="101010"/>
+                          </a:solidFill>
+                          <a:latin typeface="Calibri"/>
+                        </a:rPr>
+                        <a:t>+$400</a:t>
                       </a:r>
                     </a:p>
                   </a:txBody>
@@ -10254,90 +11596,159 @@
                   </a:tcPr>
                 </a:tc>
               </a:tr>
-              <a:tr h="256032">
-                <a:tc>
-                  <a:txBody>
-                    <a:bodyPr lIns="45720" rIns="45720" tIns="18288" bIns="18288" wrap="square" anchor="ctr"/>
-                    <a:lstStyle/>
-                    <a:p>
-                      <a:pPr algn="ctr"/>
-                      <a:r>
-                        <a:rPr sz="900" b="1">
-                          <a:solidFill>
-                            <a:srgbClr val="101010"/>
-                          </a:solidFill>
-                          <a:latin typeface="Calibri"/>
-                        </a:rPr>
-                        <a:t>Melissa Feb</a:t>
-                      </a:r>
-                    </a:p>
-                  </a:txBody>
-                  <a:tcPr>
-                    <a:solidFill>
-                      <a:srgbClr val="FFFFFF"/>
-                    </a:solidFill>
-                  </a:tcPr>
-                </a:tc>
-                <a:tc>
-                  <a:txBody>
-                    <a:bodyPr lIns="45720" rIns="45720" tIns="18288" bIns="18288" wrap="square" anchor="ctr"/>
-                    <a:lstStyle/>
-                    <a:p>
-                      <a:pPr algn="ctr"/>
-                      <a:r>
-                        <a:rPr sz="900">
-                          <a:solidFill>
-                            <a:srgbClr val="101010"/>
-                          </a:solidFill>
-                          <a:latin typeface="Calibri"/>
-                        </a:rPr>
-                        <a:t>$250</a:t>
-                      </a:r>
-                    </a:p>
-                  </a:txBody>
-                  <a:tcPr>
-                    <a:solidFill>
-                      <a:srgbClr val="FFFFFF"/>
-                    </a:solidFill>
-                  </a:tcPr>
-                </a:tc>
-                <a:tc>
-                  <a:txBody>
-                    <a:bodyPr lIns="45720" rIns="45720" tIns="18288" bIns="18288" wrap="square" anchor="ctr"/>
-                    <a:lstStyle/>
-                    <a:p>
-                      <a:pPr algn="ctr"/>
-                      <a:r>
-                        <a:rPr sz="900">
-                          <a:solidFill>
-                            <a:srgbClr val="101010"/>
-                          </a:solidFill>
-                          <a:latin typeface="Calibri"/>
-                        </a:rPr>
-                        <a:t>$250</a:t>
-                      </a:r>
-                    </a:p>
-                  </a:txBody>
-                  <a:tcPr>
-                    <a:solidFill>
-                      <a:srgbClr val="FFFFFF"/>
-                    </a:solidFill>
-                  </a:tcPr>
-                </a:tc>
-                <a:tc>
-                  <a:txBody>
-                    <a:bodyPr lIns="45720" rIns="45720" tIns="18288" bIns="18288" wrap="square" anchor="ctr"/>
-                    <a:lstStyle/>
-                    <a:p>
-                      <a:pPr algn="ctr"/>
-                      <a:r>
-                        <a:rPr sz="900">
-                          <a:solidFill>
-                            <a:srgbClr val="101010"/>
-                          </a:solidFill>
-                          <a:latin typeface="Calibri"/>
-                        </a:rPr>
-                        <a:t>$0</a:t>
+              <a:tr h="274320">
+                <a:tc>
+                  <a:txBody>
+                    <a:bodyPr lIns="45720" rIns="45720" tIns="18288" bIns="18288" wrap="square" anchor="ctr"/>
+                    <a:lstStyle/>
+                    <a:p>
+                      <a:pPr algn="ctr"/>
+                      <a:r>
+                        <a:rPr sz="800" b="1">
+                          <a:solidFill>
+                            <a:srgbClr val="101010"/>
+                          </a:solidFill>
+                          <a:latin typeface="Calibri"/>
+                        </a:rPr>
+                        <a:t>Dialiner Feb</a:t>
+                      </a:r>
+                    </a:p>
+                  </a:txBody>
+                  <a:tcPr>
+                    <a:solidFill>
+                      <a:srgbClr val="FFFFFF"/>
+                    </a:solidFill>
+                  </a:tcPr>
+                </a:tc>
+                <a:tc>
+                  <a:txBody>
+                    <a:bodyPr lIns="45720" rIns="45720" tIns="18288" bIns="18288" wrap="square" anchor="ctr"/>
+                    <a:lstStyle/>
+                    <a:p>
+                      <a:pPr algn="ctr"/>
+                      <a:r>
+                        <a:rPr sz="800">
+                          <a:solidFill>
+                            <a:srgbClr val="101010"/>
+                          </a:solidFill>
+                          <a:latin typeface="Calibri"/>
+                        </a:rPr>
+                        <a:t>23 / $30k</a:t>
+                      </a:r>
+                    </a:p>
+                  </a:txBody>
+                  <a:tcPr>
+                    <a:solidFill>
+                      <a:srgbClr val="FFFFFF"/>
+                    </a:solidFill>
+                  </a:tcPr>
+                </a:tc>
+                <a:tc>
+                  <a:txBody>
+                    <a:bodyPr lIns="45720" rIns="45720" tIns="18288" bIns="18288" wrap="square" anchor="ctr"/>
+                    <a:lstStyle/>
+                    <a:p>
+                      <a:pPr algn="ctr"/>
+                      <a:r>
+                        <a:rPr sz="800">
+                          <a:solidFill>
+                            <a:srgbClr val="101010"/>
+                          </a:solidFill>
+                          <a:latin typeface="Calibri"/>
+                        </a:rPr>
+                        <a:t>28 / $43k</a:t>
+                      </a:r>
+                    </a:p>
+                  </a:txBody>
+                  <a:tcPr>
+                    <a:solidFill>
+                      <a:srgbClr val="FFFFFF"/>
+                    </a:solidFill>
+                  </a:tcPr>
+                </a:tc>
+                <a:tc>
+                  <a:txBody>
+                    <a:bodyPr lIns="45720" rIns="45720" tIns="18288" bIns="18288" wrap="square" anchor="ctr"/>
+                    <a:lstStyle/>
+                    <a:p>
+                      <a:pPr algn="ctr"/>
+                      <a:r>
+                        <a:rPr sz="800">
+                          <a:solidFill>
+                            <a:srgbClr val="101010"/>
+                          </a:solidFill>
+                          <a:latin typeface="Calibri"/>
+                        </a:rPr>
+                        <a:t>37 / $54k</a:t>
+                      </a:r>
+                    </a:p>
+                  </a:txBody>
+                  <a:tcPr>
+                    <a:solidFill>
+                      <a:srgbClr val="FFFFFF"/>
+                    </a:solidFill>
+                  </a:tcPr>
+                </a:tc>
+                <a:tc>
+                  <a:txBody>
+                    <a:bodyPr lIns="45720" rIns="45720" tIns="18288" bIns="18288" wrap="square" anchor="ctr"/>
+                    <a:lstStyle/>
+                    <a:p>
+                      <a:pPr algn="ctr"/>
+                      <a:r>
+                        <a:rPr sz="800">
+                          <a:solidFill>
+                            <a:srgbClr val="101010"/>
+                          </a:solidFill>
+                          <a:latin typeface="Calibri"/>
+                        </a:rPr>
+                        <a:t>$460</a:t>
+                      </a:r>
+                    </a:p>
+                  </a:txBody>
+                  <a:tcPr>
+                    <a:solidFill>
+                      <a:srgbClr val="FFFFFF"/>
+                    </a:solidFill>
+                  </a:tcPr>
+                </a:tc>
+                <a:tc>
+                  <a:txBody>
+                    <a:bodyPr lIns="45720" rIns="45720" tIns="18288" bIns="18288" wrap="square" anchor="ctr"/>
+                    <a:lstStyle/>
+                    <a:p>
+                      <a:pPr algn="ctr"/>
+                      <a:r>
+                        <a:rPr sz="800">
+                          <a:solidFill>
+                            <a:srgbClr val="101010"/>
+                          </a:solidFill>
+                          <a:latin typeface="Calibri"/>
+                        </a:rPr>
+                        <a:t>$850</a:t>
+                      </a:r>
+                    </a:p>
+                  </a:txBody>
+                  <a:tcPr>
+                    <a:solidFill>
+                      <a:srgbClr val="FFFFFF"/>
+                    </a:solidFill>
+                  </a:tcPr>
+                </a:tc>
+                <a:tc>
+                  <a:txBody>
+                    <a:bodyPr lIns="45720" rIns="45720" tIns="18288" bIns="18288" wrap="square" anchor="ctr"/>
+                    <a:lstStyle/>
+                    <a:p>
+                      <a:pPr algn="ctr"/>
+                      <a:r>
+                        <a:rPr sz="800">
+                          <a:solidFill>
+                            <a:srgbClr val="101010"/>
+                          </a:solidFill>
+                          <a:latin typeface="Calibri"/>
+                        </a:rPr>
+                        <a:t>+$390</a:t>
                       </a:r>
                     </a:p>
                   </a:txBody>
@@ -10348,90 +11759,159 @@
                   </a:tcPr>
                 </a:tc>
               </a:tr>
-              <a:tr h="256032">
-                <a:tc>
-                  <a:txBody>
-                    <a:bodyPr lIns="45720" rIns="45720" tIns="18288" bIns="18288" wrap="square" anchor="ctr"/>
-                    <a:lstStyle/>
-                    <a:p>
-                      <a:pPr algn="ctr"/>
-                      <a:r>
-                        <a:rPr sz="900" b="1">
-                          <a:solidFill>
-                            <a:srgbClr val="101010"/>
-                          </a:solidFill>
-                          <a:latin typeface="Calibri"/>
-                        </a:rPr>
-                        <a:t>Thalia Jan</a:t>
-                      </a:r>
-                    </a:p>
-                  </a:txBody>
-                  <a:tcPr>
-                    <a:solidFill>
-                      <a:srgbClr val="F2F2F2"/>
-                    </a:solidFill>
-                  </a:tcPr>
-                </a:tc>
-                <a:tc>
-                  <a:txBody>
-                    <a:bodyPr lIns="45720" rIns="45720" tIns="18288" bIns="18288" wrap="square" anchor="ctr"/>
-                    <a:lstStyle/>
-                    <a:p>
-                      <a:pPr algn="ctr"/>
-                      <a:r>
-                        <a:rPr sz="900">
-                          <a:solidFill>
-                            <a:srgbClr val="101010"/>
-                          </a:solidFill>
-                          <a:latin typeface="Calibri"/>
-                        </a:rPr>
-                        <a:t>$0</a:t>
-                      </a:r>
-                    </a:p>
-                  </a:txBody>
-                  <a:tcPr>
-                    <a:solidFill>
-                      <a:srgbClr val="F2F2F2"/>
-                    </a:solidFill>
-                  </a:tcPr>
-                </a:tc>
-                <a:tc>
-                  <a:txBody>
-                    <a:bodyPr lIns="45720" rIns="45720" tIns="18288" bIns="18288" wrap="square" anchor="ctr"/>
-                    <a:lstStyle/>
-                    <a:p>
-                      <a:pPr algn="ctr"/>
-                      <a:r>
-                        <a:rPr sz="900">
-                          <a:solidFill>
-                            <a:srgbClr val="101010"/>
-                          </a:solidFill>
-                          <a:latin typeface="Calibri"/>
-                        </a:rPr>
-                        <a:t>$0</a:t>
-                      </a:r>
-                    </a:p>
-                  </a:txBody>
-                  <a:tcPr>
-                    <a:solidFill>
-                      <a:srgbClr val="F2F2F2"/>
-                    </a:solidFill>
-                  </a:tcPr>
-                </a:tc>
-                <a:tc>
-                  <a:txBody>
-                    <a:bodyPr lIns="45720" rIns="45720" tIns="18288" bIns="18288" wrap="square" anchor="ctr"/>
-                    <a:lstStyle/>
-                    <a:p>
-                      <a:pPr algn="ctr"/>
-                      <a:r>
-                        <a:rPr sz="900">
-                          <a:solidFill>
-                            <a:srgbClr val="101010"/>
-                          </a:solidFill>
-                          <a:latin typeface="Calibri"/>
-                        </a:rPr>
-                        <a:t>$0</a:t>
+              <a:tr h="274320">
+                <a:tc>
+                  <a:txBody>
+                    <a:bodyPr lIns="45720" rIns="45720" tIns="18288" bIns="18288" wrap="square" anchor="ctr"/>
+                    <a:lstStyle/>
+                    <a:p>
+                      <a:pPr algn="ctr"/>
+                      <a:r>
+                        <a:rPr sz="800" b="1">
+                          <a:solidFill>
+                            <a:srgbClr val="101010"/>
+                          </a:solidFill>
+                          <a:latin typeface="Calibri"/>
+                        </a:rPr>
+                        <a:t>Melissa Mar</a:t>
+                      </a:r>
+                    </a:p>
+                  </a:txBody>
+                  <a:tcPr>
+                    <a:solidFill>
+                      <a:srgbClr val="F2F2F2"/>
+                    </a:solidFill>
+                  </a:tcPr>
+                </a:tc>
+                <a:tc>
+                  <a:txBody>
+                    <a:bodyPr lIns="45720" rIns="45720" tIns="18288" bIns="18288" wrap="square" anchor="ctr"/>
+                    <a:lstStyle/>
+                    <a:p>
+                      <a:pPr algn="ctr"/>
+                      <a:r>
+                        <a:rPr sz="800">
+                          <a:solidFill>
+                            <a:srgbClr val="101010"/>
+                          </a:solidFill>
+                          <a:latin typeface="Calibri"/>
+                        </a:rPr>
+                        <a:t>28 / $40k</a:t>
+                      </a:r>
+                    </a:p>
+                  </a:txBody>
+                  <a:tcPr>
+                    <a:solidFill>
+                      <a:srgbClr val="F2F2F2"/>
+                    </a:solidFill>
+                  </a:tcPr>
+                </a:tc>
+                <a:tc>
+                  <a:txBody>
+                    <a:bodyPr lIns="45720" rIns="45720" tIns="18288" bIns="18288" wrap="square" anchor="ctr"/>
+                    <a:lstStyle/>
+                    <a:p>
+                      <a:pPr algn="ctr"/>
+                      <a:r>
+                        <a:rPr sz="800">
+                          <a:solidFill>
+                            <a:srgbClr val="101010"/>
+                          </a:solidFill>
+                          <a:latin typeface="Calibri"/>
+                        </a:rPr>
+                        <a:t>24 / $28k</a:t>
+                      </a:r>
+                    </a:p>
+                  </a:txBody>
+                  <a:tcPr>
+                    <a:solidFill>
+                      <a:srgbClr val="F2F2F2"/>
+                    </a:solidFill>
+                  </a:tcPr>
+                </a:tc>
+                <a:tc>
+                  <a:txBody>
+                    <a:bodyPr lIns="45720" rIns="45720" tIns="18288" bIns="18288" wrap="square" anchor="ctr"/>
+                    <a:lstStyle/>
+                    <a:p>
+                      <a:pPr algn="ctr"/>
+                      <a:r>
+                        <a:rPr sz="800">
+                          <a:solidFill>
+                            <a:srgbClr val="101010"/>
+                          </a:solidFill>
+                          <a:latin typeface="Calibri"/>
+                        </a:rPr>
+                        <a:t>25 / $29k</a:t>
+                      </a:r>
+                    </a:p>
+                  </a:txBody>
+                  <a:tcPr>
+                    <a:solidFill>
+                      <a:srgbClr val="F2F2F2"/>
+                    </a:solidFill>
+                  </a:tcPr>
+                </a:tc>
+                <a:tc>
+                  <a:txBody>
+                    <a:bodyPr lIns="45720" rIns="45720" tIns="18288" bIns="18288" wrap="square" anchor="ctr"/>
+                    <a:lstStyle/>
+                    <a:p>
+                      <a:pPr algn="ctr"/>
+                      <a:r>
+                        <a:rPr sz="800">
+                          <a:solidFill>
+                            <a:srgbClr val="101010"/>
+                          </a:solidFill>
+                          <a:latin typeface="Calibri"/>
+                        </a:rPr>
+                        <a:t>$470</a:t>
+                      </a:r>
+                    </a:p>
+                  </a:txBody>
+                  <a:tcPr>
+                    <a:solidFill>
+                      <a:srgbClr val="F2F2F2"/>
+                    </a:solidFill>
+                  </a:tcPr>
+                </a:tc>
+                <a:tc>
+                  <a:txBody>
+                    <a:bodyPr lIns="45720" rIns="45720" tIns="18288" bIns="18288" wrap="square" anchor="ctr"/>
+                    <a:lstStyle/>
+                    <a:p>
+                      <a:pPr algn="ctr"/>
+                      <a:r>
+                        <a:rPr sz="800">
+                          <a:solidFill>
+                            <a:srgbClr val="101010"/>
+                          </a:solidFill>
+                          <a:latin typeface="Calibri"/>
+                        </a:rPr>
+                        <a:t>$750</a:t>
+                      </a:r>
+                    </a:p>
+                  </a:txBody>
+                  <a:tcPr>
+                    <a:solidFill>
+                      <a:srgbClr val="F2F2F2"/>
+                    </a:solidFill>
+                  </a:tcPr>
+                </a:tc>
+                <a:tc>
+                  <a:txBody>
+                    <a:bodyPr lIns="45720" rIns="45720" tIns="18288" bIns="18288" wrap="square" anchor="ctr"/>
+                    <a:lstStyle/>
+                    <a:p>
+                      <a:pPr algn="ctr"/>
+                      <a:r>
+                        <a:rPr sz="800">
+                          <a:solidFill>
+                            <a:srgbClr val="101010"/>
+                          </a:solidFill>
+                          <a:latin typeface="Calibri"/>
+                        </a:rPr>
+                        <a:t>+$280</a:t>
                       </a:r>
                     </a:p>
                   </a:txBody>
@@ -10442,90 +11922,159 @@
                   </a:tcPr>
                 </a:tc>
               </a:tr>
-              <a:tr h="256032">
-                <a:tc>
-                  <a:txBody>
-                    <a:bodyPr lIns="45720" rIns="45720" tIns="18288" bIns="18288" wrap="square" anchor="ctr"/>
-                    <a:lstStyle/>
-                    <a:p>
-                      <a:pPr algn="ctr"/>
-                      <a:r>
-                        <a:rPr sz="900" b="1">
-                          <a:solidFill>
-                            <a:srgbClr val="101010"/>
-                          </a:solidFill>
-                          <a:latin typeface="Calibri"/>
-                        </a:rPr>
-                        <a:t>Thalia Feb</a:t>
-                      </a:r>
-                    </a:p>
-                  </a:txBody>
-                  <a:tcPr>
-                    <a:solidFill>
-                      <a:srgbClr val="FFFFFF"/>
-                    </a:solidFill>
-                  </a:tcPr>
-                </a:tc>
-                <a:tc>
-                  <a:txBody>
-                    <a:bodyPr lIns="45720" rIns="45720" tIns="18288" bIns="18288" wrap="square" anchor="ctr"/>
-                    <a:lstStyle/>
-                    <a:p>
-                      <a:pPr algn="ctr"/>
-                      <a:r>
-                        <a:rPr sz="900">
-                          <a:solidFill>
-                            <a:srgbClr val="101010"/>
-                          </a:solidFill>
-                          <a:latin typeface="Calibri"/>
-                        </a:rPr>
-                        <a:t>$0</a:t>
-                      </a:r>
-                    </a:p>
-                  </a:txBody>
-                  <a:tcPr>
-                    <a:solidFill>
-                      <a:srgbClr val="FFFFFF"/>
-                    </a:solidFill>
-                  </a:tcPr>
-                </a:tc>
-                <a:tc>
-                  <a:txBody>
-                    <a:bodyPr lIns="45720" rIns="45720" tIns="18288" bIns="18288" wrap="square" anchor="ctr"/>
-                    <a:lstStyle/>
-                    <a:p>
-                      <a:pPr algn="ctr"/>
-                      <a:r>
-                        <a:rPr sz="900">
-                          <a:solidFill>
-                            <a:srgbClr val="101010"/>
-                          </a:solidFill>
-                          <a:latin typeface="Calibri"/>
-                        </a:rPr>
-                        <a:t>$0</a:t>
-                      </a:r>
-                    </a:p>
-                  </a:txBody>
-                  <a:tcPr>
-                    <a:solidFill>
-                      <a:srgbClr val="FFFFFF"/>
-                    </a:solidFill>
-                  </a:tcPr>
-                </a:tc>
-                <a:tc>
-                  <a:txBody>
-                    <a:bodyPr lIns="45720" rIns="45720" tIns="18288" bIns="18288" wrap="square" anchor="ctr"/>
-                    <a:lstStyle/>
-                    <a:p>
-                      <a:pPr algn="ctr"/>
-                      <a:r>
-                        <a:rPr sz="900">
-                          <a:solidFill>
-                            <a:srgbClr val="101010"/>
-                          </a:solidFill>
-                          <a:latin typeface="Calibri"/>
-                        </a:rPr>
-                        <a:t>$0</a:t>
+              <a:tr h="274320">
+                <a:tc>
+                  <a:txBody>
+                    <a:bodyPr lIns="45720" rIns="45720" tIns="18288" bIns="18288" wrap="square" anchor="ctr"/>
+                    <a:lstStyle/>
+                    <a:p>
+                      <a:pPr algn="ctr"/>
+                      <a:r>
+                        <a:rPr sz="800" b="1">
+                          <a:solidFill>
+                            <a:srgbClr val="101010"/>
+                          </a:solidFill>
+                          <a:latin typeface="Calibri"/>
+                        </a:rPr>
+                        <a:t>Melissa Jan</a:t>
+                      </a:r>
+                    </a:p>
+                  </a:txBody>
+                  <a:tcPr>
+                    <a:solidFill>
+                      <a:srgbClr val="FFFFFF"/>
+                    </a:solidFill>
+                  </a:tcPr>
+                </a:tc>
+                <a:tc>
+                  <a:txBody>
+                    <a:bodyPr lIns="45720" rIns="45720" tIns="18288" bIns="18288" wrap="square" anchor="ctr"/>
+                    <a:lstStyle/>
+                    <a:p>
+                      <a:pPr algn="ctr"/>
+                      <a:r>
+                        <a:rPr sz="800">
+                          <a:solidFill>
+                            <a:srgbClr val="101010"/>
+                          </a:solidFill>
+                          <a:latin typeface="Calibri"/>
+                        </a:rPr>
+                        <a:t>31 / $37k</a:t>
+                      </a:r>
+                    </a:p>
+                  </a:txBody>
+                  <a:tcPr>
+                    <a:solidFill>
+                      <a:srgbClr val="FFFFFF"/>
+                    </a:solidFill>
+                  </a:tcPr>
+                </a:tc>
+                <a:tc>
+                  <a:txBody>
+                    <a:bodyPr lIns="45720" rIns="45720" tIns="18288" bIns="18288" wrap="square" anchor="ctr"/>
+                    <a:lstStyle/>
+                    <a:p>
+                      <a:pPr algn="ctr"/>
+                      <a:r>
+                        <a:rPr sz="800">
+                          <a:solidFill>
+                            <a:srgbClr val="101010"/>
+                          </a:solidFill>
+                          <a:latin typeface="Calibri"/>
+                        </a:rPr>
+                        <a:t>24 / $32k</a:t>
+                      </a:r>
+                    </a:p>
+                  </a:txBody>
+                  <a:tcPr>
+                    <a:solidFill>
+                      <a:srgbClr val="FFFFFF"/>
+                    </a:solidFill>
+                  </a:tcPr>
+                </a:tc>
+                <a:tc>
+                  <a:txBody>
+                    <a:bodyPr lIns="45720" rIns="45720" tIns="18288" bIns="18288" wrap="square" anchor="ctr"/>
+                    <a:lstStyle/>
+                    <a:p>
+                      <a:pPr algn="ctr"/>
+                      <a:r>
+                        <a:rPr sz="800">
+                          <a:solidFill>
+                            <a:srgbClr val="101010"/>
+                          </a:solidFill>
+                          <a:latin typeface="Calibri"/>
+                        </a:rPr>
+                        <a:t>24 / $32k</a:t>
+                      </a:r>
+                    </a:p>
+                  </a:txBody>
+                  <a:tcPr>
+                    <a:solidFill>
+                      <a:srgbClr val="FFFFFF"/>
+                    </a:solidFill>
+                  </a:tcPr>
+                </a:tc>
+                <a:tc>
+                  <a:txBody>
+                    <a:bodyPr lIns="45720" rIns="45720" tIns="18288" bIns="18288" wrap="square" anchor="ctr"/>
+                    <a:lstStyle/>
+                    <a:p>
+                      <a:pPr algn="ctr"/>
+                      <a:r>
+                        <a:rPr sz="800">
+                          <a:solidFill>
+                            <a:srgbClr val="101010"/>
+                          </a:solidFill>
+                          <a:latin typeface="Calibri"/>
+                        </a:rPr>
+                        <a:t>$500</a:t>
+                      </a:r>
+                    </a:p>
+                  </a:txBody>
+                  <a:tcPr>
+                    <a:solidFill>
+                      <a:srgbClr val="FFFFFF"/>
+                    </a:solidFill>
+                  </a:tcPr>
+                </a:tc>
+                <a:tc>
+                  <a:txBody>
+                    <a:bodyPr lIns="45720" rIns="45720" tIns="18288" bIns="18288" wrap="square" anchor="ctr"/>
+                    <a:lstStyle/>
+                    <a:p>
+                      <a:pPr algn="ctr"/>
+                      <a:r>
+                        <a:rPr sz="800">
+                          <a:solidFill>
+                            <a:srgbClr val="101010"/>
+                          </a:solidFill>
+                          <a:latin typeface="Calibri"/>
+                        </a:rPr>
+                        <a:t>$750</a:t>
+                      </a:r>
+                    </a:p>
+                  </a:txBody>
+                  <a:tcPr>
+                    <a:solidFill>
+                      <a:srgbClr val="FFFFFF"/>
+                    </a:solidFill>
+                  </a:tcPr>
+                </a:tc>
+                <a:tc>
+                  <a:txBody>
+                    <a:bodyPr lIns="45720" rIns="45720" tIns="18288" bIns="18288" wrap="square" anchor="ctr"/>
+                    <a:lstStyle/>
+                    <a:p>
+                      <a:pPr algn="ctr"/>
+                      <a:r>
+                        <a:rPr sz="800">
+                          <a:solidFill>
+                            <a:srgbClr val="101010"/>
+                          </a:solidFill>
+                          <a:latin typeface="Calibri"/>
+                        </a:rPr>
+                        <a:t>+$250</a:t>
                       </a:r>
                     </a:p>
                   </a:txBody>
@@ -10536,297 +12085,15 @@
                   </a:tcPr>
                 </a:tc>
               </a:tr>
-              <a:tr h="256032">
-                <a:tc>
-                  <a:txBody>
-                    <a:bodyPr lIns="45720" rIns="45720" tIns="18288" bIns="18288" wrap="square" anchor="ctr"/>
-                    <a:lstStyle/>
-                    <a:p>
-                      <a:pPr algn="ctr"/>
-                      <a:r>
-                        <a:rPr sz="900" b="1">
-                          <a:solidFill>
-                            <a:srgbClr val="101010"/>
-                          </a:solidFill>
-                          <a:latin typeface="Calibri"/>
-                        </a:rPr>
-                        <a:t>Thalia Mar</a:t>
-                      </a:r>
-                    </a:p>
-                  </a:txBody>
-                  <a:tcPr>
-                    <a:solidFill>
-                      <a:srgbClr val="F2F2F2"/>
-                    </a:solidFill>
-                  </a:tcPr>
-                </a:tc>
-                <a:tc>
-                  <a:txBody>
-                    <a:bodyPr lIns="45720" rIns="45720" tIns="18288" bIns="18288" wrap="square" anchor="ctr"/>
-                    <a:lstStyle/>
-                    <a:p>
-                      <a:pPr algn="ctr"/>
-                      <a:r>
-                        <a:rPr sz="900">
-                          <a:solidFill>
-                            <a:srgbClr val="101010"/>
-                          </a:solidFill>
-                          <a:latin typeface="Calibri"/>
-                        </a:rPr>
-                        <a:t>$0</a:t>
-                      </a:r>
-                    </a:p>
-                  </a:txBody>
-                  <a:tcPr>
-                    <a:solidFill>
-                      <a:srgbClr val="F2F2F2"/>
-                    </a:solidFill>
-                  </a:tcPr>
-                </a:tc>
-                <a:tc>
-                  <a:txBody>
-                    <a:bodyPr lIns="45720" rIns="45720" tIns="18288" bIns="18288" wrap="square" anchor="ctr"/>
-                    <a:lstStyle/>
-                    <a:p>
-                      <a:pPr algn="ctr"/>
-                      <a:r>
-                        <a:rPr sz="900">
-                          <a:solidFill>
-                            <a:srgbClr val="101010"/>
-                          </a:solidFill>
-                          <a:latin typeface="Calibri"/>
-                        </a:rPr>
-                        <a:t>$0</a:t>
-                      </a:r>
-                    </a:p>
-                  </a:txBody>
-                  <a:tcPr>
-                    <a:solidFill>
-                      <a:srgbClr val="F2F2F2"/>
-                    </a:solidFill>
-                  </a:tcPr>
-                </a:tc>
-                <a:tc>
-                  <a:txBody>
-                    <a:bodyPr lIns="45720" rIns="45720" tIns="18288" bIns="18288" wrap="square" anchor="ctr"/>
-                    <a:lstStyle/>
-                    <a:p>
-                      <a:pPr algn="ctr"/>
-                      <a:r>
-                        <a:rPr sz="900">
-                          <a:solidFill>
-                            <a:srgbClr val="101010"/>
-                          </a:solidFill>
-                          <a:latin typeface="Calibri"/>
-                        </a:rPr>
-                        <a:t>$0</a:t>
-                      </a:r>
-                    </a:p>
-                  </a:txBody>
-                  <a:tcPr>
-                    <a:solidFill>
-                      <a:srgbClr val="F2F2F2"/>
-                    </a:solidFill>
-                  </a:tcPr>
-                </a:tc>
-              </a:tr>
-              <a:tr h="256032">
-                <a:tc>
-                  <a:txBody>
-                    <a:bodyPr lIns="45720" rIns="45720" tIns="18288" bIns="18288" wrap="square" anchor="ctr"/>
-                    <a:lstStyle/>
-                    <a:p>
-                      <a:pPr algn="ctr"/>
-                      <a:r>
-                        <a:rPr sz="900" b="1">
-                          <a:solidFill>
-                            <a:srgbClr val="101010"/>
-                          </a:solidFill>
-                          <a:latin typeface="Calibri"/>
-                        </a:rPr>
-                        <a:t>Thalia Apr</a:t>
-                      </a:r>
-                    </a:p>
-                  </a:txBody>
-                  <a:tcPr>
-                    <a:solidFill>
-                      <a:srgbClr val="FFFFFF"/>
-                    </a:solidFill>
-                  </a:tcPr>
-                </a:tc>
-                <a:tc>
-                  <a:txBody>
-                    <a:bodyPr lIns="45720" rIns="45720" tIns="18288" bIns="18288" wrap="square" anchor="ctr"/>
-                    <a:lstStyle/>
-                    <a:p>
-                      <a:pPr algn="ctr"/>
-                      <a:r>
-                        <a:rPr sz="900">
-                          <a:solidFill>
-                            <a:srgbClr val="101010"/>
-                          </a:solidFill>
-                          <a:latin typeface="Calibri"/>
-                        </a:rPr>
-                        <a:t>$0</a:t>
-                      </a:r>
-                    </a:p>
-                  </a:txBody>
-                  <a:tcPr>
-                    <a:solidFill>
-                      <a:srgbClr val="FFFFFF"/>
-                    </a:solidFill>
-                  </a:tcPr>
-                </a:tc>
-                <a:tc>
-                  <a:txBody>
-                    <a:bodyPr lIns="45720" rIns="45720" tIns="18288" bIns="18288" wrap="square" anchor="ctr"/>
-                    <a:lstStyle/>
-                    <a:p>
-                      <a:pPr algn="ctr"/>
-                      <a:r>
-                        <a:rPr sz="900">
-                          <a:solidFill>
-                            <a:srgbClr val="101010"/>
-                          </a:solidFill>
-                          <a:latin typeface="Calibri"/>
-                        </a:rPr>
-                        <a:t>$0</a:t>
-                      </a:r>
-                    </a:p>
-                  </a:txBody>
-                  <a:tcPr>
-                    <a:solidFill>
-                      <a:srgbClr val="FFFFFF"/>
-                    </a:solidFill>
-                  </a:tcPr>
-                </a:tc>
-                <a:tc>
-                  <a:txBody>
-                    <a:bodyPr lIns="45720" rIns="45720" tIns="18288" bIns="18288" wrap="square" anchor="ctr"/>
-                    <a:lstStyle/>
-                    <a:p>
-                      <a:pPr algn="ctr"/>
-                      <a:r>
-                        <a:rPr sz="900">
-                          <a:solidFill>
-                            <a:srgbClr val="101010"/>
-                          </a:solidFill>
-                          <a:latin typeface="Calibri"/>
-                        </a:rPr>
-                        <a:t>$0</a:t>
-                      </a:r>
-                    </a:p>
-                  </a:txBody>
-                  <a:tcPr>
-                    <a:solidFill>
-                      <a:srgbClr val="FFFFFF"/>
-                    </a:solidFill>
-                  </a:tcPr>
-                </a:tc>
-              </a:tr>
-              <a:tr h="256032">
-                <a:tc>
-                  <a:txBody>
-                    <a:bodyPr lIns="45720" rIns="45720" tIns="18288" bIns="18288" wrap="square" anchor="ctr"/>
-                    <a:lstStyle/>
-                    <a:p>
-                      <a:pPr algn="ctr"/>
-                      <a:r>
-                        <a:rPr sz="900" b="1">
-                          <a:solidFill>
-                            <a:srgbClr val="101010"/>
-                          </a:solidFill>
-                          <a:latin typeface="Calibri"/>
-                        </a:rPr>
-                        <a:t>Monica Mar</a:t>
-                      </a:r>
-                    </a:p>
-                  </a:txBody>
-                  <a:tcPr>
-                    <a:solidFill>
-                      <a:srgbClr val="F2F2F2"/>
-                    </a:solidFill>
-                  </a:tcPr>
-                </a:tc>
-                <a:tc>
-                  <a:txBody>
-                    <a:bodyPr lIns="45720" rIns="45720" tIns="18288" bIns="18288" wrap="square" anchor="ctr"/>
-                    <a:lstStyle/>
-                    <a:p>
-                      <a:pPr algn="ctr"/>
-                      <a:r>
-                        <a:rPr sz="900">
-                          <a:solidFill>
-                            <a:srgbClr val="101010"/>
-                          </a:solidFill>
-                          <a:latin typeface="Calibri"/>
-                        </a:rPr>
-                        <a:t>$450</a:t>
-                      </a:r>
-                    </a:p>
-                  </a:txBody>
-                  <a:tcPr>
-                    <a:solidFill>
-                      <a:srgbClr val="F2F2F2"/>
-                    </a:solidFill>
-                  </a:tcPr>
-                </a:tc>
-                <a:tc>
-                  <a:txBody>
-                    <a:bodyPr lIns="45720" rIns="45720" tIns="18288" bIns="18288" wrap="square" anchor="ctr"/>
-                    <a:lstStyle/>
-                    <a:p>
-                      <a:pPr algn="ctr"/>
-                      <a:r>
-                        <a:rPr sz="900">
-                          <a:solidFill>
-                            <a:srgbClr val="101010"/>
-                          </a:solidFill>
-                          <a:latin typeface="Calibri"/>
-                        </a:rPr>
-                        <a:t>$375</a:t>
-                      </a:r>
-                    </a:p>
-                  </a:txBody>
-                  <a:tcPr>
-                    <a:solidFill>
-                      <a:srgbClr val="F2F2F2"/>
-                    </a:solidFill>
-                  </a:tcPr>
-                </a:tc>
-                <a:tc>
-                  <a:txBody>
-                    <a:bodyPr lIns="45720" rIns="45720" tIns="18288" bIns="18288" wrap="square" anchor="ctr"/>
-                    <a:lstStyle/>
-                    <a:p>
-                      <a:pPr algn="ctr"/>
-                      <a:r>
-                        <a:rPr sz="900">
-                          <a:solidFill>
-                            <a:srgbClr val="101010"/>
-                          </a:solidFill>
-                          <a:latin typeface="Calibri"/>
-                        </a:rPr>
-                        <a:t>$-75</a:t>
-                      </a:r>
-                    </a:p>
-                  </a:txBody>
-                  <a:tcPr>
-                    <a:solidFill>
-                      <a:srgbClr val="F2F2F2"/>
-                    </a:solidFill>
-                  </a:tcPr>
-                </a:tc>
-              </a:tr>
-              <a:tr h="256032">
-                <a:tc>
-                  <a:txBody>
-                    <a:bodyPr lIns="45720" rIns="45720" tIns="18288" bIns="18288" wrap="square" anchor="ctr"/>
-                    <a:lstStyle/>
-                    <a:p>
-                      <a:pPr algn="ctr"/>
-                      <a:r>
-                        <a:rPr sz="900" b="1">
+              <a:tr h="274320">
+                <a:tc>
+                  <a:txBody>
+                    <a:bodyPr lIns="45720" rIns="45720" tIns="18288" bIns="18288" wrap="square" anchor="ctr"/>
+                    <a:lstStyle/>
+                    <a:p>
+                      <a:pPr algn="ctr"/>
+                      <a:r>
+                        <a:rPr sz="800" b="1">
                           <a:solidFill>
                             <a:srgbClr val="101010"/>
                           </a:solidFill>
@@ -10838,18 +12105,87 @@
                   </a:txBody>
                   <a:tcPr>
                     <a:solidFill>
-                      <a:srgbClr val="FFFFFF"/>
-                    </a:solidFill>
-                  </a:tcPr>
-                </a:tc>
-                <a:tc>
-                  <a:txBody>
-                    <a:bodyPr lIns="45720" rIns="45720" tIns="18288" bIns="18288" wrap="square" anchor="ctr"/>
-                    <a:lstStyle/>
-                    <a:p>
-                      <a:pPr algn="ctr"/>
-                      <a:r>
-                        <a:rPr sz="900">
+                      <a:srgbClr val="F2F2F2"/>
+                    </a:solidFill>
+                  </a:tcPr>
+                </a:tc>
+                <a:tc>
+                  <a:txBody>
+                    <a:bodyPr lIns="45720" rIns="45720" tIns="18288" bIns="18288" wrap="square" anchor="ctr"/>
+                    <a:lstStyle/>
+                    <a:p>
+                      <a:pPr algn="ctr"/>
+                      <a:r>
+                        <a:rPr sz="800">
+                          <a:solidFill>
+                            <a:srgbClr val="101010"/>
+                          </a:solidFill>
+                          <a:latin typeface="Calibri"/>
+                        </a:rPr>
+                        <a:t/>
+                      </a:r>
+                    </a:p>
+                  </a:txBody>
+                  <a:tcPr>
+                    <a:solidFill>
+                      <a:srgbClr val="F2F2F2"/>
+                    </a:solidFill>
+                  </a:tcPr>
+                </a:tc>
+                <a:tc>
+                  <a:txBody>
+                    <a:bodyPr lIns="45720" rIns="45720" tIns="18288" bIns="18288" wrap="square" anchor="ctr"/>
+                    <a:lstStyle/>
+                    <a:p>
+                      <a:pPr algn="ctr"/>
+                      <a:r>
+                        <a:rPr sz="800">
+                          <a:solidFill>
+                            <a:srgbClr val="101010"/>
+                          </a:solidFill>
+                          <a:latin typeface="Calibri"/>
+                        </a:rPr>
+                        <a:t/>
+                      </a:r>
+                    </a:p>
+                  </a:txBody>
+                  <a:tcPr>
+                    <a:solidFill>
+                      <a:srgbClr val="F2F2F2"/>
+                    </a:solidFill>
+                  </a:tcPr>
+                </a:tc>
+                <a:tc>
+                  <a:txBody>
+                    <a:bodyPr lIns="45720" rIns="45720" tIns="18288" bIns="18288" wrap="square" anchor="ctr"/>
+                    <a:lstStyle/>
+                    <a:p>
+                      <a:pPr algn="ctr"/>
+                      <a:r>
+                        <a:rPr sz="800">
+                          <a:solidFill>
+                            <a:srgbClr val="101010"/>
+                          </a:solidFill>
+                          <a:latin typeface="Calibri"/>
+                        </a:rPr>
+                        <a:t/>
+                      </a:r>
+                    </a:p>
+                  </a:txBody>
+                  <a:tcPr>
+                    <a:solidFill>
+                      <a:srgbClr val="F2F2F2"/>
+                    </a:solidFill>
+                  </a:tcPr>
+                </a:tc>
+                <a:tc>
+                  <a:txBody>
+                    <a:bodyPr lIns="45720" rIns="45720" tIns="18288" bIns="18288" wrap="square" anchor="ctr"/>
+                    <a:lstStyle/>
+                    <a:p>
+                      <a:pPr algn="ctr"/>
+                      <a:r>
+                        <a:rPr sz="800">
                           <a:solidFill>
                             <a:srgbClr val="101010"/>
                           </a:solidFill>
@@ -10861,53 +12197,53 @@
                   </a:txBody>
                   <a:tcPr>
                     <a:solidFill>
-                      <a:srgbClr val="FFFFFF"/>
-                    </a:solidFill>
-                  </a:tcPr>
-                </a:tc>
-                <a:tc>
-                  <a:txBody>
-                    <a:bodyPr lIns="45720" rIns="45720" tIns="18288" bIns="18288" wrap="square" anchor="ctr"/>
-                    <a:lstStyle/>
-                    <a:p>
-                      <a:pPr algn="ctr"/>
-                      <a:r>
-                        <a:rPr sz="900">
-                          <a:solidFill>
-                            <a:srgbClr val="101010"/>
-                          </a:solidFill>
-                          <a:latin typeface="Calibri"/>
-                        </a:rPr>
-                        <a:t>$3,875</a:t>
-                      </a:r>
-                    </a:p>
-                  </a:txBody>
-                  <a:tcPr>
-                    <a:solidFill>
-                      <a:srgbClr val="FFFFFF"/>
-                    </a:solidFill>
-                  </a:tcPr>
-                </a:tc>
-                <a:tc>
-                  <a:txBody>
-                    <a:bodyPr lIns="45720" rIns="45720" tIns="18288" bIns="18288" wrap="square" anchor="ctr"/>
-                    <a:lstStyle/>
-                    <a:p>
-                      <a:pPr algn="ctr"/>
-                      <a:r>
-                        <a:rPr sz="900">
-                          <a:solidFill>
-                            <a:srgbClr val="101010"/>
-                          </a:solidFill>
-                          <a:latin typeface="Calibri"/>
-                        </a:rPr>
-                        <a:t>$-3,235</a:t>
-                      </a:r>
-                    </a:p>
-                  </a:txBody>
-                  <a:tcPr>
-                    <a:solidFill>
-                      <a:srgbClr val="FFFFFF"/>
+                      <a:srgbClr val="F2F2F2"/>
+                    </a:solidFill>
+                  </a:tcPr>
+                </a:tc>
+                <a:tc>
+                  <a:txBody>
+                    <a:bodyPr lIns="45720" rIns="45720" tIns="18288" bIns="18288" wrap="square" anchor="ctr"/>
+                    <a:lstStyle/>
+                    <a:p>
+                      <a:pPr algn="ctr"/>
+                      <a:r>
+                        <a:rPr sz="800">
+                          <a:solidFill>
+                            <a:srgbClr val="101010"/>
+                          </a:solidFill>
+                          <a:latin typeface="Calibri"/>
+                        </a:rPr>
+                        <a:t>$8,375</a:t>
+                      </a:r>
+                    </a:p>
+                  </a:txBody>
+                  <a:tcPr>
+                    <a:solidFill>
+                      <a:srgbClr val="F2F2F2"/>
+                    </a:solidFill>
+                  </a:tcPr>
+                </a:tc>
+                <a:tc>
+                  <a:txBody>
+                    <a:bodyPr lIns="45720" rIns="45720" tIns="18288" bIns="18288" wrap="square" anchor="ctr"/>
+                    <a:lstStyle/>
+                    <a:p>
+                      <a:pPr algn="ctr"/>
+                      <a:r>
+                        <a:rPr sz="800">
+                          <a:solidFill>
+                            <a:srgbClr val="101010"/>
+                          </a:solidFill>
+                          <a:latin typeface="Calibri"/>
+                        </a:rPr>
+                        <a:t>+$1,265</a:t>
+                      </a:r>
+                    </a:p>
+                  </a:txBody>
+                  <a:tcPr>
+                    <a:solidFill>
+                      <a:srgbClr val="F2F2F2"/>
                     </a:solidFill>
                   </a:tcPr>
                 </a:tc>
@@ -11008,7 +12344,7 @@
         </p:nvGraphicFramePr>
         <p:xfrm>
           <a:off x="8174736" y="1417320"/>
-          <a:ext cx="3703320" cy="3072384"/>
+          <a:ext cx="4389120" cy="3017520"/>
         </p:xfrm>
         <a:graphic>
           <a:graphicData uri="http://schemas.openxmlformats.org/drawingml/2006/table">
@@ -11017,20 +12353,23 @@
                 <a:tableStyleId>{5C22544A-7EE6-4342-B048-85BDC9FD1C3A}</a:tableStyleId>
               </a:tblPr>
               <a:tblGrid>
-                <a:gridCol w="1280160"/>
-                <a:gridCol w="777240"/>
-                <a:gridCol w="777240"/>
                 <a:gridCol w="868680"/>
+                <a:gridCol w="640080"/>
+                <a:gridCol w="640080"/>
+                <a:gridCol w="640080"/>
+                <a:gridCol w="502920"/>
+                <a:gridCol w="502920"/>
+                <a:gridCol w="594360"/>
               </a:tblGrid>
-              <a:tr h="256032">
-                <a:tc>
-                  <a:txBody>
-                    <a:bodyPr lIns="45720" rIns="45720" tIns="18288" bIns="18288" wrap="square" anchor="ctr"/>
-                    <a:lstStyle/>
-                    <a:p>
-                      <a:pPr algn="ctr"/>
-                      <a:r>
-                        <a:rPr sz="900" b="1">
+              <a:tr h="274320">
+                <a:tc>
+                  <a:txBody>
+                    <a:bodyPr lIns="45720" rIns="45720" tIns="18288" bIns="18288" wrap="square" anchor="ctr"/>
+                    <a:lstStyle/>
+                    <a:p>
+                      <a:pPr algn="ctr"/>
+                      <a:r>
+                        <a:rPr sz="800" b="1">
                           <a:solidFill>
                             <a:srgbClr val="FFFFFF"/>
                           </a:solidFill>
@@ -11053,12 +12392,81 @@
                     <a:p>
                       <a:pPr algn="ctr"/>
                       <a:r>
-                        <a:rPr sz="900" b="1">
+                        <a:rPr sz="800" b="1">
                           <a:solidFill>
                             <a:srgbClr val="FFFFFF"/>
                           </a:solidFill>
                           <a:latin typeface="Calibri"/>
                         </a:rPr>
+                        <a:t>NB # / $</a:t>
+                      </a:r>
+                    </a:p>
+                  </a:txBody>
+                  <a:tcPr>
+                    <a:solidFill>
+                      <a:srgbClr val="BF9000"/>
+                    </a:solidFill>
+                  </a:tcPr>
+                </a:tc>
+                <a:tc>
+                  <a:txBody>
+                    <a:bodyPr lIns="45720" rIns="45720" tIns="18288" bIns="18288" wrap="square" anchor="ctr"/>
+                    <a:lstStyle/>
+                    <a:p>
+                      <a:pPr algn="ctr"/>
+                      <a:r>
+                        <a:rPr sz="800" b="1">
+                          <a:solidFill>
+                            <a:srgbClr val="FFFFFF"/>
+                          </a:solidFill>
+                          <a:latin typeface="Calibri"/>
+                        </a:rPr>
+                        <a:t>RWR # / $</a:t>
+                      </a:r>
+                    </a:p>
+                  </a:txBody>
+                  <a:tcPr>
+                    <a:solidFill>
+                      <a:srgbClr val="BF9000"/>
+                    </a:solidFill>
+                  </a:tcPr>
+                </a:tc>
+                <a:tc>
+                  <a:txBody>
+                    <a:bodyPr lIns="45720" rIns="45720" tIns="18288" bIns="18288" wrap="square" anchor="ctr"/>
+                    <a:lstStyle/>
+                    <a:p>
+                      <a:pPr algn="ctr"/>
+                      <a:r>
+                        <a:rPr sz="800" b="1">
+                          <a:solidFill>
+                            <a:srgbClr val="FFFFFF"/>
+                          </a:solidFill>
+                          <a:latin typeface="Calibri"/>
+                        </a:rPr>
+                        <a:t>REN # / $</a:t>
+                      </a:r>
+                    </a:p>
+                  </a:txBody>
+                  <a:tcPr>
+                    <a:solidFill>
+                      <a:srgbClr val="BF9000"/>
+                    </a:solidFill>
+                  </a:tcPr>
+                </a:tc>
+                <a:tc>
+                  <a:txBody>
+                    <a:bodyPr lIns="45720" rIns="45720" tIns="18288" bIns="18288" wrap="square" anchor="ctr"/>
+                    <a:lstStyle/>
+                    <a:p>
+                      <a:pPr algn="ctr"/>
+                      <a:r>
+                        <a:rPr sz="800" b="1">
+                          <a:solidFill>
+                            <a:srgbClr val="FFFFFF"/>
+                          </a:solidFill>
+                          <a:latin typeface="Calibri"/>
+                        </a:rPr>
                         <a:t>Current</a:t>
                       </a:r>
                     </a:p>
@@ -11076,7 +12484,7 @@
                     <a:p>
                       <a:pPr algn="ctr"/>
                       <a:r>
-                        <a:rPr sz="900" b="1">
+                        <a:rPr sz="800" b="1">
                           <a:solidFill>
                             <a:srgbClr val="FFFFFF"/>
                           </a:solidFill>
@@ -11099,7 +12507,7 @@
                     <a:p>
                       <a:pPr algn="ctr"/>
                       <a:r>
-                        <a:rPr sz="900" b="1">
+                        <a:rPr sz="800" b="1">
                           <a:solidFill>
                             <a:srgbClr val="FFFFFF"/>
                           </a:solidFill>
@@ -11116,38 +12524,107 @@
                   </a:tcPr>
                 </a:tc>
               </a:tr>
-              <a:tr h="256032">
-                <a:tc>
-                  <a:txBody>
-                    <a:bodyPr lIns="45720" rIns="45720" tIns="18288" bIns="18288" wrap="square" anchor="ctr"/>
-                    <a:lstStyle/>
-                    <a:p>
-                      <a:pPr algn="ctr"/>
-                      <a:r>
-                        <a:rPr sz="900" b="1">
-                          <a:solidFill>
-                            <a:srgbClr val="101010"/>
-                          </a:solidFill>
-                          <a:latin typeface="Calibri"/>
-                        </a:rPr>
-                        <a:t>Dialinerys Mar</a:t>
-                      </a:r>
-                    </a:p>
-                  </a:txBody>
-                  <a:tcPr>
-                    <a:solidFill>
-                      <a:srgbClr val="FFFFFF"/>
-                    </a:solidFill>
-                  </a:tcPr>
-                </a:tc>
-                <a:tc>
-                  <a:txBody>
-                    <a:bodyPr lIns="45720" rIns="45720" tIns="18288" bIns="18288" wrap="square" anchor="ctr"/>
-                    <a:lstStyle/>
-                    <a:p>
-                      <a:pPr algn="ctr"/>
-                      <a:r>
-                        <a:rPr sz="900">
+              <a:tr h="274320">
+                <a:tc>
+                  <a:txBody>
+                    <a:bodyPr lIns="45720" rIns="45720" tIns="18288" bIns="18288" wrap="square" anchor="ctr"/>
+                    <a:lstStyle/>
+                    <a:p>
+                      <a:pPr algn="ctr"/>
+                      <a:r>
+                        <a:rPr sz="800" b="1">
+                          <a:solidFill>
+                            <a:srgbClr val="101010"/>
+                          </a:solidFill>
+                          <a:latin typeface="Calibri"/>
+                        </a:rPr>
+                        <a:t>Dialiner Mar</a:t>
+                      </a:r>
+                    </a:p>
+                  </a:txBody>
+                  <a:tcPr>
+                    <a:solidFill>
+                      <a:srgbClr val="FFFFFF"/>
+                    </a:solidFill>
+                  </a:tcPr>
+                </a:tc>
+                <a:tc>
+                  <a:txBody>
+                    <a:bodyPr lIns="45720" rIns="45720" tIns="18288" bIns="18288" wrap="square" anchor="ctr"/>
+                    <a:lstStyle/>
+                    <a:p>
+                      <a:pPr algn="ctr"/>
+                      <a:r>
+                        <a:rPr sz="800">
+                          <a:solidFill>
+                            <a:srgbClr val="101010"/>
+                          </a:solidFill>
+                          <a:latin typeface="Calibri"/>
+                        </a:rPr>
+                        <a:t>38 / $52k</a:t>
+                      </a:r>
+                    </a:p>
+                  </a:txBody>
+                  <a:tcPr>
+                    <a:solidFill>
+                      <a:srgbClr val="FFFFFF"/>
+                    </a:solidFill>
+                  </a:tcPr>
+                </a:tc>
+                <a:tc>
+                  <a:txBody>
+                    <a:bodyPr lIns="45720" rIns="45720" tIns="18288" bIns="18288" wrap="square" anchor="ctr"/>
+                    <a:lstStyle/>
+                    <a:p>
+                      <a:pPr algn="ctr"/>
+                      <a:r>
+                        <a:rPr sz="800">
+                          <a:solidFill>
+                            <a:srgbClr val="101010"/>
+                          </a:solidFill>
+                          <a:latin typeface="Calibri"/>
+                        </a:rPr>
+                        <a:t>7 / $6k</a:t>
+                      </a:r>
+                    </a:p>
+                  </a:txBody>
+                  <a:tcPr>
+                    <a:solidFill>
+                      <a:srgbClr val="FFFFFF"/>
+                    </a:solidFill>
+                  </a:tcPr>
+                </a:tc>
+                <a:tc>
+                  <a:txBody>
+                    <a:bodyPr lIns="45720" rIns="45720" tIns="18288" bIns="18288" wrap="square" anchor="ctr"/>
+                    <a:lstStyle/>
+                    <a:p>
+                      <a:pPr algn="ctr"/>
+                      <a:r>
+                        <a:rPr sz="800">
+                          <a:solidFill>
+                            <a:srgbClr val="101010"/>
+                          </a:solidFill>
+                          <a:latin typeface="Calibri"/>
+                        </a:rPr>
+                        <a:t>69 / $96k</a:t>
+                      </a:r>
+                    </a:p>
+                  </a:txBody>
+                  <a:tcPr>
+                    <a:solidFill>
+                      <a:srgbClr val="FFFFFF"/>
+                    </a:solidFill>
+                  </a:tcPr>
+                </a:tc>
+                <a:tc>
+                  <a:txBody>
+                    <a:bodyPr lIns="45720" rIns="45720" tIns="18288" bIns="18288" wrap="square" anchor="ctr"/>
+                    <a:lstStyle/>
+                    <a:p>
+                      <a:pPr algn="ctr"/>
+                      <a:r>
+                        <a:rPr sz="800">
                           <a:solidFill>
                             <a:srgbClr val="101010"/>
                           </a:solidFill>
@@ -11170,36 +12647,36 @@
                     <a:p>
                       <a:pPr algn="ctr"/>
                       <a:r>
-                        <a:rPr sz="900">
-                          <a:solidFill>
-                            <a:srgbClr val="101010"/>
-                          </a:solidFill>
-                          <a:latin typeface="Calibri"/>
-                        </a:rPr>
-                        <a:t>$800</a:t>
-                      </a:r>
-                    </a:p>
-                  </a:txBody>
-                  <a:tcPr>
-                    <a:solidFill>
-                      <a:srgbClr val="FFFFFF"/>
-                    </a:solidFill>
-                  </a:tcPr>
-                </a:tc>
-                <a:tc>
-                  <a:txBody>
-                    <a:bodyPr lIns="45720" rIns="45720" tIns="18288" bIns="18288" wrap="square" anchor="ctr"/>
-                    <a:lstStyle/>
-                    <a:p>
-                      <a:pPr algn="ctr"/>
-                      <a:r>
-                        <a:rPr sz="900">
-                          <a:solidFill>
-                            <a:srgbClr val="101010"/>
-                          </a:solidFill>
-                          <a:latin typeface="Calibri"/>
-                        </a:rPr>
-                        <a:t>+$450</a:t>
+                        <a:rPr sz="800">
+                          <a:solidFill>
+                            <a:srgbClr val="101010"/>
+                          </a:solidFill>
+                          <a:latin typeface="Calibri"/>
+                        </a:rPr>
+                        <a:t>$1,300</a:t>
+                      </a:r>
+                    </a:p>
+                  </a:txBody>
+                  <a:tcPr>
+                    <a:solidFill>
+                      <a:srgbClr val="FFFFFF"/>
+                    </a:solidFill>
+                  </a:tcPr>
+                </a:tc>
+                <a:tc>
+                  <a:txBody>
+                    <a:bodyPr lIns="45720" rIns="45720" tIns="18288" bIns="18288" wrap="square" anchor="ctr"/>
+                    <a:lstStyle/>
+                    <a:p>
+                      <a:pPr algn="ctr"/>
+                      <a:r>
+                        <a:rPr sz="800">
+                          <a:solidFill>
+                            <a:srgbClr val="101010"/>
+                          </a:solidFill>
+                          <a:latin typeface="Calibri"/>
+                        </a:rPr>
+                        <a:t>+$950</a:t>
                       </a:r>
                     </a:p>
                   </a:txBody>
@@ -11210,15 +12687,15 @@
                   </a:tcPr>
                 </a:tc>
               </a:tr>
-              <a:tr h="256032">
-                <a:tc>
-                  <a:txBody>
-                    <a:bodyPr lIns="45720" rIns="45720" tIns="18288" bIns="18288" wrap="square" anchor="ctr"/>
-                    <a:lstStyle/>
-                    <a:p>
-                      <a:pPr algn="ctr"/>
-                      <a:r>
-                        <a:rPr sz="900" b="1">
+              <a:tr h="274320">
+                <a:tc>
+                  <a:txBody>
+                    <a:bodyPr lIns="45720" rIns="45720" tIns="18288" bIns="18288" wrap="square" anchor="ctr"/>
+                    <a:lstStyle/>
+                    <a:p>
+                      <a:pPr algn="ctr"/>
+                      <a:r>
+                        <a:rPr sz="800" b="1">
                           <a:solidFill>
                             <a:srgbClr val="101010"/>
                           </a:solidFill>
@@ -11241,7 +12718,76 @@
                     <a:p>
                       <a:pPr algn="ctr"/>
                       <a:r>
-                        <a:rPr sz="900">
+                        <a:rPr sz="800">
+                          <a:solidFill>
+                            <a:srgbClr val="101010"/>
+                          </a:solidFill>
+                          <a:latin typeface="Calibri"/>
+                        </a:rPr>
+                        <a:t>13 / $8k</a:t>
+                      </a:r>
+                    </a:p>
+                  </a:txBody>
+                  <a:tcPr>
+                    <a:solidFill>
+                      <a:srgbClr val="F2F2F2"/>
+                    </a:solidFill>
+                  </a:tcPr>
+                </a:tc>
+                <a:tc>
+                  <a:txBody>
+                    <a:bodyPr lIns="45720" rIns="45720" tIns="18288" bIns="18288" wrap="square" anchor="ctr"/>
+                    <a:lstStyle/>
+                    <a:p>
+                      <a:pPr algn="ctr"/>
+                      <a:r>
+                        <a:rPr sz="800">
+                          <a:solidFill>
+                            <a:srgbClr val="101010"/>
+                          </a:solidFill>
+                          <a:latin typeface="Calibri"/>
+                        </a:rPr>
+                        <a:t>1 / $1k</a:t>
+                      </a:r>
+                    </a:p>
+                  </a:txBody>
+                  <a:tcPr>
+                    <a:solidFill>
+                      <a:srgbClr val="F2F2F2"/>
+                    </a:solidFill>
+                  </a:tcPr>
+                </a:tc>
+                <a:tc>
+                  <a:txBody>
+                    <a:bodyPr lIns="45720" rIns="45720" tIns="18288" bIns="18288" wrap="square" anchor="ctr"/>
+                    <a:lstStyle/>
+                    <a:p>
+                      <a:pPr algn="ctr"/>
+                      <a:r>
+                        <a:rPr sz="800">
+                          <a:solidFill>
+                            <a:srgbClr val="101010"/>
+                          </a:solidFill>
+                          <a:latin typeface="Calibri"/>
+                        </a:rPr>
+                        <a:t>37 / $50k</a:t>
+                      </a:r>
+                    </a:p>
+                  </a:txBody>
+                  <a:tcPr>
+                    <a:solidFill>
+                      <a:srgbClr val="F2F2F2"/>
+                    </a:solidFill>
+                  </a:tcPr>
+                </a:tc>
+                <a:tc>
+                  <a:txBody>
+                    <a:bodyPr lIns="45720" rIns="45720" tIns="18288" bIns="18288" wrap="square" anchor="ctr"/>
+                    <a:lstStyle/>
+                    <a:p>
+                      <a:pPr algn="ctr"/>
+                      <a:r>
+                        <a:rPr sz="800">
                           <a:solidFill>
                             <a:srgbClr val="101010"/>
                           </a:solidFill>
@@ -11264,7 +12810,1125 @@
                     <a:p>
                       <a:pPr algn="ctr"/>
                       <a:r>
-                        <a:rPr sz="900">
+                        <a:rPr sz="800">
+                          <a:solidFill>
+                            <a:srgbClr val="101010"/>
+                          </a:solidFill>
+                          <a:latin typeface="Calibri"/>
+                        </a:rPr>
+                        <a:t>$850</a:t>
+                      </a:r>
+                    </a:p>
+                  </a:txBody>
+                  <a:tcPr>
+                    <a:solidFill>
+                      <a:srgbClr val="F2F2F2"/>
+                    </a:solidFill>
+                  </a:tcPr>
+                </a:tc>
+                <a:tc>
+                  <a:txBody>
+                    <a:bodyPr lIns="45720" rIns="45720" tIns="18288" bIns="18288" wrap="square" anchor="ctr"/>
+                    <a:lstStyle/>
+                    <a:p>
+                      <a:pPr algn="ctr"/>
+                      <a:r>
+                        <a:rPr sz="800">
+                          <a:solidFill>
+                            <a:srgbClr val="101010"/>
+                          </a:solidFill>
+                          <a:latin typeface="Calibri"/>
+                        </a:rPr>
+                        <a:t>+$850</a:t>
+                      </a:r>
+                    </a:p>
+                  </a:txBody>
+                  <a:tcPr>
+                    <a:solidFill>
+                      <a:srgbClr val="F2F2F2"/>
+                    </a:solidFill>
+                  </a:tcPr>
+                </a:tc>
+              </a:tr>
+              <a:tr h="274320">
+                <a:tc>
+                  <a:txBody>
+                    <a:bodyPr lIns="45720" rIns="45720" tIns="18288" bIns="18288" wrap="square" anchor="ctr"/>
+                    <a:lstStyle/>
+                    <a:p>
+                      <a:pPr algn="ctr"/>
+                      <a:r>
+                        <a:rPr sz="800" b="1">
+                          <a:solidFill>
+                            <a:srgbClr val="101010"/>
+                          </a:solidFill>
+                          <a:latin typeface="Calibri"/>
+                        </a:rPr>
+                        <a:t>Melissa Mar</a:t>
+                      </a:r>
+                    </a:p>
+                  </a:txBody>
+                  <a:tcPr>
+                    <a:solidFill>
+                      <a:srgbClr val="FFFFFF"/>
+                    </a:solidFill>
+                  </a:tcPr>
+                </a:tc>
+                <a:tc>
+                  <a:txBody>
+                    <a:bodyPr lIns="45720" rIns="45720" tIns="18288" bIns="18288" wrap="square" anchor="ctr"/>
+                    <a:lstStyle/>
+                    <a:p>
+                      <a:pPr algn="ctr"/>
+                      <a:r>
+                        <a:rPr sz="800">
+                          <a:solidFill>
+                            <a:srgbClr val="101010"/>
+                          </a:solidFill>
+                          <a:latin typeface="Calibri"/>
+                        </a:rPr>
+                        <a:t>28 / $40k</a:t>
+                      </a:r>
+                    </a:p>
+                  </a:txBody>
+                  <a:tcPr>
+                    <a:solidFill>
+                      <a:srgbClr val="FFFFFF"/>
+                    </a:solidFill>
+                  </a:tcPr>
+                </a:tc>
+                <a:tc>
+                  <a:txBody>
+                    <a:bodyPr lIns="45720" rIns="45720" tIns="18288" bIns="18288" wrap="square" anchor="ctr"/>
+                    <a:lstStyle/>
+                    <a:p>
+                      <a:pPr algn="ctr"/>
+                      <a:r>
+                        <a:rPr sz="800">
+                          <a:solidFill>
+                            <a:srgbClr val="101010"/>
+                          </a:solidFill>
+                          <a:latin typeface="Calibri"/>
+                        </a:rPr>
+                        <a:t>1 / $1k</a:t>
+                      </a:r>
+                    </a:p>
+                  </a:txBody>
+                  <a:tcPr>
+                    <a:solidFill>
+                      <a:srgbClr val="FFFFFF"/>
+                    </a:solidFill>
+                  </a:tcPr>
+                </a:tc>
+                <a:tc>
+                  <a:txBody>
+                    <a:bodyPr lIns="45720" rIns="45720" tIns="18288" bIns="18288" wrap="square" anchor="ctr"/>
+                    <a:lstStyle/>
+                    <a:p>
+                      <a:pPr algn="ctr"/>
+                      <a:r>
+                        <a:rPr sz="800">
+                          <a:solidFill>
+                            <a:srgbClr val="101010"/>
+                          </a:solidFill>
+                          <a:latin typeface="Calibri"/>
+                        </a:rPr>
+                        <a:t>48 / $57k</a:t>
+                      </a:r>
+                    </a:p>
+                  </a:txBody>
+                  <a:tcPr>
+                    <a:solidFill>
+                      <a:srgbClr val="FFFFFF"/>
+                    </a:solidFill>
+                  </a:tcPr>
+                </a:tc>
+                <a:tc>
+                  <a:txBody>
+                    <a:bodyPr lIns="45720" rIns="45720" tIns="18288" bIns="18288" wrap="square" anchor="ctr"/>
+                    <a:lstStyle/>
+                    <a:p>
+                      <a:pPr algn="ctr"/>
+                      <a:r>
+                        <a:rPr sz="800">
+                          <a:solidFill>
+                            <a:srgbClr val="101010"/>
+                          </a:solidFill>
+                          <a:latin typeface="Calibri"/>
+                        </a:rPr>
+                        <a:t>$0</a:t>
+                      </a:r>
+                    </a:p>
+                  </a:txBody>
+                  <a:tcPr>
+                    <a:solidFill>
+                      <a:srgbClr val="FFFFFF"/>
+                    </a:solidFill>
+                  </a:tcPr>
+                </a:tc>
+                <a:tc>
+                  <a:txBody>
+                    <a:bodyPr lIns="45720" rIns="45720" tIns="18288" bIns="18288" wrap="square" anchor="ctr"/>
+                    <a:lstStyle/>
+                    <a:p>
+                      <a:pPr algn="ctr"/>
+                      <a:r>
+                        <a:rPr sz="800">
+                          <a:solidFill>
+                            <a:srgbClr val="101010"/>
+                          </a:solidFill>
+                          <a:latin typeface="Calibri"/>
+                        </a:rPr>
+                        <a:t>$850</a:t>
+                      </a:r>
+                    </a:p>
+                  </a:txBody>
+                  <a:tcPr>
+                    <a:solidFill>
+                      <a:srgbClr val="FFFFFF"/>
+                    </a:solidFill>
+                  </a:tcPr>
+                </a:tc>
+                <a:tc>
+                  <a:txBody>
+                    <a:bodyPr lIns="45720" rIns="45720" tIns="18288" bIns="18288" wrap="square" anchor="ctr"/>
+                    <a:lstStyle/>
+                    <a:p>
+                      <a:pPr algn="ctr"/>
+                      <a:r>
+                        <a:rPr sz="800">
+                          <a:solidFill>
+                            <a:srgbClr val="101010"/>
+                          </a:solidFill>
+                          <a:latin typeface="Calibri"/>
+                        </a:rPr>
+                        <a:t>+$850</a:t>
+                      </a:r>
+                    </a:p>
+                  </a:txBody>
+                  <a:tcPr>
+                    <a:solidFill>
+                      <a:srgbClr val="FFFFFF"/>
+                    </a:solidFill>
+                  </a:tcPr>
+                </a:tc>
+              </a:tr>
+              <a:tr h="274320">
+                <a:tc>
+                  <a:txBody>
+                    <a:bodyPr lIns="45720" rIns="45720" tIns="18288" bIns="18288" wrap="square" anchor="ctr"/>
+                    <a:lstStyle/>
+                    <a:p>
+                      <a:pPr algn="ctr"/>
+                      <a:r>
+                        <a:rPr sz="800" b="1">
+                          <a:solidFill>
+                            <a:srgbClr val="101010"/>
+                          </a:solidFill>
+                          <a:latin typeface="Calibri"/>
+                        </a:rPr>
+                        <a:t>Melissa Apr</a:t>
+                      </a:r>
+                    </a:p>
+                  </a:txBody>
+                  <a:tcPr>
+                    <a:solidFill>
+                      <a:srgbClr val="F2F2F2"/>
+                    </a:solidFill>
+                  </a:tcPr>
+                </a:tc>
+                <a:tc>
+                  <a:txBody>
+                    <a:bodyPr lIns="45720" rIns="45720" tIns="18288" bIns="18288" wrap="square" anchor="ctr"/>
+                    <a:lstStyle/>
+                    <a:p>
+                      <a:pPr algn="ctr"/>
+                      <a:r>
+                        <a:rPr sz="800">
+                          <a:solidFill>
+                            <a:srgbClr val="101010"/>
+                          </a:solidFill>
+                          <a:latin typeface="Calibri"/>
+                        </a:rPr>
+                        <a:t>15 / $19k</a:t>
+                      </a:r>
+                    </a:p>
+                  </a:txBody>
+                  <a:tcPr>
+                    <a:solidFill>
+                      <a:srgbClr val="F2F2F2"/>
+                    </a:solidFill>
+                  </a:tcPr>
+                </a:tc>
+                <a:tc>
+                  <a:txBody>
+                    <a:bodyPr lIns="45720" rIns="45720" tIns="18288" bIns="18288" wrap="square" anchor="ctr"/>
+                    <a:lstStyle/>
+                    <a:p>
+                      <a:pPr algn="ctr"/>
+                      <a:r>
+                        <a:rPr sz="800">
+                          <a:solidFill>
+                            <a:srgbClr val="101010"/>
+                          </a:solidFill>
+                          <a:latin typeface="Calibri"/>
+                        </a:rPr>
+                        <a:t>0 / $0k</a:t>
+                      </a:r>
+                    </a:p>
+                  </a:txBody>
+                  <a:tcPr>
+                    <a:solidFill>
+                      <a:srgbClr val="F2F2F2"/>
+                    </a:solidFill>
+                  </a:tcPr>
+                </a:tc>
+                <a:tc>
+                  <a:txBody>
+                    <a:bodyPr lIns="45720" rIns="45720" tIns="18288" bIns="18288" wrap="square" anchor="ctr"/>
+                    <a:lstStyle/>
+                    <a:p>
+                      <a:pPr algn="ctr"/>
+                      <a:r>
+                        <a:rPr sz="800">
+                          <a:solidFill>
+                            <a:srgbClr val="101010"/>
+                          </a:solidFill>
+                          <a:latin typeface="Calibri"/>
+                        </a:rPr>
+                        <a:t>37 / $43k</a:t>
+                      </a:r>
+                    </a:p>
+                  </a:txBody>
+                  <a:tcPr>
+                    <a:solidFill>
+                      <a:srgbClr val="F2F2F2"/>
+                    </a:solidFill>
+                  </a:tcPr>
+                </a:tc>
+                <a:tc>
+                  <a:txBody>
+                    <a:bodyPr lIns="45720" rIns="45720" tIns="18288" bIns="18288" wrap="square" anchor="ctr"/>
+                    <a:lstStyle/>
+                    <a:p>
+                      <a:pPr algn="ctr"/>
+                      <a:r>
+                        <a:rPr sz="800">
+                          <a:solidFill>
+                            <a:srgbClr val="101010"/>
+                          </a:solidFill>
+                          <a:latin typeface="Calibri"/>
+                        </a:rPr>
+                        <a:t>$0</a:t>
+                      </a:r>
+                    </a:p>
+                  </a:txBody>
+                  <a:tcPr>
+                    <a:solidFill>
+                      <a:srgbClr val="F2F2F2"/>
+                    </a:solidFill>
+                  </a:tcPr>
+                </a:tc>
+                <a:tc>
+                  <a:txBody>
+                    <a:bodyPr lIns="45720" rIns="45720" tIns="18288" bIns="18288" wrap="square" anchor="ctr"/>
+                    <a:lstStyle/>
+                    <a:p>
+                      <a:pPr algn="ctr"/>
+                      <a:r>
+                        <a:rPr sz="800">
+                          <a:solidFill>
+                            <a:srgbClr val="101010"/>
+                          </a:solidFill>
+                          <a:latin typeface="Calibri"/>
+                        </a:rPr>
+                        <a:t>$850</a:t>
+                      </a:r>
+                    </a:p>
+                  </a:txBody>
+                  <a:tcPr>
+                    <a:solidFill>
+                      <a:srgbClr val="F2F2F2"/>
+                    </a:solidFill>
+                  </a:tcPr>
+                </a:tc>
+                <a:tc>
+                  <a:txBody>
+                    <a:bodyPr lIns="45720" rIns="45720" tIns="18288" bIns="18288" wrap="square" anchor="ctr"/>
+                    <a:lstStyle/>
+                    <a:p>
+                      <a:pPr algn="ctr"/>
+                      <a:r>
+                        <a:rPr sz="800">
+                          <a:solidFill>
+                            <a:srgbClr val="101010"/>
+                          </a:solidFill>
+                          <a:latin typeface="Calibri"/>
+                        </a:rPr>
+                        <a:t>+$850</a:t>
+                      </a:r>
+                    </a:p>
+                  </a:txBody>
+                  <a:tcPr>
+                    <a:solidFill>
+                      <a:srgbClr val="F2F2F2"/>
+                    </a:solidFill>
+                  </a:tcPr>
+                </a:tc>
+              </a:tr>
+              <a:tr h="274320">
+                <a:tc>
+                  <a:txBody>
+                    <a:bodyPr lIns="45720" rIns="45720" tIns="18288" bIns="18288" wrap="square" anchor="ctr"/>
+                    <a:lstStyle/>
+                    <a:p>
+                      <a:pPr algn="ctr"/>
+                      <a:r>
+                        <a:rPr sz="800" b="1">
+                          <a:solidFill>
+                            <a:srgbClr val="101010"/>
+                          </a:solidFill>
+                          <a:latin typeface="Calibri"/>
+                        </a:rPr>
+                        <a:t>Flavia Feb</a:t>
+                      </a:r>
+                    </a:p>
+                  </a:txBody>
+                  <a:tcPr>
+                    <a:solidFill>
+                      <a:srgbClr val="FFFFFF"/>
+                    </a:solidFill>
+                  </a:tcPr>
+                </a:tc>
+                <a:tc>
+                  <a:txBody>
+                    <a:bodyPr lIns="45720" rIns="45720" tIns="18288" bIns="18288" wrap="square" anchor="ctr"/>
+                    <a:lstStyle/>
+                    <a:p>
+                      <a:pPr algn="ctr"/>
+                      <a:r>
+                        <a:rPr sz="800">
+                          <a:solidFill>
+                            <a:srgbClr val="101010"/>
+                          </a:solidFill>
+                          <a:latin typeface="Calibri"/>
+                        </a:rPr>
+                        <a:t>23 / $22k</a:t>
+                      </a:r>
+                    </a:p>
+                  </a:txBody>
+                  <a:tcPr>
+                    <a:solidFill>
+                      <a:srgbClr val="FFFFFF"/>
+                    </a:solidFill>
+                  </a:tcPr>
+                </a:tc>
+                <a:tc>
+                  <a:txBody>
+                    <a:bodyPr lIns="45720" rIns="45720" tIns="18288" bIns="18288" wrap="square" anchor="ctr"/>
+                    <a:lstStyle/>
+                    <a:p>
+                      <a:pPr algn="ctr"/>
+                      <a:r>
+                        <a:rPr sz="800">
+                          <a:solidFill>
+                            <a:srgbClr val="101010"/>
+                          </a:solidFill>
+                          <a:latin typeface="Calibri"/>
+                        </a:rPr>
+                        <a:t>2 / $2k</a:t>
+                      </a:r>
+                    </a:p>
+                  </a:txBody>
+                  <a:tcPr>
+                    <a:solidFill>
+                      <a:srgbClr val="FFFFFF"/>
+                    </a:solidFill>
+                  </a:tcPr>
+                </a:tc>
+                <a:tc>
+                  <a:txBody>
+                    <a:bodyPr lIns="45720" rIns="45720" tIns="18288" bIns="18288" wrap="square" anchor="ctr"/>
+                    <a:lstStyle/>
+                    <a:p>
+                      <a:pPr algn="ctr"/>
+                      <a:r>
+                        <a:rPr sz="800">
+                          <a:solidFill>
+                            <a:srgbClr val="101010"/>
+                          </a:solidFill>
+                          <a:latin typeface="Calibri"/>
+                        </a:rPr>
+                        <a:t>42 / $44k</a:t>
+                      </a:r>
+                    </a:p>
+                  </a:txBody>
+                  <a:tcPr>
+                    <a:solidFill>
+                      <a:srgbClr val="FFFFFF"/>
+                    </a:solidFill>
+                  </a:tcPr>
+                </a:tc>
+                <a:tc>
+                  <a:txBody>
+                    <a:bodyPr lIns="45720" rIns="45720" tIns="18288" bIns="18288" wrap="square" anchor="ctr"/>
+                    <a:lstStyle/>
+                    <a:p>
+                      <a:pPr algn="ctr"/>
+                      <a:r>
+                        <a:rPr sz="800">
+                          <a:solidFill>
+                            <a:srgbClr val="101010"/>
+                          </a:solidFill>
+                          <a:latin typeface="Calibri"/>
+                        </a:rPr>
+                        <a:t>$0</a:t>
+                      </a:r>
+                    </a:p>
+                  </a:txBody>
+                  <a:tcPr>
+                    <a:solidFill>
+                      <a:srgbClr val="FFFFFF"/>
+                    </a:solidFill>
+                  </a:tcPr>
+                </a:tc>
+                <a:tc>
+                  <a:txBody>
+                    <a:bodyPr lIns="45720" rIns="45720" tIns="18288" bIns="18288" wrap="square" anchor="ctr"/>
+                    <a:lstStyle/>
+                    <a:p>
+                      <a:pPr algn="ctr"/>
+                      <a:r>
+                        <a:rPr sz="800">
+                          <a:solidFill>
+                            <a:srgbClr val="101010"/>
+                          </a:solidFill>
+                          <a:latin typeface="Calibri"/>
+                        </a:rPr>
+                        <a:t>$850</a:t>
+                      </a:r>
+                    </a:p>
+                  </a:txBody>
+                  <a:tcPr>
+                    <a:solidFill>
+                      <a:srgbClr val="FFFFFF"/>
+                    </a:solidFill>
+                  </a:tcPr>
+                </a:tc>
+                <a:tc>
+                  <a:txBody>
+                    <a:bodyPr lIns="45720" rIns="45720" tIns="18288" bIns="18288" wrap="square" anchor="ctr"/>
+                    <a:lstStyle/>
+                    <a:p>
+                      <a:pPr algn="ctr"/>
+                      <a:r>
+                        <a:rPr sz="800">
+                          <a:solidFill>
+                            <a:srgbClr val="101010"/>
+                          </a:solidFill>
+                          <a:latin typeface="Calibri"/>
+                        </a:rPr>
+                        <a:t>+$850</a:t>
+                      </a:r>
+                    </a:p>
+                  </a:txBody>
+                  <a:tcPr>
+                    <a:solidFill>
+                      <a:srgbClr val="FFFFFF"/>
+                    </a:solidFill>
+                  </a:tcPr>
+                </a:tc>
+              </a:tr>
+              <a:tr h="274320">
+                <a:tc>
+                  <a:txBody>
+                    <a:bodyPr lIns="45720" rIns="45720" tIns="18288" bIns="18288" wrap="square" anchor="ctr"/>
+                    <a:lstStyle/>
+                    <a:p>
+                      <a:pPr algn="ctr"/>
+                      <a:r>
+                        <a:rPr sz="800" b="1">
+                          <a:solidFill>
+                            <a:srgbClr val="101010"/>
+                          </a:solidFill>
+                          <a:latin typeface="Calibri"/>
+                        </a:rPr>
+                        <a:t>Monica Jan</a:t>
+                      </a:r>
+                    </a:p>
+                  </a:txBody>
+                  <a:tcPr>
+                    <a:solidFill>
+                      <a:srgbClr val="F2F2F2"/>
+                    </a:solidFill>
+                  </a:tcPr>
+                </a:tc>
+                <a:tc>
+                  <a:txBody>
+                    <a:bodyPr lIns="45720" rIns="45720" tIns="18288" bIns="18288" wrap="square" anchor="ctr"/>
+                    <a:lstStyle/>
+                    <a:p>
+                      <a:pPr algn="ctr"/>
+                      <a:r>
+                        <a:rPr sz="800">
+                          <a:solidFill>
+                            <a:srgbClr val="101010"/>
+                          </a:solidFill>
+                          <a:latin typeface="Calibri"/>
+                        </a:rPr>
+                        <a:t>23 / $29k</a:t>
+                      </a:r>
+                    </a:p>
+                  </a:txBody>
+                  <a:tcPr>
+                    <a:solidFill>
+                      <a:srgbClr val="F2F2F2"/>
+                    </a:solidFill>
+                  </a:tcPr>
+                </a:tc>
+                <a:tc>
+                  <a:txBody>
+                    <a:bodyPr lIns="45720" rIns="45720" tIns="18288" bIns="18288" wrap="square" anchor="ctr"/>
+                    <a:lstStyle/>
+                    <a:p>
+                      <a:pPr algn="ctr"/>
+                      <a:r>
+                        <a:rPr sz="800">
+                          <a:solidFill>
+                            <a:srgbClr val="101010"/>
+                          </a:solidFill>
+                          <a:latin typeface="Calibri"/>
+                        </a:rPr>
+                        <a:t>6 / $7k</a:t>
+                      </a:r>
+                    </a:p>
+                  </a:txBody>
+                  <a:tcPr>
+                    <a:solidFill>
+                      <a:srgbClr val="F2F2F2"/>
+                    </a:solidFill>
+                  </a:tcPr>
+                </a:tc>
+                <a:tc>
+                  <a:txBody>
+                    <a:bodyPr lIns="45720" rIns="45720" tIns="18288" bIns="18288" wrap="square" anchor="ctr"/>
+                    <a:lstStyle/>
+                    <a:p>
+                      <a:pPr algn="ctr"/>
+                      <a:r>
+                        <a:rPr sz="800">
+                          <a:solidFill>
+                            <a:srgbClr val="101010"/>
+                          </a:solidFill>
+                          <a:latin typeface="Calibri"/>
+                        </a:rPr>
+                        <a:t>37 / $49k</a:t>
+                      </a:r>
+                    </a:p>
+                  </a:txBody>
+                  <a:tcPr>
+                    <a:solidFill>
+                      <a:srgbClr val="F2F2F2"/>
+                    </a:solidFill>
+                  </a:tcPr>
+                </a:tc>
+                <a:tc>
+                  <a:txBody>
+                    <a:bodyPr lIns="45720" rIns="45720" tIns="18288" bIns="18288" wrap="square" anchor="ctr"/>
+                    <a:lstStyle/>
+                    <a:p>
+                      <a:pPr algn="ctr"/>
+                      <a:r>
+                        <a:rPr sz="800">
+                          <a:solidFill>
+                            <a:srgbClr val="101010"/>
+                          </a:solidFill>
+                          <a:latin typeface="Calibri"/>
+                        </a:rPr>
+                        <a:t>$0</a:t>
+                      </a:r>
+                    </a:p>
+                  </a:txBody>
+                  <a:tcPr>
+                    <a:solidFill>
+                      <a:srgbClr val="F2F2F2"/>
+                    </a:solidFill>
+                  </a:tcPr>
+                </a:tc>
+                <a:tc>
+                  <a:txBody>
+                    <a:bodyPr lIns="45720" rIns="45720" tIns="18288" bIns="18288" wrap="square" anchor="ctr"/>
+                    <a:lstStyle/>
+                    <a:p>
+                      <a:pPr algn="ctr"/>
+                      <a:r>
+                        <a:rPr sz="800">
+                          <a:solidFill>
+                            <a:srgbClr val="101010"/>
+                          </a:solidFill>
+                          <a:latin typeface="Calibri"/>
+                        </a:rPr>
+                        <a:t>$850</a:t>
+                      </a:r>
+                    </a:p>
+                  </a:txBody>
+                  <a:tcPr>
+                    <a:solidFill>
+                      <a:srgbClr val="F2F2F2"/>
+                    </a:solidFill>
+                  </a:tcPr>
+                </a:tc>
+                <a:tc>
+                  <a:txBody>
+                    <a:bodyPr lIns="45720" rIns="45720" tIns="18288" bIns="18288" wrap="square" anchor="ctr"/>
+                    <a:lstStyle/>
+                    <a:p>
+                      <a:pPr algn="ctr"/>
+                      <a:r>
+                        <a:rPr sz="800">
+                          <a:solidFill>
+                            <a:srgbClr val="101010"/>
+                          </a:solidFill>
+                          <a:latin typeface="Calibri"/>
+                        </a:rPr>
+                        <a:t>+$850</a:t>
+                      </a:r>
+                    </a:p>
+                  </a:txBody>
+                  <a:tcPr>
+                    <a:solidFill>
+                      <a:srgbClr val="F2F2F2"/>
+                    </a:solidFill>
+                  </a:tcPr>
+                </a:tc>
+              </a:tr>
+              <a:tr h="274320">
+                <a:tc>
+                  <a:txBody>
+                    <a:bodyPr lIns="45720" rIns="45720" tIns="18288" bIns="18288" wrap="square" anchor="ctr"/>
+                    <a:lstStyle/>
+                    <a:p>
+                      <a:pPr algn="ctr"/>
+                      <a:r>
+                        <a:rPr sz="800" b="1">
+                          <a:solidFill>
+                            <a:srgbClr val="101010"/>
+                          </a:solidFill>
+                          <a:latin typeface="Calibri"/>
+                        </a:rPr>
+                        <a:t>Monica Feb</a:t>
+                      </a:r>
+                    </a:p>
+                  </a:txBody>
+                  <a:tcPr>
+                    <a:solidFill>
+                      <a:srgbClr val="FFFFFF"/>
+                    </a:solidFill>
+                  </a:tcPr>
+                </a:tc>
+                <a:tc>
+                  <a:txBody>
+                    <a:bodyPr lIns="45720" rIns="45720" tIns="18288" bIns="18288" wrap="square" anchor="ctr"/>
+                    <a:lstStyle/>
+                    <a:p>
+                      <a:pPr algn="ctr"/>
+                      <a:r>
+                        <a:rPr sz="800">
+                          <a:solidFill>
+                            <a:srgbClr val="101010"/>
+                          </a:solidFill>
+                          <a:latin typeface="Calibri"/>
+                        </a:rPr>
+                        <a:t>21 / $32k</a:t>
+                      </a:r>
+                    </a:p>
+                  </a:txBody>
+                  <a:tcPr>
+                    <a:solidFill>
+                      <a:srgbClr val="FFFFFF"/>
+                    </a:solidFill>
+                  </a:tcPr>
+                </a:tc>
+                <a:tc>
+                  <a:txBody>
+                    <a:bodyPr lIns="45720" rIns="45720" tIns="18288" bIns="18288" wrap="square" anchor="ctr"/>
+                    <a:lstStyle/>
+                    <a:p>
+                      <a:pPr algn="ctr"/>
+                      <a:r>
+                        <a:rPr sz="800">
+                          <a:solidFill>
+                            <a:srgbClr val="101010"/>
+                          </a:solidFill>
+                          <a:latin typeface="Calibri"/>
+                        </a:rPr>
+                        <a:t>2 / $3k</a:t>
+                      </a:r>
+                    </a:p>
+                  </a:txBody>
+                  <a:tcPr>
+                    <a:solidFill>
+                      <a:srgbClr val="FFFFFF"/>
+                    </a:solidFill>
+                  </a:tcPr>
+                </a:tc>
+                <a:tc>
+                  <a:txBody>
+                    <a:bodyPr lIns="45720" rIns="45720" tIns="18288" bIns="18288" wrap="square" anchor="ctr"/>
+                    <a:lstStyle/>
+                    <a:p>
+                      <a:pPr algn="ctr"/>
+                      <a:r>
+                        <a:rPr sz="800">
+                          <a:solidFill>
+                            <a:srgbClr val="101010"/>
+                          </a:solidFill>
+                          <a:latin typeface="Calibri"/>
+                        </a:rPr>
+                        <a:t>29 / $47k</a:t>
+                      </a:r>
+                    </a:p>
+                  </a:txBody>
+                  <a:tcPr>
+                    <a:solidFill>
+                      <a:srgbClr val="FFFFFF"/>
+                    </a:solidFill>
+                  </a:tcPr>
+                </a:tc>
+                <a:tc>
+                  <a:txBody>
+                    <a:bodyPr lIns="45720" rIns="45720" tIns="18288" bIns="18288" wrap="square" anchor="ctr"/>
+                    <a:lstStyle/>
+                    <a:p>
+                      <a:pPr algn="ctr"/>
+                      <a:r>
+                        <a:rPr sz="800">
+                          <a:solidFill>
+                            <a:srgbClr val="101010"/>
+                          </a:solidFill>
+                          <a:latin typeface="Calibri"/>
+                        </a:rPr>
+                        <a:t>$0</a:t>
+                      </a:r>
+                    </a:p>
+                  </a:txBody>
+                  <a:tcPr>
+                    <a:solidFill>
+                      <a:srgbClr val="FFFFFF"/>
+                    </a:solidFill>
+                  </a:tcPr>
+                </a:tc>
+                <a:tc>
+                  <a:txBody>
+                    <a:bodyPr lIns="45720" rIns="45720" tIns="18288" bIns="18288" wrap="square" anchor="ctr"/>
+                    <a:lstStyle/>
+                    <a:p>
+                      <a:pPr algn="ctr"/>
+                      <a:r>
+                        <a:rPr sz="800">
+                          <a:solidFill>
+                            <a:srgbClr val="101010"/>
+                          </a:solidFill>
+                          <a:latin typeface="Calibri"/>
+                        </a:rPr>
+                        <a:t>$850</a:t>
+                      </a:r>
+                    </a:p>
+                  </a:txBody>
+                  <a:tcPr>
+                    <a:solidFill>
+                      <a:srgbClr val="FFFFFF"/>
+                    </a:solidFill>
+                  </a:tcPr>
+                </a:tc>
+                <a:tc>
+                  <a:txBody>
+                    <a:bodyPr lIns="45720" rIns="45720" tIns="18288" bIns="18288" wrap="square" anchor="ctr"/>
+                    <a:lstStyle/>
+                    <a:p>
+                      <a:pPr algn="ctr"/>
+                      <a:r>
+                        <a:rPr sz="800">
+                          <a:solidFill>
+                            <a:srgbClr val="101010"/>
+                          </a:solidFill>
+                          <a:latin typeface="Calibri"/>
+                        </a:rPr>
+                        <a:t>+$850</a:t>
+                      </a:r>
+                    </a:p>
+                  </a:txBody>
+                  <a:tcPr>
+                    <a:solidFill>
+                      <a:srgbClr val="FFFFFF"/>
+                    </a:solidFill>
+                  </a:tcPr>
+                </a:tc>
+              </a:tr>
+              <a:tr h="274320">
+                <a:tc>
+                  <a:txBody>
+                    <a:bodyPr lIns="45720" rIns="45720" tIns="18288" bIns="18288" wrap="square" anchor="ctr"/>
+                    <a:lstStyle/>
+                    <a:p>
+                      <a:pPr algn="ctr"/>
+                      <a:r>
+                        <a:rPr sz="800" b="1">
+                          <a:solidFill>
+                            <a:srgbClr val="101010"/>
+                          </a:solidFill>
+                          <a:latin typeface="Calibri"/>
+                        </a:rPr>
+                        <a:t>Dialiner Feb</a:t>
+                      </a:r>
+                    </a:p>
+                  </a:txBody>
+                  <a:tcPr>
+                    <a:solidFill>
+                      <a:srgbClr val="F2F2F2"/>
+                    </a:solidFill>
+                  </a:tcPr>
+                </a:tc>
+                <a:tc>
+                  <a:txBody>
+                    <a:bodyPr lIns="45720" rIns="45720" tIns="18288" bIns="18288" wrap="square" anchor="ctr"/>
+                    <a:lstStyle/>
+                    <a:p>
+                      <a:pPr algn="ctr"/>
+                      <a:r>
+                        <a:rPr sz="800">
+                          <a:solidFill>
+                            <a:srgbClr val="101010"/>
+                          </a:solidFill>
+                          <a:latin typeface="Calibri"/>
+                        </a:rPr>
+                        <a:t>23 / $30k</a:t>
+                      </a:r>
+                    </a:p>
+                  </a:txBody>
+                  <a:tcPr>
+                    <a:solidFill>
+                      <a:srgbClr val="F2F2F2"/>
+                    </a:solidFill>
+                  </a:tcPr>
+                </a:tc>
+                <a:tc>
+                  <a:txBody>
+                    <a:bodyPr lIns="45720" rIns="45720" tIns="18288" bIns="18288" wrap="square" anchor="ctr"/>
+                    <a:lstStyle/>
+                    <a:p>
+                      <a:pPr algn="ctr"/>
+                      <a:r>
+                        <a:rPr sz="800">
+                          <a:solidFill>
+                            <a:srgbClr val="101010"/>
+                          </a:solidFill>
+                          <a:latin typeface="Calibri"/>
+                        </a:rPr>
+                        <a:t>9 / $12k</a:t>
+                      </a:r>
+                    </a:p>
+                  </a:txBody>
+                  <a:tcPr>
+                    <a:solidFill>
+                      <a:srgbClr val="F2F2F2"/>
+                    </a:solidFill>
+                  </a:tcPr>
+                </a:tc>
+                <a:tc>
+                  <a:txBody>
+                    <a:bodyPr lIns="45720" rIns="45720" tIns="18288" bIns="18288" wrap="square" anchor="ctr"/>
+                    <a:lstStyle/>
+                    <a:p>
+                      <a:pPr algn="ctr"/>
+                      <a:r>
+                        <a:rPr sz="800">
+                          <a:solidFill>
+                            <a:srgbClr val="101010"/>
+                          </a:solidFill>
+                          <a:latin typeface="Calibri"/>
+                        </a:rPr>
+                        <a:t>56 / $86k</a:t>
+                      </a:r>
+                    </a:p>
+                  </a:txBody>
+                  <a:tcPr>
+                    <a:solidFill>
+                      <a:srgbClr val="F2F2F2"/>
+                    </a:solidFill>
+                  </a:tcPr>
+                </a:tc>
+                <a:tc>
+                  <a:txBody>
+                    <a:bodyPr lIns="45720" rIns="45720" tIns="18288" bIns="18288" wrap="square" anchor="ctr"/>
+                    <a:lstStyle/>
+                    <a:p>
+                      <a:pPr algn="ctr"/>
+                      <a:r>
+                        <a:rPr sz="800">
+                          <a:solidFill>
+                            <a:srgbClr val="101010"/>
+                          </a:solidFill>
+                          <a:latin typeface="Calibri"/>
+                        </a:rPr>
+                        <a:t>$250</a:t>
+                      </a:r>
+                    </a:p>
+                  </a:txBody>
+                  <a:tcPr>
+                    <a:solidFill>
+                      <a:srgbClr val="F2F2F2"/>
+                    </a:solidFill>
+                  </a:tcPr>
+                </a:tc>
+                <a:tc>
+                  <a:txBody>
+                    <a:bodyPr lIns="45720" rIns="45720" tIns="18288" bIns="18288" wrap="square" anchor="ctr"/>
+                    <a:lstStyle/>
+                    <a:p>
+                      <a:pPr algn="ctr"/>
+                      <a:r>
+                        <a:rPr sz="800">
+                          <a:solidFill>
+                            <a:srgbClr val="101010"/>
+                          </a:solidFill>
+                          <a:latin typeface="Calibri"/>
+                        </a:rPr>
+                        <a:t>$1,050</a:t>
+                      </a:r>
+                    </a:p>
+                  </a:txBody>
+                  <a:tcPr>
+                    <a:solidFill>
+                      <a:srgbClr val="F2F2F2"/>
+                    </a:solidFill>
+                  </a:tcPr>
+                </a:tc>
+                <a:tc>
+                  <a:txBody>
+                    <a:bodyPr lIns="45720" rIns="45720" tIns="18288" bIns="18288" wrap="square" anchor="ctr"/>
+                    <a:lstStyle/>
+                    <a:p>
+                      <a:pPr algn="ctr"/>
+                      <a:r>
+                        <a:rPr sz="800">
+                          <a:solidFill>
+                            <a:srgbClr val="101010"/>
+                          </a:solidFill>
+                          <a:latin typeface="Calibri"/>
+                        </a:rPr>
+                        <a:t>+$800</a:t>
+                      </a:r>
+                    </a:p>
+                  </a:txBody>
+                  <a:tcPr>
+                    <a:solidFill>
+                      <a:srgbClr val="F2F2F2"/>
+                    </a:solidFill>
+                  </a:tcPr>
+                </a:tc>
+              </a:tr>
+              <a:tr h="274320">
+                <a:tc>
+                  <a:txBody>
+                    <a:bodyPr lIns="45720" rIns="45720" tIns="18288" bIns="18288" wrap="square" anchor="ctr"/>
+                    <a:lstStyle/>
+                    <a:p>
+                      <a:pPr algn="ctr"/>
+                      <a:r>
+                        <a:rPr sz="800" b="1">
+                          <a:solidFill>
+                            <a:srgbClr val="101010"/>
+                          </a:solidFill>
+                          <a:latin typeface="Calibri"/>
+                        </a:rPr>
+                        <a:t>Monica Mar</a:t>
+                      </a:r>
+                    </a:p>
+                  </a:txBody>
+                  <a:tcPr>
+                    <a:solidFill>
+                      <a:srgbClr val="FFFFFF"/>
+                    </a:solidFill>
+                  </a:tcPr>
+                </a:tc>
+                <a:tc>
+                  <a:txBody>
+                    <a:bodyPr lIns="45720" rIns="45720" tIns="18288" bIns="18288" wrap="square" anchor="ctr"/>
+                    <a:lstStyle/>
+                    <a:p>
+                      <a:pPr algn="ctr"/>
+                      <a:r>
+                        <a:rPr sz="800">
+                          <a:solidFill>
+                            <a:srgbClr val="101010"/>
+                          </a:solidFill>
+                          <a:latin typeface="Calibri"/>
+                        </a:rPr>
+                        <a:t>36 / $69k</a:t>
+                      </a:r>
+                    </a:p>
+                  </a:txBody>
+                  <a:tcPr>
+                    <a:solidFill>
+                      <a:srgbClr val="FFFFFF"/>
+                    </a:solidFill>
+                  </a:tcPr>
+                </a:tc>
+                <a:tc>
+                  <a:txBody>
+                    <a:bodyPr lIns="45720" rIns="45720" tIns="18288" bIns="18288" wrap="square" anchor="ctr"/>
+                    <a:lstStyle/>
+                    <a:p>
+                      <a:pPr algn="ctr"/>
+                      <a:r>
+                        <a:rPr sz="800">
+                          <a:solidFill>
+                            <a:srgbClr val="101010"/>
+                          </a:solidFill>
+                          <a:latin typeface="Calibri"/>
+                        </a:rPr>
+                        <a:t>0 / $0k</a:t>
+                      </a:r>
+                    </a:p>
+                  </a:txBody>
+                  <a:tcPr>
+                    <a:solidFill>
+                      <a:srgbClr val="FFFFFF"/>
+                    </a:solidFill>
+                  </a:tcPr>
+                </a:tc>
+                <a:tc>
+                  <a:txBody>
+                    <a:bodyPr lIns="45720" rIns="45720" tIns="18288" bIns="18288" wrap="square" anchor="ctr"/>
+                    <a:lstStyle/>
+                    <a:p>
+                      <a:pPr algn="ctr"/>
+                      <a:r>
+                        <a:rPr sz="800">
+                          <a:solidFill>
+                            <a:srgbClr val="101010"/>
+                          </a:solidFill>
+                          <a:latin typeface="Calibri"/>
+                        </a:rPr>
+                        <a:t>28 / $39k</a:t>
+                      </a:r>
+                    </a:p>
+                  </a:txBody>
+                  <a:tcPr>
+                    <a:solidFill>
+                      <a:srgbClr val="FFFFFF"/>
+                    </a:solidFill>
+                  </a:tcPr>
+                </a:tc>
+                <a:tc>
+                  <a:txBody>
+                    <a:bodyPr lIns="45720" rIns="45720" tIns="18288" bIns="18288" wrap="square" anchor="ctr"/>
+                    <a:lstStyle/>
+                    <a:p>
+                      <a:pPr algn="ctr"/>
+                      <a:r>
+                        <a:rPr sz="800">
                           <a:solidFill>
                             <a:srgbClr val="101010"/>
                           </a:solidFill>
@@ -11276,795 +13940,66 @@
                   </a:txBody>
                   <a:tcPr>
                     <a:solidFill>
-                      <a:srgbClr val="F2F2F2"/>
-                    </a:solidFill>
-                  </a:tcPr>
-                </a:tc>
-                <a:tc>
-                  <a:txBody>
-                    <a:bodyPr lIns="45720" rIns="45720" tIns="18288" bIns="18288" wrap="square" anchor="ctr"/>
-                    <a:lstStyle/>
-                    <a:p>
-                      <a:pPr algn="ctr"/>
-                      <a:r>
-                        <a:rPr sz="900">
-                          <a:solidFill>
-                            <a:srgbClr val="101010"/>
-                          </a:solidFill>
-                          <a:latin typeface="Calibri"/>
-                        </a:rPr>
-                        <a:t>+$350</a:t>
-                      </a:r>
-                    </a:p>
-                  </a:txBody>
-                  <a:tcPr>
-                    <a:solidFill>
-                      <a:srgbClr val="F2F2F2"/>
+                      <a:srgbClr val="FFFFFF"/>
+                    </a:solidFill>
+                  </a:tcPr>
+                </a:tc>
+                <a:tc>
+                  <a:txBody>
+                    <a:bodyPr lIns="45720" rIns="45720" tIns="18288" bIns="18288" wrap="square" anchor="ctr"/>
+                    <a:lstStyle/>
+                    <a:p>
+                      <a:pPr algn="ctr"/>
+                      <a:r>
+                        <a:rPr sz="800">
+                          <a:solidFill>
+                            <a:srgbClr val="101010"/>
+                          </a:solidFill>
+                          <a:latin typeface="Calibri"/>
+                        </a:rPr>
+                        <a:t>$1,125</a:t>
+                      </a:r>
+                    </a:p>
+                  </a:txBody>
+                  <a:tcPr>
+                    <a:solidFill>
+                      <a:srgbClr val="FFFFFF"/>
+                    </a:solidFill>
+                  </a:tcPr>
+                </a:tc>
+                <a:tc>
+                  <a:txBody>
+                    <a:bodyPr lIns="45720" rIns="45720" tIns="18288" bIns="18288" wrap="square" anchor="ctr"/>
+                    <a:lstStyle/>
+                    <a:p>
+                      <a:pPr algn="ctr"/>
+                      <a:r>
+                        <a:rPr sz="800">
+                          <a:solidFill>
+                            <a:srgbClr val="101010"/>
+                          </a:solidFill>
+                          <a:latin typeface="Calibri"/>
+                        </a:rPr>
+                        <a:t>+$775</a:t>
+                      </a:r>
+                    </a:p>
+                  </a:txBody>
+                  <a:tcPr>
+                    <a:solidFill>
+                      <a:srgbClr val="FFFFFF"/>
                     </a:solidFill>
                   </a:tcPr>
                 </a:tc>
               </a:tr>
-              <a:tr h="256032">
-                <a:tc>
-                  <a:txBody>
-                    <a:bodyPr lIns="45720" rIns="45720" tIns="18288" bIns="18288" wrap="square" anchor="ctr"/>
-                    <a:lstStyle/>
-                    <a:p>
-                      <a:pPr algn="ctr"/>
-                      <a:r>
-                        <a:rPr sz="900" b="1">
-                          <a:solidFill>
-                            <a:srgbClr val="101010"/>
-                          </a:solidFill>
-                          <a:latin typeface="Calibri"/>
-                        </a:rPr>
-                        <a:t>Melissa Mar</a:t>
-                      </a:r>
-                    </a:p>
-                  </a:txBody>
-                  <a:tcPr>
-                    <a:solidFill>
-                      <a:srgbClr val="FFFFFF"/>
-                    </a:solidFill>
-                  </a:tcPr>
-                </a:tc>
-                <a:tc>
-                  <a:txBody>
-                    <a:bodyPr lIns="45720" rIns="45720" tIns="18288" bIns="18288" wrap="square" anchor="ctr"/>
-                    <a:lstStyle/>
-                    <a:p>
-                      <a:pPr algn="ctr"/>
-                      <a:r>
-                        <a:rPr sz="900">
-                          <a:solidFill>
-                            <a:srgbClr val="101010"/>
-                          </a:solidFill>
-                          <a:latin typeface="Calibri"/>
-                        </a:rPr>
-                        <a:t>$0</a:t>
-                      </a:r>
-                    </a:p>
-                  </a:txBody>
-                  <a:tcPr>
-                    <a:solidFill>
-                      <a:srgbClr val="FFFFFF"/>
-                    </a:solidFill>
-                  </a:tcPr>
-                </a:tc>
-                <a:tc>
-                  <a:txBody>
-                    <a:bodyPr lIns="45720" rIns="45720" tIns="18288" bIns="18288" wrap="square" anchor="ctr"/>
-                    <a:lstStyle/>
-                    <a:p>
-                      <a:pPr algn="ctr"/>
-                      <a:r>
-                        <a:rPr sz="900">
-                          <a:solidFill>
-                            <a:srgbClr val="101010"/>
-                          </a:solidFill>
-                          <a:latin typeface="Calibri"/>
-                        </a:rPr>
-                        <a:t>$350</a:t>
-                      </a:r>
-                    </a:p>
-                  </a:txBody>
-                  <a:tcPr>
-                    <a:solidFill>
-                      <a:srgbClr val="FFFFFF"/>
-                    </a:solidFill>
-                  </a:tcPr>
-                </a:tc>
-                <a:tc>
-                  <a:txBody>
-                    <a:bodyPr lIns="45720" rIns="45720" tIns="18288" bIns="18288" wrap="square" anchor="ctr"/>
-                    <a:lstStyle/>
-                    <a:p>
-                      <a:pPr algn="ctr"/>
-                      <a:r>
-                        <a:rPr sz="900">
-                          <a:solidFill>
-                            <a:srgbClr val="101010"/>
-                          </a:solidFill>
-                          <a:latin typeface="Calibri"/>
-                        </a:rPr>
-                        <a:t>+$350</a:t>
-                      </a:r>
-                    </a:p>
-                  </a:txBody>
-                  <a:tcPr>
-                    <a:solidFill>
-                      <a:srgbClr val="FFFFFF"/>
-                    </a:solidFill>
-                  </a:tcPr>
-                </a:tc>
-              </a:tr>
-              <a:tr h="256032">
-                <a:tc>
-                  <a:txBody>
-                    <a:bodyPr lIns="45720" rIns="45720" tIns="18288" bIns="18288" wrap="square" anchor="ctr"/>
-                    <a:lstStyle/>
-                    <a:p>
-                      <a:pPr algn="ctr"/>
-                      <a:r>
-                        <a:rPr sz="900" b="1">
-                          <a:solidFill>
-                            <a:srgbClr val="101010"/>
-                          </a:solidFill>
-                          <a:latin typeface="Calibri"/>
-                        </a:rPr>
-                        <a:t>Melissa Apr</a:t>
-                      </a:r>
-                    </a:p>
-                  </a:txBody>
-                  <a:tcPr>
-                    <a:solidFill>
-                      <a:srgbClr val="F2F2F2"/>
-                    </a:solidFill>
-                  </a:tcPr>
-                </a:tc>
-                <a:tc>
-                  <a:txBody>
-                    <a:bodyPr lIns="45720" rIns="45720" tIns="18288" bIns="18288" wrap="square" anchor="ctr"/>
-                    <a:lstStyle/>
-                    <a:p>
-                      <a:pPr algn="ctr"/>
-                      <a:r>
-                        <a:rPr sz="900">
-                          <a:solidFill>
-                            <a:srgbClr val="101010"/>
-                          </a:solidFill>
-                          <a:latin typeface="Calibri"/>
-                        </a:rPr>
-                        <a:t>$0</a:t>
-                      </a:r>
-                    </a:p>
-                  </a:txBody>
-                  <a:tcPr>
-                    <a:solidFill>
-                      <a:srgbClr val="F2F2F2"/>
-                    </a:solidFill>
-                  </a:tcPr>
-                </a:tc>
-                <a:tc>
-                  <a:txBody>
-                    <a:bodyPr lIns="45720" rIns="45720" tIns="18288" bIns="18288" wrap="square" anchor="ctr"/>
-                    <a:lstStyle/>
-                    <a:p>
-                      <a:pPr algn="ctr"/>
-                      <a:r>
-                        <a:rPr sz="900">
-                          <a:solidFill>
-                            <a:srgbClr val="101010"/>
-                          </a:solidFill>
-                          <a:latin typeface="Calibri"/>
-                        </a:rPr>
-                        <a:t>$350</a:t>
-                      </a:r>
-                    </a:p>
-                  </a:txBody>
-                  <a:tcPr>
-                    <a:solidFill>
-                      <a:srgbClr val="F2F2F2"/>
-                    </a:solidFill>
-                  </a:tcPr>
-                </a:tc>
-                <a:tc>
-                  <a:txBody>
-                    <a:bodyPr lIns="45720" rIns="45720" tIns="18288" bIns="18288" wrap="square" anchor="ctr"/>
-                    <a:lstStyle/>
-                    <a:p>
-                      <a:pPr algn="ctr"/>
-                      <a:r>
-                        <a:rPr sz="900">
-                          <a:solidFill>
-                            <a:srgbClr val="101010"/>
-                          </a:solidFill>
-                          <a:latin typeface="Calibri"/>
-                        </a:rPr>
-                        <a:t>+$350</a:t>
-                      </a:r>
-                    </a:p>
-                  </a:txBody>
-                  <a:tcPr>
-                    <a:solidFill>
-                      <a:srgbClr val="F2F2F2"/>
-                    </a:solidFill>
-                  </a:tcPr>
-                </a:tc>
-              </a:tr>
-              <a:tr h="256032">
-                <a:tc>
-                  <a:txBody>
-                    <a:bodyPr lIns="45720" rIns="45720" tIns="18288" bIns="18288" wrap="square" anchor="ctr"/>
-                    <a:lstStyle/>
-                    <a:p>
-                      <a:pPr algn="ctr"/>
-                      <a:r>
-                        <a:rPr sz="900" b="1">
-                          <a:solidFill>
-                            <a:srgbClr val="101010"/>
-                          </a:solidFill>
-                          <a:latin typeface="Calibri"/>
-                        </a:rPr>
-                        <a:t>Flavia Feb</a:t>
-                      </a:r>
-                    </a:p>
-                  </a:txBody>
-                  <a:tcPr>
-                    <a:solidFill>
-                      <a:srgbClr val="FFFFFF"/>
-                    </a:solidFill>
-                  </a:tcPr>
-                </a:tc>
-                <a:tc>
-                  <a:txBody>
-                    <a:bodyPr lIns="45720" rIns="45720" tIns="18288" bIns="18288" wrap="square" anchor="ctr"/>
-                    <a:lstStyle/>
-                    <a:p>
-                      <a:pPr algn="ctr"/>
-                      <a:r>
-                        <a:rPr sz="900">
-                          <a:solidFill>
-                            <a:srgbClr val="101010"/>
-                          </a:solidFill>
-                          <a:latin typeface="Calibri"/>
-                        </a:rPr>
-                        <a:t>$0</a:t>
-                      </a:r>
-                    </a:p>
-                  </a:txBody>
-                  <a:tcPr>
-                    <a:solidFill>
-                      <a:srgbClr val="FFFFFF"/>
-                    </a:solidFill>
-                  </a:tcPr>
-                </a:tc>
-                <a:tc>
-                  <a:txBody>
-                    <a:bodyPr lIns="45720" rIns="45720" tIns="18288" bIns="18288" wrap="square" anchor="ctr"/>
-                    <a:lstStyle/>
-                    <a:p>
-                      <a:pPr algn="ctr"/>
-                      <a:r>
-                        <a:rPr sz="900">
-                          <a:solidFill>
-                            <a:srgbClr val="101010"/>
-                          </a:solidFill>
-                          <a:latin typeface="Calibri"/>
-                        </a:rPr>
-                        <a:t>$350</a:t>
-                      </a:r>
-                    </a:p>
-                  </a:txBody>
-                  <a:tcPr>
-                    <a:solidFill>
-                      <a:srgbClr val="FFFFFF"/>
-                    </a:solidFill>
-                  </a:tcPr>
-                </a:tc>
-                <a:tc>
-                  <a:txBody>
-                    <a:bodyPr lIns="45720" rIns="45720" tIns="18288" bIns="18288" wrap="square" anchor="ctr"/>
-                    <a:lstStyle/>
-                    <a:p>
-                      <a:pPr algn="ctr"/>
-                      <a:r>
-                        <a:rPr sz="900">
-                          <a:solidFill>
-                            <a:srgbClr val="101010"/>
-                          </a:solidFill>
-                          <a:latin typeface="Calibri"/>
-                        </a:rPr>
-                        <a:t>+$350</a:t>
-                      </a:r>
-                    </a:p>
-                  </a:txBody>
-                  <a:tcPr>
-                    <a:solidFill>
-                      <a:srgbClr val="FFFFFF"/>
-                    </a:solidFill>
-                  </a:tcPr>
-                </a:tc>
-              </a:tr>
-              <a:tr h="256032">
-                <a:tc>
-                  <a:txBody>
-                    <a:bodyPr lIns="45720" rIns="45720" tIns="18288" bIns="18288" wrap="square" anchor="ctr"/>
-                    <a:lstStyle/>
-                    <a:p>
-                      <a:pPr algn="ctr"/>
-                      <a:r>
-                        <a:rPr sz="900" b="1">
-                          <a:solidFill>
-                            <a:srgbClr val="101010"/>
-                          </a:solidFill>
-                          <a:latin typeface="Calibri"/>
-                        </a:rPr>
-                        <a:t>Monica Jan</a:t>
-                      </a:r>
-                    </a:p>
-                  </a:txBody>
-                  <a:tcPr>
-                    <a:solidFill>
-                      <a:srgbClr val="F2F2F2"/>
-                    </a:solidFill>
-                  </a:tcPr>
-                </a:tc>
-                <a:tc>
-                  <a:txBody>
-                    <a:bodyPr lIns="45720" rIns="45720" tIns="18288" bIns="18288" wrap="square" anchor="ctr"/>
-                    <a:lstStyle/>
-                    <a:p>
-                      <a:pPr algn="ctr"/>
-                      <a:r>
-                        <a:rPr sz="900">
-                          <a:solidFill>
-                            <a:srgbClr val="101010"/>
-                          </a:solidFill>
-                          <a:latin typeface="Calibri"/>
-                        </a:rPr>
-                        <a:t>$0</a:t>
-                      </a:r>
-                    </a:p>
-                  </a:txBody>
-                  <a:tcPr>
-                    <a:solidFill>
-                      <a:srgbClr val="F2F2F2"/>
-                    </a:solidFill>
-                  </a:tcPr>
-                </a:tc>
-                <a:tc>
-                  <a:txBody>
-                    <a:bodyPr lIns="45720" rIns="45720" tIns="18288" bIns="18288" wrap="square" anchor="ctr"/>
-                    <a:lstStyle/>
-                    <a:p>
-                      <a:pPr algn="ctr"/>
-                      <a:r>
-                        <a:rPr sz="900">
-                          <a:solidFill>
-                            <a:srgbClr val="101010"/>
-                          </a:solidFill>
-                          <a:latin typeface="Calibri"/>
-                        </a:rPr>
-                        <a:t>$350</a:t>
-                      </a:r>
-                    </a:p>
-                  </a:txBody>
-                  <a:tcPr>
-                    <a:solidFill>
-                      <a:srgbClr val="F2F2F2"/>
-                    </a:solidFill>
-                  </a:tcPr>
-                </a:tc>
-                <a:tc>
-                  <a:txBody>
-                    <a:bodyPr lIns="45720" rIns="45720" tIns="18288" bIns="18288" wrap="square" anchor="ctr"/>
-                    <a:lstStyle/>
-                    <a:p>
-                      <a:pPr algn="ctr"/>
-                      <a:r>
-                        <a:rPr sz="900">
-                          <a:solidFill>
-                            <a:srgbClr val="101010"/>
-                          </a:solidFill>
-                          <a:latin typeface="Calibri"/>
-                        </a:rPr>
-                        <a:t>+$350</a:t>
-                      </a:r>
-                    </a:p>
-                  </a:txBody>
-                  <a:tcPr>
-                    <a:solidFill>
-                      <a:srgbClr val="F2F2F2"/>
-                    </a:solidFill>
-                  </a:tcPr>
-                </a:tc>
-              </a:tr>
-              <a:tr h="256032">
-                <a:tc>
-                  <a:txBody>
-                    <a:bodyPr lIns="45720" rIns="45720" tIns="18288" bIns="18288" wrap="square" anchor="ctr"/>
-                    <a:lstStyle/>
-                    <a:p>
-                      <a:pPr algn="ctr"/>
-                      <a:r>
-                        <a:rPr sz="900" b="1">
-                          <a:solidFill>
-                            <a:srgbClr val="101010"/>
-                          </a:solidFill>
-                          <a:latin typeface="Calibri"/>
-                        </a:rPr>
-                        <a:t>Monica Feb</a:t>
-                      </a:r>
-                    </a:p>
-                  </a:txBody>
-                  <a:tcPr>
-                    <a:solidFill>
-                      <a:srgbClr val="FFFFFF"/>
-                    </a:solidFill>
-                  </a:tcPr>
-                </a:tc>
-                <a:tc>
-                  <a:txBody>
-                    <a:bodyPr lIns="45720" rIns="45720" tIns="18288" bIns="18288" wrap="square" anchor="ctr"/>
-                    <a:lstStyle/>
-                    <a:p>
-                      <a:pPr algn="ctr"/>
-                      <a:r>
-                        <a:rPr sz="900">
-                          <a:solidFill>
-                            <a:srgbClr val="101010"/>
-                          </a:solidFill>
-                          <a:latin typeface="Calibri"/>
-                        </a:rPr>
-                        <a:t>$0</a:t>
-                      </a:r>
-                    </a:p>
-                  </a:txBody>
-                  <a:tcPr>
-                    <a:solidFill>
-                      <a:srgbClr val="FFFFFF"/>
-                    </a:solidFill>
-                  </a:tcPr>
-                </a:tc>
-                <a:tc>
-                  <a:txBody>
-                    <a:bodyPr lIns="45720" rIns="45720" tIns="18288" bIns="18288" wrap="square" anchor="ctr"/>
-                    <a:lstStyle/>
-                    <a:p>
-                      <a:pPr algn="ctr"/>
-                      <a:r>
-                        <a:rPr sz="900">
-                          <a:solidFill>
-                            <a:srgbClr val="101010"/>
-                          </a:solidFill>
-                          <a:latin typeface="Calibri"/>
-                        </a:rPr>
-                        <a:t>$350</a:t>
-                      </a:r>
-                    </a:p>
-                  </a:txBody>
-                  <a:tcPr>
-                    <a:solidFill>
-                      <a:srgbClr val="FFFFFF"/>
-                    </a:solidFill>
-                  </a:tcPr>
-                </a:tc>
-                <a:tc>
-                  <a:txBody>
-                    <a:bodyPr lIns="45720" rIns="45720" tIns="18288" bIns="18288" wrap="square" anchor="ctr"/>
-                    <a:lstStyle/>
-                    <a:p>
-                      <a:pPr algn="ctr"/>
-                      <a:r>
-                        <a:rPr sz="900">
-                          <a:solidFill>
-                            <a:srgbClr val="101010"/>
-                          </a:solidFill>
-                          <a:latin typeface="Calibri"/>
-                        </a:rPr>
-                        <a:t>+$350</a:t>
-                      </a:r>
-                    </a:p>
-                  </a:txBody>
-                  <a:tcPr>
-                    <a:solidFill>
-                      <a:srgbClr val="FFFFFF"/>
-                    </a:solidFill>
-                  </a:tcPr>
-                </a:tc>
-              </a:tr>
-              <a:tr h="256032">
-                <a:tc>
-                  <a:txBody>
-                    <a:bodyPr lIns="45720" rIns="45720" tIns="18288" bIns="18288" wrap="square" anchor="ctr"/>
-                    <a:lstStyle/>
-                    <a:p>
-                      <a:pPr algn="ctr"/>
-                      <a:r>
-                        <a:rPr sz="900" b="1">
-                          <a:solidFill>
-                            <a:srgbClr val="101010"/>
-                          </a:solidFill>
-                          <a:latin typeface="Calibri"/>
-                        </a:rPr>
-                        <a:t>Dialinerys Feb</a:t>
-                      </a:r>
-                    </a:p>
-                  </a:txBody>
-                  <a:tcPr>
-                    <a:solidFill>
-                      <a:srgbClr val="F2F2F2"/>
-                    </a:solidFill>
-                  </a:tcPr>
-                </a:tc>
-                <a:tc>
-                  <a:txBody>
-                    <a:bodyPr lIns="45720" rIns="45720" tIns="18288" bIns="18288" wrap="square" anchor="ctr"/>
-                    <a:lstStyle/>
-                    <a:p>
-                      <a:pPr algn="ctr"/>
-                      <a:r>
-                        <a:rPr sz="900">
-                          <a:solidFill>
-                            <a:srgbClr val="101010"/>
-                          </a:solidFill>
-                          <a:latin typeface="Calibri"/>
-                        </a:rPr>
-                        <a:t>$250</a:t>
-                      </a:r>
-                    </a:p>
-                  </a:txBody>
-                  <a:tcPr>
-                    <a:solidFill>
-                      <a:srgbClr val="F2F2F2"/>
-                    </a:solidFill>
-                  </a:tcPr>
-                </a:tc>
-                <a:tc>
-                  <a:txBody>
-                    <a:bodyPr lIns="45720" rIns="45720" tIns="18288" bIns="18288" wrap="square" anchor="ctr"/>
-                    <a:lstStyle/>
-                    <a:p>
-                      <a:pPr algn="ctr"/>
-                      <a:r>
-                        <a:rPr sz="900">
-                          <a:solidFill>
-                            <a:srgbClr val="101010"/>
-                          </a:solidFill>
-                          <a:latin typeface="Calibri"/>
-                        </a:rPr>
-                        <a:t>$550</a:t>
-                      </a:r>
-                    </a:p>
-                  </a:txBody>
-                  <a:tcPr>
-                    <a:solidFill>
-                      <a:srgbClr val="F2F2F2"/>
-                    </a:solidFill>
-                  </a:tcPr>
-                </a:tc>
-                <a:tc>
-                  <a:txBody>
-                    <a:bodyPr lIns="45720" rIns="45720" tIns="18288" bIns="18288" wrap="square" anchor="ctr"/>
-                    <a:lstStyle/>
-                    <a:p>
-                      <a:pPr algn="ctr"/>
-                      <a:r>
-                        <a:rPr sz="900">
-                          <a:solidFill>
-                            <a:srgbClr val="101010"/>
-                          </a:solidFill>
-                          <a:latin typeface="Calibri"/>
-                        </a:rPr>
-                        <a:t>+$300</a:t>
-                      </a:r>
-                    </a:p>
-                  </a:txBody>
-                  <a:tcPr>
-                    <a:solidFill>
-                      <a:srgbClr val="F2F2F2"/>
-                    </a:solidFill>
-                  </a:tcPr>
-                </a:tc>
-              </a:tr>
-              <a:tr h="256032">
-                <a:tc>
-                  <a:txBody>
-                    <a:bodyPr lIns="45720" rIns="45720" tIns="18288" bIns="18288" wrap="square" anchor="ctr"/>
-                    <a:lstStyle/>
-                    <a:p>
-                      <a:pPr algn="ctr"/>
-                      <a:r>
-                        <a:rPr sz="900" b="1">
-                          <a:solidFill>
-                            <a:srgbClr val="101010"/>
-                          </a:solidFill>
-                          <a:latin typeface="Calibri"/>
-                        </a:rPr>
-                        <a:t>Monica Mar</a:t>
-                      </a:r>
-                    </a:p>
-                  </a:txBody>
-                  <a:tcPr>
-                    <a:solidFill>
-                      <a:srgbClr val="FFFFFF"/>
-                    </a:solidFill>
-                  </a:tcPr>
-                </a:tc>
-                <a:tc>
-                  <a:txBody>
-                    <a:bodyPr lIns="45720" rIns="45720" tIns="18288" bIns="18288" wrap="square" anchor="ctr"/>
-                    <a:lstStyle/>
-                    <a:p>
-                      <a:pPr algn="ctr"/>
-                      <a:r>
-                        <a:rPr sz="900">
-                          <a:solidFill>
-                            <a:srgbClr val="101010"/>
-                          </a:solidFill>
-                          <a:latin typeface="Calibri"/>
-                        </a:rPr>
-                        <a:t>$350</a:t>
-                      </a:r>
-                    </a:p>
-                  </a:txBody>
-                  <a:tcPr>
-                    <a:solidFill>
-                      <a:srgbClr val="FFFFFF"/>
-                    </a:solidFill>
-                  </a:tcPr>
-                </a:tc>
-                <a:tc>
-                  <a:txBody>
-                    <a:bodyPr lIns="45720" rIns="45720" tIns="18288" bIns="18288" wrap="square" anchor="ctr"/>
-                    <a:lstStyle/>
-                    <a:p>
-                      <a:pPr algn="ctr"/>
-                      <a:r>
-                        <a:rPr sz="900">
-                          <a:solidFill>
-                            <a:srgbClr val="101010"/>
-                          </a:solidFill>
-                          <a:latin typeface="Calibri"/>
-                        </a:rPr>
-                        <a:t>$625</a:t>
-                      </a:r>
-                    </a:p>
-                  </a:txBody>
-                  <a:tcPr>
-                    <a:solidFill>
-                      <a:srgbClr val="FFFFFF"/>
-                    </a:solidFill>
-                  </a:tcPr>
-                </a:tc>
-                <a:tc>
-                  <a:txBody>
-                    <a:bodyPr lIns="45720" rIns="45720" tIns="18288" bIns="18288" wrap="square" anchor="ctr"/>
-                    <a:lstStyle/>
-                    <a:p>
-                      <a:pPr algn="ctr"/>
-                      <a:r>
-                        <a:rPr sz="900">
-                          <a:solidFill>
-                            <a:srgbClr val="101010"/>
-                          </a:solidFill>
-                          <a:latin typeface="Calibri"/>
-                        </a:rPr>
-                        <a:t>+$275</a:t>
-                      </a:r>
-                    </a:p>
-                  </a:txBody>
-                  <a:tcPr>
-                    <a:solidFill>
-                      <a:srgbClr val="FFFFFF"/>
-                    </a:solidFill>
-                  </a:tcPr>
-                </a:tc>
-              </a:tr>
-              <a:tr h="256032">
-                <a:tc>
-                  <a:txBody>
-                    <a:bodyPr lIns="45720" rIns="45720" tIns="18288" bIns="18288" wrap="square" anchor="ctr"/>
-                    <a:lstStyle/>
-                    <a:p>
-                      <a:pPr algn="ctr"/>
-                      <a:r>
-                        <a:rPr sz="900" b="1">
-                          <a:solidFill>
-                            <a:srgbClr val="101010"/>
-                          </a:solidFill>
-                          <a:latin typeface="Calibri"/>
-                        </a:rPr>
-                        <a:t>Abel Feb</a:t>
-                      </a:r>
-                    </a:p>
-                  </a:txBody>
-                  <a:tcPr>
-                    <a:solidFill>
-                      <a:srgbClr val="F2F2F2"/>
-                    </a:solidFill>
-                  </a:tcPr>
-                </a:tc>
-                <a:tc>
-                  <a:txBody>
-                    <a:bodyPr lIns="45720" rIns="45720" tIns="18288" bIns="18288" wrap="square" anchor="ctr"/>
-                    <a:lstStyle/>
-                    <a:p>
-                      <a:pPr algn="ctr"/>
-                      <a:r>
-                        <a:rPr sz="900">
-                          <a:solidFill>
-                            <a:srgbClr val="101010"/>
-                          </a:solidFill>
-                          <a:latin typeface="Calibri"/>
-                        </a:rPr>
-                        <a:t>$0</a:t>
-                      </a:r>
-                    </a:p>
-                  </a:txBody>
-                  <a:tcPr>
-                    <a:solidFill>
-                      <a:srgbClr val="F2F2F2"/>
-                    </a:solidFill>
-                  </a:tcPr>
-                </a:tc>
-                <a:tc>
-                  <a:txBody>
-                    <a:bodyPr lIns="45720" rIns="45720" tIns="18288" bIns="18288" wrap="square" anchor="ctr"/>
-                    <a:lstStyle/>
-                    <a:p>
-                      <a:pPr algn="ctr"/>
-                      <a:r>
-                        <a:rPr sz="900">
-                          <a:solidFill>
-                            <a:srgbClr val="101010"/>
-                          </a:solidFill>
-                          <a:latin typeface="Calibri"/>
-                        </a:rPr>
-                        <a:t>$250</a:t>
-                      </a:r>
-                    </a:p>
-                  </a:txBody>
-                  <a:tcPr>
-                    <a:solidFill>
-                      <a:srgbClr val="F2F2F2"/>
-                    </a:solidFill>
-                  </a:tcPr>
-                </a:tc>
-                <a:tc>
-                  <a:txBody>
-                    <a:bodyPr lIns="45720" rIns="45720" tIns="18288" bIns="18288" wrap="square" anchor="ctr"/>
-                    <a:lstStyle/>
-                    <a:p>
-                      <a:pPr algn="ctr"/>
-                      <a:r>
-                        <a:rPr sz="900">
-                          <a:solidFill>
-                            <a:srgbClr val="101010"/>
-                          </a:solidFill>
-                          <a:latin typeface="Calibri"/>
-                        </a:rPr>
-                        <a:t>+$250</a:t>
-                      </a:r>
-                    </a:p>
-                  </a:txBody>
-                  <a:tcPr>
-                    <a:solidFill>
-                      <a:srgbClr val="F2F2F2"/>
-                    </a:solidFill>
-                  </a:tcPr>
-                </a:tc>
-              </a:tr>
-              <a:tr h="256032">
-                <a:tc>
-                  <a:txBody>
-                    <a:bodyPr lIns="45720" rIns="45720" tIns="18288" bIns="18288" wrap="square" anchor="ctr"/>
-                    <a:lstStyle/>
-                    <a:p>
-                      <a:pPr algn="ctr"/>
-                      <a:r>
-                        <a:rPr sz="900" b="1">
+              <a:tr h="274320">
+                <a:tc>
+                  <a:txBody>
+                    <a:bodyPr lIns="45720" rIns="45720" tIns="18288" bIns="18288" wrap="square" anchor="ctr"/>
+                    <a:lstStyle/>
+                    <a:p>
+                      <a:pPr algn="ctr"/>
+                      <a:r>
+                        <a:rPr sz="800" b="1">
                           <a:solidFill>
                             <a:srgbClr val="101010"/>
                           </a:solidFill>
@@ -12076,18 +14011,87 @@
                   </a:txBody>
                   <a:tcPr>
                     <a:solidFill>
-                      <a:srgbClr val="FFFFFF"/>
-                    </a:solidFill>
-                  </a:tcPr>
-                </a:tc>
-                <a:tc>
-                  <a:txBody>
-                    <a:bodyPr lIns="45720" rIns="45720" tIns="18288" bIns="18288" wrap="square" anchor="ctr"/>
-                    <a:lstStyle/>
-                    <a:p>
-                      <a:pPr algn="ctr"/>
-                      <a:r>
-                        <a:rPr sz="900">
+                      <a:srgbClr val="F2F2F2"/>
+                    </a:solidFill>
+                  </a:tcPr>
+                </a:tc>
+                <a:tc>
+                  <a:txBody>
+                    <a:bodyPr lIns="45720" rIns="45720" tIns="18288" bIns="18288" wrap="square" anchor="ctr"/>
+                    <a:lstStyle/>
+                    <a:p>
+                      <a:pPr algn="ctr"/>
+                      <a:r>
+                        <a:rPr sz="800">
+                          <a:solidFill>
+                            <a:srgbClr val="101010"/>
+                          </a:solidFill>
+                          <a:latin typeface="Calibri"/>
+                        </a:rPr>
+                        <a:t/>
+                      </a:r>
+                    </a:p>
+                  </a:txBody>
+                  <a:tcPr>
+                    <a:solidFill>
+                      <a:srgbClr val="F2F2F2"/>
+                    </a:solidFill>
+                  </a:tcPr>
+                </a:tc>
+                <a:tc>
+                  <a:txBody>
+                    <a:bodyPr lIns="45720" rIns="45720" tIns="18288" bIns="18288" wrap="square" anchor="ctr"/>
+                    <a:lstStyle/>
+                    <a:p>
+                      <a:pPr algn="ctr"/>
+                      <a:r>
+                        <a:rPr sz="800">
+                          <a:solidFill>
+                            <a:srgbClr val="101010"/>
+                          </a:solidFill>
+                          <a:latin typeface="Calibri"/>
+                        </a:rPr>
+                        <a:t/>
+                      </a:r>
+                    </a:p>
+                  </a:txBody>
+                  <a:tcPr>
+                    <a:solidFill>
+                      <a:srgbClr val="F2F2F2"/>
+                    </a:solidFill>
+                  </a:tcPr>
+                </a:tc>
+                <a:tc>
+                  <a:txBody>
+                    <a:bodyPr lIns="45720" rIns="45720" tIns="18288" bIns="18288" wrap="square" anchor="ctr"/>
+                    <a:lstStyle/>
+                    <a:p>
+                      <a:pPr algn="ctr"/>
+                      <a:r>
+                        <a:rPr sz="800">
+                          <a:solidFill>
+                            <a:srgbClr val="101010"/>
+                          </a:solidFill>
+                          <a:latin typeface="Calibri"/>
+                        </a:rPr>
+                        <a:t/>
+                      </a:r>
+                    </a:p>
+                  </a:txBody>
+                  <a:tcPr>
+                    <a:solidFill>
+                      <a:srgbClr val="F2F2F2"/>
+                    </a:solidFill>
+                  </a:tcPr>
+                </a:tc>
+                <a:tc>
+                  <a:txBody>
+                    <a:bodyPr lIns="45720" rIns="45720" tIns="18288" bIns="18288" wrap="square" anchor="ctr"/>
+                    <a:lstStyle/>
+                    <a:p>
+                      <a:pPr algn="ctr"/>
+                      <a:r>
+                        <a:rPr sz="800">
                           <a:solidFill>
                             <a:srgbClr val="101010"/>
                           </a:solidFill>
@@ -12099,53 +14103,53 @@
                   </a:txBody>
                   <a:tcPr>
                     <a:solidFill>
-                      <a:srgbClr val="FFFFFF"/>
-                    </a:solidFill>
-                  </a:tcPr>
-                </a:tc>
-                <a:tc>
-                  <a:txBody>
-                    <a:bodyPr lIns="45720" rIns="45720" tIns="18288" bIns="18288" wrap="square" anchor="ctr"/>
-                    <a:lstStyle/>
-                    <a:p>
-                      <a:pPr algn="ctr"/>
-                      <a:r>
-                        <a:rPr sz="900">
-                          <a:solidFill>
-                            <a:srgbClr val="101010"/>
-                          </a:solidFill>
-                          <a:latin typeface="Calibri"/>
-                        </a:rPr>
-                        <a:t>$7,975</a:t>
-                      </a:r>
-                    </a:p>
-                  </a:txBody>
-                  <a:tcPr>
-                    <a:solidFill>
-                      <a:srgbClr val="FFFFFF"/>
-                    </a:solidFill>
-                  </a:tcPr>
-                </a:tc>
-                <a:tc>
-                  <a:txBody>
-                    <a:bodyPr lIns="45720" rIns="45720" tIns="18288" bIns="18288" wrap="square" anchor="ctr"/>
-                    <a:lstStyle/>
-                    <a:p>
-                      <a:pPr algn="ctr"/>
-                      <a:r>
-                        <a:rPr sz="900">
-                          <a:solidFill>
-                            <a:srgbClr val="101010"/>
-                          </a:solidFill>
-                          <a:latin typeface="Calibri"/>
-                        </a:rPr>
-                        <a:t>+$5,225</a:t>
-                      </a:r>
-                    </a:p>
-                  </a:txBody>
-                  <a:tcPr>
-                    <a:solidFill>
-                      <a:srgbClr val="FFFFFF"/>
+                      <a:srgbClr val="F2F2F2"/>
+                    </a:solidFill>
+                  </a:tcPr>
+                </a:tc>
+                <a:tc>
+                  <a:txBody>
+                    <a:bodyPr lIns="45720" rIns="45720" tIns="18288" bIns="18288" wrap="square" anchor="ctr"/>
+                    <a:lstStyle/>
+                    <a:p>
+                      <a:pPr algn="ctr"/>
+                      <a:r>
+                        <a:rPr sz="800">
+                          <a:solidFill>
+                            <a:srgbClr val="101010"/>
+                          </a:solidFill>
+                          <a:latin typeface="Calibri"/>
+                        </a:rPr>
+                        <a:t>$18,475</a:t>
+                      </a:r>
+                    </a:p>
+                  </a:txBody>
+                  <a:tcPr>
+                    <a:solidFill>
+                      <a:srgbClr val="F2F2F2"/>
+                    </a:solidFill>
+                  </a:tcPr>
+                </a:tc>
+                <a:tc>
+                  <a:txBody>
+                    <a:bodyPr lIns="45720" rIns="45720" tIns="18288" bIns="18288" wrap="square" anchor="ctr"/>
+                    <a:lstStyle/>
+                    <a:p>
+                      <a:pPr algn="ctr"/>
+                      <a:r>
+                        <a:rPr sz="800">
+                          <a:solidFill>
+                            <a:srgbClr val="101010"/>
+                          </a:solidFill>
+                          <a:latin typeface="Calibri"/>
+                        </a:rPr>
+                        <a:t>+$15,725</a:t>
+                      </a:r>
+                    </a:p>
+                  </a:txBody>
+                  <a:tcPr>
+                    <a:solidFill>
+                      <a:srgbClr val="F2F2F2"/>
                     </a:solidFill>
                   </a:tcPr>
                 </a:tc>
@@ -12731,7 +14735,7 @@
                           </a:solidFill>
                           <a:latin typeface="Calibri"/>
                         </a:rPr>
-                        <a:t>$3,875</a:t>
+                        <a:t>$8,375</a:t>
                       </a:r>
                     </a:p>
                   </a:txBody>
@@ -12754,7 +14758,7 @@
                           </a:solidFill>
                           <a:latin typeface="Calibri"/>
                         </a:rPr>
-                        <a:t>$7,975</a:t>
+                        <a:t>$18,475</a:t>
                       </a:r>
                     </a:p>
                   </a:txBody>
@@ -12848,7 +14852,7 @@
                           </a:solidFill>
                           <a:latin typeface="Calibri"/>
                         </a:rPr>
-                        <a:t>$3,875</a:t>
+                        <a:t>$8,375</a:t>
                       </a:r>
                     </a:p>
                   </a:txBody>
@@ -12871,7 +14875,7 @@
                           </a:solidFill>
                           <a:latin typeface="Calibri"/>
                         </a:rPr>
-                        <a:t>$7,975</a:t>
+                        <a:t>$18,475</a:t>
                       </a:r>
                     </a:p>
                   </a:txBody>
@@ -13000,7 +15004,7 @@
                 </a:solidFill>
                 <a:latin typeface="Calibri"/>
               </a:rPr>
-              <a:t>• New plan WITH MIN under 100% FLIP = $7,975 (65% of today's $12,220). The agency keeps more profit while still rewarding the right behavior.</a:t>
+              <a:t>• New plan WITH MIN under 100% FLIP = $18,475 (151% of today's $12,220). The agency keeps more profit while still rewarding the right behavior.</a:t>
             </a:r>
           </a:p>
           <a:p>
@@ -13582,7 +15586,7 @@
                 </a:solidFill>
                 <a:latin typeface="Calibri"/>
               </a:rPr>
-              <a:t>• Costs LESS at full target than today's count-tier plan - new plan FLIP $7,975 vs current $12,220.</a:t>
+              <a:t>• Pays more under FLIP ($18,475 vs today's $12,220) but only when the agency keeps the book - REAL behavior pays only $1,675. The pay scales with the retention upside.</a:t>
             </a:r>
           </a:p>
         </p:txBody>
@@ -15935,7 +17939,7 @@
         </p:nvGraphicFramePr>
         <p:xfrm>
           <a:off x="365760" y="4069080"/>
-          <a:ext cx="11612880" cy="1097280"/>
+          <a:ext cx="11612880" cy="960120"/>
         </p:xfrm>
         <a:graphic>
           <a:graphicData uri="http://schemas.openxmlformats.org/drawingml/2006/table">
@@ -15952,7 +17956,7 @@
                 <a:gridCol w="1463040"/>
                 <a:gridCol w="2286000"/>
               </a:tblGrid>
-              <a:tr h="365760">
+              <a:tr h="320040">
                 <a:tc>
                   <a:txBody>
                     <a:bodyPr lIns="45720" rIns="45720" tIns="18288" bIns="18288" wrap="square" anchor="ctr"/>
@@ -16115,7 +18119,7 @@
                   </a:tcPr>
                 </a:tc>
               </a:tr>
-              <a:tr h="365760">
+              <a:tr h="320040">
                 <a:tc>
                   <a:txBody>
                     <a:bodyPr lIns="45720" rIns="45720" tIns="18288" bIns="18288" wrap="square" anchor="ctr"/>
@@ -16278,7 +18282,7 @@
                   </a:tcPr>
                 </a:tc>
               </a:tr>
-              <a:tr h="365760">
+              <a:tr h="320040">
                 <a:tc>
                   <a:txBody>
                     <a:bodyPr lIns="45720" rIns="45720" tIns="18288" bIns="18288" wrap="square" anchor="ctr"/>
@@ -16437,6 +18441,269 @@
                   <a:tcPr>
                     <a:solidFill>
                       <a:srgbClr val="F2F2F2"/>
+                    </a:solidFill>
+                  </a:tcPr>
+                </a:tc>
+              </a:tr>
+            </a:tbl>
+          </a:graphicData>
+        </a:graphic>
+      </p:graphicFrame>
+      <p:graphicFrame>
+        <p:nvGraphicFramePr>
+          <p:cNvPr id="14" name="Table 13"/>
+          <p:cNvGraphicFramePr>
+            <a:graphicFrameLocks noGrp="1"/>
+          </p:cNvGraphicFramePr>
+          <p:nvPr/>
+        </p:nvGraphicFramePr>
+        <p:xfrm>
+          <a:off x="365760" y="5074920"/>
+          <a:ext cx="11612880" cy="585216"/>
+        </p:xfrm>
+        <a:graphic>
+          <a:graphicData uri="http://schemas.openxmlformats.org/drawingml/2006/table">
+            <a:tbl>
+              <a:tblPr firstRow="1" bandRow="1">
+                <a:tableStyleId>{5C22544A-7EE6-4342-B048-85BDC9FD1C3A}</a:tableStyleId>
+              </a:tblPr>
+              <a:tblGrid>
+                <a:gridCol w="3200400"/>
+                <a:gridCol w="2103120"/>
+                <a:gridCol w="2103120"/>
+                <a:gridCol w="2103120"/>
+                <a:gridCol w="2103120"/>
+              </a:tblGrid>
+              <a:tr h="292608">
+                <a:tc>
+                  <a:txBody>
+                    <a:bodyPr lIns="45720" rIns="45720" tIns="18288" bIns="18288" wrap="square" anchor="ctr"/>
+                    <a:lstStyle/>
+                    <a:p>
+                      <a:pPr algn="ctr"/>
+                      <a:r>
+                        <a:rPr sz="1100" b="1">
+                          <a:solidFill>
+                            <a:srgbClr val="FFFFFF"/>
+                          </a:solidFill>
+                          <a:latin typeface="Calibri"/>
+                        </a:rPr>
+                        <a:t>Retention rate</a:t>
+                      </a:r>
+                    </a:p>
+                  </a:txBody>
+                  <a:tcPr>
+                    <a:solidFill>
+                      <a:srgbClr val="BF9000"/>
+                    </a:solidFill>
+                  </a:tcPr>
+                </a:tc>
+                <a:tc>
+                  <a:txBody>
+                    <a:bodyPr lIns="45720" rIns="45720" tIns="18288" bIns="18288" wrap="square" anchor="ctr"/>
+                    <a:lstStyle/>
+                    <a:p>
+                      <a:pPr algn="ctr"/>
+                      <a:r>
+                        <a:rPr sz="1100" b="1">
+                          <a:solidFill>
+                            <a:srgbClr val="FFFFFF"/>
+                          </a:solidFill>
+                          <a:latin typeface="Calibri"/>
+                        </a:rPr>
+                        <a:t>30-49%</a:t>
+                      </a:r>
+                    </a:p>
+                  </a:txBody>
+                  <a:tcPr>
+                    <a:solidFill>
+                      <a:srgbClr val="BF9000"/>
+                    </a:solidFill>
+                  </a:tcPr>
+                </a:tc>
+                <a:tc>
+                  <a:txBody>
+                    <a:bodyPr lIns="45720" rIns="45720" tIns="18288" bIns="18288" wrap="square" anchor="ctr"/>
+                    <a:lstStyle/>
+                    <a:p>
+                      <a:pPr algn="ctr"/>
+                      <a:r>
+                        <a:rPr sz="1100" b="1">
+                          <a:solidFill>
+                            <a:srgbClr val="FFFFFF"/>
+                          </a:solidFill>
+                          <a:latin typeface="Calibri"/>
+                        </a:rPr>
+                        <a:t>50-74%</a:t>
+                      </a:r>
+                    </a:p>
+                  </a:txBody>
+                  <a:tcPr>
+                    <a:solidFill>
+                      <a:srgbClr val="BF9000"/>
+                    </a:solidFill>
+                  </a:tcPr>
+                </a:tc>
+                <a:tc>
+                  <a:txBody>
+                    <a:bodyPr lIns="45720" rIns="45720" tIns="18288" bIns="18288" wrap="square" anchor="ctr"/>
+                    <a:lstStyle/>
+                    <a:p>
+                      <a:pPr algn="ctr"/>
+                      <a:r>
+                        <a:rPr sz="1100" b="1">
+                          <a:solidFill>
+                            <a:srgbClr val="FFFFFF"/>
+                          </a:solidFill>
+                          <a:latin typeface="Calibri"/>
+                        </a:rPr>
+                        <a:t>75-99%</a:t>
+                      </a:r>
+                    </a:p>
+                  </a:txBody>
+                  <a:tcPr>
+                    <a:solidFill>
+                      <a:srgbClr val="BF9000"/>
+                    </a:solidFill>
+                  </a:tcPr>
+                </a:tc>
+                <a:tc>
+                  <a:txBody>
+                    <a:bodyPr lIns="45720" rIns="45720" tIns="18288" bIns="18288" wrap="square" anchor="ctr"/>
+                    <a:lstStyle/>
+                    <a:p>
+                      <a:pPr algn="ctr"/>
+                      <a:r>
+                        <a:rPr sz="1100" b="1">
+                          <a:solidFill>
+                            <a:srgbClr val="FFFFFF"/>
+                          </a:solidFill>
+                          <a:latin typeface="Calibri"/>
+                        </a:rPr>
+                        <a:t>100%</a:t>
+                      </a:r>
+                    </a:p>
+                  </a:txBody>
+                  <a:tcPr>
+                    <a:solidFill>
+                      <a:srgbClr val="BF9000"/>
+                    </a:solidFill>
+                  </a:tcPr>
+                </a:tc>
+              </a:tr>
+              <a:tr h="292608">
+                <a:tc>
+                  <a:txBody>
+                    <a:bodyPr lIns="45720" rIns="45720" tIns="18288" bIns="18288" wrap="square" anchor="ctr"/>
+                    <a:lstStyle/>
+                    <a:p>
+                      <a:pPr algn="ctr"/>
+                      <a:r>
+                        <a:rPr sz="1100" b="1">
+                          <a:solidFill>
+                            <a:srgbClr val="101010"/>
+                          </a:solidFill>
+                          <a:latin typeface="Calibri"/>
+                        </a:rPr>
+                        <a:t>Kicker on top of tier</a:t>
+                      </a:r>
+                    </a:p>
+                  </a:txBody>
+                  <a:tcPr>
+                    <a:solidFill>
+                      <a:srgbClr val="FFFFFF"/>
+                    </a:solidFill>
+                  </a:tcPr>
+                </a:tc>
+                <a:tc>
+                  <a:txBody>
+                    <a:bodyPr lIns="45720" rIns="45720" tIns="18288" bIns="18288" wrap="square" anchor="ctr"/>
+                    <a:lstStyle/>
+                    <a:p>
+                      <a:pPr algn="ctr"/>
+                      <a:r>
+                        <a:rPr sz="1100">
+                          <a:solidFill>
+                            <a:srgbClr val="101010"/>
+                          </a:solidFill>
+                          <a:latin typeface="Calibri"/>
+                        </a:rPr>
+                        <a:t>$0</a:t>
+                      </a:r>
+                    </a:p>
+                  </a:txBody>
+                  <a:tcPr>
+                    <a:solidFill>
+                      <a:srgbClr val="FFFFFF"/>
+                    </a:solidFill>
+                  </a:tcPr>
+                </a:tc>
+                <a:tc>
+                  <a:txBody>
+                    <a:bodyPr lIns="45720" rIns="45720" tIns="18288" bIns="18288" wrap="square" anchor="ctr"/>
+                    <a:lstStyle/>
+                    <a:p>
+                      <a:pPr algn="ctr"/>
+                      <a:r>
+                        <a:rPr sz="1100">
+                          <a:solidFill>
+                            <a:srgbClr val="101010"/>
+                          </a:solidFill>
+                          <a:latin typeface="Calibri"/>
+                        </a:rPr>
+                        <a:t>+$250</a:t>
+                      </a:r>
+                    </a:p>
+                  </a:txBody>
+                  <a:tcPr>
+                    <a:solidFill>
+                      <a:srgbClr val="FFFFFF"/>
+                    </a:solidFill>
+                  </a:tcPr>
+                </a:tc>
+                <a:tc>
+                  <a:txBody>
+                    <a:bodyPr lIns="45720" rIns="45720" tIns="18288" bIns="18288" wrap="square" anchor="ctr"/>
+                    <a:lstStyle/>
+                    <a:p>
+                      <a:pPr algn="ctr"/>
+                      <a:r>
+                        <a:rPr sz="1100">
+                          <a:solidFill>
+                            <a:srgbClr val="101010"/>
+                          </a:solidFill>
+                          <a:latin typeface="Calibri"/>
+                        </a:rPr>
+                        <a:t>+$500</a:t>
+                      </a:r>
+                    </a:p>
+                  </a:txBody>
+                  <a:tcPr>
+                    <a:solidFill>
+                      <a:srgbClr val="FFFFFF"/>
+                    </a:solidFill>
+                  </a:tcPr>
+                </a:tc>
+                <a:tc>
+                  <a:txBody>
+                    <a:bodyPr lIns="45720" rIns="45720" tIns="18288" bIns="18288" wrap="square" anchor="ctr"/>
+                    <a:lstStyle/>
+                    <a:p>
+                      <a:pPr algn="ctr"/>
+                      <a:r>
+                        <a:rPr sz="1100">
+                          <a:solidFill>
+                            <a:srgbClr val="101010"/>
+                          </a:solidFill>
+                          <a:latin typeface="Calibri"/>
+                        </a:rPr>
+                        <a:t>+$1,000</a:t>
+                      </a:r>
+                    </a:p>
+                  </a:txBody>
+                  <a:tcPr>
+                    <a:solidFill>
+                      <a:srgbClr val="FFFFFF"/>
                     </a:solidFill>
                   </a:tcPr>
                 </a:tc>
@@ -16447,13 +18714,13 @@
       </p:graphicFrame>
       <p:sp>
         <p:nvSpPr>
-          <p:cNvPr id="14" name="TextBox 13"/>
+          <p:cNvPr id="15" name="TextBox 14"/>
           <p:cNvSpPr txBox="1"/>
           <p:nvPr/>
         </p:nvSpPr>
         <p:spPr>
           <a:xfrm>
-            <a:off x="365760" y="5532120"/>
+            <a:off x="365760" y="5806440"/>
             <a:ext cx="11612880" cy="274320"/>
           </a:xfrm>
           <a:prstGeom prst="rect">
@@ -16485,14 +18752,14 @@
       </p:sp>
       <p:graphicFrame>
         <p:nvGraphicFramePr>
-          <p:cNvPr id="15" name="Table 14"/>
+          <p:cNvPr id="16" name="Table 15"/>
           <p:cNvGraphicFramePr>
             <a:graphicFrameLocks noGrp="1"/>
           </p:cNvGraphicFramePr>
           <p:nvPr/>
         </p:nvGraphicFramePr>
         <p:xfrm>
-          <a:off x="365760" y="5852160"/>
+          <a:off x="365760" y="6126480"/>
           <a:ext cx="11612880" cy="950976"/>
         </p:xfrm>
         <a:graphic>
@@ -18527,7 +20794,7 @@
                           </a:solidFill>
                           <a:latin typeface="Calibri"/>
                         </a:rPr>
-                        <a:t>$700</a:t>
+                        <a:t>$1200</a:t>
                       </a:r>
                     </a:p>
                   </a:txBody>
@@ -18667,7 +20934,7 @@
                           </a:solidFill>
                           <a:latin typeface="Calibri"/>
                         </a:rPr>
-                        <a:t>+$100 (GOOD)</a:t>
+                        <a:t>+$600 (GOOD)</a:t>
                       </a:r>
                     </a:p>
                   </a:txBody>
@@ -20135,7 +22402,7 @@
                 </a:solidFill>
                 <a:latin typeface="Calibri"/>
               </a:rPr>
-              <a:t>  REN $54k -&gt; T2 $40k = $350</a:t>
+              <a:t>  REN $54k -&gt; T2 $40k = $850</a:t>
             </a:r>
           </a:p>
         </p:txBody>
@@ -20173,7 +22440,7 @@
                 </a:solidFill>
                 <a:latin typeface="Calibri"/>
               </a:rPr>
-              <a:t>TARGET TOTAL = $700</a:t>
+              <a:t>TARGET TOTAL = $1200</a:t>
             </a:r>
           </a:p>
         </p:txBody>
@@ -20363,7 +22630,7 @@
                 </a:solidFill>
                 <a:latin typeface="Calibri"/>
               </a:rPr>
-              <a:t>PAID = $700</a:t>
+              <a:t>PAID = $1200</a:t>
             </a:r>
           </a:p>
         </p:txBody>
@@ -20793,7 +23060,7 @@
                 </a:solidFill>
                 <a:latin typeface="Calibri"/>
               </a:rPr>
-              <a:t>  REN $96k -&gt; T4 $80k = $550</a:t>
+              <a:t>  REN $96k -&gt; T4 $80k = $1050</a:t>
             </a:r>
           </a:p>
         </p:txBody>
@@ -20831,7 +23098,7 @@
                 </a:solidFill>
                 <a:latin typeface="Calibri"/>
               </a:rPr>
-              <a:t>TARGET TOTAL = $800</a:t>
+              <a:t>TARGET TOTAL = $1300</a:t>
             </a:r>
           </a:p>
         </p:txBody>
@@ -21021,7 +23288,7 @@
                 </a:solidFill>
                 <a:latin typeface="Calibri"/>
               </a:rPr>
-              <a:t>PAID = $800</a:t>
+              <a:t>PAID = $1300</a:t>
             </a:r>
           </a:p>
         </p:txBody>
@@ -27867,7 +30134,7 @@
                 </a:solidFill>
                 <a:latin typeface="Calibri"/>
               </a:rPr>
-              <a:t>T1 $25k=$250 | T2 $40k=$350 | T3 $65k=$450 | T4 $80k=$550 | T5 $100k=$800 | Above $100k: +$40 per $5k. Min 30% retention rate.</a:t>
+              <a:t>T1 $25k=$250 | T2 $40k=$350 | T3 $65k=$450 | T4 $80k=$550 | T5 $100k=$800 | Above $100k: +$40 per $5k. Retention KICKER on top: 50-74%=+$250 | 75-99%=+$500 | 100%=+$1,000. Min 30% retention rate.</a:t>
             </a:r>
           </a:p>
         </p:txBody>

--- a/output/Bonus_Plan_SIMPLE.pptx
+++ b/output/Bonus_Plan_SIMPLE.pptx
@@ -8315,7 +8315,7 @@
                 </a:solidFill>
                 <a:latin typeface="Calibri"/>
               </a:rPr>
-              <a:t>CURRENT = count-tier on NB+RWR. NEW = NB tier + RWR tier + REN tier + retention kicker. Sorted by delta. # = policy count, $ = written premium.</a:t>
+              <a:t>CURRENT = count-tier on NB+RWR. NEW = NB tier + RWR tier + REN tier. Sorted by delta. # = policy count, $ = written premium.</a:t>
             </a:r>
           </a:p>
         </p:txBody>
@@ -10747,7 +10747,7 @@
                           </a:solidFill>
                           <a:latin typeface="Calibri"/>
                         </a:rPr>
-                        <a:t>$1,100</a:t>
+                        <a:t>$600</a:t>
                       </a:r>
                     </a:p>
                   </a:txBody>
@@ -10770,7 +10770,7 @@
                           </a:solidFill>
                           <a:latin typeface="Calibri"/>
                         </a:rPr>
-                        <a:t>+$600</a:t>
+                        <a:t>+$100</a:t>
                       </a:r>
                     </a:p>
                   </a:txBody>
@@ -10910,7 +10910,7 @@
                           </a:solidFill>
                           <a:latin typeface="Calibri"/>
                         </a:rPr>
-                        <a:t>$1,200</a:t>
+                        <a:t>$700</a:t>
                       </a:r>
                     </a:p>
                   </a:txBody>
@@ -10933,7 +10933,7 @@
                           </a:solidFill>
                           <a:latin typeface="Calibri"/>
                         </a:rPr>
-                        <a:t>+$520</a:t>
+                        <a:t>+$20</a:t>
                       </a:r>
                     </a:p>
                   </a:txBody>
@@ -10958,7 +10958,7 @@
                           </a:solidFill>
                           <a:latin typeface="Calibri"/>
                         </a:rPr>
-                        <a:t>Dialiner Jan</a:t>
+                        <a:t>Abel Feb</a:t>
                       </a:r>
                     </a:p>
                   </a:txBody>
@@ -10981,7 +10981,7 @@
                           </a:solidFill>
                           <a:latin typeface="Calibri"/>
                         </a:rPr>
-                        <a:t>23 / $40k</a:t>
+                        <a:t>13 / $25k</a:t>
                       </a:r>
                     </a:p>
                   </a:txBody>
@@ -11004,7 +11004,7 @@
                           </a:solidFill>
                           <a:latin typeface="Calibri"/>
                         </a:rPr>
-                        <a:t>24 / $33k</a:t>
+                        <a:t>9 / $15k</a:t>
                       </a:r>
                     </a:p>
                   </a:txBody>
@@ -11027,7 +11027,7 @@
                           </a:solidFill>
                           <a:latin typeface="Calibri"/>
                         </a:rPr>
-                        <a:t>35 / $45k</a:t>
+                        <a:t>17 / $23k</a:t>
                       </a:r>
                     </a:p>
                   </a:txBody>
@@ -11050,7 +11050,7 @@
                           </a:solidFill>
                           <a:latin typeface="Calibri"/>
                         </a:rPr>
-                        <a:t>$350</a:t>
+                        <a:t>$0</a:t>
                       </a:r>
                     </a:p>
                   </a:txBody>
@@ -11073,7 +11073,7 @@
                           </a:solidFill>
                           <a:latin typeface="Calibri"/>
                         </a:rPr>
-                        <a:t>$850</a:t>
+                        <a:t>$0</a:t>
                       </a:r>
                     </a:p>
                   </a:txBody>
@@ -11096,7 +11096,7 @@
                           </a:solidFill>
                           <a:latin typeface="Calibri"/>
                         </a:rPr>
-                        <a:t>+$500</a:t>
+                        <a:t>$0</a:t>
                       </a:r>
                     </a:p>
                   </a:txBody>
@@ -11121,7 +11121,7 @@
                           </a:solidFill>
                           <a:latin typeface="Calibri"/>
                         </a:rPr>
-                        <a:t>Melissa Feb</a:t>
+                        <a:t>Dialiner Jan</a:t>
                       </a:r>
                     </a:p>
                   </a:txBody>
@@ -11144,7 +11144,7 @@
                           </a:solidFill>
                           <a:latin typeface="Calibri"/>
                         </a:rPr>
-                        <a:t>13 / $8k</a:t>
+                        <a:t>23 / $40k</a:t>
                       </a:r>
                     </a:p>
                   </a:txBody>
@@ -11167,7 +11167,7 @@
                           </a:solidFill>
                           <a:latin typeface="Calibri"/>
                         </a:rPr>
-                        <a:t>19 / $25k</a:t>
+                        <a:t>24 / $33k</a:t>
                       </a:r>
                     </a:p>
                   </a:txBody>
@@ -11190,7 +11190,7 @@
                           </a:solidFill>
                           <a:latin typeface="Calibri"/>
                         </a:rPr>
-                        <a:t>19 / $26k</a:t>
+                        <a:t>35 / $45k</a:t>
                       </a:r>
                     </a:p>
                   </a:txBody>
@@ -11213,7 +11213,7 @@
                           </a:solidFill>
                           <a:latin typeface="Calibri"/>
                         </a:rPr>
-                        <a:t>$250</a:t>
+                        <a:t>$350</a:t>
                       </a:r>
                     </a:p>
                   </a:txBody>
@@ -11236,7 +11236,7 @@
                           </a:solidFill>
                           <a:latin typeface="Calibri"/>
                         </a:rPr>
-                        <a:t>$750</a:t>
+                        <a:t>$350</a:t>
                       </a:r>
                     </a:p>
                   </a:txBody>
@@ -11259,7 +11259,7 @@
                           </a:solidFill>
                           <a:latin typeface="Calibri"/>
                         </a:rPr>
-                        <a:t>+$500</a:t>
+                        <a:t>$0</a:t>
                       </a:r>
                     </a:p>
                   </a:txBody>
@@ -11284,7 +11284,7 @@
                           </a:solidFill>
                           <a:latin typeface="Calibri"/>
                         </a:rPr>
-                        <a:t>Monica Jan</a:t>
+                        <a:t>Melissa Feb</a:t>
                       </a:r>
                     </a:p>
                   </a:txBody>
@@ -11307,7 +11307,7 @@
                           </a:solidFill>
                           <a:latin typeface="Calibri"/>
                         </a:rPr>
-                        <a:t>23 / $29k</a:t>
+                        <a:t>13 / $8k</a:t>
                       </a:r>
                     </a:p>
                   </a:txBody>
@@ -11330,7 +11330,7 @@
                           </a:solidFill>
                           <a:latin typeface="Calibri"/>
                         </a:rPr>
-                        <a:t>19 / $24k</a:t>
+                        <a:t>19 / $25k</a:t>
                       </a:r>
                     </a:p>
                   </a:txBody>
@@ -11353,7 +11353,7 @@
                           </a:solidFill>
                           <a:latin typeface="Calibri"/>
                         </a:rPr>
-                        <a:t>24 / $31k</a:t>
+                        <a:t>19 / $26k</a:t>
                       </a:r>
                     </a:p>
                   </a:txBody>
@@ -11376,7 +11376,7 @@
                           </a:solidFill>
                           <a:latin typeface="Calibri"/>
                         </a:rPr>
-                        <a:t>$350</a:t>
+                        <a:t>$250</a:t>
                       </a:r>
                     </a:p>
                   </a:txBody>
@@ -11399,7 +11399,7 @@
                           </a:solidFill>
                           <a:latin typeface="Calibri"/>
                         </a:rPr>
-                        <a:t>$750</a:t>
+                        <a:t>$250</a:t>
                       </a:r>
                     </a:p>
                   </a:txBody>
@@ -11422,7 +11422,7 @@
                           </a:solidFill>
                           <a:latin typeface="Calibri"/>
                         </a:rPr>
-                        <a:t>+$400</a:t>
+                        <a:t>$0</a:t>
                       </a:r>
                     </a:p>
                   </a:txBody>
@@ -11447,7 +11447,7 @@
                           </a:solidFill>
                           <a:latin typeface="Calibri"/>
                         </a:rPr>
-                        <a:t>Monica Feb</a:t>
+                        <a:t>Thalia Jan</a:t>
                       </a:r>
                     </a:p>
                   </a:txBody>
@@ -11470,7 +11470,7 @@
                           </a:solidFill>
                           <a:latin typeface="Calibri"/>
                         </a:rPr>
-                        <a:t>21 / $32k</a:t>
+                        <a:t>10 / $16k</a:t>
                       </a:r>
                     </a:p>
                   </a:txBody>
@@ -11493,7 +11493,7 @@
                           </a:solidFill>
                           <a:latin typeface="Calibri"/>
                         </a:rPr>
-                        <a:t>15 / $24k</a:t>
+                        <a:t>14 / $17k</a:t>
                       </a:r>
                     </a:p>
                   </a:txBody>
@@ -11516,7 +11516,7 @@
                           </a:solidFill>
                           <a:latin typeface="Calibri"/>
                         </a:rPr>
-                        <a:t>16 / $27k</a:t>
+                        <a:t>18 / $20k</a:t>
                       </a:r>
                     </a:p>
                   </a:txBody>
@@ -11539,7 +11539,7 @@
                           </a:solidFill>
                           <a:latin typeface="Calibri"/>
                         </a:rPr>
-                        <a:t>$350</a:t>
+                        <a:t>$0</a:t>
                       </a:r>
                     </a:p>
                   </a:txBody>
@@ -11562,7 +11562,7 @@
                           </a:solidFill>
                           <a:latin typeface="Calibri"/>
                         </a:rPr>
-                        <a:t>$750</a:t>
+                        <a:t>$0</a:t>
                       </a:r>
                     </a:p>
                   </a:txBody>
@@ -11585,7 +11585,7 @@
                           </a:solidFill>
                           <a:latin typeface="Calibri"/>
                         </a:rPr>
-                        <a:t>+$400</a:t>
+                        <a:t>$0</a:t>
                       </a:r>
                     </a:p>
                   </a:txBody>
@@ -11610,7 +11610,7 @@
                           </a:solidFill>
                           <a:latin typeface="Calibri"/>
                         </a:rPr>
-                        <a:t>Dialiner Feb</a:t>
+                        <a:t>Thalia Feb</a:t>
                       </a:r>
                     </a:p>
                   </a:txBody>
@@ -11633,7 +11633,7 @@
                           </a:solidFill>
                           <a:latin typeface="Calibri"/>
                         </a:rPr>
-                        <a:t>23 / $30k</a:t>
+                        <a:t>14 / $19k</a:t>
                       </a:r>
                     </a:p>
                   </a:txBody>
@@ -11656,7 +11656,7 @@
                           </a:solidFill>
                           <a:latin typeface="Calibri"/>
                         </a:rPr>
-                        <a:t>28 / $43k</a:t>
+                        <a:t>12 / $14k</a:t>
                       </a:r>
                     </a:p>
                   </a:txBody>
@@ -11679,7 +11679,7 @@
                           </a:solidFill>
                           <a:latin typeface="Calibri"/>
                         </a:rPr>
-                        <a:t>37 / $54k</a:t>
+                        <a:t>17 / $22k</a:t>
                       </a:r>
                     </a:p>
                   </a:txBody>
@@ -11702,7 +11702,7 @@
                           </a:solidFill>
                           <a:latin typeface="Calibri"/>
                         </a:rPr>
-                        <a:t>$460</a:t>
+                        <a:t>$0</a:t>
                       </a:r>
                     </a:p>
                   </a:txBody>
@@ -11725,7 +11725,7 @@
                           </a:solidFill>
                           <a:latin typeface="Calibri"/>
                         </a:rPr>
-                        <a:t>$850</a:t>
+                        <a:t>$0</a:t>
                       </a:r>
                     </a:p>
                   </a:txBody>
@@ -11748,7 +11748,7 @@
                           </a:solidFill>
                           <a:latin typeface="Calibri"/>
                         </a:rPr>
-                        <a:t>+$390</a:t>
+                        <a:t>$0</a:t>
                       </a:r>
                     </a:p>
                   </a:txBody>
@@ -11773,7 +11773,7 @@
                           </a:solidFill>
                           <a:latin typeface="Calibri"/>
                         </a:rPr>
-                        <a:t>Melissa Mar</a:t>
+                        <a:t>Thalia Mar</a:t>
                       </a:r>
                     </a:p>
                   </a:txBody>
@@ -11796,7 +11796,7 @@
                           </a:solidFill>
                           <a:latin typeface="Calibri"/>
                         </a:rPr>
-                        <a:t>28 / $40k</a:t>
+                        <a:t>19 / $18k</a:t>
                       </a:r>
                     </a:p>
                   </a:txBody>
@@ -11819,7 +11819,7 @@
                           </a:solidFill>
                           <a:latin typeface="Calibri"/>
                         </a:rPr>
-                        <a:t>24 / $28k</a:t>
+                        <a:t>9 / $10k</a:t>
                       </a:r>
                     </a:p>
                   </a:txBody>
@@ -11842,7 +11842,7 @@
                           </a:solidFill>
                           <a:latin typeface="Calibri"/>
                         </a:rPr>
-                        <a:t>25 / $29k</a:t>
+                        <a:t>16 / $16k</a:t>
                       </a:r>
                     </a:p>
                   </a:txBody>
@@ -11865,7 +11865,7 @@
                           </a:solidFill>
                           <a:latin typeface="Calibri"/>
                         </a:rPr>
-                        <a:t>$470</a:t>
+                        <a:t>$0</a:t>
                       </a:r>
                     </a:p>
                   </a:txBody>
@@ -11888,7 +11888,7 @@
                           </a:solidFill>
                           <a:latin typeface="Calibri"/>
                         </a:rPr>
-                        <a:t>$750</a:t>
+                        <a:t>$0</a:t>
                       </a:r>
                     </a:p>
                   </a:txBody>
@@ -11911,7 +11911,7 @@
                           </a:solidFill>
                           <a:latin typeface="Calibri"/>
                         </a:rPr>
-                        <a:t>+$280</a:t>
+                        <a:t>$0</a:t>
                       </a:r>
                     </a:p>
                   </a:txBody>
@@ -11936,7 +11936,7 @@
                           </a:solidFill>
                           <a:latin typeface="Calibri"/>
                         </a:rPr>
-                        <a:t>Melissa Jan</a:t>
+                        <a:t>Thalia Apr</a:t>
                       </a:r>
                     </a:p>
                   </a:txBody>
@@ -11959,7 +11959,7 @@
                           </a:solidFill>
                           <a:latin typeface="Calibri"/>
                         </a:rPr>
-                        <a:t>31 / $37k</a:t>
+                        <a:t>9 / $14k</a:t>
                       </a:r>
                     </a:p>
                   </a:txBody>
@@ -11982,7 +11982,7 @@
                           </a:solidFill>
                           <a:latin typeface="Calibri"/>
                         </a:rPr>
-                        <a:t>24 / $32k</a:t>
+                        <a:t>15 / $20k</a:t>
                       </a:r>
                     </a:p>
                   </a:txBody>
@@ -12005,7 +12005,7 @@
                           </a:solidFill>
                           <a:latin typeface="Calibri"/>
                         </a:rPr>
-                        <a:t>24 / $32k</a:t>
+                        <a:t>17 / $24k</a:t>
                       </a:r>
                     </a:p>
                   </a:txBody>
@@ -12028,7 +12028,7 @@
                           </a:solidFill>
                           <a:latin typeface="Calibri"/>
                         </a:rPr>
-                        <a:t>$500</a:t>
+                        <a:t>$0</a:t>
                       </a:r>
                     </a:p>
                   </a:txBody>
@@ -12051,7 +12051,7 @@
                           </a:solidFill>
                           <a:latin typeface="Calibri"/>
                         </a:rPr>
-                        <a:t>$750</a:t>
+                        <a:t>$0</a:t>
                       </a:r>
                     </a:p>
                   </a:txBody>
@@ -12074,7 +12074,7 @@
                           </a:solidFill>
                           <a:latin typeface="Calibri"/>
                         </a:rPr>
-                        <a:t>+$250</a:t>
+                        <a:t>$0</a:t>
                       </a:r>
                     </a:p>
                   </a:txBody>
@@ -12214,7 +12214,7 @@
                           </a:solidFill>
                           <a:latin typeface="Calibri"/>
                         </a:rPr>
-                        <a:t>$8,375</a:t>
+                        <a:t>$3,875</a:t>
                       </a:r>
                     </a:p>
                   </a:txBody>
@@ -12237,7 +12237,7 @@
                           </a:solidFill>
                           <a:latin typeface="Calibri"/>
                         </a:rPr>
-                        <a:t>+$1,265</a:t>
+                        <a:t>$-3,235</a:t>
                       </a:r>
                     </a:p>
                   </a:txBody>
@@ -12653,7 +12653,7 @@
                           </a:solidFill>
                           <a:latin typeface="Calibri"/>
                         </a:rPr>
-                        <a:t>$1,300</a:t>
+                        <a:t>$800</a:t>
                       </a:r>
                     </a:p>
                   </a:txBody>
@@ -12676,7 +12676,7 @@
                           </a:solidFill>
                           <a:latin typeface="Calibri"/>
                         </a:rPr>
-                        <a:t>+$950</a:t>
+                        <a:t>+$450</a:t>
                       </a:r>
                     </a:p>
                   </a:txBody>
@@ -12816,7 +12816,7 @@
                           </a:solidFill>
                           <a:latin typeface="Calibri"/>
                         </a:rPr>
-                        <a:t>$850</a:t>
+                        <a:t>$350</a:t>
                       </a:r>
                     </a:p>
                   </a:txBody>
@@ -12839,7 +12839,7 @@
                           </a:solidFill>
                           <a:latin typeface="Calibri"/>
                         </a:rPr>
-                        <a:t>+$850</a:t>
+                        <a:t>+$350</a:t>
                       </a:r>
                     </a:p>
                   </a:txBody>
@@ -12979,7 +12979,7 @@
                           </a:solidFill>
                           <a:latin typeface="Calibri"/>
                         </a:rPr>
-                        <a:t>$850</a:t>
+                        <a:t>$350</a:t>
                       </a:r>
                     </a:p>
                   </a:txBody>
@@ -13002,7 +13002,7 @@
                           </a:solidFill>
                           <a:latin typeface="Calibri"/>
                         </a:rPr>
-                        <a:t>+$850</a:t>
+                        <a:t>+$350</a:t>
                       </a:r>
                     </a:p>
                   </a:txBody>
@@ -13142,7 +13142,7 @@
                           </a:solidFill>
                           <a:latin typeface="Calibri"/>
                         </a:rPr>
-                        <a:t>$850</a:t>
+                        <a:t>$350</a:t>
                       </a:r>
                     </a:p>
                   </a:txBody>
@@ -13165,7 +13165,7 @@
                           </a:solidFill>
                           <a:latin typeface="Calibri"/>
                         </a:rPr>
-                        <a:t>+$850</a:t>
+                        <a:t>+$350</a:t>
                       </a:r>
                     </a:p>
                   </a:txBody>
@@ -13305,7 +13305,7 @@
                           </a:solidFill>
                           <a:latin typeface="Calibri"/>
                         </a:rPr>
-                        <a:t>$850</a:t>
+                        <a:t>$350</a:t>
                       </a:r>
                     </a:p>
                   </a:txBody>
@@ -13328,7 +13328,7 @@
                           </a:solidFill>
                           <a:latin typeface="Calibri"/>
                         </a:rPr>
-                        <a:t>+$850</a:t>
+                        <a:t>+$350</a:t>
                       </a:r>
                     </a:p>
                   </a:txBody>
@@ -13468,7 +13468,7 @@
                           </a:solidFill>
                           <a:latin typeface="Calibri"/>
                         </a:rPr>
-                        <a:t>$850</a:t>
+                        <a:t>$350</a:t>
                       </a:r>
                     </a:p>
                   </a:txBody>
@@ -13491,7 +13491,7 @@
                           </a:solidFill>
                           <a:latin typeface="Calibri"/>
                         </a:rPr>
-                        <a:t>+$850</a:t>
+                        <a:t>+$350</a:t>
                       </a:r>
                     </a:p>
                   </a:txBody>
@@ -13631,7 +13631,7 @@
                           </a:solidFill>
                           <a:latin typeface="Calibri"/>
                         </a:rPr>
-                        <a:t>$850</a:t>
+                        <a:t>$350</a:t>
                       </a:r>
                     </a:p>
                   </a:txBody>
@@ -13654,7 +13654,7 @@
                           </a:solidFill>
                           <a:latin typeface="Calibri"/>
                         </a:rPr>
-                        <a:t>+$850</a:t>
+                        <a:t>+$350</a:t>
                       </a:r>
                     </a:p>
                   </a:txBody>
@@ -13794,7 +13794,7 @@
                           </a:solidFill>
                           <a:latin typeface="Calibri"/>
                         </a:rPr>
-                        <a:t>$1,050</a:t>
+                        <a:t>$550</a:t>
                       </a:r>
                     </a:p>
                   </a:txBody>
@@ -13817,7 +13817,7 @@
                           </a:solidFill>
                           <a:latin typeface="Calibri"/>
                         </a:rPr>
-                        <a:t>+$800</a:t>
+                        <a:t>+$300</a:t>
                       </a:r>
                     </a:p>
                   </a:txBody>
@@ -13957,7 +13957,7 @@
                           </a:solidFill>
                           <a:latin typeface="Calibri"/>
                         </a:rPr>
-                        <a:t>$1,125</a:t>
+                        <a:t>$625</a:t>
                       </a:r>
                     </a:p>
                   </a:txBody>
@@ -13980,7 +13980,7 @@
                           </a:solidFill>
                           <a:latin typeface="Calibri"/>
                         </a:rPr>
-                        <a:t>+$775</a:t>
+                        <a:t>+$275</a:t>
                       </a:r>
                     </a:p>
                   </a:txBody>
@@ -14120,7 +14120,7 @@
                           </a:solidFill>
                           <a:latin typeface="Calibri"/>
                         </a:rPr>
-                        <a:t>$18,475</a:t>
+                        <a:t>$7,975</a:t>
                       </a:r>
                     </a:p>
                   </a:txBody>
@@ -14143,7 +14143,7 @@
                           </a:solidFill>
                           <a:latin typeface="Calibri"/>
                         </a:rPr>
-                        <a:t>+$15,725</a:t>
+                        <a:t>+$5,225</a:t>
                       </a:r>
                     </a:p>
                   </a:txBody>
@@ -14735,7 +14735,7 @@
                           </a:solidFill>
                           <a:latin typeface="Calibri"/>
                         </a:rPr>
-                        <a:t>$8,375</a:t>
+                        <a:t>$3,875</a:t>
                       </a:r>
                     </a:p>
                   </a:txBody>
@@ -14758,7 +14758,7 @@
                           </a:solidFill>
                           <a:latin typeface="Calibri"/>
                         </a:rPr>
-                        <a:t>$18,475</a:t>
+                        <a:t>$7,975</a:t>
                       </a:r>
                     </a:p>
                   </a:txBody>
@@ -14852,7 +14852,7 @@
                           </a:solidFill>
                           <a:latin typeface="Calibri"/>
                         </a:rPr>
-                        <a:t>$8,375</a:t>
+                        <a:t>$3,875</a:t>
                       </a:r>
                     </a:p>
                   </a:txBody>
@@ -14875,7 +14875,7 @@
                           </a:solidFill>
                           <a:latin typeface="Calibri"/>
                         </a:rPr>
-                        <a:t>$18,475</a:t>
+                        <a:t>$7,975</a:t>
                       </a:r>
                     </a:p>
                   </a:txBody>
@@ -15004,7 +15004,7 @@
                 </a:solidFill>
                 <a:latin typeface="Calibri"/>
               </a:rPr>
-              <a:t>• New plan WITH MIN under 100% FLIP = $18,475 (151% of today's $12,220). The agency keeps more profit while still rewarding the right behavior.</a:t>
+              <a:t>• New plan WITH MIN under 100% FLIP = $7,975 (65% of today's $12,220). The agency keeps more profit while still rewarding the right behavior.</a:t>
             </a:r>
           </a:p>
           <a:p>
@@ -15586,7 +15586,7 @@
                 </a:solidFill>
                 <a:latin typeface="Calibri"/>
               </a:rPr>
-              <a:t>• Pays more under FLIP ($18,475 vs today's $12,220) but only when the agency keeps the book - REAL behavior pays only $1,675. The pay scales with the retention upside.</a:t>
+              <a:t>• Costs LESS at full target than today's count-tier plan - new plan FLIP $7,975 vs current $12,220.</a:t>
             </a:r>
           </a:p>
         </p:txBody>
@@ -17939,7 +17939,7 @@
         </p:nvGraphicFramePr>
         <p:xfrm>
           <a:off x="365760" y="4069080"/>
-          <a:ext cx="11612880" cy="960120"/>
+          <a:ext cx="11612880" cy="1097280"/>
         </p:xfrm>
         <a:graphic>
           <a:graphicData uri="http://schemas.openxmlformats.org/drawingml/2006/table">
@@ -17956,7 +17956,7 @@
                 <a:gridCol w="1463040"/>
                 <a:gridCol w="2286000"/>
               </a:tblGrid>
-              <a:tr h="320040">
+              <a:tr h="365760">
                 <a:tc>
                   <a:txBody>
                     <a:bodyPr lIns="45720" rIns="45720" tIns="18288" bIns="18288" wrap="square" anchor="ctr"/>
@@ -18119,7 +18119,7 @@
                   </a:tcPr>
                 </a:tc>
               </a:tr>
-              <a:tr h="320040">
+              <a:tr h="365760">
                 <a:tc>
                   <a:txBody>
                     <a:bodyPr lIns="45720" rIns="45720" tIns="18288" bIns="18288" wrap="square" anchor="ctr"/>
@@ -18282,7 +18282,7 @@
                   </a:tcPr>
                 </a:tc>
               </a:tr>
-              <a:tr h="320040">
+              <a:tr h="365760">
                 <a:tc>
                   <a:txBody>
                     <a:bodyPr lIns="45720" rIns="45720" tIns="18288" bIns="18288" wrap="square" anchor="ctr"/>
@@ -18441,269 +18441,6 @@
                   <a:tcPr>
                     <a:solidFill>
                       <a:srgbClr val="F2F2F2"/>
-                    </a:solidFill>
-                  </a:tcPr>
-                </a:tc>
-              </a:tr>
-            </a:tbl>
-          </a:graphicData>
-        </a:graphic>
-      </p:graphicFrame>
-      <p:graphicFrame>
-        <p:nvGraphicFramePr>
-          <p:cNvPr id="14" name="Table 13"/>
-          <p:cNvGraphicFramePr>
-            <a:graphicFrameLocks noGrp="1"/>
-          </p:cNvGraphicFramePr>
-          <p:nvPr/>
-        </p:nvGraphicFramePr>
-        <p:xfrm>
-          <a:off x="365760" y="5074920"/>
-          <a:ext cx="11612880" cy="585216"/>
-        </p:xfrm>
-        <a:graphic>
-          <a:graphicData uri="http://schemas.openxmlformats.org/drawingml/2006/table">
-            <a:tbl>
-              <a:tblPr firstRow="1" bandRow="1">
-                <a:tableStyleId>{5C22544A-7EE6-4342-B048-85BDC9FD1C3A}</a:tableStyleId>
-              </a:tblPr>
-              <a:tblGrid>
-                <a:gridCol w="3200400"/>
-                <a:gridCol w="2103120"/>
-                <a:gridCol w="2103120"/>
-                <a:gridCol w="2103120"/>
-                <a:gridCol w="2103120"/>
-              </a:tblGrid>
-              <a:tr h="292608">
-                <a:tc>
-                  <a:txBody>
-                    <a:bodyPr lIns="45720" rIns="45720" tIns="18288" bIns="18288" wrap="square" anchor="ctr"/>
-                    <a:lstStyle/>
-                    <a:p>
-                      <a:pPr algn="ctr"/>
-                      <a:r>
-                        <a:rPr sz="1100" b="1">
-                          <a:solidFill>
-                            <a:srgbClr val="FFFFFF"/>
-                          </a:solidFill>
-                          <a:latin typeface="Calibri"/>
-                        </a:rPr>
-                        <a:t>Retention rate</a:t>
-                      </a:r>
-                    </a:p>
-                  </a:txBody>
-                  <a:tcPr>
-                    <a:solidFill>
-                      <a:srgbClr val="BF9000"/>
-                    </a:solidFill>
-                  </a:tcPr>
-                </a:tc>
-                <a:tc>
-                  <a:txBody>
-                    <a:bodyPr lIns="45720" rIns="45720" tIns="18288" bIns="18288" wrap="square" anchor="ctr"/>
-                    <a:lstStyle/>
-                    <a:p>
-                      <a:pPr algn="ctr"/>
-                      <a:r>
-                        <a:rPr sz="1100" b="1">
-                          <a:solidFill>
-                            <a:srgbClr val="FFFFFF"/>
-                          </a:solidFill>
-                          <a:latin typeface="Calibri"/>
-                        </a:rPr>
-                        <a:t>30-49%</a:t>
-                      </a:r>
-                    </a:p>
-                  </a:txBody>
-                  <a:tcPr>
-                    <a:solidFill>
-                      <a:srgbClr val="BF9000"/>
-                    </a:solidFill>
-                  </a:tcPr>
-                </a:tc>
-                <a:tc>
-                  <a:txBody>
-                    <a:bodyPr lIns="45720" rIns="45720" tIns="18288" bIns="18288" wrap="square" anchor="ctr"/>
-                    <a:lstStyle/>
-                    <a:p>
-                      <a:pPr algn="ctr"/>
-                      <a:r>
-                        <a:rPr sz="1100" b="1">
-                          <a:solidFill>
-                            <a:srgbClr val="FFFFFF"/>
-                          </a:solidFill>
-                          <a:latin typeface="Calibri"/>
-                        </a:rPr>
-                        <a:t>50-74%</a:t>
-                      </a:r>
-                    </a:p>
-                  </a:txBody>
-                  <a:tcPr>
-                    <a:solidFill>
-                      <a:srgbClr val="BF9000"/>
-                    </a:solidFill>
-                  </a:tcPr>
-                </a:tc>
-                <a:tc>
-                  <a:txBody>
-                    <a:bodyPr lIns="45720" rIns="45720" tIns="18288" bIns="18288" wrap="square" anchor="ctr"/>
-                    <a:lstStyle/>
-                    <a:p>
-                      <a:pPr algn="ctr"/>
-                      <a:r>
-                        <a:rPr sz="1100" b="1">
-                          <a:solidFill>
-                            <a:srgbClr val="FFFFFF"/>
-                          </a:solidFill>
-                          <a:latin typeface="Calibri"/>
-                        </a:rPr>
-                        <a:t>75-99%</a:t>
-                      </a:r>
-                    </a:p>
-                  </a:txBody>
-                  <a:tcPr>
-                    <a:solidFill>
-                      <a:srgbClr val="BF9000"/>
-                    </a:solidFill>
-                  </a:tcPr>
-                </a:tc>
-                <a:tc>
-                  <a:txBody>
-                    <a:bodyPr lIns="45720" rIns="45720" tIns="18288" bIns="18288" wrap="square" anchor="ctr"/>
-                    <a:lstStyle/>
-                    <a:p>
-                      <a:pPr algn="ctr"/>
-                      <a:r>
-                        <a:rPr sz="1100" b="1">
-                          <a:solidFill>
-                            <a:srgbClr val="FFFFFF"/>
-                          </a:solidFill>
-                          <a:latin typeface="Calibri"/>
-                        </a:rPr>
-                        <a:t>100%</a:t>
-                      </a:r>
-                    </a:p>
-                  </a:txBody>
-                  <a:tcPr>
-                    <a:solidFill>
-                      <a:srgbClr val="BF9000"/>
-                    </a:solidFill>
-                  </a:tcPr>
-                </a:tc>
-              </a:tr>
-              <a:tr h="292608">
-                <a:tc>
-                  <a:txBody>
-                    <a:bodyPr lIns="45720" rIns="45720" tIns="18288" bIns="18288" wrap="square" anchor="ctr"/>
-                    <a:lstStyle/>
-                    <a:p>
-                      <a:pPr algn="ctr"/>
-                      <a:r>
-                        <a:rPr sz="1100" b="1">
-                          <a:solidFill>
-                            <a:srgbClr val="101010"/>
-                          </a:solidFill>
-                          <a:latin typeface="Calibri"/>
-                        </a:rPr>
-                        <a:t>Kicker on top of tier</a:t>
-                      </a:r>
-                    </a:p>
-                  </a:txBody>
-                  <a:tcPr>
-                    <a:solidFill>
-                      <a:srgbClr val="FFFFFF"/>
-                    </a:solidFill>
-                  </a:tcPr>
-                </a:tc>
-                <a:tc>
-                  <a:txBody>
-                    <a:bodyPr lIns="45720" rIns="45720" tIns="18288" bIns="18288" wrap="square" anchor="ctr"/>
-                    <a:lstStyle/>
-                    <a:p>
-                      <a:pPr algn="ctr"/>
-                      <a:r>
-                        <a:rPr sz="1100">
-                          <a:solidFill>
-                            <a:srgbClr val="101010"/>
-                          </a:solidFill>
-                          <a:latin typeface="Calibri"/>
-                        </a:rPr>
-                        <a:t>$0</a:t>
-                      </a:r>
-                    </a:p>
-                  </a:txBody>
-                  <a:tcPr>
-                    <a:solidFill>
-                      <a:srgbClr val="FFFFFF"/>
-                    </a:solidFill>
-                  </a:tcPr>
-                </a:tc>
-                <a:tc>
-                  <a:txBody>
-                    <a:bodyPr lIns="45720" rIns="45720" tIns="18288" bIns="18288" wrap="square" anchor="ctr"/>
-                    <a:lstStyle/>
-                    <a:p>
-                      <a:pPr algn="ctr"/>
-                      <a:r>
-                        <a:rPr sz="1100">
-                          <a:solidFill>
-                            <a:srgbClr val="101010"/>
-                          </a:solidFill>
-                          <a:latin typeface="Calibri"/>
-                        </a:rPr>
-                        <a:t>+$250</a:t>
-                      </a:r>
-                    </a:p>
-                  </a:txBody>
-                  <a:tcPr>
-                    <a:solidFill>
-                      <a:srgbClr val="FFFFFF"/>
-                    </a:solidFill>
-                  </a:tcPr>
-                </a:tc>
-                <a:tc>
-                  <a:txBody>
-                    <a:bodyPr lIns="45720" rIns="45720" tIns="18288" bIns="18288" wrap="square" anchor="ctr"/>
-                    <a:lstStyle/>
-                    <a:p>
-                      <a:pPr algn="ctr"/>
-                      <a:r>
-                        <a:rPr sz="1100">
-                          <a:solidFill>
-                            <a:srgbClr val="101010"/>
-                          </a:solidFill>
-                          <a:latin typeface="Calibri"/>
-                        </a:rPr>
-                        <a:t>+$500</a:t>
-                      </a:r>
-                    </a:p>
-                  </a:txBody>
-                  <a:tcPr>
-                    <a:solidFill>
-                      <a:srgbClr val="FFFFFF"/>
-                    </a:solidFill>
-                  </a:tcPr>
-                </a:tc>
-                <a:tc>
-                  <a:txBody>
-                    <a:bodyPr lIns="45720" rIns="45720" tIns="18288" bIns="18288" wrap="square" anchor="ctr"/>
-                    <a:lstStyle/>
-                    <a:p>
-                      <a:pPr algn="ctr"/>
-                      <a:r>
-                        <a:rPr sz="1100">
-                          <a:solidFill>
-                            <a:srgbClr val="101010"/>
-                          </a:solidFill>
-                          <a:latin typeface="Calibri"/>
-                        </a:rPr>
-                        <a:t>+$1,000</a:t>
-                      </a:r>
-                    </a:p>
-                  </a:txBody>
-                  <a:tcPr>
-                    <a:solidFill>
-                      <a:srgbClr val="FFFFFF"/>
                     </a:solidFill>
                   </a:tcPr>
                 </a:tc>
@@ -18714,13 +18451,13 @@
       </p:graphicFrame>
       <p:sp>
         <p:nvSpPr>
-          <p:cNvPr id="15" name="TextBox 14"/>
+          <p:cNvPr id="14" name="TextBox 13"/>
           <p:cNvSpPr txBox="1"/>
           <p:nvPr/>
         </p:nvSpPr>
         <p:spPr>
           <a:xfrm>
-            <a:off x="365760" y="5806440"/>
+            <a:off x="365760" y="5532120"/>
             <a:ext cx="11612880" cy="274320"/>
           </a:xfrm>
           <a:prstGeom prst="rect">
@@ -18752,14 +18489,14 @@
       </p:sp>
       <p:graphicFrame>
         <p:nvGraphicFramePr>
-          <p:cNvPr id="16" name="Table 15"/>
+          <p:cNvPr id="15" name="Table 14"/>
           <p:cNvGraphicFramePr>
             <a:graphicFrameLocks noGrp="1"/>
           </p:cNvGraphicFramePr>
           <p:nvPr/>
         </p:nvGraphicFramePr>
         <p:xfrm>
-          <a:off x="365760" y="6126480"/>
+          <a:off x="365760" y="5852160"/>
           <a:ext cx="11612880" cy="950976"/>
         </p:xfrm>
         <a:graphic>
@@ -19982,7 +19719,7 @@
                 </a:solidFill>
                 <a:latin typeface="Calibri"/>
               </a:rPr>
-              <a:t>• The MINIMUM is the floor. The COLLECTED KICKER is the lever to cover salary and earn bonus on top.</a:t>
+              <a:t>• The MINIMUM is the floor: hit it and the agent's commission already covers salary. The tier bonus is the reward on top.</a:t>
             </a:r>
           </a:p>
         </p:txBody>
@@ -20794,7 +20531,7 @@
                           </a:solidFill>
                           <a:latin typeface="Calibri"/>
                         </a:rPr>
-                        <a:t>$1200</a:t>
+                        <a:t>$700</a:t>
                       </a:r>
                     </a:p>
                   </a:txBody>
@@ -20934,7 +20671,7 @@
                           </a:solidFill>
                           <a:latin typeface="Calibri"/>
                         </a:rPr>
-                        <a:t>+$600 (GOOD)</a:t>
+                        <a:t>+$100 (GOOD)</a:t>
                       </a:r>
                     </a:p>
                   </a:txBody>
@@ -22402,7 +22139,7 @@
                 </a:solidFill>
                 <a:latin typeface="Calibri"/>
               </a:rPr>
-              <a:t>  REN $54k -&gt; T2 $40k = $850</a:t>
+              <a:t>  REN $54k -&gt; T2 $40k = $350</a:t>
             </a:r>
           </a:p>
         </p:txBody>
@@ -22440,7 +22177,7 @@
                 </a:solidFill>
                 <a:latin typeface="Calibri"/>
               </a:rPr>
-              <a:t>TARGET TOTAL = $1200</a:t>
+              <a:t>TARGET TOTAL = $700</a:t>
             </a:r>
           </a:p>
         </p:txBody>
@@ -22630,7 +22367,7 @@
                 </a:solidFill>
                 <a:latin typeface="Calibri"/>
               </a:rPr>
-              <a:t>PAID = $1200</a:t>
+              <a:t>PAID = $700</a:t>
             </a:r>
           </a:p>
         </p:txBody>
@@ -23060,7 +22797,7 @@
                 </a:solidFill>
                 <a:latin typeface="Calibri"/>
               </a:rPr>
-              <a:t>  REN $96k -&gt; T4 $80k = $1050</a:t>
+              <a:t>  REN $96k -&gt; T4 $80k = $550</a:t>
             </a:r>
           </a:p>
         </p:txBody>
@@ -23098,7 +22835,7 @@
                 </a:solidFill>
                 <a:latin typeface="Calibri"/>
               </a:rPr>
-              <a:t>TARGET TOTAL = $1300</a:t>
+              <a:t>TARGET TOTAL = $800</a:t>
             </a:r>
           </a:p>
         </p:txBody>
@@ -23288,7 +23025,7 @@
                 </a:solidFill>
                 <a:latin typeface="Calibri"/>
               </a:rPr>
-              <a:t>PAID = $1300</a:t>
+              <a:t>PAID = $800</a:t>
             </a:r>
           </a:p>
         </p:txBody>
@@ -30134,7 +29871,7 @@
                 </a:solidFill>
                 <a:latin typeface="Calibri"/>
               </a:rPr>
-              <a:t>T1 $25k=$250 | T2 $40k=$350 | T3 $65k=$450 | T4 $80k=$550 | T5 $100k=$800 | Above $100k: +$40 per $5k. Retention KICKER on top: 50-74%=+$250 | 75-99%=+$500 | 100%=+$1,000. Min 30% retention rate.</a:t>
+              <a:t>T1 $25k=$250 | T2 $40k=$350 | T3 $65k=$450 | T4 $80k=$550 | T5 $100k=$800 | Above $100k: +$40 per $5k. Min 30% retention rate.</a:t>
             </a:r>
           </a:p>
         </p:txBody>
